--- a/outputs/apresentacao_resultados.pptx
+++ b/outputs/apresentacao_resultados.pptx
@@ -22,6 +22,8 @@
     <p:sldId id="270" r:id="rId17"/>
     <p:sldId id="271" r:id="rId18"/>
     <p:sldId id="272" r:id="rId19"/>
+    <p:sldId id="273" r:id="rId20"/>
+    <p:sldId id="274" r:id="rId21"/>
   </p:sldIdLst>
   <p:sldSz cx="12192000" cy="6858000"/>
   <p:notesSz cx="7559675" cy="10691813"/>
@@ -29,14 +31,14 @@
 </file>
 
 <file path=ppt/slideLayouts/slideLayout1.xml><?xml version="1.0" encoding="utf-8"?>
-<p:sldLayout xmlns:a="http://schemas.openxmlformats.org/drawingml/2006/main" xmlns:p="http://schemas.openxmlformats.org/presentationml/2006/main" xmlns:r="http://schemas.openxmlformats.org/officeDocument/2006/relationships" xmlns:p14="http://schemas.microsoft.com/office/powerpoint/2010/main" xmlns:p15="http://schemas.microsoft.com/office/powerpoint/2012/main" xmlns:mc="http://schemas.openxmlformats.org/markup-compatibility/2006" type="twoObj" preserve="1">
-  <p:cSld name="Duas Partes de Conteúdo">
+<p:sldLayout xmlns:a="http://schemas.openxmlformats.org/drawingml/2006/main" xmlns:p="http://schemas.openxmlformats.org/presentationml/2006/main" xmlns:r="http://schemas.openxmlformats.org/officeDocument/2006/relationships" xmlns:p14="http://schemas.microsoft.com/office/powerpoint/2010/main" xmlns:p15="http://schemas.microsoft.com/office/powerpoint/2012/main" xmlns:mc="http://schemas.openxmlformats.org/markup-compatibility/2006" type="blank" preserve="1">
+  <p:cSld name="Imagem com Legenda">
     <p:bg>
       <p:bgPr>
         <a:blipFill rotWithShape="0">
           <a:blip r:embed="rId2"/>
           <a:stretch>
-            <a:fillRect l="-996" r="-996"/>
+            <a:fillRect l="-993" r="-993"/>
           </a:stretch>
         </a:blipFill>
       </p:bgPr>
@@ -67,8 +69,8 @@
         </p:nvSpPr>
         <p:spPr>
           <a:xfrm>
-            <a:off x="838080" y="365040"/>
-            <a:ext cx="10514520" cy="1324440"/>
+            <a:off x="839880" y="457200"/>
+            <a:ext cx="3930480" cy="1598400"/>
           </a:xfrm>
           <a:prstGeom prst="rect">
             <a:avLst/>
@@ -79,7 +81,7 @@
           </a:ln>
         </p:spPr>
         <p:txBody>
-          <a:bodyPr lIns="91440" rIns="91440" tIns="45720" bIns="45720" anchor="ctr">
+          <a:bodyPr lIns="91440" rIns="91440" tIns="45720" bIns="45720" anchor="b">
             <a:noAutofit/>
           </a:bodyPr>
           <a:p>
@@ -93,7 +95,7 @@
               </a:tabLst>
             </a:pPr>
             <a:r>
-              <a:rPr lang="pt-BR" sz="4400" b="0" u="none" strike="noStrike">
+              <a:rPr lang="pt-BR" sz="3200" b="0" u="none" strike="noStrike">
                 <a:solidFill>
                   <a:schemeClr val="dk1"/>
                 </a:solidFill>
@@ -103,7 +105,7 @@
               </a:rPr>
               <a:t>Clique para editar o título Mestre</a:t>
             </a:r>
-            <a:endParaRPr lang="pt-BR" sz="4400" b="0" u="none" strike="noStrike">
+            <a:endParaRPr lang="pt-BR" sz="3200" b="0" u="none" strike="noStrike">
               <a:solidFill>
                 <a:srgbClr val="000000"/>
               </a:solidFill>
@@ -126,8 +128,8 @@
         </p:nvSpPr>
         <p:spPr>
           <a:xfrm>
-            <a:off x="838080" y="1825560"/>
-            <a:ext cx="5180400" cy="4350240"/>
+            <a:off x="5183280" y="987480"/>
+            <a:ext cx="6170400" cy="4871880"/>
           </a:xfrm>
           <a:prstGeom prst="rect">
             <a:avLst/>
@@ -138,25 +140,26 @@
           </a:ln>
         </p:spPr>
         <p:txBody>
-          <a:bodyPr lIns="91440" rIns="91440" tIns="45720" bIns="45720" anchor="t">
+          <a:bodyPr lIns="90000" rIns="90000" tIns="45000" bIns="45000" anchor="t">
             <a:noAutofit/>
           </a:bodyPr>
           <a:p>
-            <a:pPr marL="228600" indent="-228600" defTabSz="914400">
+            <a:pPr marL="432000" indent="-324000">
               <a:lnSpc>
                 <a:spcPct val="90000"/>
               </a:lnSpc>
               <a:spcBef>
-                <a:spcPts val="1001"/>
+                <a:spcPts val="1417"/>
               </a:spcBef>
               <a:buClr>
                 <a:srgbClr val="000000"/>
               </a:buClr>
-              <a:buFont typeface="Arial"/>
-              <a:buChar char="•"/>
+              <a:buSzPct val="45000"/>
+              <a:buFont typeface="Wingdings" charset="2"/>
+              <a:buChar char=""/>
             </a:pPr>
             <a:r>
-              <a:rPr lang="pt-BR" sz="2800" b="0" u="none" strike="noStrike">
+              <a:rPr lang="pt-BR" sz="3200" b="0" u="none" strike="noStrike">
                 <a:solidFill>
                   <a:schemeClr val="dk1"/>
                 </a:solidFill>
@@ -164,9 +167,9 @@
                 <a:uFillTx/>
                 <a:latin typeface="Calibri"/>
               </a:rPr>
-              <a:t>Clique para editar os estilos de texto Mestres</a:t>
+              <a:t>Clique para editar o formato de texto dos tópicos</a:t>
             </a:r>
-            <a:endParaRPr lang="pt-BR" sz="2800" b="0" u="none" strike="noStrike">
+            <a:endParaRPr lang="pt-BR" sz="3200" b="0" u="none" strike="noStrike">
               <a:solidFill>
                 <a:srgbClr val="000000"/>
               </a:solidFill>
@@ -176,21 +179,22 @@
             </a:endParaRPr>
           </a:p>
           <a:p>
-            <a:pPr marL="685800" lvl="1" indent="-228600" defTabSz="914400">
+            <a:pPr marL="864000" lvl="1" indent="-324000">
               <a:lnSpc>
                 <a:spcPct val="90000"/>
               </a:lnSpc>
               <a:spcBef>
-                <a:spcPts val="499"/>
+                <a:spcPts val="1134"/>
               </a:spcBef>
               <a:buClr>
                 <a:srgbClr val="000000"/>
               </a:buClr>
-              <a:buFont typeface="Arial"/>
-              <a:buChar char="•"/>
+              <a:buSzPct val="75000"/>
+              <a:buFont typeface="Symbol" charset="2"/>
+              <a:buChar char=""/>
             </a:pPr>
             <a:r>
-              <a:rPr lang="pt-BR" sz="2400" b="0" u="none" strike="noStrike">
+              <a:rPr lang="pt-BR" sz="3200" b="0" u="none" strike="noStrike">
                 <a:solidFill>
                   <a:schemeClr val="dk1"/>
                 </a:solidFill>
@@ -198,9 +202,9 @@
                 <a:uFillTx/>
                 <a:latin typeface="Calibri"/>
               </a:rPr>
-              <a:t>Segundo nível</a:t>
+              <a:t>2.º nível de tópicos</a:t>
             </a:r>
-            <a:endParaRPr lang="pt-BR" sz="2400" b="0" u="none" strike="noStrike">
+            <a:endParaRPr lang="pt-BR" sz="3200" b="0" u="none" strike="noStrike">
               <a:solidFill>
                 <a:srgbClr val="000000"/>
               </a:solidFill>
@@ -210,21 +214,22 @@
             </a:endParaRPr>
           </a:p>
           <a:p>
-            <a:pPr marL="1143000" lvl="2" indent="-228600" defTabSz="914400">
+            <a:pPr marL="1296000" lvl="2" indent="-288000">
               <a:lnSpc>
                 <a:spcPct val="90000"/>
               </a:lnSpc>
               <a:spcBef>
-                <a:spcPts val="499"/>
+                <a:spcPts val="850"/>
               </a:spcBef>
               <a:buClr>
                 <a:srgbClr val="000000"/>
               </a:buClr>
-              <a:buFont typeface="Arial"/>
-              <a:buChar char="•"/>
+              <a:buSzPct val="45000"/>
+              <a:buFont typeface="Wingdings" charset="2"/>
+              <a:buChar char=""/>
             </a:pPr>
             <a:r>
-              <a:rPr lang="pt-BR" sz="2000" b="0" u="none" strike="noStrike">
+              <a:rPr lang="pt-BR" sz="3200" b="0" u="none" strike="noStrike">
                 <a:solidFill>
                   <a:schemeClr val="dk1"/>
                 </a:solidFill>
@@ -232,9 +237,9 @@
                 <a:uFillTx/>
                 <a:latin typeface="Calibri"/>
               </a:rPr>
-              <a:t>Terceiro nível</a:t>
+              <a:t>3.º nível de tópicos</a:t>
             </a:r>
-            <a:endParaRPr lang="pt-BR" sz="2000" b="0" u="none" strike="noStrike">
+            <a:endParaRPr lang="pt-BR" sz="3200" b="0" u="none" strike="noStrike">
               <a:solidFill>
                 <a:srgbClr val="000000"/>
               </a:solidFill>
@@ -244,21 +249,22 @@
             </a:endParaRPr>
           </a:p>
           <a:p>
-            <a:pPr marL="1600200" lvl="3" indent="-228600" defTabSz="914400">
+            <a:pPr marL="1728000" lvl="3" indent="-216000">
               <a:lnSpc>
                 <a:spcPct val="90000"/>
               </a:lnSpc>
               <a:spcBef>
-                <a:spcPts val="499"/>
+                <a:spcPts val="567"/>
               </a:spcBef>
               <a:buClr>
                 <a:srgbClr val="000000"/>
               </a:buClr>
-              <a:buFont typeface="Arial"/>
-              <a:buChar char="•"/>
+              <a:buSzPct val="75000"/>
+              <a:buFont typeface="Symbol" charset="2"/>
+              <a:buChar char=""/>
             </a:pPr>
             <a:r>
-              <a:rPr lang="pt-BR" sz="1800" b="0" u="none" strike="noStrike">
+              <a:rPr lang="pt-BR" sz="3200" b="0" u="none" strike="noStrike">
                 <a:solidFill>
                   <a:schemeClr val="dk1"/>
                 </a:solidFill>
@@ -266,9 +272,9 @@
                 <a:uFillTx/>
                 <a:latin typeface="Calibri"/>
               </a:rPr>
-              <a:t>Quarto nível</a:t>
+              <a:t>4.º nível de tópicos</a:t>
             </a:r>
-            <a:endParaRPr lang="pt-BR" sz="1800" b="0" u="none" strike="noStrike">
+            <a:endParaRPr lang="pt-BR" sz="3200" b="0" u="none" strike="noStrike">
               <a:solidFill>
                 <a:srgbClr val="000000"/>
               </a:solidFill>
@@ -278,21 +284,22 @@
             </a:endParaRPr>
           </a:p>
           <a:p>
-            <a:pPr marL="2057400" lvl="4" indent="-228600" defTabSz="914400">
+            <a:pPr marL="2160000" lvl="4" indent="-216000">
               <a:lnSpc>
                 <a:spcPct val="90000"/>
               </a:lnSpc>
               <a:spcBef>
-                <a:spcPts val="499"/>
+                <a:spcPts val="283"/>
               </a:spcBef>
               <a:buClr>
                 <a:srgbClr val="000000"/>
               </a:buClr>
-              <a:buFont typeface="Arial"/>
-              <a:buChar char="•"/>
+              <a:buSzPct val="45000"/>
+              <a:buFont typeface="Wingdings" charset="2"/>
+              <a:buChar char=""/>
             </a:pPr>
             <a:r>
-              <a:rPr lang="pt-BR" sz="1800" b="0" u="none" strike="noStrike">
+              <a:rPr lang="pt-BR" sz="3200" b="0" u="none" strike="noStrike">
                 <a:solidFill>
                   <a:schemeClr val="dk1"/>
                 </a:solidFill>
@@ -300,9 +307,79 @@
                 <a:uFillTx/>
                 <a:latin typeface="Calibri"/>
               </a:rPr>
-              <a:t>Quinto nível</a:t>
+              <a:t>5.º nível de tópicos</a:t>
             </a:r>
-            <a:endParaRPr lang="pt-BR" sz="1800" b="0" u="none" strike="noStrike">
+            <a:endParaRPr lang="pt-BR" sz="3200" b="0" u="none" strike="noStrike">
+              <a:solidFill>
+                <a:srgbClr val="000000"/>
+              </a:solidFill>
+              <a:effectLst/>
+              <a:uFillTx/>
+              <a:latin typeface="Arial"/>
+            </a:endParaRPr>
+          </a:p>
+          <a:p>
+            <a:pPr marL="2592000" lvl="5" indent="-216000">
+              <a:lnSpc>
+                <a:spcPct val="90000"/>
+              </a:lnSpc>
+              <a:spcBef>
+                <a:spcPts val="283"/>
+              </a:spcBef>
+              <a:buClr>
+                <a:srgbClr val="000000"/>
+              </a:buClr>
+              <a:buSzPct val="45000"/>
+              <a:buFont typeface="Wingdings" charset="2"/>
+              <a:buChar char=""/>
+            </a:pPr>
+            <a:r>
+              <a:rPr lang="pt-BR" sz="3200" b="0" u="none" strike="noStrike">
+                <a:solidFill>
+                  <a:schemeClr val="dk1"/>
+                </a:solidFill>
+                <a:effectLst/>
+                <a:uFillTx/>
+                <a:latin typeface="Calibri"/>
+              </a:rPr>
+              <a:t>6.º nível de tópicos</a:t>
+            </a:r>
+            <a:endParaRPr lang="pt-BR" sz="3200" b="0" u="none" strike="noStrike">
+              <a:solidFill>
+                <a:srgbClr val="000000"/>
+              </a:solidFill>
+              <a:effectLst/>
+              <a:uFillTx/>
+              <a:latin typeface="Arial"/>
+            </a:endParaRPr>
+          </a:p>
+          <a:p>
+            <a:pPr marL="3024000" lvl="6" indent="-216000">
+              <a:lnSpc>
+                <a:spcPct val="90000"/>
+              </a:lnSpc>
+              <a:spcBef>
+                <a:spcPts val="283"/>
+              </a:spcBef>
+              <a:buClr>
+                <a:srgbClr val="000000"/>
+              </a:buClr>
+              <a:buSzPct val="45000"/>
+              <a:buFont typeface="Wingdings" charset="2"/>
+              <a:buChar char=""/>
+            </a:pPr>
+            <a:r>
+              <a:rPr lang="pt-BR" sz="3200" b="0" u="none" strike="noStrike">
+                <a:solidFill>
+                  <a:schemeClr val="dk1"/>
+                </a:solidFill>
+                <a:effectLst/>
+                <a:uFillTx/>
+                <a:latin typeface="Calibri"/>
+              </a:rPr>
+              <a:t>7.º nível de tópicos</a:t>
+            </a:r>
+            <a:endParaRPr lang="pt-BR" sz="3200" b="0" u="none" strike="noStrike">
               <a:solidFill>
                 <a:srgbClr val="000000"/>
               </a:solidFill>
@@ -325,8 +402,8 @@
         </p:nvSpPr>
         <p:spPr>
           <a:xfrm>
-            <a:off x="6172200" y="1825560"/>
-            <a:ext cx="5180400" cy="4350240"/>
+            <a:off x="839880" y="2057400"/>
+            <a:ext cx="3930480" cy="3809880"/>
           </a:xfrm>
           <a:prstGeom prst="rect">
             <a:avLst/>
@@ -341,21 +418,20 @@
             <a:noAutofit/>
           </a:bodyPr>
           <a:p>
-            <a:pPr marL="228600" indent="-228600" defTabSz="914400">
+            <a:pPr indent="0" defTabSz="914400">
               <a:lnSpc>
                 <a:spcPct val="90000"/>
               </a:lnSpc>
               <a:spcBef>
                 <a:spcPts val="1001"/>
               </a:spcBef>
-              <a:buClr>
-                <a:srgbClr val="000000"/>
-              </a:buClr>
-              <a:buFont typeface="Arial"/>
-              <a:buChar char="•"/>
+              <a:buNone/>
+              <a:tabLst>
+                <a:tab algn="l" pos="0"/>
+              </a:tabLst>
             </a:pPr>
             <a:r>
-              <a:rPr lang="pt-BR" sz="2800" b="0" u="none" strike="noStrike">
+              <a:rPr lang="pt-BR" sz="1600" b="0" u="none" strike="noStrike">
                 <a:solidFill>
                   <a:schemeClr val="dk1"/>
                 </a:solidFill>
@@ -365,143 +441,7 @@
               </a:rPr>
               <a:t>Clique para editar os estilos de texto Mestres</a:t>
             </a:r>
-            <a:endParaRPr lang="pt-BR" sz="2800" b="0" u="none" strike="noStrike">
-              <a:solidFill>
-                <a:srgbClr val="000000"/>
-              </a:solidFill>
-              <a:effectLst/>
-              <a:uFillTx/>
-              <a:latin typeface="Arial"/>
-            </a:endParaRPr>
-          </a:p>
-          <a:p>
-            <a:pPr marL="685800" lvl="1" indent="-228600" defTabSz="914400">
-              <a:lnSpc>
-                <a:spcPct val="90000"/>
-              </a:lnSpc>
-              <a:spcBef>
-                <a:spcPts val="499"/>
-              </a:spcBef>
-              <a:buClr>
-                <a:srgbClr val="000000"/>
-              </a:buClr>
-              <a:buFont typeface="Arial"/>
-              <a:buChar char="•"/>
-            </a:pPr>
-            <a:r>
-              <a:rPr lang="pt-BR" sz="2400" b="0" u="none" strike="noStrike">
-                <a:solidFill>
-                  <a:schemeClr val="dk1"/>
-                </a:solidFill>
-                <a:effectLst/>
-                <a:uFillTx/>
-                <a:latin typeface="Calibri"/>
-              </a:rPr>
-              <a:t>Segundo nível</a:t>
-            </a:r>
-            <a:endParaRPr lang="pt-BR" sz="2400" b="0" u="none" strike="noStrike">
-              <a:solidFill>
-                <a:srgbClr val="000000"/>
-              </a:solidFill>
-              <a:effectLst/>
-              <a:uFillTx/>
-              <a:latin typeface="Arial"/>
-            </a:endParaRPr>
-          </a:p>
-          <a:p>
-            <a:pPr marL="1143000" lvl="2" indent="-228600" defTabSz="914400">
-              <a:lnSpc>
-                <a:spcPct val="90000"/>
-              </a:lnSpc>
-              <a:spcBef>
-                <a:spcPts val="499"/>
-              </a:spcBef>
-              <a:buClr>
-                <a:srgbClr val="000000"/>
-              </a:buClr>
-              <a:buFont typeface="Arial"/>
-              <a:buChar char="•"/>
-            </a:pPr>
-            <a:r>
-              <a:rPr lang="pt-BR" sz="2000" b="0" u="none" strike="noStrike">
-                <a:solidFill>
-                  <a:schemeClr val="dk1"/>
-                </a:solidFill>
-                <a:effectLst/>
-                <a:uFillTx/>
-                <a:latin typeface="Calibri"/>
-              </a:rPr>
-              <a:t>Terceiro nível</a:t>
-            </a:r>
-            <a:endParaRPr lang="pt-BR" sz="2000" b="0" u="none" strike="noStrike">
-              <a:solidFill>
-                <a:srgbClr val="000000"/>
-              </a:solidFill>
-              <a:effectLst/>
-              <a:uFillTx/>
-              <a:latin typeface="Arial"/>
-            </a:endParaRPr>
-          </a:p>
-          <a:p>
-            <a:pPr marL="1600200" lvl="3" indent="-228600" defTabSz="914400">
-              <a:lnSpc>
-                <a:spcPct val="90000"/>
-              </a:lnSpc>
-              <a:spcBef>
-                <a:spcPts val="499"/>
-              </a:spcBef>
-              <a:buClr>
-                <a:srgbClr val="000000"/>
-              </a:buClr>
-              <a:buFont typeface="Arial"/>
-              <a:buChar char="•"/>
-            </a:pPr>
-            <a:r>
-              <a:rPr lang="pt-BR" sz="1800" b="0" u="none" strike="noStrike">
-                <a:solidFill>
-                  <a:schemeClr val="dk1"/>
-                </a:solidFill>
-                <a:effectLst/>
-                <a:uFillTx/>
-                <a:latin typeface="Calibri"/>
-              </a:rPr>
-              <a:t>Quarto nível</a:t>
-            </a:r>
-            <a:endParaRPr lang="pt-BR" sz="1800" b="0" u="none" strike="noStrike">
-              <a:solidFill>
-                <a:srgbClr val="000000"/>
-              </a:solidFill>
-              <a:effectLst/>
-              <a:uFillTx/>
-              <a:latin typeface="Arial"/>
-            </a:endParaRPr>
-          </a:p>
-          <a:p>
-            <a:pPr marL="2057400" lvl="4" indent="-228600" defTabSz="914400">
-              <a:lnSpc>
-                <a:spcPct val="90000"/>
-              </a:lnSpc>
-              <a:spcBef>
-                <a:spcPts val="499"/>
-              </a:spcBef>
-              <a:buClr>
-                <a:srgbClr val="000000"/>
-              </a:buClr>
-              <a:buFont typeface="Arial"/>
-              <a:buChar char="•"/>
-            </a:pPr>
-            <a:r>
-              <a:rPr lang="pt-BR" sz="1800" b="0" u="none" strike="noStrike">
-                <a:solidFill>
-                  <a:schemeClr val="dk1"/>
-                </a:solidFill>
-                <a:effectLst/>
-                <a:uFillTx/>
-                <a:latin typeface="Calibri"/>
-              </a:rPr>
-              <a:t>Quinto nível</a:t>
-            </a:r>
-            <a:endParaRPr lang="pt-BR" sz="1800" b="0" u="none" strike="noStrike">
+            <a:endParaRPr lang="pt-BR" sz="1600" b="0" u="none" strike="noStrike">
               <a:solidFill>
                 <a:srgbClr val="000000"/>
               </a:solidFill>
@@ -525,7 +465,7 @@
         <p:spPr>
           <a:xfrm>
             <a:off x="838080" y="6356520"/>
-            <a:ext cx="2742120" cy="363960"/>
+            <a:ext cx="2741400" cy="363240"/>
           </a:xfrm>
           <a:prstGeom prst="rect">
             <a:avLst/>
@@ -607,7 +547,7 @@
         <p:spPr>
           <a:xfrm>
             <a:off x="4038480" y="6356520"/>
-            <a:ext cx="4113720" cy="363960"/>
+            <a:ext cx="4113000" cy="363240"/>
           </a:xfrm>
           <a:prstGeom prst="rect">
             <a:avLst/>
@@ -685,7 +625,7 @@
         <p:spPr>
           <a:xfrm>
             <a:off x="8610480" y="6356520"/>
-            <a:ext cx="2742120" cy="363960"/>
+            <a:ext cx="2741400" cy="363240"/>
           </a:xfrm>
           <a:prstGeom prst="rect">
             <a:avLst/>
@@ -730,7 +670,7 @@
                 <a:tab algn="l" pos="0"/>
               </a:tabLst>
             </a:pPr>
-            <a:fld id="{3F235D21-2DC8-40B1-BDAE-B4C384969D70}" type="slidenum">
+            <a:fld id="{C9E92C05-6FCE-4D47-9939-0143D188FC73}" type="slidenum">
               <a:rPr lang="pt-BR" sz="1200" b="0" u="none" strike="noStrike">
                 <a:solidFill>
                   <a:schemeClr val="dk1">
@@ -760,14 +700,14 @@
 </file>
 
 <file path=ppt/slideLayouts/slideLayout10.xml><?xml version="1.0" encoding="utf-8"?>
-<p:sldLayout xmlns:a="http://schemas.openxmlformats.org/drawingml/2006/main" xmlns:p="http://schemas.openxmlformats.org/presentationml/2006/main" xmlns:r="http://schemas.openxmlformats.org/officeDocument/2006/relationships" xmlns:p14="http://schemas.microsoft.com/office/powerpoint/2010/main" xmlns:p15="http://schemas.microsoft.com/office/powerpoint/2012/main" xmlns:mc="http://schemas.openxmlformats.org/markup-compatibility/2006" type="obj" preserve="1">
-  <p:cSld name="Título e Conteúdo">
+<p:sldLayout xmlns:a="http://schemas.openxmlformats.org/drawingml/2006/main" xmlns:p="http://schemas.openxmlformats.org/presentationml/2006/main" xmlns:r="http://schemas.openxmlformats.org/officeDocument/2006/relationships" xmlns:p14="http://schemas.microsoft.com/office/powerpoint/2010/main" xmlns:p15="http://schemas.microsoft.com/office/powerpoint/2012/main" xmlns:mc="http://schemas.openxmlformats.org/markup-compatibility/2006" type="blank" preserve="1">
+  <p:cSld name="Em Branco">
     <p:bg>
       <p:bgPr>
         <a:blipFill rotWithShape="0">
           <a:blip r:embed="rId2"/>
           <a:stretch>
-            <a:fillRect l="-996" r="-996"/>
+            <a:fillRect l="-993" r="-993"/>
           </a:stretch>
         </a:blipFill>
       </p:bgPr>
@@ -788,265 +728,7 @@
       </p:grpSpPr>
       <p:sp>
         <p:nvSpPr>
-          <p:cNvPr id="49" name="PlaceHolder 1"/>
-          <p:cNvSpPr>
-            <a:spLocks noGrp="1"/>
-          </p:cNvSpPr>
-          <p:nvPr>
-            <p:ph type="title"/>
-          </p:nvPr>
-        </p:nvSpPr>
-        <p:spPr>
-          <a:xfrm>
-            <a:off x="838080" y="365040"/>
-            <a:ext cx="10514520" cy="1324440"/>
-          </a:xfrm>
-          <a:prstGeom prst="rect">
-            <a:avLst/>
-          </a:prstGeom>
-          <a:noFill/>
-          <a:ln w="0">
-            <a:noFill/>
-          </a:ln>
-        </p:spPr>
-        <p:txBody>
-          <a:bodyPr lIns="91440" rIns="91440" tIns="45720" bIns="45720" anchor="ctr">
-            <a:noAutofit/>
-          </a:bodyPr>
-          <a:p>
-            <a:pPr indent="0" defTabSz="914400">
-              <a:lnSpc>
-                <a:spcPct val="90000"/>
-              </a:lnSpc>
-              <a:buNone/>
-              <a:tabLst>
-                <a:tab algn="l" pos="0"/>
-              </a:tabLst>
-            </a:pPr>
-            <a:r>
-              <a:rPr lang="pt-BR" sz="4400" b="0" u="none" strike="noStrike">
-                <a:solidFill>
-                  <a:schemeClr val="dk1"/>
-                </a:solidFill>
-                <a:effectLst/>
-                <a:uFillTx/>
-                <a:latin typeface="Calibri Light"/>
-              </a:rPr>
-              <a:t>Clique para editar o título Mestre</a:t>
-            </a:r>
-            <a:endParaRPr lang="pt-BR" sz="4400" b="0" u="none" strike="noStrike">
-              <a:solidFill>
-                <a:srgbClr val="000000"/>
-              </a:solidFill>
-              <a:effectLst/>
-              <a:uFillTx/>
-              <a:latin typeface="Arial"/>
-            </a:endParaRPr>
-          </a:p>
-        </p:txBody>
-      </p:sp>
-      <p:sp>
-        <p:nvSpPr>
-          <p:cNvPr id="50" name="PlaceHolder 2"/>
-          <p:cNvSpPr>
-            <a:spLocks noGrp="1"/>
-          </p:cNvSpPr>
-          <p:nvPr>
-            <p:ph type="body"/>
-          </p:nvPr>
-        </p:nvSpPr>
-        <p:spPr>
-          <a:xfrm>
-            <a:off x="838080" y="1825560"/>
-            <a:ext cx="10514520" cy="4350240"/>
-          </a:xfrm>
-          <a:prstGeom prst="rect">
-            <a:avLst/>
-          </a:prstGeom>
-          <a:noFill/>
-          <a:ln w="0">
-            <a:noFill/>
-          </a:ln>
-        </p:spPr>
-        <p:txBody>
-          <a:bodyPr lIns="91440" rIns="91440" tIns="45720" bIns="45720" anchor="t">
-            <a:noAutofit/>
-          </a:bodyPr>
-          <a:p>
-            <a:pPr marL="228600" indent="-228600" defTabSz="914400">
-              <a:lnSpc>
-                <a:spcPct val="90000"/>
-              </a:lnSpc>
-              <a:spcBef>
-                <a:spcPts val="1001"/>
-              </a:spcBef>
-              <a:buClr>
-                <a:srgbClr val="000000"/>
-              </a:buClr>
-              <a:buFont typeface="Arial"/>
-              <a:buChar char="•"/>
-            </a:pPr>
-            <a:r>
-              <a:rPr lang="pt-BR" sz="2800" b="0" u="none" strike="noStrike">
-                <a:solidFill>
-                  <a:schemeClr val="dk1"/>
-                </a:solidFill>
-                <a:effectLst/>
-                <a:uFillTx/>
-                <a:latin typeface="Calibri"/>
-              </a:rPr>
-              <a:t>Clique para editar os estilos de texto Mestres</a:t>
-            </a:r>
-            <a:endParaRPr lang="pt-BR" sz="2800" b="0" u="none" strike="noStrike">
-              <a:solidFill>
-                <a:srgbClr val="000000"/>
-              </a:solidFill>
-              <a:effectLst/>
-              <a:uFillTx/>
-              <a:latin typeface="Arial"/>
-            </a:endParaRPr>
-          </a:p>
-          <a:p>
-            <a:pPr marL="685800" lvl="1" indent="-228600" defTabSz="914400">
-              <a:lnSpc>
-                <a:spcPct val="90000"/>
-              </a:lnSpc>
-              <a:spcBef>
-                <a:spcPts val="499"/>
-              </a:spcBef>
-              <a:buClr>
-                <a:srgbClr val="000000"/>
-              </a:buClr>
-              <a:buFont typeface="Arial"/>
-              <a:buChar char="•"/>
-            </a:pPr>
-            <a:r>
-              <a:rPr lang="pt-BR" sz="2400" b="0" u="none" strike="noStrike">
-                <a:solidFill>
-                  <a:schemeClr val="dk1"/>
-                </a:solidFill>
-                <a:effectLst/>
-                <a:uFillTx/>
-                <a:latin typeface="Calibri"/>
-              </a:rPr>
-              <a:t>Segundo nível</a:t>
-            </a:r>
-            <a:endParaRPr lang="pt-BR" sz="2400" b="0" u="none" strike="noStrike">
-              <a:solidFill>
-                <a:srgbClr val="000000"/>
-              </a:solidFill>
-              <a:effectLst/>
-              <a:uFillTx/>
-              <a:latin typeface="Arial"/>
-            </a:endParaRPr>
-          </a:p>
-          <a:p>
-            <a:pPr marL="1143000" lvl="2" indent="-228600" defTabSz="914400">
-              <a:lnSpc>
-                <a:spcPct val="90000"/>
-              </a:lnSpc>
-              <a:spcBef>
-                <a:spcPts val="499"/>
-              </a:spcBef>
-              <a:buClr>
-                <a:srgbClr val="000000"/>
-              </a:buClr>
-              <a:buFont typeface="Arial"/>
-              <a:buChar char="•"/>
-            </a:pPr>
-            <a:r>
-              <a:rPr lang="pt-BR" sz="2000" b="0" u="none" strike="noStrike">
-                <a:solidFill>
-                  <a:schemeClr val="dk1"/>
-                </a:solidFill>
-                <a:effectLst/>
-                <a:uFillTx/>
-                <a:latin typeface="Calibri"/>
-              </a:rPr>
-              <a:t>Terceiro nível</a:t>
-            </a:r>
-            <a:endParaRPr lang="pt-BR" sz="2000" b="0" u="none" strike="noStrike">
-              <a:solidFill>
-                <a:srgbClr val="000000"/>
-              </a:solidFill>
-              <a:effectLst/>
-              <a:uFillTx/>
-              <a:latin typeface="Arial"/>
-            </a:endParaRPr>
-          </a:p>
-          <a:p>
-            <a:pPr marL="1600200" lvl="3" indent="-228600" defTabSz="914400">
-              <a:lnSpc>
-                <a:spcPct val="90000"/>
-              </a:lnSpc>
-              <a:spcBef>
-                <a:spcPts val="499"/>
-              </a:spcBef>
-              <a:buClr>
-                <a:srgbClr val="000000"/>
-              </a:buClr>
-              <a:buFont typeface="Arial"/>
-              <a:buChar char="•"/>
-            </a:pPr>
-            <a:r>
-              <a:rPr lang="pt-BR" sz="1800" b="0" u="none" strike="noStrike">
-                <a:solidFill>
-                  <a:schemeClr val="dk1"/>
-                </a:solidFill>
-                <a:effectLst/>
-                <a:uFillTx/>
-                <a:latin typeface="Calibri"/>
-              </a:rPr>
-              <a:t>Quarto nível</a:t>
-            </a:r>
-            <a:endParaRPr lang="pt-BR" sz="1800" b="0" u="none" strike="noStrike">
-              <a:solidFill>
-                <a:srgbClr val="000000"/>
-              </a:solidFill>
-              <a:effectLst/>
-              <a:uFillTx/>
-              <a:latin typeface="Arial"/>
-            </a:endParaRPr>
-          </a:p>
-          <a:p>
-            <a:pPr marL="2057400" lvl="4" indent="-228600" defTabSz="914400">
-              <a:lnSpc>
-                <a:spcPct val="90000"/>
-              </a:lnSpc>
-              <a:spcBef>
-                <a:spcPts val="499"/>
-              </a:spcBef>
-              <a:buClr>
-                <a:srgbClr val="000000"/>
-              </a:buClr>
-              <a:buFont typeface="Arial"/>
-              <a:buChar char="•"/>
-            </a:pPr>
-            <a:r>
-              <a:rPr lang="pt-BR" sz="1800" b="0" u="none" strike="noStrike">
-                <a:solidFill>
-                  <a:schemeClr val="dk1"/>
-                </a:solidFill>
-                <a:effectLst/>
-                <a:uFillTx/>
-                <a:latin typeface="Calibri"/>
-              </a:rPr>
-              <a:t>Quinto nível</a:t>
-            </a:r>
-            <a:endParaRPr lang="pt-BR" sz="1800" b="0" u="none" strike="noStrike">
-              <a:solidFill>
-                <a:srgbClr val="000000"/>
-              </a:solidFill>
-              <a:effectLst/>
-              <a:uFillTx/>
-              <a:latin typeface="Arial"/>
-            </a:endParaRPr>
-          </a:p>
-        </p:txBody>
-      </p:sp>
-      <p:sp>
-        <p:nvSpPr>
-          <p:cNvPr id="51" name="PlaceHolder 3"/>
+          <p:cNvPr id="50" name="PlaceHolder 1"/>
           <p:cNvSpPr>
             <a:spLocks noGrp="1"/>
           </p:cNvSpPr>
@@ -1057,7 +739,7 @@
         <p:spPr>
           <a:xfrm>
             <a:off x="838080" y="6356520"/>
-            <a:ext cx="2742120" cy="363960"/>
+            <a:ext cx="2741400" cy="363240"/>
           </a:xfrm>
           <a:prstGeom prst="rect">
             <a:avLst/>
@@ -1128,7 +810,7 @@
       </p:sp>
       <p:sp>
         <p:nvSpPr>
-          <p:cNvPr id="52" name="PlaceHolder 4"/>
+          <p:cNvPr id="51" name="PlaceHolder 2"/>
           <p:cNvSpPr>
             <a:spLocks noGrp="1"/>
           </p:cNvSpPr>
@@ -1139,7 +821,7 @@
         <p:spPr>
           <a:xfrm>
             <a:off x="4038480" y="6356520"/>
-            <a:ext cx="4113720" cy="363960"/>
+            <a:ext cx="4113000" cy="363240"/>
           </a:xfrm>
           <a:prstGeom prst="rect">
             <a:avLst/>
@@ -1206,7 +888,7 @@
       </p:sp>
       <p:sp>
         <p:nvSpPr>
-          <p:cNvPr id="53" name="PlaceHolder 5"/>
+          <p:cNvPr id="52" name="PlaceHolder 3"/>
           <p:cNvSpPr>
             <a:spLocks noGrp="1"/>
           </p:cNvSpPr>
@@ -1217,7 +899,7 @@
         <p:spPr>
           <a:xfrm>
             <a:off x="8610480" y="6356520"/>
-            <a:ext cx="2742120" cy="363960"/>
+            <a:ext cx="2741400" cy="363240"/>
           </a:xfrm>
           <a:prstGeom prst="rect">
             <a:avLst/>
@@ -1262,7 +944,7 @@
                 <a:tab algn="l" pos="0"/>
               </a:tabLst>
             </a:pPr>
-            <a:fld id="{3F69076A-81E9-4C5A-B8DF-CFDFD5E281E4}" type="slidenum">
+            <a:fld id="{F1005ABB-FB0E-46A8-8DFC-4DB3C6E0EC93}" type="slidenum">
               <a:rPr lang="pt-BR" sz="1200" b="0" u="none" strike="noStrike">
                 <a:solidFill>
                   <a:schemeClr val="dk1">
@@ -1293,13 +975,13 @@
 
 <file path=ppt/slideLayouts/slideLayout11.xml><?xml version="1.0" encoding="utf-8"?>
 <p:sldLayout xmlns:a="http://schemas.openxmlformats.org/drawingml/2006/main" xmlns:p="http://schemas.openxmlformats.org/presentationml/2006/main" xmlns:r="http://schemas.openxmlformats.org/officeDocument/2006/relationships" xmlns:p14="http://schemas.microsoft.com/office/powerpoint/2010/main" xmlns:p15="http://schemas.microsoft.com/office/powerpoint/2012/main" xmlns:mc="http://schemas.openxmlformats.org/markup-compatibility/2006" type="blank" preserve="1">
-  <p:cSld name="Cabeçalho da Seção">
+  <p:cSld name="Conteúdo com Legenda">
     <p:bg>
       <p:bgPr>
         <a:blipFill rotWithShape="0">
           <a:blip r:embed="rId2"/>
           <a:stretch>
-            <a:fillRect l="-996" r="-996"/>
+            <a:fillRect l="-993" r="-993"/>
           </a:stretch>
         </a:blipFill>
       </p:bgPr>
@@ -1320,7 +1002,7 @@
       </p:grpSpPr>
       <p:sp>
         <p:nvSpPr>
-          <p:cNvPr id="54" name="PlaceHolder 1"/>
+          <p:cNvPr id="53" name="PlaceHolder 1"/>
           <p:cNvSpPr>
             <a:spLocks noGrp="1"/>
           </p:cNvSpPr>
@@ -1330,8 +1012,8 @@
         </p:nvSpPr>
         <p:spPr>
           <a:xfrm>
-            <a:off x="831960" y="1709640"/>
-            <a:ext cx="10514520" cy="2851560"/>
+            <a:off x="839880" y="457200"/>
+            <a:ext cx="3930480" cy="1598400"/>
           </a:xfrm>
           <a:prstGeom prst="rect">
             <a:avLst/>
@@ -1356,7 +1038,7 @@
               </a:tabLst>
             </a:pPr>
             <a:r>
-              <a:rPr lang="pt-BR" sz="6000" b="0" u="none" strike="noStrike">
+              <a:rPr lang="pt-BR" sz="3200" b="0" u="none" strike="noStrike">
                 <a:solidFill>
                   <a:schemeClr val="dk1"/>
                 </a:solidFill>
@@ -1366,7 +1048,7 @@
               </a:rPr>
               <a:t>Clique para editar o título Mestre</a:t>
             </a:r>
-            <a:endParaRPr lang="pt-BR" sz="6000" b="0" u="none" strike="noStrike">
+            <a:endParaRPr lang="pt-BR" sz="3200" b="0" u="none" strike="noStrike">
               <a:solidFill>
                 <a:srgbClr val="000000"/>
               </a:solidFill>
@@ -1379,7 +1061,7 @@
       </p:sp>
       <p:sp>
         <p:nvSpPr>
-          <p:cNvPr id="55" name="PlaceHolder 2"/>
+          <p:cNvPr id="54" name="PlaceHolder 2"/>
           <p:cNvSpPr>
             <a:spLocks noGrp="1"/>
           </p:cNvSpPr>
@@ -1389,8 +1071,207 @@
         </p:nvSpPr>
         <p:spPr>
           <a:xfrm>
-            <a:off x="831960" y="4589640"/>
-            <a:ext cx="10514520" cy="1499040"/>
+            <a:off x="5183280" y="987480"/>
+            <a:ext cx="6170400" cy="4871880"/>
+          </a:xfrm>
+          <a:prstGeom prst="rect">
+            <a:avLst/>
+          </a:prstGeom>
+          <a:noFill/>
+          <a:ln w="0">
+            <a:noFill/>
+          </a:ln>
+        </p:spPr>
+        <p:txBody>
+          <a:bodyPr lIns="91440" rIns="91440" tIns="45720" bIns="45720" anchor="t">
+            <a:noAutofit/>
+          </a:bodyPr>
+          <a:p>
+            <a:pPr marL="228600" indent="-228600" defTabSz="914400">
+              <a:lnSpc>
+                <a:spcPct val="90000"/>
+              </a:lnSpc>
+              <a:spcBef>
+                <a:spcPts val="1001"/>
+              </a:spcBef>
+              <a:buClr>
+                <a:srgbClr val="000000"/>
+              </a:buClr>
+              <a:buFont typeface="Arial"/>
+              <a:buChar char="•"/>
+            </a:pPr>
+            <a:r>
+              <a:rPr lang="pt-BR" sz="3200" b="0" u="none" strike="noStrike">
+                <a:solidFill>
+                  <a:schemeClr val="dk1"/>
+                </a:solidFill>
+                <a:effectLst/>
+                <a:uFillTx/>
+                <a:latin typeface="Calibri"/>
+              </a:rPr>
+              <a:t>Clique para editar os estilos de texto Mestres</a:t>
+            </a:r>
+            <a:endParaRPr lang="pt-BR" sz="3200" b="0" u="none" strike="noStrike">
+              <a:solidFill>
+                <a:srgbClr val="000000"/>
+              </a:solidFill>
+              <a:effectLst/>
+              <a:uFillTx/>
+              <a:latin typeface="Arial"/>
+            </a:endParaRPr>
+          </a:p>
+          <a:p>
+            <a:pPr marL="685800" lvl="1" indent="-228600" defTabSz="914400">
+              <a:lnSpc>
+                <a:spcPct val="90000"/>
+              </a:lnSpc>
+              <a:spcBef>
+                <a:spcPts val="499"/>
+              </a:spcBef>
+              <a:buClr>
+                <a:srgbClr val="000000"/>
+              </a:buClr>
+              <a:buFont typeface="Arial"/>
+              <a:buChar char="•"/>
+            </a:pPr>
+            <a:r>
+              <a:rPr lang="pt-BR" sz="2800" b="0" u="none" strike="noStrike">
+                <a:solidFill>
+                  <a:schemeClr val="dk1"/>
+                </a:solidFill>
+                <a:effectLst/>
+                <a:uFillTx/>
+                <a:latin typeface="Calibri"/>
+              </a:rPr>
+              <a:t>Segundo nível</a:t>
+            </a:r>
+            <a:endParaRPr lang="pt-BR" sz="2800" b="0" u="none" strike="noStrike">
+              <a:solidFill>
+                <a:srgbClr val="000000"/>
+              </a:solidFill>
+              <a:effectLst/>
+              <a:uFillTx/>
+              <a:latin typeface="Arial"/>
+            </a:endParaRPr>
+          </a:p>
+          <a:p>
+            <a:pPr marL="1143000" lvl="2" indent="-228600" defTabSz="914400">
+              <a:lnSpc>
+                <a:spcPct val="90000"/>
+              </a:lnSpc>
+              <a:spcBef>
+                <a:spcPts val="499"/>
+              </a:spcBef>
+              <a:buClr>
+                <a:srgbClr val="000000"/>
+              </a:buClr>
+              <a:buFont typeface="Arial"/>
+              <a:buChar char="•"/>
+            </a:pPr>
+            <a:r>
+              <a:rPr lang="pt-BR" sz="2400" b="0" u="none" strike="noStrike">
+                <a:solidFill>
+                  <a:schemeClr val="dk1"/>
+                </a:solidFill>
+                <a:effectLst/>
+                <a:uFillTx/>
+                <a:latin typeface="Calibri"/>
+              </a:rPr>
+              <a:t>Terceiro nível</a:t>
+            </a:r>
+            <a:endParaRPr lang="pt-BR" sz="2400" b="0" u="none" strike="noStrike">
+              <a:solidFill>
+                <a:srgbClr val="000000"/>
+              </a:solidFill>
+              <a:effectLst/>
+              <a:uFillTx/>
+              <a:latin typeface="Arial"/>
+            </a:endParaRPr>
+          </a:p>
+          <a:p>
+            <a:pPr marL="1600200" lvl="3" indent="-228600" defTabSz="914400">
+              <a:lnSpc>
+                <a:spcPct val="90000"/>
+              </a:lnSpc>
+              <a:spcBef>
+                <a:spcPts val="499"/>
+              </a:spcBef>
+              <a:buClr>
+                <a:srgbClr val="000000"/>
+              </a:buClr>
+              <a:buFont typeface="Arial"/>
+              <a:buChar char="•"/>
+            </a:pPr>
+            <a:r>
+              <a:rPr lang="pt-BR" sz="2000" b="0" u="none" strike="noStrike">
+                <a:solidFill>
+                  <a:schemeClr val="dk1"/>
+                </a:solidFill>
+                <a:effectLst/>
+                <a:uFillTx/>
+                <a:latin typeface="Calibri"/>
+              </a:rPr>
+              <a:t>Quarto nível</a:t>
+            </a:r>
+            <a:endParaRPr lang="pt-BR" sz="2000" b="0" u="none" strike="noStrike">
+              <a:solidFill>
+                <a:srgbClr val="000000"/>
+              </a:solidFill>
+              <a:effectLst/>
+              <a:uFillTx/>
+              <a:latin typeface="Arial"/>
+            </a:endParaRPr>
+          </a:p>
+          <a:p>
+            <a:pPr marL="2057400" lvl="4" indent="-228600" defTabSz="914400">
+              <a:lnSpc>
+                <a:spcPct val="90000"/>
+              </a:lnSpc>
+              <a:spcBef>
+                <a:spcPts val="499"/>
+              </a:spcBef>
+              <a:buClr>
+                <a:srgbClr val="000000"/>
+              </a:buClr>
+              <a:buFont typeface="Arial"/>
+              <a:buChar char="•"/>
+            </a:pPr>
+            <a:r>
+              <a:rPr lang="pt-BR" sz="2000" b="0" u="none" strike="noStrike">
+                <a:solidFill>
+                  <a:schemeClr val="dk1"/>
+                </a:solidFill>
+                <a:effectLst/>
+                <a:uFillTx/>
+                <a:latin typeface="Calibri"/>
+              </a:rPr>
+              <a:t>Quinto nível</a:t>
+            </a:r>
+            <a:endParaRPr lang="pt-BR" sz="2000" b="0" u="none" strike="noStrike">
+              <a:solidFill>
+                <a:srgbClr val="000000"/>
+              </a:solidFill>
+              <a:effectLst/>
+              <a:uFillTx/>
+              <a:latin typeface="Arial"/>
+            </a:endParaRPr>
+          </a:p>
+        </p:txBody>
+      </p:sp>
+      <p:sp>
+        <p:nvSpPr>
+          <p:cNvPr id="55" name="PlaceHolder 3"/>
+          <p:cNvSpPr>
+            <a:spLocks noGrp="1"/>
+          </p:cNvSpPr>
+          <p:nvPr>
+            <p:ph type="body"/>
+          </p:nvPr>
+        </p:nvSpPr>
+        <p:spPr>
+          <a:xfrm>
+            <a:off x="839880" y="2057400"/>
+            <a:ext cx="3930480" cy="3809880"/>
           </a:xfrm>
           <a:prstGeom prst="rect">
             <a:avLst/>
@@ -1418,11 +1299,9 @@
               </a:tabLst>
             </a:pPr>
             <a:r>
-              <a:rPr lang="pt-BR" sz="2400" b="0" u="none" strike="noStrike">
-                <a:solidFill>
-                  <a:schemeClr val="dk1">
-                    <a:tint val="75000"/>
-                  </a:schemeClr>
+              <a:rPr lang="pt-BR" sz="1600" b="0" u="none" strike="noStrike">
+                <a:solidFill>
+                  <a:schemeClr val="dk1"/>
                 </a:solidFill>
                 <a:effectLst/>
                 <a:uFillTx/>
@@ -1430,7 +1309,7 @@
               </a:rPr>
               <a:t>Clique para editar os estilos de texto Mestres</a:t>
             </a:r>
-            <a:endParaRPr lang="pt-BR" sz="2400" b="0" u="none" strike="noStrike">
+            <a:endParaRPr lang="pt-BR" sz="1600" b="0" u="none" strike="noStrike">
               <a:solidFill>
                 <a:srgbClr val="000000"/>
               </a:solidFill>
@@ -1443,7 +1322,7 @@
       </p:sp>
       <p:sp>
         <p:nvSpPr>
-          <p:cNvPr id="56" name="PlaceHolder 3"/>
+          <p:cNvPr id="56" name="PlaceHolder 4"/>
           <p:cNvSpPr>
             <a:spLocks noGrp="1"/>
           </p:cNvSpPr>
@@ -1454,7 +1333,7 @@
         <p:spPr>
           <a:xfrm>
             <a:off x="838080" y="6356520"/>
-            <a:ext cx="2742120" cy="363960"/>
+            <a:ext cx="2741400" cy="363240"/>
           </a:xfrm>
           <a:prstGeom prst="rect">
             <a:avLst/>
@@ -1525,7 +1404,7 @@
       </p:sp>
       <p:sp>
         <p:nvSpPr>
-          <p:cNvPr id="57" name="PlaceHolder 4"/>
+          <p:cNvPr id="57" name="PlaceHolder 5"/>
           <p:cNvSpPr>
             <a:spLocks noGrp="1"/>
           </p:cNvSpPr>
@@ -1536,7 +1415,7 @@
         <p:spPr>
           <a:xfrm>
             <a:off x="4038480" y="6356520"/>
-            <a:ext cx="4113720" cy="363960"/>
+            <a:ext cx="4113000" cy="363240"/>
           </a:xfrm>
           <a:prstGeom prst="rect">
             <a:avLst/>
@@ -1603,7 +1482,7 @@
       </p:sp>
       <p:sp>
         <p:nvSpPr>
-          <p:cNvPr id="58" name="PlaceHolder 5"/>
+          <p:cNvPr id="58" name="PlaceHolder 6"/>
           <p:cNvSpPr>
             <a:spLocks noGrp="1"/>
           </p:cNvSpPr>
@@ -1614,7 +1493,7 @@
         <p:spPr>
           <a:xfrm>
             <a:off x="8610480" y="6356520"/>
-            <a:ext cx="2742120" cy="363960"/>
+            <a:ext cx="2741400" cy="363240"/>
           </a:xfrm>
           <a:prstGeom prst="rect">
             <a:avLst/>
@@ -1659,7 +1538,7 @@
                 <a:tab algn="l" pos="0"/>
               </a:tabLst>
             </a:pPr>
-            <a:fld id="{B1941623-075E-438A-811B-A912FA920DC3}" type="slidenum">
+            <a:fld id="{0F2EFBC8-21BC-4FE1-B94A-4D29A7A405A6}" type="slidenum">
               <a:rPr lang="pt-BR" sz="1200" b="0" u="none" strike="noStrike">
                 <a:solidFill>
                   <a:schemeClr val="dk1">
@@ -1689,14 +1568,14 @@
 </file>
 
 <file path=ppt/slideLayouts/slideLayout2.xml><?xml version="1.0" encoding="utf-8"?>
-<p:sldLayout xmlns:a="http://schemas.openxmlformats.org/drawingml/2006/main" xmlns:p="http://schemas.openxmlformats.org/presentationml/2006/main" xmlns:r="http://schemas.openxmlformats.org/officeDocument/2006/relationships" xmlns:p14="http://schemas.microsoft.com/office/powerpoint/2010/main" xmlns:p15="http://schemas.microsoft.com/office/powerpoint/2012/main" xmlns:mc="http://schemas.openxmlformats.org/markup-compatibility/2006" type="blank" preserve="1">
-  <p:cSld name="Comparação">
+<p:sldLayout xmlns:a="http://schemas.openxmlformats.org/drawingml/2006/main" xmlns:p="http://schemas.openxmlformats.org/presentationml/2006/main" xmlns:r="http://schemas.openxmlformats.org/officeDocument/2006/relationships" xmlns:p14="http://schemas.microsoft.com/office/powerpoint/2010/main" xmlns:p15="http://schemas.microsoft.com/office/powerpoint/2012/main" xmlns:mc="http://schemas.openxmlformats.org/markup-compatibility/2006" type="title" preserve="1">
+  <p:cSld name="Slide de Título">
     <p:bg>
       <p:bgPr>
         <a:blipFill rotWithShape="0">
           <a:blip r:embed="rId2"/>
           <a:stretch>
-            <a:fillRect l="-996" r="-996"/>
+            <a:fillRect l="-993" r="-993"/>
           </a:stretch>
         </a:blipFill>
       </p:bgPr>
@@ -1727,8 +1606,8 @@
         </p:nvSpPr>
         <p:spPr>
           <a:xfrm>
-            <a:off x="839880" y="365040"/>
-            <a:ext cx="10514520" cy="1324440"/>
+            <a:off x="1523880" y="1122480"/>
+            <a:ext cx="9142200" cy="2385720"/>
           </a:xfrm>
           <a:prstGeom prst="rect">
             <a:avLst/>
@@ -1739,11 +1618,11 @@
           </a:ln>
         </p:spPr>
         <p:txBody>
-          <a:bodyPr lIns="91440" rIns="91440" tIns="45720" bIns="45720" anchor="ctr">
+          <a:bodyPr lIns="91440" rIns="91440" tIns="45720" bIns="45720" anchor="b">
             <a:noAutofit/>
           </a:bodyPr>
           <a:p>
-            <a:pPr indent="0" defTabSz="914400">
+            <a:pPr indent="0" algn="ctr" defTabSz="914400">
               <a:lnSpc>
                 <a:spcPct val="90000"/>
               </a:lnSpc>
@@ -1753,7 +1632,7 @@
               </a:tabLst>
             </a:pPr>
             <a:r>
-              <a:rPr lang="pt-BR" sz="4400" b="0" u="none" strike="noStrike">
+              <a:rPr lang="pt-BR" sz="6000" b="0" u="none" strike="noStrike">
                 <a:solidFill>
                   <a:schemeClr val="dk1"/>
                 </a:solidFill>
@@ -1763,7 +1642,7 @@
               </a:rPr>
               <a:t>Clique para editar o título Mestre</a:t>
             </a:r>
-            <a:endParaRPr lang="pt-BR" sz="4400" b="0" u="none" strike="noStrike">
+            <a:endParaRPr lang="pt-BR" sz="6000" b="0" u="none" strike="noStrike">
               <a:solidFill>
                 <a:srgbClr val="000000"/>
               </a:solidFill>
@@ -1781,535 +1660,13 @@
             <a:spLocks noGrp="1"/>
           </p:cNvSpPr>
           <p:nvPr>
-            <p:ph type="body"/>
-          </p:nvPr>
-        </p:nvSpPr>
-        <p:spPr>
-          <a:xfrm>
-            <a:off x="839880" y="1681200"/>
-            <a:ext cx="5156640" cy="822960"/>
-          </a:xfrm>
-          <a:prstGeom prst="rect">
-            <a:avLst/>
-          </a:prstGeom>
-          <a:noFill/>
-          <a:ln w="0">
-            <a:noFill/>
-          </a:ln>
-        </p:spPr>
-        <p:txBody>
-          <a:bodyPr lIns="91440" rIns="91440" tIns="45720" bIns="45720" anchor="b">
-            <a:noAutofit/>
-          </a:bodyPr>
-          <a:p>
-            <a:pPr indent="0" defTabSz="914400">
-              <a:lnSpc>
-                <a:spcPct val="90000"/>
-              </a:lnSpc>
-              <a:spcBef>
-                <a:spcPts val="1001"/>
-              </a:spcBef>
-              <a:buNone/>
-              <a:tabLst>
-                <a:tab algn="l" pos="0"/>
-              </a:tabLst>
-            </a:pPr>
-            <a:r>
-              <a:rPr lang="pt-BR" sz="2400" b="1" u="none" strike="noStrike">
-                <a:solidFill>
-                  <a:schemeClr val="dk1"/>
-                </a:solidFill>
-                <a:effectLst/>
-                <a:uFillTx/>
-                <a:latin typeface="Calibri"/>
-              </a:rPr>
-              <a:t>Clique para editar os estilos de texto Mestres</a:t>
-            </a:r>
-            <a:endParaRPr lang="pt-BR" sz="2400" b="0" u="none" strike="noStrike">
-              <a:solidFill>
-                <a:srgbClr val="000000"/>
-              </a:solidFill>
-              <a:effectLst/>
-              <a:uFillTx/>
-              <a:latin typeface="Arial"/>
-            </a:endParaRPr>
-          </a:p>
-        </p:txBody>
-      </p:sp>
-      <p:sp>
-        <p:nvSpPr>
-          <p:cNvPr id="10" name="PlaceHolder 3"/>
-          <p:cNvSpPr>
-            <a:spLocks noGrp="1"/>
-          </p:cNvSpPr>
-          <p:nvPr>
-            <p:ph type="body"/>
-          </p:nvPr>
-        </p:nvSpPr>
-        <p:spPr>
-          <a:xfrm>
-            <a:off x="839880" y="2505240"/>
-            <a:ext cx="5156640" cy="3683520"/>
-          </a:xfrm>
-          <a:prstGeom prst="rect">
-            <a:avLst/>
-          </a:prstGeom>
-          <a:noFill/>
-          <a:ln w="0">
-            <a:noFill/>
-          </a:ln>
-        </p:spPr>
-        <p:txBody>
-          <a:bodyPr lIns="91440" rIns="91440" tIns="45720" bIns="45720" anchor="t">
-            <a:noAutofit/>
-          </a:bodyPr>
-          <a:p>
-            <a:pPr marL="228600" indent="-228600" defTabSz="914400">
-              <a:lnSpc>
-                <a:spcPct val="90000"/>
-              </a:lnSpc>
-              <a:spcBef>
-                <a:spcPts val="1001"/>
-              </a:spcBef>
-              <a:buClr>
-                <a:srgbClr val="000000"/>
-              </a:buClr>
-              <a:buFont typeface="Arial"/>
-              <a:buChar char="•"/>
-            </a:pPr>
-            <a:r>
-              <a:rPr lang="pt-BR" sz="2800" b="0" u="none" strike="noStrike">
-                <a:solidFill>
-                  <a:schemeClr val="dk1"/>
-                </a:solidFill>
-                <a:effectLst/>
-                <a:uFillTx/>
-                <a:latin typeface="Calibri"/>
-              </a:rPr>
-              <a:t>Clique para editar os estilos de texto Mestres</a:t>
-            </a:r>
-            <a:endParaRPr lang="pt-BR" sz="2800" b="0" u="none" strike="noStrike">
-              <a:solidFill>
-                <a:srgbClr val="000000"/>
-              </a:solidFill>
-              <a:effectLst/>
-              <a:uFillTx/>
-              <a:latin typeface="Arial"/>
-            </a:endParaRPr>
-          </a:p>
-          <a:p>
-            <a:pPr marL="685800" lvl="1" indent="-228600" defTabSz="914400">
-              <a:lnSpc>
-                <a:spcPct val="90000"/>
-              </a:lnSpc>
-              <a:spcBef>
-                <a:spcPts val="499"/>
-              </a:spcBef>
-              <a:buClr>
-                <a:srgbClr val="000000"/>
-              </a:buClr>
-              <a:buFont typeface="Arial"/>
-              <a:buChar char="•"/>
-            </a:pPr>
-            <a:r>
-              <a:rPr lang="pt-BR" sz="2400" b="0" u="none" strike="noStrike">
-                <a:solidFill>
-                  <a:schemeClr val="dk1"/>
-                </a:solidFill>
-                <a:effectLst/>
-                <a:uFillTx/>
-                <a:latin typeface="Calibri"/>
-              </a:rPr>
-              <a:t>Segundo nível</a:t>
-            </a:r>
-            <a:endParaRPr lang="pt-BR" sz="2400" b="0" u="none" strike="noStrike">
-              <a:solidFill>
-                <a:srgbClr val="000000"/>
-              </a:solidFill>
-              <a:effectLst/>
-              <a:uFillTx/>
-              <a:latin typeface="Arial"/>
-            </a:endParaRPr>
-          </a:p>
-          <a:p>
-            <a:pPr marL="1143000" lvl="2" indent="-228600" defTabSz="914400">
-              <a:lnSpc>
-                <a:spcPct val="90000"/>
-              </a:lnSpc>
-              <a:spcBef>
-                <a:spcPts val="499"/>
-              </a:spcBef>
-              <a:buClr>
-                <a:srgbClr val="000000"/>
-              </a:buClr>
-              <a:buFont typeface="Arial"/>
-              <a:buChar char="•"/>
-            </a:pPr>
-            <a:r>
-              <a:rPr lang="pt-BR" sz="2000" b="0" u="none" strike="noStrike">
-                <a:solidFill>
-                  <a:schemeClr val="dk1"/>
-                </a:solidFill>
-                <a:effectLst/>
-                <a:uFillTx/>
-                <a:latin typeface="Calibri"/>
-              </a:rPr>
-              <a:t>Terceiro nível</a:t>
-            </a:r>
-            <a:endParaRPr lang="pt-BR" sz="2000" b="0" u="none" strike="noStrike">
-              <a:solidFill>
-                <a:srgbClr val="000000"/>
-              </a:solidFill>
-              <a:effectLst/>
-              <a:uFillTx/>
-              <a:latin typeface="Arial"/>
-            </a:endParaRPr>
-          </a:p>
-          <a:p>
-            <a:pPr marL="1600200" lvl="3" indent="-228600" defTabSz="914400">
-              <a:lnSpc>
-                <a:spcPct val="90000"/>
-              </a:lnSpc>
-              <a:spcBef>
-                <a:spcPts val="499"/>
-              </a:spcBef>
-              <a:buClr>
-                <a:srgbClr val="000000"/>
-              </a:buClr>
-              <a:buFont typeface="Arial"/>
-              <a:buChar char="•"/>
-            </a:pPr>
-            <a:r>
-              <a:rPr lang="pt-BR" sz="1800" b="0" u="none" strike="noStrike">
-                <a:solidFill>
-                  <a:schemeClr val="dk1"/>
-                </a:solidFill>
-                <a:effectLst/>
-                <a:uFillTx/>
-                <a:latin typeface="Calibri"/>
-              </a:rPr>
-              <a:t>Quarto nível</a:t>
-            </a:r>
-            <a:endParaRPr lang="pt-BR" sz="1800" b="0" u="none" strike="noStrike">
-              <a:solidFill>
-                <a:srgbClr val="000000"/>
-              </a:solidFill>
-              <a:effectLst/>
-              <a:uFillTx/>
-              <a:latin typeface="Arial"/>
-            </a:endParaRPr>
-          </a:p>
-          <a:p>
-            <a:pPr marL="2057400" lvl="4" indent="-228600" defTabSz="914400">
-              <a:lnSpc>
-                <a:spcPct val="90000"/>
-              </a:lnSpc>
-              <a:spcBef>
-                <a:spcPts val="499"/>
-              </a:spcBef>
-              <a:buClr>
-                <a:srgbClr val="000000"/>
-              </a:buClr>
-              <a:buFont typeface="Arial"/>
-              <a:buChar char="•"/>
-            </a:pPr>
-            <a:r>
-              <a:rPr lang="pt-BR" sz="1800" b="0" u="none" strike="noStrike">
-                <a:solidFill>
-                  <a:schemeClr val="dk1"/>
-                </a:solidFill>
-                <a:effectLst/>
-                <a:uFillTx/>
-                <a:latin typeface="Calibri"/>
-              </a:rPr>
-              <a:t>Quinto nível</a:t>
-            </a:r>
-            <a:endParaRPr lang="pt-BR" sz="1800" b="0" u="none" strike="noStrike">
-              <a:solidFill>
-                <a:srgbClr val="000000"/>
-              </a:solidFill>
-              <a:effectLst/>
-              <a:uFillTx/>
-              <a:latin typeface="Arial"/>
-            </a:endParaRPr>
-          </a:p>
-        </p:txBody>
-      </p:sp>
-      <p:sp>
-        <p:nvSpPr>
-          <p:cNvPr id="11" name="PlaceHolder 4"/>
-          <p:cNvSpPr>
-            <a:spLocks noGrp="1"/>
-          </p:cNvSpPr>
-          <p:nvPr>
-            <p:ph type="body"/>
-          </p:nvPr>
-        </p:nvSpPr>
-        <p:spPr>
-          <a:xfrm>
-            <a:off x="6172200" y="1681200"/>
-            <a:ext cx="5182200" cy="822960"/>
-          </a:xfrm>
-          <a:prstGeom prst="rect">
-            <a:avLst/>
-          </a:prstGeom>
-          <a:noFill/>
-          <a:ln w="0">
-            <a:noFill/>
-          </a:ln>
-        </p:spPr>
-        <p:txBody>
-          <a:bodyPr lIns="91440" rIns="91440" tIns="45720" bIns="45720" anchor="b">
-            <a:noAutofit/>
-          </a:bodyPr>
-          <a:p>
-            <a:pPr indent="0" defTabSz="914400">
-              <a:lnSpc>
-                <a:spcPct val="90000"/>
-              </a:lnSpc>
-              <a:spcBef>
-                <a:spcPts val="1001"/>
-              </a:spcBef>
-              <a:buNone/>
-              <a:tabLst>
-                <a:tab algn="l" pos="0"/>
-              </a:tabLst>
-            </a:pPr>
-            <a:r>
-              <a:rPr lang="pt-BR" sz="2400" b="1" u="none" strike="noStrike">
-                <a:solidFill>
-                  <a:schemeClr val="dk1"/>
-                </a:solidFill>
-                <a:effectLst/>
-                <a:uFillTx/>
-                <a:latin typeface="Calibri"/>
-              </a:rPr>
-              <a:t>Clique para editar os estilos de texto Mestres</a:t>
-            </a:r>
-            <a:endParaRPr lang="pt-BR" sz="2400" b="0" u="none" strike="noStrike">
-              <a:solidFill>
-                <a:srgbClr val="000000"/>
-              </a:solidFill>
-              <a:effectLst/>
-              <a:uFillTx/>
-              <a:latin typeface="Arial"/>
-            </a:endParaRPr>
-          </a:p>
-        </p:txBody>
-      </p:sp>
-      <p:sp>
-        <p:nvSpPr>
-          <p:cNvPr id="12" name="PlaceHolder 5"/>
-          <p:cNvSpPr>
-            <a:spLocks noGrp="1"/>
-          </p:cNvSpPr>
-          <p:nvPr>
-            <p:ph type="body"/>
-          </p:nvPr>
-        </p:nvSpPr>
-        <p:spPr>
-          <a:xfrm>
-            <a:off x="6172200" y="2505240"/>
-            <a:ext cx="5182200" cy="3683520"/>
-          </a:xfrm>
-          <a:prstGeom prst="rect">
-            <a:avLst/>
-          </a:prstGeom>
-          <a:noFill/>
-          <a:ln w="0">
-            <a:noFill/>
-          </a:ln>
-        </p:spPr>
-        <p:txBody>
-          <a:bodyPr lIns="91440" rIns="91440" tIns="45720" bIns="45720" anchor="t">
-            <a:noAutofit/>
-          </a:bodyPr>
-          <a:p>
-            <a:pPr marL="228600" indent="-228600" defTabSz="914400">
-              <a:lnSpc>
-                <a:spcPct val="90000"/>
-              </a:lnSpc>
-              <a:spcBef>
-                <a:spcPts val="1001"/>
-              </a:spcBef>
-              <a:buClr>
-                <a:srgbClr val="000000"/>
-              </a:buClr>
-              <a:buFont typeface="Arial"/>
-              <a:buChar char="•"/>
-            </a:pPr>
-            <a:r>
-              <a:rPr lang="pt-BR" sz="2800" b="0" u="none" strike="noStrike">
-                <a:solidFill>
-                  <a:schemeClr val="dk1"/>
-                </a:solidFill>
-                <a:effectLst/>
-                <a:uFillTx/>
-                <a:latin typeface="Calibri"/>
-              </a:rPr>
-              <a:t>Clique para editar os estilos de texto Mestres</a:t>
-            </a:r>
-            <a:endParaRPr lang="pt-BR" sz="2800" b="0" u="none" strike="noStrike">
-              <a:solidFill>
-                <a:srgbClr val="000000"/>
-              </a:solidFill>
-              <a:effectLst/>
-              <a:uFillTx/>
-              <a:latin typeface="Arial"/>
-            </a:endParaRPr>
-          </a:p>
-          <a:p>
-            <a:pPr marL="685800" lvl="1" indent="-228600" defTabSz="914400">
-              <a:lnSpc>
-                <a:spcPct val="90000"/>
-              </a:lnSpc>
-              <a:spcBef>
-                <a:spcPts val="499"/>
-              </a:spcBef>
-              <a:buClr>
-                <a:srgbClr val="000000"/>
-              </a:buClr>
-              <a:buFont typeface="Arial"/>
-              <a:buChar char="•"/>
-            </a:pPr>
-            <a:r>
-              <a:rPr lang="pt-BR" sz="2400" b="0" u="none" strike="noStrike">
-                <a:solidFill>
-                  <a:schemeClr val="dk1"/>
-                </a:solidFill>
-                <a:effectLst/>
-                <a:uFillTx/>
-                <a:latin typeface="Calibri"/>
-              </a:rPr>
-              <a:t>Segundo nível</a:t>
-            </a:r>
-            <a:endParaRPr lang="pt-BR" sz="2400" b="0" u="none" strike="noStrike">
-              <a:solidFill>
-                <a:srgbClr val="000000"/>
-              </a:solidFill>
-              <a:effectLst/>
-              <a:uFillTx/>
-              <a:latin typeface="Arial"/>
-            </a:endParaRPr>
-          </a:p>
-          <a:p>
-            <a:pPr marL="1143000" lvl="2" indent="-228600" defTabSz="914400">
-              <a:lnSpc>
-                <a:spcPct val="90000"/>
-              </a:lnSpc>
-              <a:spcBef>
-                <a:spcPts val="499"/>
-              </a:spcBef>
-              <a:buClr>
-                <a:srgbClr val="000000"/>
-              </a:buClr>
-              <a:buFont typeface="Arial"/>
-              <a:buChar char="•"/>
-            </a:pPr>
-            <a:r>
-              <a:rPr lang="pt-BR" sz="2000" b="0" u="none" strike="noStrike">
-                <a:solidFill>
-                  <a:schemeClr val="dk1"/>
-                </a:solidFill>
-                <a:effectLst/>
-                <a:uFillTx/>
-                <a:latin typeface="Calibri"/>
-              </a:rPr>
-              <a:t>Terceiro nível</a:t>
-            </a:r>
-            <a:endParaRPr lang="pt-BR" sz="2000" b="0" u="none" strike="noStrike">
-              <a:solidFill>
-                <a:srgbClr val="000000"/>
-              </a:solidFill>
-              <a:effectLst/>
-              <a:uFillTx/>
-              <a:latin typeface="Arial"/>
-            </a:endParaRPr>
-          </a:p>
-          <a:p>
-            <a:pPr marL="1600200" lvl="3" indent="-228600" defTabSz="914400">
-              <a:lnSpc>
-                <a:spcPct val="90000"/>
-              </a:lnSpc>
-              <a:spcBef>
-                <a:spcPts val="499"/>
-              </a:spcBef>
-              <a:buClr>
-                <a:srgbClr val="000000"/>
-              </a:buClr>
-              <a:buFont typeface="Arial"/>
-              <a:buChar char="•"/>
-            </a:pPr>
-            <a:r>
-              <a:rPr lang="pt-BR" sz="1800" b="0" u="none" strike="noStrike">
-                <a:solidFill>
-                  <a:schemeClr val="dk1"/>
-                </a:solidFill>
-                <a:effectLst/>
-                <a:uFillTx/>
-                <a:latin typeface="Calibri"/>
-              </a:rPr>
-              <a:t>Quarto nível</a:t>
-            </a:r>
-            <a:endParaRPr lang="pt-BR" sz="1800" b="0" u="none" strike="noStrike">
-              <a:solidFill>
-                <a:srgbClr val="000000"/>
-              </a:solidFill>
-              <a:effectLst/>
-              <a:uFillTx/>
-              <a:latin typeface="Arial"/>
-            </a:endParaRPr>
-          </a:p>
-          <a:p>
-            <a:pPr marL="2057400" lvl="4" indent="-228600" defTabSz="914400">
-              <a:lnSpc>
-                <a:spcPct val="90000"/>
-              </a:lnSpc>
-              <a:spcBef>
-                <a:spcPts val="499"/>
-              </a:spcBef>
-              <a:buClr>
-                <a:srgbClr val="000000"/>
-              </a:buClr>
-              <a:buFont typeface="Arial"/>
-              <a:buChar char="•"/>
-            </a:pPr>
-            <a:r>
-              <a:rPr lang="pt-BR" sz="1800" b="0" u="none" strike="noStrike">
-                <a:solidFill>
-                  <a:schemeClr val="dk1"/>
-                </a:solidFill>
-                <a:effectLst/>
-                <a:uFillTx/>
-                <a:latin typeface="Calibri"/>
-              </a:rPr>
-              <a:t>Quinto nível</a:t>
-            </a:r>
-            <a:endParaRPr lang="pt-BR" sz="1800" b="0" u="none" strike="noStrike">
-              <a:solidFill>
-                <a:srgbClr val="000000"/>
-              </a:solidFill>
-              <a:effectLst/>
-              <a:uFillTx/>
-              <a:latin typeface="Arial"/>
-            </a:endParaRPr>
-          </a:p>
-        </p:txBody>
-      </p:sp>
-      <p:sp>
-        <p:nvSpPr>
-          <p:cNvPr id="13" name="PlaceHolder 6"/>
-          <p:cNvSpPr>
-            <a:spLocks noGrp="1"/>
-          </p:cNvSpPr>
-          <p:nvPr>
             <p:ph type="dt" idx="4"/>
           </p:nvPr>
         </p:nvSpPr>
         <p:spPr>
           <a:xfrm>
             <a:off x="838080" y="6356520"/>
-            <a:ext cx="2742120" cy="363960"/>
+            <a:ext cx="2741400" cy="363240"/>
           </a:xfrm>
           <a:prstGeom prst="rect">
             <a:avLst/>
@@ -2380,7 +1737,7 @@
       </p:sp>
       <p:sp>
         <p:nvSpPr>
-          <p:cNvPr id="14" name="PlaceHolder 7"/>
+          <p:cNvPr id="10" name="PlaceHolder 3"/>
           <p:cNvSpPr>
             <a:spLocks noGrp="1"/>
           </p:cNvSpPr>
@@ -2391,7 +1748,7 @@
         <p:spPr>
           <a:xfrm>
             <a:off x="4038480" y="6356520"/>
-            <a:ext cx="4113720" cy="363960"/>
+            <a:ext cx="4113000" cy="363240"/>
           </a:xfrm>
           <a:prstGeom prst="rect">
             <a:avLst/>
@@ -2458,7 +1815,7 @@
       </p:sp>
       <p:sp>
         <p:nvSpPr>
-          <p:cNvPr id="15" name="PlaceHolder 8"/>
+          <p:cNvPr id="11" name="PlaceHolder 4"/>
           <p:cNvSpPr>
             <a:spLocks noGrp="1"/>
           </p:cNvSpPr>
@@ -2469,7 +1826,7 @@
         <p:spPr>
           <a:xfrm>
             <a:off x="8610480" y="6356520"/>
-            <a:ext cx="2742120" cy="363960"/>
+            <a:ext cx="2741400" cy="363240"/>
           </a:xfrm>
           <a:prstGeom prst="rect">
             <a:avLst/>
@@ -2514,7 +1871,7 @@
                 <a:tab algn="l" pos="0"/>
               </a:tabLst>
             </a:pPr>
-            <a:fld id="{045EA14E-0C0C-4DB2-B1F8-245FC6E1F883}" type="slidenum">
+            <a:fld id="{5E36066E-7A59-4E30-9C96-435F940BD933}" type="slidenum">
               <a:rPr lang="pt-BR" sz="1200" b="0" u="none" strike="noStrike">
                 <a:solidFill>
                   <a:schemeClr val="dk1">
@@ -2544,14 +1901,14 @@
 </file>
 
 <file path=ppt/slideLayouts/slideLayout3.xml><?xml version="1.0" encoding="utf-8"?>
-<p:sldLayout xmlns:a="http://schemas.openxmlformats.org/drawingml/2006/main" xmlns:p="http://schemas.openxmlformats.org/presentationml/2006/main" xmlns:r="http://schemas.openxmlformats.org/officeDocument/2006/relationships" xmlns:p14="http://schemas.microsoft.com/office/powerpoint/2010/main" xmlns:p15="http://schemas.microsoft.com/office/powerpoint/2012/main" xmlns:mc="http://schemas.openxmlformats.org/markup-compatibility/2006" type="titleOnly" preserve="1">
-  <p:cSld name="Somente Título">
+<p:sldLayout xmlns:a="http://schemas.openxmlformats.org/drawingml/2006/main" xmlns:p="http://schemas.openxmlformats.org/presentationml/2006/main" xmlns:r="http://schemas.openxmlformats.org/officeDocument/2006/relationships" xmlns:p14="http://schemas.microsoft.com/office/powerpoint/2010/main" xmlns:p15="http://schemas.microsoft.com/office/powerpoint/2012/main" xmlns:mc="http://schemas.openxmlformats.org/markup-compatibility/2006" type="vertTx" preserve="1">
+  <p:cSld name="Título e Texto Vertical">
     <p:bg>
       <p:bgPr>
         <a:blipFill rotWithShape="0">
           <a:blip r:embed="rId2"/>
           <a:stretch>
-            <a:fillRect l="-996" r="-996"/>
+            <a:fillRect l="-993" r="-993"/>
           </a:stretch>
         </a:blipFill>
       </p:bgPr>
@@ -2572,7 +1929,7 @@
       </p:grpSpPr>
       <p:sp>
         <p:nvSpPr>
-          <p:cNvPr id="16" name="PlaceHolder 1"/>
+          <p:cNvPr id="12" name="PlaceHolder 1"/>
           <p:cNvSpPr>
             <a:spLocks noGrp="1"/>
           </p:cNvSpPr>
@@ -2583,7 +1940,7 @@
         <p:spPr>
           <a:xfrm>
             <a:off x="838080" y="365040"/>
-            <a:ext cx="10514520" cy="1324440"/>
+            <a:ext cx="10513800" cy="1323720"/>
           </a:xfrm>
           <a:prstGeom prst="rect">
             <a:avLst/>
@@ -2631,7 +1988,206 @@
       </p:sp>
       <p:sp>
         <p:nvSpPr>
-          <p:cNvPr id="17" name="PlaceHolder 2"/>
+          <p:cNvPr id="13" name="PlaceHolder 2"/>
+          <p:cNvSpPr>
+            <a:spLocks noGrp="1"/>
+          </p:cNvSpPr>
+          <p:nvPr>
+            <p:ph type="body"/>
+          </p:nvPr>
+        </p:nvSpPr>
+        <p:spPr>
+          <a:xfrm>
+            <a:off x="838080" y="1825560"/>
+            <a:ext cx="10513800" cy="4349520"/>
+          </a:xfrm>
+          <a:prstGeom prst="rect">
+            <a:avLst/>
+          </a:prstGeom>
+          <a:noFill/>
+          <a:ln w="0">
+            <a:noFill/>
+          </a:ln>
+        </p:spPr>
+        <p:txBody>
+          <a:bodyPr lIns="91440" rIns="91440" tIns="45720" bIns="45720" anchor="t" vert="eaVert">
+            <a:noAutofit/>
+          </a:bodyPr>
+          <a:p>
+            <a:pPr marL="228600" indent="-228600" defTabSz="914400">
+              <a:lnSpc>
+                <a:spcPct val="90000"/>
+              </a:lnSpc>
+              <a:spcBef>
+                <a:spcPts val="1001"/>
+              </a:spcBef>
+              <a:buClr>
+                <a:srgbClr val="000000"/>
+              </a:buClr>
+              <a:buFont typeface="Arial"/>
+              <a:buChar char="•"/>
+            </a:pPr>
+            <a:r>
+              <a:rPr lang="pt-BR" sz="2800" b="0" u="none" strike="noStrike">
+                <a:solidFill>
+                  <a:schemeClr val="dk1"/>
+                </a:solidFill>
+                <a:effectLst/>
+                <a:uFillTx/>
+                <a:latin typeface="Calibri"/>
+              </a:rPr>
+              <a:t>Clique para editar os estilos de texto Mestres</a:t>
+            </a:r>
+            <a:endParaRPr lang="pt-BR" sz="2800" b="0" u="none" strike="noStrike">
+              <a:solidFill>
+                <a:srgbClr val="000000"/>
+              </a:solidFill>
+              <a:effectLst/>
+              <a:uFillTx/>
+              <a:latin typeface="Arial"/>
+            </a:endParaRPr>
+          </a:p>
+          <a:p>
+            <a:pPr marL="685800" lvl="1" indent="-228600" defTabSz="914400">
+              <a:lnSpc>
+                <a:spcPct val="90000"/>
+              </a:lnSpc>
+              <a:spcBef>
+                <a:spcPts val="499"/>
+              </a:spcBef>
+              <a:buClr>
+                <a:srgbClr val="000000"/>
+              </a:buClr>
+              <a:buFont typeface="Arial"/>
+              <a:buChar char="•"/>
+            </a:pPr>
+            <a:r>
+              <a:rPr lang="pt-BR" sz="2400" b="0" u="none" strike="noStrike">
+                <a:solidFill>
+                  <a:schemeClr val="dk1"/>
+                </a:solidFill>
+                <a:effectLst/>
+                <a:uFillTx/>
+                <a:latin typeface="Calibri"/>
+              </a:rPr>
+              <a:t>Segundo nível</a:t>
+            </a:r>
+            <a:endParaRPr lang="pt-BR" sz="2400" b="0" u="none" strike="noStrike">
+              <a:solidFill>
+                <a:srgbClr val="000000"/>
+              </a:solidFill>
+              <a:effectLst/>
+              <a:uFillTx/>
+              <a:latin typeface="Arial"/>
+            </a:endParaRPr>
+          </a:p>
+          <a:p>
+            <a:pPr marL="1143000" lvl="2" indent="-228600" defTabSz="914400">
+              <a:lnSpc>
+                <a:spcPct val="90000"/>
+              </a:lnSpc>
+              <a:spcBef>
+                <a:spcPts val="499"/>
+              </a:spcBef>
+              <a:buClr>
+                <a:srgbClr val="000000"/>
+              </a:buClr>
+              <a:buFont typeface="Arial"/>
+              <a:buChar char="•"/>
+            </a:pPr>
+            <a:r>
+              <a:rPr lang="pt-BR" sz="2000" b="0" u="none" strike="noStrike">
+                <a:solidFill>
+                  <a:schemeClr val="dk1"/>
+                </a:solidFill>
+                <a:effectLst/>
+                <a:uFillTx/>
+                <a:latin typeface="Calibri"/>
+              </a:rPr>
+              <a:t>Terceiro nível</a:t>
+            </a:r>
+            <a:endParaRPr lang="pt-BR" sz="2000" b="0" u="none" strike="noStrike">
+              <a:solidFill>
+                <a:srgbClr val="000000"/>
+              </a:solidFill>
+              <a:effectLst/>
+              <a:uFillTx/>
+              <a:latin typeface="Arial"/>
+            </a:endParaRPr>
+          </a:p>
+          <a:p>
+            <a:pPr marL="1600200" lvl="3" indent="-228600" defTabSz="914400">
+              <a:lnSpc>
+                <a:spcPct val="90000"/>
+              </a:lnSpc>
+              <a:spcBef>
+                <a:spcPts val="499"/>
+              </a:spcBef>
+              <a:buClr>
+                <a:srgbClr val="000000"/>
+              </a:buClr>
+              <a:buFont typeface="Arial"/>
+              <a:buChar char="•"/>
+            </a:pPr>
+            <a:r>
+              <a:rPr lang="pt-BR" sz="1800" b="0" u="none" strike="noStrike">
+                <a:solidFill>
+                  <a:schemeClr val="dk1"/>
+                </a:solidFill>
+                <a:effectLst/>
+                <a:uFillTx/>
+                <a:latin typeface="Calibri"/>
+              </a:rPr>
+              <a:t>Quarto nível</a:t>
+            </a:r>
+            <a:endParaRPr lang="pt-BR" sz="1800" b="0" u="none" strike="noStrike">
+              <a:solidFill>
+                <a:srgbClr val="000000"/>
+              </a:solidFill>
+              <a:effectLst/>
+              <a:uFillTx/>
+              <a:latin typeface="Arial"/>
+            </a:endParaRPr>
+          </a:p>
+          <a:p>
+            <a:pPr marL="2057400" lvl="4" indent="-228600" defTabSz="914400">
+              <a:lnSpc>
+                <a:spcPct val="90000"/>
+              </a:lnSpc>
+              <a:spcBef>
+                <a:spcPts val="499"/>
+              </a:spcBef>
+              <a:buClr>
+                <a:srgbClr val="000000"/>
+              </a:buClr>
+              <a:buFont typeface="Arial"/>
+              <a:buChar char="•"/>
+            </a:pPr>
+            <a:r>
+              <a:rPr lang="pt-BR" sz="1800" b="0" u="none" strike="noStrike">
+                <a:solidFill>
+                  <a:schemeClr val="dk1"/>
+                </a:solidFill>
+                <a:effectLst/>
+                <a:uFillTx/>
+                <a:latin typeface="Calibri"/>
+              </a:rPr>
+              <a:t>Quinto nível</a:t>
+            </a:r>
+            <a:endParaRPr lang="pt-BR" sz="1800" b="0" u="none" strike="noStrike">
+              <a:solidFill>
+                <a:srgbClr val="000000"/>
+              </a:solidFill>
+              <a:effectLst/>
+              <a:uFillTx/>
+              <a:latin typeface="Arial"/>
+            </a:endParaRPr>
+          </a:p>
+        </p:txBody>
+      </p:sp>
+      <p:sp>
+        <p:nvSpPr>
+          <p:cNvPr id="14" name="PlaceHolder 3"/>
           <p:cNvSpPr>
             <a:spLocks noGrp="1"/>
           </p:cNvSpPr>
@@ -2642,7 +2198,7 @@
         <p:spPr>
           <a:xfrm>
             <a:off x="838080" y="6356520"/>
-            <a:ext cx="2742120" cy="363960"/>
+            <a:ext cx="2741400" cy="363240"/>
           </a:xfrm>
           <a:prstGeom prst="rect">
             <a:avLst/>
@@ -2713,7 +2269,7 @@
       </p:sp>
       <p:sp>
         <p:nvSpPr>
-          <p:cNvPr id="18" name="PlaceHolder 3"/>
+          <p:cNvPr id="15" name="PlaceHolder 4"/>
           <p:cNvSpPr>
             <a:spLocks noGrp="1"/>
           </p:cNvSpPr>
@@ -2724,7 +2280,7 @@
         <p:spPr>
           <a:xfrm>
             <a:off x="4038480" y="6356520"/>
-            <a:ext cx="4113720" cy="363960"/>
+            <a:ext cx="4113000" cy="363240"/>
           </a:xfrm>
           <a:prstGeom prst="rect">
             <a:avLst/>
@@ -2791,7 +2347,7 @@
       </p:sp>
       <p:sp>
         <p:nvSpPr>
-          <p:cNvPr id="19" name="PlaceHolder 4"/>
+          <p:cNvPr id="16" name="PlaceHolder 5"/>
           <p:cNvSpPr>
             <a:spLocks noGrp="1"/>
           </p:cNvSpPr>
@@ -2802,7 +2358,7 @@
         <p:spPr>
           <a:xfrm>
             <a:off x="8610480" y="6356520"/>
-            <a:ext cx="2742120" cy="363960"/>
+            <a:ext cx="2741400" cy="363240"/>
           </a:xfrm>
           <a:prstGeom prst="rect">
             <a:avLst/>
@@ -2847,7 +2403,7 @@
                 <a:tab algn="l" pos="0"/>
               </a:tabLst>
             </a:pPr>
-            <a:fld id="{8B937D54-F02B-49AF-B1EA-5ECD8F0C4CFF}" type="slidenum">
+            <a:fld id="{3D6C1C46-6D6C-4EB5-BAA3-08D48F859E64}" type="slidenum">
               <a:rPr lang="pt-BR" sz="1200" b="0" u="none" strike="noStrike">
                 <a:solidFill>
                   <a:schemeClr val="dk1">
@@ -2877,14 +2433,14 @@
 </file>
 
 <file path=ppt/slideLayouts/slideLayout4.xml><?xml version="1.0" encoding="utf-8"?>
-<p:sldLayout xmlns:a="http://schemas.openxmlformats.org/drawingml/2006/main" xmlns:p="http://schemas.openxmlformats.org/presentationml/2006/main" xmlns:r="http://schemas.openxmlformats.org/officeDocument/2006/relationships" xmlns:p14="http://schemas.microsoft.com/office/powerpoint/2010/main" xmlns:p15="http://schemas.microsoft.com/office/powerpoint/2012/main" xmlns:mc="http://schemas.openxmlformats.org/markup-compatibility/2006" type="blank" preserve="1">
-  <p:cSld name="Em Branco">
+<p:sldLayout xmlns:a="http://schemas.openxmlformats.org/drawingml/2006/main" xmlns:p="http://schemas.openxmlformats.org/presentationml/2006/main" xmlns:r="http://schemas.openxmlformats.org/officeDocument/2006/relationships" xmlns:p14="http://schemas.microsoft.com/office/powerpoint/2010/main" xmlns:p15="http://schemas.microsoft.com/office/powerpoint/2012/main" xmlns:mc="http://schemas.openxmlformats.org/markup-compatibility/2006" type="vertTitleAndTx" preserve="1">
+  <p:cSld name="Texto e Título Vertical">
     <p:bg>
       <p:bgPr>
         <a:blipFill rotWithShape="0">
           <a:blip r:embed="rId2"/>
           <a:stretch>
-            <a:fillRect l="-996" r="-996"/>
+            <a:fillRect l="-993" r="-993"/>
           </a:stretch>
         </a:blipFill>
       </p:bgPr>
@@ -2905,7 +2461,265 @@
       </p:grpSpPr>
       <p:sp>
         <p:nvSpPr>
-          <p:cNvPr id="20" name="PlaceHolder 1"/>
+          <p:cNvPr id="17" name="PlaceHolder 1"/>
+          <p:cNvSpPr>
+            <a:spLocks noGrp="1"/>
+          </p:cNvSpPr>
+          <p:nvPr>
+            <p:ph type="title"/>
+          </p:nvPr>
+        </p:nvSpPr>
+        <p:spPr>
+          <a:xfrm>
+            <a:off x="8724960" y="365040"/>
+            <a:ext cx="2627280" cy="5810040"/>
+          </a:xfrm>
+          <a:prstGeom prst="rect">
+            <a:avLst/>
+          </a:prstGeom>
+          <a:noFill/>
+          <a:ln w="0">
+            <a:noFill/>
+          </a:ln>
+        </p:spPr>
+        <p:txBody>
+          <a:bodyPr lIns="91440" rIns="91440" tIns="45720" bIns="45720" anchor="ctr" vert="eaVert">
+            <a:noAutofit/>
+          </a:bodyPr>
+          <a:p>
+            <a:pPr indent="0" defTabSz="914400">
+              <a:lnSpc>
+                <a:spcPct val="90000"/>
+              </a:lnSpc>
+              <a:buNone/>
+              <a:tabLst>
+                <a:tab algn="l" pos="0"/>
+              </a:tabLst>
+            </a:pPr>
+            <a:r>
+              <a:rPr lang="pt-BR" sz="4400" b="0" u="none" strike="noStrike">
+                <a:solidFill>
+                  <a:schemeClr val="dk1"/>
+                </a:solidFill>
+                <a:effectLst/>
+                <a:uFillTx/>
+                <a:latin typeface="Calibri Light"/>
+              </a:rPr>
+              <a:t>Clique para editar o título Mestre</a:t>
+            </a:r>
+            <a:endParaRPr lang="pt-BR" sz="4400" b="0" u="none" strike="noStrike">
+              <a:solidFill>
+                <a:srgbClr val="000000"/>
+              </a:solidFill>
+              <a:effectLst/>
+              <a:uFillTx/>
+              <a:latin typeface="Arial"/>
+            </a:endParaRPr>
+          </a:p>
+        </p:txBody>
+      </p:sp>
+      <p:sp>
+        <p:nvSpPr>
+          <p:cNvPr id="18" name="PlaceHolder 2"/>
+          <p:cNvSpPr>
+            <a:spLocks noGrp="1"/>
+          </p:cNvSpPr>
+          <p:nvPr>
+            <p:ph type="body"/>
+          </p:nvPr>
+        </p:nvSpPr>
+        <p:spPr>
+          <a:xfrm>
+            <a:off x="838080" y="365040"/>
+            <a:ext cx="7732440" cy="5810040"/>
+          </a:xfrm>
+          <a:prstGeom prst="rect">
+            <a:avLst/>
+          </a:prstGeom>
+          <a:noFill/>
+          <a:ln w="0">
+            <a:noFill/>
+          </a:ln>
+        </p:spPr>
+        <p:txBody>
+          <a:bodyPr lIns="91440" rIns="91440" tIns="45720" bIns="45720" anchor="t" vert="eaVert">
+            <a:noAutofit/>
+          </a:bodyPr>
+          <a:p>
+            <a:pPr marL="228600" indent="-228600" defTabSz="914400">
+              <a:lnSpc>
+                <a:spcPct val="90000"/>
+              </a:lnSpc>
+              <a:spcBef>
+                <a:spcPts val="1001"/>
+              </a:spcBef>
+              <a:buClr>
+                <a:srgbClr val="000000"/>
+              </a:buClr>
+              <a:buFont typeface="Arial"/>
+              <a:buChar char="•"/>
+            </a:pPr>
+            <a:r>
+              <a:rPr lang="pt-BR" sz="2800" b="0" u="none" strike="noStrike">
+                <a:solidFill>
+                  <a:schemeClr val="dk1"/>
+                </a:solidFill>
+                <a:effectLst/>
+                <a:uFillTx/>
+                <a:latin typeface="Calibri"/>
+              </a:rPr>
+              <a:t>Clique para editar os estilos de texto Mestres</a:t>
+            </a:r>
+            <a:endParaRPr lang="pt-BR" sz="2800" b="0" u="none" strike="noStrike">
+              <a:solidFill>
+                <a:srgbClr val="000000"/>
+              </a:solidFill>
+              <a:effectLst/>
+              <a:uFillTx/>
+              <a:latin typeface="Arial"/>
+            </a:endParaRPr>
+          </a:p>
+          <a:p>
+            <a:pPr marL="685800" lvl="1" indent="-228600" defTabSz="914400">
+              <a:lnSpc>
+                <a:spcPct val="90000"/>
+              </a:lnSpc>
+              <a:spcBef>
+                <a:spcPts val="499"/>
+              </a:spcBef>
+              <a:buClr>
+                <a:srgbClr val="000000"/>
+              </a:buClr>
+              <a:buFont typeface="Arial"/>
+              <a:buChar char="•"/>
+            </a:pPr>
+            <a:r>
+              <a:rPr lang="pt-BR" sz="2400" b="0" u="none" strike="noStrike">
+                <a:solidFill>
+                  <a:schemeClr val="dk1"/>
+                </a:solidFill>
+                <a:effectLst/>
+                <a:uFillTx/>
+                <a:latin typeface="Calibri"/>
+              </a:rPr>
+              <a:t>Segundo nível</a:t>
+            </a:r>
+            <a:endParaRPr lang="pt-BR" sz="2400" b="0" u="none" strike="noStrike">
+              <a:solidFill>
+                <a:srgbClr val="000000"/>
+              </a:solidFill>
+              <a:effectLst/>
+              <a:uFillTx/>
+              <a:latin typeface="Arial"/>
+            </a:endParaRPr>
+          </a:p>
+          <a:p>
+            <a:pPr marL="1143000" lvl="2" indent="-228600" defTabSz="914400">
+              <a:lnSpc>
+                <a:spcPct val="90000"/>
+              </a:lnSpc>
+              <a:spcBef>
+                <a:spcPts val="499"/>
+              </a:spcBef>
+              <a:buClr>
+                <a:srgbClr val="000000"/>
+              </a:buClr>
+              <a:buFont typeface="Arial"/>
+              <a:buChar char="•"/>
+            </a:pPr>
+            <a:r>
+              <a:rPr lang="pt-BR" sz="2000" b="0" u="none" strike="noStrike">
+                <a:solidFill>
+                  <a:schemeClr val="dk1"/>
+                </a:solidFill>
+                <a:effectLst/>
+                <a:uFillTx/>
+                <a:latin typeface="Calibri"/>
+              </a:rPr>
+              <a:t>Terceiro nível</a:t>
+            </a:r>
+            <a:endParaRPr lang="pt-BR" sz="2000" b="0" u="none" strike="noStrike">
+              <a:solidFill>
+                <a:srgbClr val="000000"/>
+              </a:solidFill>
+              <a:effectLst/>
+              <a:uFillTx/>
+              <a:latin typeface="Arial"/>
+            </a:endParaRPr>
+          </a:p>
+          <a:p>
+            <a:pPr marL="1600200" lvl="3" indent="-228600" defTabSz="914400">
+              <a:lnSpc>
+                <a:spcPct val="90000"/>
+              </a:lnSpc>
+              <a:spcBef>
+                <a:spcPts val="499"/>
+              </a:spcBef>
+              <a:buClr>
+                <a:srgbClr val="000000"/>
+              </a:buClr>
+              <a:buFont typeface="Arial"/>
+              <a:buChar char="•"/>
+            </a:pPr>
+            <a:r>
+              <a:rPr lang="pt-BR" sz="1800" b="0" u="none" strike="noStrike">
+                <a:solidFill>
+                  <a:schemeClr val="dk1"/>
+                </a:solidFill>
+                <a:effectLst/>
+                <a:uFillTx/>
+                <a:latin typeface="Calibri"/>
+              </a:rPr>
+              <a:t>Quarto nível</a:t>
+            </a:r>
+            <a:endParaRPr lang="pt-BR" sz="1800" b="0" u="none" strike="noStrike">
+              <a:solidFill>
+                <a:srgbClr val="000000"/>
+              </a:solidFill>
+              <a:effectLst/>
+              <a:uFillTx/>
+              <a:latin typeface="Arial"/>
+            </a:endParaRPr>
+          </a:p>
+          <a:p>
+            <a:pPr marL="2057400" lvl="4" indent="-228600" defTabSz="914400">
+              <a:lnSpc>
+                <a:spcPct val="90000"/>
+              </a:lnSpc>
+              <a:spcBef>
+                <a:spcPts val="499"/>
+              </a:spcBef>
+              <a:buClr>
+                <a:srgbClr val="000000"/>
+              </a:buClr>
+              <a:buFont typeface="Arial"/>
+              <a:buChar char="•"/>
+            </a:pPr>
+            <a:r>
+              <a:rPr lang="pt-BR" sz="1800" b="0" u="none" strike="noStrike">
+                <a:solidFill>
+                  <a:schemeClr val="dk1"/>
+                </a:solidFill>
+                <a:effectLst/>
+                <a:uFillTx/>
+                <a:latin typeface="Calibri"/>
+              </a:rPr>
+              <a:t>Quinto nível</a:t>
+            </a:r>
+            <a:endParaRPr lang="pt-BR" sz="1800" b="0" u="none" strike="noStrike">
+              <a:solidFill>
+                <a:srgbClr val="000000"/>
+              </a:solidFill>
+              <a:effectLst/>
+              <a:uFillTx/>
+              <a:latin typeface="Arial"/>
+            </a:endParaRPr>
+          </a:p>
+        </p:txBody>
+      </p:sp>
+      <p:sp>
+        <p:nvSpPr>
+          <p:cNvPr id="19" name="PlaceHolder 3"/>
           <p:cNvSpPr>
             <a:spLocks noGrp="1"/>
           </p:cNvSpPr>
@@ -2916,7 +2730,7 @@
         <p:spPr>
           <a:xfrm>
             <a:off x="838080" y="6356520"/>
-            <a:ext cx="2742120" cy="363960"/>
+            <a:ext cx="2741400" cy="363240"/>
           </a:xfrm>
           <a:prstGeom prst="rect">
             <a:avLst/>
@@ -2987,7 +2801,7 @@
       </p:sp>
       <p:sp>
         <p:nvSpPr>
-          <p:cNvPr id="21" name="PlaceHolder 2"/>
+          <p:cNvPr id="20" name="PlaceHolder 4"/>
           <p:cNvSpPr>
             <a:spLocks noGrp="1"/>
           </p:cNvSpPr>
@@ -2998,7 +2812,7 @@
         <p:spPr>
           <a:xfrm>
             <a:off x="4038480" y="6356520"/>
-            <a:ext cx="4113720" cy="363960"/>
+            <a:ext cx="4113000" cy="363240"/>
           </a:xfrm>
           <a:prstGeom prst="rect">
             <a:avLst/>
@@ -3065,7 +2879,7 @@
       </p:sp>
       <p:sp>
         <p:nvSpPr>
-          <p:cNvPr id="22" name="PlaceHolder 3"/>
+          <p:cNvPr id="21" name="PlaceHolder 5"/>
           <p:cNvSpPr>
             <a:spLocks noGrp="1"/>
           </p:cNvSpPr>
@@ -3076,7 +2890,7 @@
         <p:spPr>
           <a:xfrm>
             <a:off x="8610480" y="6356520"/>
-            <a:ext cx="2742120" cy="363960"/>
+            <a:ext cx="2741400" cy="363240"/>
           </a:xfrm>
           <a:prstGeom prst="rect">
             <a:avLst/>
@@ -3121,7 +2935,7 @@
                 <a:tab algn="l" pos="0"/>
               </a:tabLst>
             </a:pPr>
-            <a:fld id="{37BE2C1B-0D74-492F-B4DA-57AA9DAB85D9}" type="slidenum">
+            <a:fld id="{845A41CF-1571-4F77-86E9-3EFEE305924B}" type="slidenum">
               <a:rPr lang="pt-BR" sz="1200" b="0" u="none" strike="noStrike">
                 <a:solidFill>
                   <a:schemeClr val="dk1">
@@ -3151,14 +2965,14 @@
 </file>
 
 <file path=ppt/slideLayouts/slideLayout5.xml><?xml version="1.0" encoding="utf-8"?>
-<p:sldLayout xmlns:a="http://schemas.openxmlformats.org/drawingml/2006/main" xmlns:p="http://schemas.openxmlformats.org/presentationml/2006/main" xmlns:r="http://schemas.openxmlformats.org/officeDocument/2006/relationships" xmlns:p14="http://schemas.microsoft.com/office/powerpoint/2010/main" xmlns:p15="http://schemas.microsoft.com/office/powerpoint/2012/main" xmlns:mc="http://schemas.openxmlformats.org/markup-compatibility/2006" type="blank" preserve="1">
-  <p:cSld name="Conteúdo com Legenda">
+<p:sldLayout xmlns:a="http://schemas.openxmlformats.org/drawingml/2006/main" xmlns:p="http://schemas.openxmlformats.org/presentationml/2006/main" xmlns:r="http://schemas.openxmlformats.org/officeDocument/2006/relationships" xmlns:p14="http://schemas.microsoft.com/office/powerpoint/2010/main" xmlns:p15="http://schemas.microsoft.com/office/powerpoint/2012/main" xmlns:mc="http://schemas.openxmlformats.org/markup-compatibility/2006" type="obj" preserve="1">
+  <p:cSld name="Título e Conteúdo">
     <p:bg>
       <p:bgPr>
         <a:blipFill rotWithShape="0">
           <a:blip r:embed="rId2"/>
           <a:stretch>
-            <a:fillRect l="-996" r="-996"/>
+            <a:fillRect l="-993" r="-993"/>
           </a:stretch>
         </a:blipFill>
       </p:bgPr>
@@ -3179,7 +2993,7 @@
       </p:grpSpPr>
       <p:sp>
         <p:nvSpPr>
-          <p:cNvPr id="23" name="PlaceHolder 1"/>
+          <p:cNvPr id="22" name="PlaceHolder 1"/>
           <p:cNvSpPr>
             <a:spLocks noGrp="1"/>
           </p:cNvSpPr>
@@ -3189,8 +3003,8 @@
         </p:nvSpPr>
         <p:spPr>
           <a:xfrm>
-            <a:off x="839880" y="457200"/>
-            <a:ext cx="3931200" cy="1599120"/>
+            <a:off x="838080" y="365040"/>
+            <a:ext cx="10513800" cy="1323720"/>
           </a:xfrm>
           <a:prstGeom prst="rect">
             <a:avLst/>
@@ -3201,7 +3015,7 @@
           </a:ln>
         </p:spPr>
         <p:txBody>
-          <a:bodyPr lIns="91440" rIns="91440" tIns="45720" bIns="45720" anchor="b">
+          <a:bodyPr lIns="91440" rIns="91440" tIns="45720" bIns="45720" anchor="ctr">
             <a:noAutofit/>
           </a:bodyPr>
           <a:p>
@@ -3215,7 +3029,7 @@
               </a:tabLst>
             </a:pPr>
             <a:r>
-              <a:rPr lang="pt-BR" sz="3200" b="0" u="none" strike="noStrike">
+              <a:rPr lang="pt-BR" sz="4400" b="0" u="none" strike="noStrike">
                 <a:solidFill>
                   <a:schemeClr val="dk1"/>
                 </a:solidFill>
@@ -3225,7 +3039,7 @@
               </a:rPr>
               <a:t>Clique para editar o título Mestre</a:t>
             </a:r>
-            <a:endParaRPr lang="pt-BR" sz="3200" b="0" u="none" strike="noStrike">
+            <a:endParaRPr lang="pt-BR" sz="4400" b="0" u="none" strike="noStrike">
               <a:solidFill>
                 <a:srgbClr val="000000"/>
               </a:solidFill>
@@ -3238,7 +3052,7 @@
       </p:sp>
       <p:sp>
         <p:nvSpPr>
-          <p:cNvPr id="24" name="PlaceHolder 2"/>
+          <p:cNvPr id="23" name="PlaceHolder 2"/>
           <p:cNvSpPr>
             <a:spLocks noGrp="1"/>
           </p:cNvSpPr>
@@ -3248,8 +3062,8 @@
         </p:nvSpPr>
         <p:spPr>
           <a:xfrm>
-            <a:off x="5183280" y="987480"/>
-            <a:ext cx="6171120" cy="4872600"/>
+            <a:off x="838080" y="1825560"/>
+            <a:ext cx="10513800" cy="4349520"/>
           </a:xfrm>
           <a:prstGeom prst="rect">
             <a:avLst/>
@@ -3278,7 +3092,7 @@
               <a:buChar char="•"/>
             </a:pPr>
             <a:r>
-              <a:rPr lang="pt-BR" sz="3200" b="0" u="none" strike="noStrike">
+              <a:rPr lang="pt-BR" sz="2800" b="0" u="none" strike="noStrike">
                 <a:solidFill>
                   <a:schemeClr val="dk1"/>
                 </a:solidFill>
@@ -3288,7 +3102,7 @@
               </a:rPr>
               <a:t>Clique para editar os estilos de texto Mestres</a:t>
             </a:r>
-            <a:endParaRPr lang="pt-BR" sz="3200" b="0" u="none" strike="noStrike">
+            <a:endParaRPr lang="pt-BR" sz="2800" b="0" u="none" strike="noStrike">
               <a:solidFill>
                 <a:srgbClr val="000000"/>
               </a:solidFill>
@@ -3312,7 +3126,7 @@
               <a:buChar char="•"/>
             </a:pPr>
             <a:r>
-              <a:rPr lang="pt-BR" sz="2800" b="0" u="none" strike="noStrike">
+              <a:rPr lang="pt-BR" sz="2400" b="0" u="none" strike="noStrike">
                 <a:solidFill>
                   <a:schemeClr val="dk1"/>
                 </a:solidFill>
@@ -3322,7 +3136,7 @@
               </a:rPr>
               <a:t>Segundo nível</a:t>
             </a:r>
-            <a:endParaRPr lang="pt-BR" sz="2800" b="0" u="none" strike="noStrike">
+            <a:endParaRPr lang="pt-BR" sz="2400" b="0" u="none" strike="noStrike">
               <a:solidFill>
                 <a:srgbClr val="000000"/>
               </a:solidFill>
@@ -3346,7 +3160,7 @@
               <a:buChar char="•"/>
             </a:pPr>
             <a:r>
-              <a:rPr lang="pt-BR" sz="2400" b="0" u="none" strike="noStrike">
+              <a:rPr lang="pt-BR" sz="2000" b="0" u="none" strike="noStrike">
                 <a:solidFill>
                   <a:schemeClr val="dk1"/>
                 </a:solidFill>
@@ -3356,7 +3170,7 @@
               </a:rPr>
               <a:t>Terceiro nível</a:t>
             </a:r>
-            <a:endParaRPr lang="pt-BR" sz="2400" b="0" u="none" strike="noStrike">
+            <a:endParaRPr lang="pt-BR" sz="2000" b="0" u="none" strike="noStrike">
               <a:solidFill>
                 <a:srgbClr val="000000"/>
               </a:solidFill>
@@ -3380,7 +3194,7 @@
               <a:buChar char="•"/>
             </a:pPr>
             <a:r>
-              <a:rPr lang="pt-BR" sz="2000" b="0" u="none" strike="noStrike">
+              <a:rPr lang="pt-BR" sz="1800" b="0" u="none" strike="noStrike">
                 <a:solidFill>
                   <a:schemeClr val="dk1"/>
                 </a:solidFill>
@@ -3390,7 +3204,7 @@
               </a:rPr>
               <a:t>Quarto nível</a:t>
             </a:r>
-            <a:endParaRPr lang="pt-BR" sz="2000" b="0" u="none" strike="noStrike">
+            <a:endParaRPr lang="pt-BR" sz="1800" b="0" u="none" strike="noStrike">
               <a:solidFill>
                 <a:srgbClr val="000000"/>
               </a:solidFill>
@@ -3414,7 +3228,7 @@
               <a:buChar char="•"/>
             </a:pPr>
             <a:r>
-              <a:rPr lang="pt-BR" sz="2000" b="0" u="none" strike="noStrike">
+              <a:rPr lang="pt-BR" sz="1800" b="0" u="none" strike="noStrike">
                 <a:solidFill>
                   <a:schemeClr val="dk1"/>
                 </a:solidFill>
@@ -3424,7 +3238,7 @@
               </a:rPr>
               <a:t>Quinto nível</a:t>
             </a:r>
-            <a:endParaRPr lang="pt-BR" sz="2000" b="0" u="none" strike="noStrike">
+            <a:endParaRPr lang="pt-BR" sz="1800" b="0" u="none" strike="noStrike">
               <a:solidFill>
                 <a:srgbClr val="000000"/>
               </a:solidFill>
@@ -3437,69 +3251,7 @@
       </p:sp>
       <p:sp>
         <p:nvSpPr>
-          <p:cNvPr id="25" name="PlaceHolder 3"/>
-          <p:cNvSpPr>
-            <a:spLocks noGrp="1"/>
-          </p:cNvSpPr>
-          <p:nvPr>
-            <p:ph type="body"/>
-          </p:nvPr>
-        </p:nvSpPr>
-        <p:spPr>
-          <a:xfrm>
-            <a:off x="839880" y="2057400"/>
-            <a:ext cx="3931200" cy="3810600"/>
-          </a:xfrm>
-          <a:prstGeom prst="rect">
-            <a:avLst/>
-          </a:prstGeom>
-          <a:noFill/>
-          <a:ln w="0">
-            <a:noFill/>
-          </a:ln>
-        </p:spPr>
-        <p:txBody>
-          <a:bodyPr lIns="91440" rIns="91440" tIns="45720" bIns="45720" anchor="t">
-            <a:noAutofit/>
-          </a:bodyPr>
-          <a:p>
-            <a:pPr indent="0" defTabSz="914400">
-              <a:lnSpc>
-                <a:spcPct val="90000"/>
-              </a:lnSpc>
-              <a:spcBef>
-                <a:spcPts val="1001"/>
-              </a:spcBef>
-              <a:buNone/>
-              <a:tabLst>
-                <a:tab algn="l" pos="0"/>
-              </a:tabLst>
-            </a:pPr>
-            <a:r>
-              <a:rPr lang="pt-BR" sz="1600" b="0" u="none" strike="noStrike">
-                <a:solidFill>
-                  <a:schemeClr val="dk1"/>
-                </a:solidFill>
-                <a:effectLst/>
-                <a:uFillTx/>
-                <a:latin typeface="Calibri"/>
-              </a:rPr>
-              <a:t>Clique para editar os estilos de texto Mestres</a:t>
-            </a:r>
-            <a:endParaRPr lang="pt-BR" sz="1600" b="0" u="none" strike="noStrike">
-              <a:solidFill>
-                <a:srgbClr val="000000"/>
-              </a:solidFill>
-              <a:effectLst/>
-              <a:uFillTx/>
-              <a:latin typeface="Arial"/>
-            </a:endParaRPr>
-          </a:p>
-        </p:txBody>
-      </p:sp>
-      <p:sp>
-        <p:nvSpPr>
-          <p:cNvPr id="26" name="PlaceHolder 4"/>
+          <p:cNvPr id="24" name="PlaceHolder 3"/>
           <p:cNvSpPr>
             <a:spLocks noGrp="1"/>
           </p:cNvSpPr>
@@ -3510,7 +3262,7 @@
         <p:spPr>
           <a:xfrm>
             <a:off x="838080" y="6356520"/>
-            <a:ext cx="2742120" cy="363960"/>
+            <a:ext cx="2741400" cy="363240"/>
           </a:xfrm>
           <a:prstGeom prst="rect">
             <a:avLst/>
@@ -3581,7 +3333,7 @@
       </p:sp>
       <p:sp>
         <p:nvSpPr>
-          <p:cNvPr id="27" name="PlaceHolder 5"/>
+          <p:cNvPr id="25" name="PlaceHolder 4"/>
           <p:cNvSpPr>
             <a:spLocks noGrp="1"/>
           </p:cNvSpPr>
@@ -3592,7 +3344,7 @@
         <p:spPr>
           <a:xfrm>
             <a:off x="4038480" y="6356520"/>
-            <a:ext cx="4113720" cy="363960"/>
+            <a:ext cx="4113000" cy="363240"/>
           </a:xfrm>
           <a:prstGeom prst="rect">
             <a:avLst/>
@@ -3659,7 +3411,7 @@
       </p:sp>
       <p:sp>
         <p:nvSpPr>
-          <p:cNvPr id="28" name="PlaceHolder 6"/>
+          <p:cNvPr id="26" name="PlaceHolder 5"/>
           <p:cNvSpPr>
             <a:spLocks noGrp="1"/>
           </p:cNvSpPr>
@@ -3670,7 +3422,7 @@
         <p:spPr>
           <a:xfrm>
             <a:off x="8610480" y="6356520"/>
-            <a:ext cx="2742120" cy="363960"/>
+            <a:ext cx="2741400" cy="363240"/>
           </a:xfrm>
           <a:prstGeom prst="rect">
             <a:avLst/>
@@ -3715,7 +3467,7 @@
                 <a:tab algn="l" pos="0"/>
               </a:tabLst>
             </a:pPr>
-            <a:fld id="{FA0181B2-F0B2-4CF5-8FEA-788D9F0C0541}" type="slidenum">
+            <a:fld id="{EEC5967B-1327-4E02-BE89-F91156D6C7F8}" type="slidenum">
               <a:rPr lang="pt-BR" sz="1200" b="0" u="none" strike="noStrike">
                 <a:solidFill>
                   <a:schemeClr val="dk1">
@@ -3746,13 +3498,13 @@
 
 <file path=ppt/slideLayouts/slideLayout6.xml><?xml version="1.0" encoding="utf-8"?>
 <p:sldLayout xmlns:a="http://schemas.openxmlformats.org/drawingml/2006/main" xmlns:p="http://schemas.openxmlformats.org/presentationml/2006/main" xmlns:r="http://schemas.openxmlformats.org/officeDocument/2006/relationships" xmlns:p14="http://schemas.microsoft.com/office/powerpoint/2010/main" xmlns:p15="http://schemas.microsoft.com/office/powerpoint/2012/main" xmlns:mc="http://schemas.openxmlformats.org/markup-compatibility/2006" type="blank" preserve="1">
-  <p:cSld name="Imagem com Legenda">
+  <p:cSld name="Cabeçalho da Seção">
     <p:bg>
       <p:bgPr>
         <a:blipFill rotWithShape="0">
           <a:blip r:embed="rId2"/>
           <a:stretch>
-            <a:fillRect l="-996" r="-996"/>
+            <a:fillRect l="-993" r="-993"/>
           </a:stretch>
         </a:blipFill>
       </p:bgPr>
@@ -3773,7 +3525,7 @@
       </p:grpSpPr>
       <p:sp>
         <p:nvSpPr>
-          <p:cNvPr id="29" name="PlaceHolder 1"/>
+          <p:cNvPr id="27" name="PlaceHolder 1"/>
           <p:cNvSpPr>
             <a:spLocks noGrp="1"/>
           </p:cNvSpPr>
@@ -3783,8 +3535,8 @@
         </p:nvSpPr>
         <p:spPr>
           <a:xfrm>
-            <a:off x="839880" y="457200"/>
-            <a:ext cx="3931200" cy="1599120"/>
+            <a:off x="831960" y="1709640"/>
+            <a:ext cx="10513800" cy="2850840"/>
           </a:xfrm>
           <a:prstGeom prst="rect">
             <a:avLst/>
@@ -3809,7 +3561,7 @@
               </a:tabLst>
             </a:pPr>
             <a:r>
-              <a:rPr lang="pt-BR" sz="3200" b="0" u="none" strike="noStrike">
+              <a:rPr lang="pt-BR" sz="6000" b="0" u="none" strike="noStrike">
                 <a:solidFill>
                   <a:schemeClr val="dk1"/>
                 </a:solidFill>
@@ -3819,7 +3571,7 @@
               </a:rPr>
               <a:t>Clique para editar o título Mestre</a:t>
             </a:r>
-            <a:endParaRPr lang="pt-BR" sz="3200" b="0" u="none" strike="noStrike">
+            <a:endParaRPr lang="pt-BR" sz="6000" b="0" u="none" strike="noStrike">
               <a:solidFill>
                 <a:srgbClr val="000000"/>
               </a:solidFill>
@@ -3832,7 +3584,7 @@
       </p:sp>
       <p:sp>
         <p:nvSpPr>
-          <p:cNvPr id="30" name="PlaceHolder 2"/>
+          <p:cNvPr id="28" name="PlaceHolder 2"/>
           <p:cNvSpPr>
             <a:spLocks noGrp="1"/>
           </p:cNvSpPr>
@@ -3842,282 +3594,8 @@
         </p:nvSpPr>
         <p:spPr>
           <a:xfrm>
-            <a:off x="5183280" y="987480"/>
-            <a:ext cx="6171120" cy="4872600"/>
-          </a:xfrm>
-          <a:prstGeom prst="rect">
-            <a:avLst/>
-          </a:prstGeom>
-          <a:noFill/>
-          <a:ln w="0">
-            <a:noFill/>
-          </a:ln>
-        </p:spPr>
-        <p:txBody>
-          <a:bodyPr lIns="90000" rIns="90000" tIns="45000" bIns="45000" anchor="t">
-            <a:noAutofit/>
-          </a:bodyPr>
-          <a:p>
-            <a:pPr marL="432000" indent="-324000">
-              <a:lnSpc>
-                <a:spcPct val="90000"/>
-              </a:lnSpc>
-              <a:spcBef>
-                <a:spcPts val="1417"/>
-              </a:spcBef>
-              <a:buClr>
-                <a:srgbClr val="000000"/>
-              </a:buClr>
-              <a:buSzPct val="45000"/>
-              <a:buFont typeface="Wingdings" charset="2"/>
-              <a:buChar char=""/>
-            </a:pPr>
-            <a:r>
-              <a:rPr lang="pt-BR" sz="3200" b="0" u="none" strike="noStrike">
-                <a:solidFill>
-                  <a:schemeClr val="dk1"/>
-                </a:solidFill>
-                <a:effectLst/>
-                <a:uFillTx/>
-                <a:latin typeface="Calibri"/>
-              </a:rPr>
-              <a:t>Clique para editar o formato de texto dos tópicos</a:t>
-            </a:r>
-            <a:endParaRPr lang="pt-BR" sz="3200" b="0" u="none" strike="noStrike">
-              <a:solidFill>
-                <a:srgbClr val="000000"/>
-              </a:solidFill>
-              <a:effectLst/>
-              <a:uFillTx/>
-              <a:latin typeface="Arial"/>
-            </a:endParaRPr>
-          </a:p>
-          <a:p>
-            <a:pPr marL="864000" lvl="1" indent="-324000">
-              <a:lnSpc>
-                <a:spcPct val="90000"/>
-              </a:lnSpc>
-              <a:spcBef>
-                <a:spcPts val="1134"/>
-              </a:spcBef>
-              <a:buClr>
-                <a:srgbClr val="000000"/>
-              </a:buClr>
-              <a:buSzPct val="75000"/>
-              <a:buFont typeface="Symbol" charset="2"/>
-              <a:buChar char=""/>
-            </a:pPr>
-            <a:r>
-              <a:rPr lang="pt-BR" sz="3200" b="0" u="none" strike="noStrike">
-                <a:solidFill>
-                  <a:schemeClr val="dk1"/>
-                </a:solidFill>
-                <a:effectLst/>
-                <a:uFillTx/>
-                <a:latin typeface="Calibri"/>
-              </a:rPr>
-              <a:t>2.º nível de tópicos</a:t>
-            </a:r>
-            <a:endParaRPr lang="pt-BR" sz="3200" b="0" u="none" strike="noStrike">
-              <a:solidFill>
-                <a:srgbClr val="000000"/>
-              </a:solidFill>
-              <a:effectLst/>
-              <a:uFillTx/>
-              <a:latin typeface="Arial"/>
-            </a:endParaRPr>
-          </a:p>
-          <a:p>
-            <a:pPr marL="1296000" lvl="2" indent="-288000">
-              <a:lnSpc>
-                <a:spcPct val="90000"/>
-              </a:lnSpc>
-              <a:spcBef>
-                <a:spcPts val="850"/>
-              </a:spcBef>
-              <a:buClr>
-                <a:srgbClr val="000000"/>
-              </a:buClr>
-              <a:buSzPct val="45000"/>
-              <a:buFont typeface="Wingdings" charset="2"/>
-              <a:buChar char=""/>
-            </a:pPr>
-            <a:r>
-              <a:rPr lang="pt-BR" sz="3200" b="0" u="none" strike="noStrike">
-                <a:solidFill>
-                  <a:schemeClr val="dk1"/>
-                </a:solidFill>
-                <a:effectLst/>
-                <a:uFillTx/>
-                <a:latin typeface="Calibri"/>
-              </a:rPr>
-              <a:t>3.º nível de tópicos</a:t>
-            </a:r>
-            <a:endParaRPr lang="pt-BR" sz="3200" b="0" u="none" strike="noStrike">
-              <a:solidFill>
-                <a:srgbClr val="000000"/>
-              </a:solidFill>
-              <a:effectLst/>
-              <a:uFillTx/>
-              <a:latin typeface="Arial"/>
-            </a:endParaRPr>
-          </a:p>
-          <a:p>
-            <a:pPr marL="1728000" lvl="3" indent="-216000">
-              <a:lnSpc>
-                <a:spcPct val="90000"/>
-              </a:lnSpc>
-              <a:spcBef>
-                <a:spcPts val="567"/>
-              </a:spcBef>
-              <a:buClr>
-                <a:srgbClr val="000000"/>
-              </a:buClr>
-              <a:buSzPct val="75000"/>
-              <a:buFont typeface="Symbol" charset="2"/>
-              <a:buChar char=""/>
-            </a:pPr>
-            <a:r>
-              <a:rPr lang="pt-BR" sz="3200" b="0" u="none" strike="noStrike">
-                <a:solidFill>
-                  <a:schemeClr val="dk1"/>
-                </a:solidFill>
-                <a:effectLst/>
-                <a:uFillTx/>
-                <a:latin typeface="Calibri"/>
-              </a:rPr>
-              <a:t>4.º nível de tópicos</a:t>
-            </a:r>
-            <a:endParaRPr lang="pt-BR" sz="3200" b="0" u="none" strike="noStrike">
-              <a:solidFill>
-                <a:srgbClr val="000000"/>
-              </a:solidFill>
-              <a:effectLst/>
-              <a:uFillTx/>
-              <a:latin typeface="Arial"/>
-            </a:endParaRPr>
-          </a:p>
-          <a:p>
-            <a:pPr marL="2160000" lvl="4" indent="-216000">
-              <a:lnSpc>
-                <a:spcPct val="90000"/>
-              </a:lnSpc>
-              <a:spcBef>
-                <a:spcPts val="283"/>
-              </a:spcBef>
-              <a:buClr>
-                <a:srgbClr val="000000"/>
-              </a:buClr>
-              <a:buSzPct val="45000"/>
-              <a:buFont typeface="Wingdings" charset="2"/>
-              <a:buChar char=""/>
-            </a:pPr>
-            <a:r>
-              <a:rPr lang="pt-BR" sz="3200" b="0" u="none" strike="noStrike">
-                <a:solidFill>
-                  <a:schemeClr val="dk1"/>
-                </a:solidFill>
-                <a:effectLst/>
-                <a:uFillTx/>
-                <a:latin typeface="Calibri"/>
-              </a:rPr>
-              <a:t>5.º nível de tópicos</a:t>
-            </a:r>
-            <a:endParaRPr lang="pt-BR" sz="3200" b="0" u="none" strike="noStrike">
-              <a:solidFill>
-                <a:srgbClr val="000000"/>
-              </a:solidFill>
-              <a:effectLst/>
-              <a:uFillTx/>
-              <a:latin typeface="Arial"/>
-            </a:endParaRPr>
-          </a:p>
-          <a:p>
-            <a:pPr marL="2592000" lvl="5" indent="-216000">
-              <a:lnSpc>
-                <a:spcPct val="90000"/>
-              </a:lnSpc>
-              <a:spcBef>
-                <a:spcPts val="283"/>
-              </a:spcBef>
-              <a:buClr>
-                <a:srgbClr val="000000"/>
-              </a:buClr>
-              <a:buSzPct val="45000"/>
-              <a:buFont typeface="Wingdings" charset="2"/>
-              <a:buChar char=""/>
-            </a:pPr>
-            <a:r>
-              <a:rPr lang="pt-BR" sz="3200" b="0" u="none" strike="noStrike">
-                <a:solidFill>
-                  <a:schemeClr val="dk1"/>
-                </a:solidFill>
-                <a:effectLst/>
-                <a:uFillTx/>
-                <a:latin typeface="Calibri"/>
-              </a:rPr>
-              <a:t>6.º nível de tópicos</a:t>
-            </a:r>
-            <a:endParaRPr lang="pt-BR" sz="3200" b="0" u="none" strike="noStrike">
-              <a:solidFill>
-                <a:srgbClr val="000000"/>
-              </a:solidFill>
-              <a:effectLst/>
-              <a:uFillTx/>
-              <a:latin typeface="Arial"/>
-            </a:endParaRPr>
-          </a:p>
-          <a:p>
-            <a:pPr marL="3024000" lvl="6" indent="-216000">
-              <a:lnSpc>
-                <a:spcPct val="90000"/>
-              </a:lnSpc>
-              <a:spcBef>
-                <a:spcPts val="283"/>
-              </a:spcBef>
-              <a:buClr>
-                <a:srgbClr val="000000"/>
-              </a:buClr>
-              <a:buSzPct val="45000"/>
-              <a:buFont typeface="Wingdings" charset="2"/>
-              <a:buChar char=""/>
-            </a:pPr>
-            <a:r>
-              <a:rPr lang="pt-BR" sz="3200" b="0" u="none" strike="noStrike">
-                <a:solidFill>
-                  <a:schemeClr val="dk1"/>
-                </a:solidFill>
-                <a:effectLst/>
-                <a:uFillTx/>
-                <a:latin typeface="Calibri"/>
-              </a:rPr>
-              <a:t>7.º nível de tópicos</a:t>
-            </a:r>
-            <a:endParaRPr lang="pt-BR" sz="3200" b="0" u="none" strike="noStrike">
-              <a:solidFill>
-                <a:srgbClr val="000000"/>
-              </a:solidFill>
-              <a:effectLst/>
-              <a:uFillTx/>
-              <a:latin typeface="Arial"/>
-            </a:endParaRPr>
-          </a:p>
-        </p:txBody>
-      </p:sp>
-      <p:sp>
-        <p:nvSpPr>
-          <p:cNvPr id="31" name="PlaceHolder 3"/>
-          <p:cNvSpPr>
-            <a:spLocks noGrp="1"/>
-          </p:cNvSpPr>
-          <p:nvPr>
-            <p:ph type="body"/>
-          </p:nvPr>
-        </p:nvSpPr>
-        <p:spPr>
-          <a:xfrm>
-            <a:off x="839880" y="2057400"/>
-            <a:ext cx="3931200" cy="3810600"/>
+            <a:off x="831960" y="4589640"/>
+            <a:ext cx="10513800" cy="1498320"/>
           </a:xfrm>
           <a:prstGeom prst="rect">
             <a:avLst/>
@@ -4145,9 +3623,11 @@
               </a:tabLst>
             </a:pPr>
             <a:r>
-              <a:rPr lang="pt-BR" sz="1600" b="0" u="none" strike="noStrike">
-                <a:solidFill>
-                  <a:schemeClr val="dk1"/>
+              <a:rPr lang="pt-BR" sz="2400" b="0" u="none" strike="noStrike">
+                <a:solidFill>
+                  <a:schemeClr val="dk1">
+                    <a:tint val="75000"/>
+                  </a:schemeClr>
                 </a:solidFill>
                 <a:effectLst/>
                 <a:uFillTx/>
@@ -4155,7 +3635,7 @@
               </a:rPr>
               <a:t>Clique para editar os estilos de texto Mestres</a:t>
             </a:r>
-            <a:endParaRPr lang="pt-BR" sz="1600" b="0" u="none" strike="noStrike">
+            <a:endParaRPr lang="pt-BR" sz="2400" b="0" u="none" strike="noStrike">
               <a:solidFill>
                 <a:srgbClr val="000000"/>
               </a:solidFill>
@@ -4168,7 +3648,7 @@
       </p:sp>
       <p:sp>
         <p:nvSpPr>
-          <p:cNvPr id="32" name="PlaceHolder 4"/>
+          <p:cNvPr id="29" name="PlaceHolder 3"/>
           <p:cNvSpPr>
             <a:spLocks noGrp="1"/>
           </p:cNvSpPr>
@@ -4179,7 +3659,7 @@
         <p:spPr>
           <a:xfrm>
             <a:off x="838080" y="6356520"/>
-            <a:ext cx="2742120" cy="363960"/>
+            <a:ext cx="2741400" cy="363240"/>
           </a:xfrm>
           <a:prstGeom prst="rect">
             <a:avLst/>
@@ -4250,7 +3730,7 @@
       </p:sp>
       <p:sp>
         <p:nvSpPr>
-          <p:cNvPr id="33" name="PlaceHolder 5"/>
+          <p:cNvPr id="30" name="PlaceHolder 4"/>
           <p:cNvSpPr>
             <a:spLocks noGrp="1"/>
           </p:cNvSpPr>
@@ -4261,7 +3741,7 @@
         <p:spPr>
           <a:xfrm>
             <a:off x="4038480" y="6356520"/>
-            <a:ext cx="4113720" cy="363960"/>
+            <a:ext cx="4113000" cy="363240"/>
           </a:xfrm>
           <a:prstGeom prst="rect">
             <a:avLst/>
@@ -4328,7 +3808,7 @@
       </p:sp>
       <p:sp>
         <p:nvSpPr>
-          <p:cNvPr id="34" name="PlaceHolder 6"/>
+          <p:cNvPr id="31" name="PlaceHolder 5"/>
           <p:cNvSpPr>
             <a:spLocks noGrp="1"/>
           </p:cNvSpPr>
@@ -4339,7 +3819,7 @@
         <p:spPr>
           <a:xfrm>
             <a:off x="8610480" y="6356520"/>
-            <a:ext cx="2742120" cy="363960"/>
+            <a:ext cx="2741400" cy="363240"/>
           </a:xfrm>
           <a:prstGeom prst="rect">
             <a:avLst/>
@@ -4384,7 +3864,7 @@
                 <a:tab algn="l" pos="0"/>
               </a:tabLst>
             </a:pPr>
-            <a:fld id="{D62635F0-75FD-4BB7-AD22-3E48AC1ED910}" type="slidenum">
+            <a:fld id="{B2544E9B-F28E-4B0E-9EE0-CC1C7C6A7923}" type="slidenum">
               <a:rPr lang="pt-BR" sz="1200" b="0" u="none" strike="noStrike">
                 <a:solidFill>
                   <a:schemeClr val="dk1">
@@ -4414,14 +3894,14 @@
 </file>
 
 <file path=ppt/slideLayouts/slideLayout7.xml><?xml version="1.0" encoding="utf-8"?>
-<p:sldLayout xmlns:a="http://schemas.openxmlformats.org/drawingml/2006/main" xmlns:p="http://schemas.openxmlformats.org/presentationml/2006/main" xmlns:r="http://schemas.openxmlformats.org/officeDocument/2006/relationships" xmlns:p14="http://schemas.microsoft.com/office/powerpoint/2010/main" xmlns:p15="http://schemas.microsoft.com/office/powerpoint/2012/main" xmlns:mc="http://schemas.openxmlformats.org/markup-compatibility/2006" type="title" preserve="1">
-  <p:cSld name="Slide de Título">
+<p:sldLayout xmlns:a="http://schemas.openxmlformats.org/drawingml/2006/main" xmlns:p="http://schemas.openxmlformats.org/presentationml/2006/main" xmlns:r="http://schemas.openxmlformats.org/officeDocument/2006/relationships" xmlns:p14="http://schemas.microsoft.com/office/powerpoint/2010/main" xmlns:p15="http://schemas.microsoft.com/office/powerpoint/2012/main" xmlns:mc="http://schemas.openxmlformats.org/markup-compatibility/2006" type="twoObj" preserve="1">
+  <p:cSld name="Duas Partes de Conteúdo">
     <p:bg>
       <p:bgPr>
         <a:blipFill rotWithShape="0">
           <a:blip r:embed="rId2"/>
           <a:stretch>
-            <a:fillRect l="-996" r="-996"/>
+            <a:fillRect l="-993" r="-993"/>
           </a:stretch>
         </a:blipFill>
       </p:bgPr>
@@ -4442,7 +3922,7 @@
       </p:grpSpPr>
       <p:sp>
         <p:nvSpPr>
-          <p:cNvPr id="35" name="PlaceHolder 1"/>
+          <p:cNvPr id="32" name="PlaceHolder 1"/>
           <p:cNvSpPr>
             <a:spLocks noGrp="1"/>
           </p:cNvSpPr>
@@ -4452,8 +3932,8 @@
         </p:nvSpPr>
         <p:spPr>
           <a:xfrm>
-            <a:off x="1523880" y="1122480"/>
-            <a:ext cx="9142920" cy="2386440"/>
+            <a:off x="838080" y="365040"/>
+            <a:ext cx="10513800" cy="1323720"/>
           </a:xfrm>
           <a:prstGeom prst="rect">
             <a:avLst/>
@@ -4464,11 +3944,11 @@
           </a:ln>
         </p:spPr>
         <p:txBody>
-          <a:bodyPr lIns="91440" rIns="91440" tIns="45720" bIns="45720" anchor="b">
+          <a:bodyPr lIns="91440" rIns="91440" tIns="45720" bIns="45720" anchor="ctr">
             <a:noAutofit/>
           </a:bodyPr>
           <a:p>
-            <a:pPr indent="0" algn="ctr" defTabSz="914400">
+            <a:pPr indent="0" defTabSz="914400">
               <a:lnSpc>
                 <a:spcPct val="90000"/>
               </a:lnSpc>
@@ -4478,7 +3958,7 @@
               </a:tabLst>
             </a:pPr>
             <a:r>
-              <a:rPr lang="pt-BR" sz="6000" b="0" u="none" strike="noStrike">
+              <a:rPr lang="pt-BR" sz="4400" b="0" u="none" strike="noStrike">
                 <a:solidFill>
                   <a:schemeClr val="dk1"/>
                 </a:solidFill>
@@ -4488,7 +3968,7 @@
               </a:rPr>
               <a:t>Clique para editar o título Mestre</a:t>
             </a:r>
-            <a:endParaRPr lang="pt-BR" sz="6000" b="0" u="none" strike="noStrike">
+            <a:endParaRPr lang="pt-BR" sz="4400" b="0" u="none" strike="noStrike">
               <a:solidFill>
                 <a:srgbClr val="000000"/>
               </a:solidFill>
@@ -4501,7 +3981,405 @@
       </p:sp>
       <p:sp>
         <p:nvSpPr>
-          <p:cNvPr id="36" name="PlaceHolder 2"/>
+          <p:cNvPr id="33" name="PlaceHolder 2"/>
+          <p:cNvSpPr>
+            <a:spLocks noGrp="1"/>
+          </p:cNvSpPr>
+          <p:nvPr>
+            <p:ph type="body"/>
+          </p:nvPr>
+        </p:nvSpPr>
+        <p:spPr>
+          <a:xfrm>
+            <a:off x="838080" y="1825560"/>
+            <a:ext cx="5179680" cy="4349520"/>
+          </a:xfrm>
+          <a:prstGeom prst="rect">
+            <a:avLst/>
+          </a:prstGeom>
+          <a:noFill/>
+          <a:ln w="0">
+            <a:noFill/>
+          </a:ln>
+        </p:spPr>
+        <p:txBody>
+          <a:bodyPr lIns="91440" rIns="91440" tIns="45720" bIns="45720" anchor="t">
+            <a:noAutofit/>
+          </a:bodyPr>
+          <a:p>
+            <a:pPr marL="228600" indent="-228600" defTabSz="914400">
+              <a:lnSpc>
+                <a:spcPct val="90000"/>
+              </a:lnSpc>
+              <a:spcBef>
+                <a:spcPts val="1001"/>
+              </a:spcBef>
+              <a:buClr>
+                <a:srgbClr val="000000"/>
+              </a:buClr>
+              <a:buFont typeface="Arial"/>
+              <a:buChar char="•"/>
+            </a:pPr>
+            <a:r>
+              <a:rPr lang="pt-BR" sz="2800" b="0" u="none" strike="noStrike">
+                <a:solidFill>
+                  <a:schemeClr val="dk1"/>
+                </a:solidFill>
+                <a:effectLst/>
+                <a:uFillTx/>
+                <a:latin typeface="Calibri"/>
+              </a:rPr>
+              <a:t>Clique para editar os estilos de texto Mestres</a:t>
+            </a:r>
+            <a:endParaRPr lang="pt-BR" sz="2800" b="0" u="none" strike="noStrike">
+              <a:solidFill>
+                <a:srgbClr val="000000"/>
+              </a:solidFill>
+              <a:effectLst/>
+              <a:uFillTx/>
+              <a:latin typeface="Arial"/>
+            </a:endParaRPr>
+          </a:p>
+          <a:p>
+            <a:pPr marL="685800" lvl="1" indent="-228600" defTabSz="914400">
+              <a:lnSpc>
+                <a:spcPct val="90000"/>
+              </a:lnSpc>
+              <a:spcBef>
+                <a:spcPts val="499"/>
+              </a:spcBef>
+              <a:buClr>
+                <a:srgbClr val="000000"/>
+              </a:buClr>
+              <a:buFont typeface="Arial"/>
+              <a:buChar char="•"/>
+            </a:pPr>
+            <a:r>
+              <a:rPr lang="pt-BR" sz="2400" b="0" u="none" strike="noStrike">
+                <a:solidFill>
+                  <a:schemeClr val="dk1"/>
+                </a:solidFill>
+                <a:effectLst/>
+                <a:uFillTx/>
+                <a:latin typeface="Calibri"/>
+              </a:rPr>
+              <a:t>Segundo nível</a:t>
+            </a:r>
+            <a:endParaRPr lang="pt-BR" sz="2400" b="0" u="none" strike="noStrike">
+              <a:solidFill>
+                <a:srgbClr val="000000"/>
+              </a:solidFill>
+              <a:effectLst/>
+              <a:uFillTx/>
+              <a:latin typeface="Arial"/>
+            </a:endParaRPr>
+          </a:p>
+          <a:p>
+            <a:pPr marL="1143000" lvl="2" indent="-228600" defTabSz="914400">
+              <a:lnSpc>
+                <a:spcPct val="90000"/>
+              </a:lnSpc>
+              <a:spcBef>
+                <a:spcPts val="499"/>
+              </a:spcBef>
+              <a:buClr>
+                <a:srgbClr val="000000"/>
+              </a:buClr>
+              <a:buFont typeface="Arial"/>
+              <a:buChar char="•"/>
+            </a:pPr>
+            <a:r>
+              <a:rPr lang="pt-BR" sz="2000" b="0" u="none" strike="noStrike">
+                <a:solidFill>
+                  <a:schemeClr val="dk1"/>
+                </a:solidFill>
+                <a:effectLst/>
+                <a:uFillTx/>
+                <a:latin typeface="Calibri"/>
+              </a:rPr>
+              <a:t>Terceiro nível</a:t>
+            </a:r>
+            <a:endParaRPr lang="pt-BR" sz="2000" b="0" u="none" strike="noStrike">
+              <a:solidFill>
+                <a:srgbClr val="000000"/>
+              </a:solidFill>
+              <a:effectLst/>
+              <a:uFillTx/>
+              <a:latin typeface="Arial"/>
+            </a:endParaRPr>
+          </a:p>
+          <a:p>
+            <a:pPr marL="1600200" lvl="3" indent="-228600" defTabSz="914400">
+              <a:lnSpc>
+                <a:spcPct val="90000"/>
+              </a:lnSpc>
+              <a:spcBef>
+                <a:spcPts val="499"/>
+              </a:spcBef>
+              <a:buClr>
+                <a:srgbClr val="000000"/>
+              </a:buClr>
+              <a:buFont typeface="Arial"/>
+              <a:buChar char="•"/>
+            </a:pPr>
+            <a:r>
+              <a:rPr lang="pt-BR" sz="1800" b="0" u="none" strike="noStrike">
+                <a:solidFill>
+                  <a:schemeClr val="dk1"/>
+                </a:solidFill>
+                <a:effectLst/>
+                <a:uFillTx/>
+                <a:latin typeface="Calibri"/>
+              </a:rPr>
+              <a:t>Quarto nível</a:t>
+            </a:r>
+            <a:endParaRPr lang="pt-BR" sz="1800" b="0" u="none" strike="noStrike">
+              <a:solidFill>
+                <a:srgbClr val="000000"/>
+              </a:solidFill>
+              <a:effectLst/>
+              <a:uFillTx/>
+              <a:latin typeface="Arial"/>
+            </a:endParaRPr>
+          </a:p>
+          <a:p>
+            <a:pPr marL="2057400" lvl="4" indent="-228600" defTabSz="914400">
+              <a:lnSpc>
+                <a:spcPct val="90000"/>
+              </a:lnSpc>
+              <a:spcBef>
+                <a:spcPts val="499"/>
+              </a:spcBef>
+              <a:buClr>
+                <a:srgbClr val="000000"/>
+              </a:buClr>
+              <a:buFont typeface="Arial"/>
+              <a:buChar char="•"/>
+            </a:pPr>
+            <a:r>
+              <a:rPr lang="pt-BR" sz="1800" b="0" u="none" strike="noStrike">
+                <a:solidFill>
+                  <a:schemeClr val="dk1"/>
+                </a:solidFill>
+                <a:effectLst/>
+                <a:uFillTx/>
+                <a:latin typeface="Calibri"/>
+              </a:rPr>
+              <a:t>Quinto nível</a:t>
+            </a:r>
+            <a:endParaRPr lang="pt-BR" sz="1800" b="0" u="none" strike="noStrike">
+              <a:solidFill>
+                <a:srgbClr val="000000"/>
+              </a:solidFill>
+              <a:effectLst/>
+              <a:uFillTx/>
+              <a:latin typeface="Arial"/>
+            </a:endParaRPr>
+          </a:p>
+        </p:txBody>
+      </p:sp>
+      <p:sp>
+        <p:nvSpPr>
+          <p:cNvPr id="34" name="PlaceHolder 3"/>
+          <p:cNvSpPr>
+            <a:spLocks noGrp="1"/>
+          </p:cNvSpPr>
+          <p:nvPr>
+            <p:ph type="body"/>
+          </p:nvPr>
+        </p:nvSpPr>
+        <p:spPr>
+          <a:xfrm>
+            <a:off x="6172200" y="1825560"/>
+            <a:ext cx="5179680" cy="4349520"/>
+          </a:xfrm>
+          <a:prstGeom prst="rect">
+            <a:avLst/>
+          </a:prstGeom>
+          <a:noFill/>
+          <a:ln w="0">
+            <a:noFill/>
+          </a:ln>
+        </p:spPr>
+        <p:txBody>
+          <a:bodyPr lIns="91440" rIns="91440" tIns="45720" bIns="45720" anchor="t">
+            <a:noAutofit/>
+          </a:bodyPr>
+          <a:p>
+            <a:pPr marL="228600" indent="-228600" defTabSz="914400">
+              <a:lnSpc>
+                <a:spcPct val="90000"/>
+              </a:lnSpc>
+              <a:spcBef>
+                <a:spcPts val="1001"/>
+              </a:spcBef>
+              <a:buClr>
+                <a:srgbClr val="000000"/>
+              </a:buClr>
+              <a:buFont typeface="Arial"/>
+              <a:buChar char="•"/>
+            </a:pPr>
+            <a:r>
+              <a:rPr lang="pt-BR" sz="2800" b="0" u="none" strike="noStrike">
+                <a:solidFill>
+                  <a:schemeClr val="dk1"/>
+                </a:solidFill>
+                <a:effectLst/>
+                <a:uFillTx/>
+                <a:latin typeface="Calibri"/>
+              </a:rPr>
+              <a:t>Clique para editar os estilos de texto Mestres</a:t>
+            </a:r>
+            <a:endParaRPr lang="pt-BR" sz="2800" b="0" u="none" strike="noStrike">
+              <a:solidFill>
+                <a:srgbClr val="000000"/>
+              </a:solidFill>
+              <a:effectLst/>
+              <a:uFillTx/>
+              <a:latin typeface="Arial"/>
+            </a:endParaRPr>
+          </a:p>
+          <a:p>
+            <a:pPr marL="685800" lvl="1" indent="-228600" defTabSz="914400">
+              <a:lnSpc>
+                <a:spcPct val="90000"/>
+              </a:lnSpc>
+              <a:spcBef>
+                <a:spcPts val="499"/>
+              </a:spcBef>
+              <a:buClr>
+                <a:srgbClr val="000000"/>
+              </a:buClr>
+              <a:buFont typeface="Arial"/>
+              <a:buChar char="•"/>
+            </a:pPr>
+            <a:r>
+              <a:rPr lang="pt-BR" sz="2400" b="0" u="none" strike="noStrike">
+                <a:solidFill>
+                  <a:schemeClr val="dk1"/>
+                </a:solidFill>
+                <a:effectLst/>
+                <a:uFillTx/>
+                <a:latin typeface="Calibri"/>
+              </a:rPr>
+              <a:t>Segundo nível</a:t>
+            </a:r>
+            <a:endParaRPr lang="pt-BR" sz="2400" b="0" u="none" strike="noStrike">
+              <a:solidFill>
+                <a:srgbClr val="000000"/>
+              </a:solidFill>
+              <a:effectLst/>
+              <a:uFillTx/>
+              <a:latin typeface="Arial"/>
+            </a:endParaRPr>
+          </a:p>
+          <a:p>
+            <a:pPr marL="1143000" lvl="2" indent="-228600" defTabSz="914400">
+              <a:lnSpc>
+                <a:spcPct val="90000"/>
+              </a:lnSpc>
+              <a:spcBef>
+                <a:spcPts val="499"/>
+              </a:spcBef>
+              <a:buClr>
+                <a:srgbClr val="000000"/>
+              </a:buClr>
+              <a:buFont typeface="Arial"/>
+              <a:buChar char="•"/>
+            </a:pPr>
+            <a:r>
+              <a:rPr lang="pt-BR" sz="2000" b="0" u="none" strike="noStrike">
+                <a:solidFill>
+                  <a:schemeClr val="dk1"/>
+                </a:solidFill>
+                <a:effectLst/>
+                <a:uFillTx/>
+                <a:latin typeface="Calibri"/>
+              </a:rPr>
+              <a:t>Terceiro nível</a:t>
+            </a:r>
+            <a:endParaRPr lang="pt-BR" sz="2000" b="0" u="none" strike="noStrike">
+              <a:solidFill>
+                <a:srgbClr val="000000"/>
+              </a:solidFill>
+              <a:effectLst/>
+              <a:uFillTx/>
+              <a:latin typeface="Arial"/>
+            </a:endParaRPr>
+          </a:p>
+          <a:p>
+            <a:pPr marL="1600200" lvl="3" indent="-228600" defTabSz="914400">
+              <a:lnSpc>
+                <a:spcPct val="90000"/>
+              </a:lnSpc>
+              <a:spcBef>
+                <a:spcPts val="499"/>
+              </a:spcBef>
+              <a:buClr>
+                <a:srgbClr val="000000"/>
+              </a:buClr>
+              <a:buFont typeface="Arial"/>
+              <a:buChar char="•"/>
+            </a:pPr>
+            <a:r>
+              <a:rPr lang="pt-BR" sz="1800" b="0" u="none" strike="noStrike">
+                <a:solidFill>
+                  <a:schemeClr val="dk1"/>
+                </a:solidFill>
+                <a:effectLst/>
+                <a:uFillTx/>
+                <a:latin typeface="Calibri"/>
+              </a:rPr>
+              <a:t>Quarto nível</a:t>
+            </a:r>
+            <a:endParaRPr lang="pt-BR" sz="1800" b="0" u="none" strike="noStrike">
+              <a:solidFill>
+                <a:srgbClr val="000000"/>
+              </a:solidFill>
+              <a:effectLst/>
+              <a:uFillTx/>
+              <a:latin typeface="Arial"/>
+            </a:endParaRPr>
+          </a:p>
+          <a:p>
+            <a:pPr marL="2057400" lvl="4" indent="-228600" defTabSz="914400">
+              <a:lnSpc>
+                <a:spcPct val="90000"/>
+              </a:lnSpc>
+              <a:spcBef>
+                <a:spcPts val="499"/>
+              </a:spcBef>
+              <a:buClr>
+                <a:srgbClr val="000000"/>
+              </a:buClr>
+              <a:buFont typeface="Arial"/>
+              <a:buChar char="•"/>
+            </a:pPr>
+            <a:r>
+              <a:rPr lang="pt-BR" sz="1800" b="0" u="none" strike="noStrike">
+                <a:solidFill>
+                  <a:schemeClr val="dk1"/>
+                </a:solidFill>
+                <a:effectLst/>
+                <a:uFillTx/>
+                <a:latin typeface="Calibri"/>
+              </a:rPr>
+              <a:t>Quinto nível</a:t>
+            </a:r>
+            <a:endParaRPr lang="pt-BR" sz="1800" b="0" u="none" strike="noStrike">
+              <a:solidFill>
+                <a:srgbClr val="000000"/>
+              </a:solidFill>
+              <a:effectLst/>
+              <a:uFillTx/>
+              <a:latin typeface="Arial"/>
+            </a:endParaRPr>
+          </a:p>
+        </p:txBody>
+      </p:sp>
+      <p:sp>
+        <p:nvSpPr>
+          <p:cNvPr id="35" name="PlaceHolder 4"/>
           <p:cNvSpPr>
             <a:spLocks noGrp="1"/>
           </p:cNvSpPr>
@@ -4512,7 +4390,7 @@
         <p:spPr>
           <a:xfrm>
             <a:off x="838080" y="6356520"/>
-            <a:ext cx="2742120" cy="363960"/>
+            <a:ext cx="2741400" cy="363240"/>
           </a:xfrm>
           <a:prstGeom prst="rect">
             <a:avLst/>
@@ -4583,7 +4461,7 @@
       </p:sp>
       <p:sp>
         <p:nvSpPr>
-          <p:cNvPr id="37" name="PlaceHolder 3"/>
+          <p:cNvPr id="36" name="PlaceHolder 5"/>
           <p:cNvSpPr>
             <a:spLocks noGrp="1"/>
           </p:cNvSpPr>
@@ -4594,7 +4472,7 @@
         <p:spPr>
           <a:xfrm>
             <a:off x="4038480" y="6356520"/>
-            <a:ext cx="4113720" cy="363960"/>
+            <a:ext cx="4113000" cy="363240"/>
           </a:xfrm>
           <a:prstGeom prst="rect">
             <a:avLst/>
@@ -4661,7 +4539,7 @@
       </p:sp>
       <p:sp>
         <p:nvSpPr>
-          <p:cNvPr id="38" name="PlaceHolder 4"/>
+          <p:cNvPr id="37" name="PlaceHolder 6"/>
           <p:cNvSpPr>
             <a:spLocks noGrp="1"/>
           </p:cNvSpPr>
@@ -4672,7 +4550,7 @@
         <p:spPr>
           <a:xfrm>
             <a:off x="8610480" y="6356520"/>
-            <a:ext cx="2742120" cy="363960"/>
+            <a:ext cx="2741400" cy="363240"/>
           </a:xfrm>
           <a:prstGeom prst="rect">
             <a:avLst/>
@@ -4717,7 +4595,7 @@
                 <a:tab algn="l" pos="0"/>
               </a:tabLst>
             </a:pPr>
-            <a:fld id="{3A4A46E4-5C0C-45B3-99BF-61947D1934EA}" type="slidenum">
+            <a:fld id="{EA4D7298-D381-4580-93ED-28692FE9CC1A}" type="slidenum">
               <a:rPr lang="pt-BR" sz="1200" b="0" u="none" strike="noStrike">
                 <a:solidFill>
                   <a:schemeClr val="dk1">
@@ -4747,14 +4625,14 @@
 </file>
 
 <file path=ppt/slideLayouts/slideLayout8.xml><?xml version="1.0" encoding="utf-8"?>
-<p:sldLayout xmlns:a="http://schemas.openxmlformats.org/drawingml/2006/main" xmlns:p="http://schemas.openxmlformats.org/presentationml/2006/main" xmlns:r="http://schemas.openxmlformats.org/officeDocument/2006/relationships" xmlns:p14="http://schemas.microsoft.com/office/powerpoint/2010/main" xmlns:p15="http://schemas.microsoft.com/office/powerpoint/2012/main" xmlns:mc="http://schemas.openxmlformats.org/markup-compatibility/2006" type="vertTx" preserve="1">
-  <p:cSld name="Título e Texto Vertical">
+<p:sldLayout xmlns:a="http://schemas.openxmlformats.org/drawingml/2006/main" xmlns:p="http://schemas.openxmlformats.org/presentationml/2006/main" xmlns:r="http://schemas.openxmlformats.org/officeDocument/2006/relationships" xmlns:p14="http://schemas.microsoft.com/office/powerpoint/2010/main" xmlns:p15="http://schemas.microsoft.com/office/powerpoint/2012/main" xmlns:mc="http://schemas.openxmlformats.org/markup-compatibility/2006" type="blank" preserve="1">
+  <p:cSld name="Comparação">
     <p:bg>
       <p:bgPr>
         <a:blipFill rotWithShape="0">
           <a:blip r:embed="rId2"/>
           <a:stretch>
-            <a:fillRect l="-996" r="-996"/>
+            <a:fillRect l="-993" r="-993"/>
           </a:stretch>
         </a:blipFill>
       </p:bgPr>
@@ -4775,7 +4653,7 @@
       </p:grpSpPr>
       <p:sp>
         <p:nvSpPr>
-          <p:cNvPr id="39" name="PlaceHolder 1"/>
+          <p:cNvPr id="38" name="PlaceHolder 1"/>
           <p:cNvSpPr>
             <a:spLocks noGrp="1"/>
           </p:cNvSpPr>
@@ -4785,8 +4663,8 @@
         </p:nvSpPr>
         <p:spPr>
           <a:xfrm>
-            <a:off x="838080" y="365040"/>
-            <a:ext cx="10514520" cy="1324440"/>
+            <a:off x="839880" y="365040"/>
+            <a:ext cx="10513800" cy="1323720"/>
           </a:xfrm>
           <a:prstGeom prst="rect">
             <a:avLst/>
@@ -4834,7 +4712,7 @@
       </p:sp>
       <p:sp>
         <p:nvSpPr>
-          <p:cNvPr id="40" name="PlaceHolder 2"/>
+          <p:cNvPr id="39" name="PlaceHolder 2"/>
           <p:cNvSpPr>
             <a:spLocks noGrp="1"/>
           </p:cNvSpPr>
@@ -4844,8 +4722,8 @@
         </p:nvSpPr>
         <p:spPr>
           <a:xfrm>
-            <a:off x="838080" y="1825560"/>
-            <a:ext cx="10514520" cy="4350240"/>
+            <a:off x="839880" y="1681200"/>
+            <a:ext cx="5155920" cy="822240"/>
           </a:xfrm>
           <a:prstGeom prst="rect">
             <a:avLst/>
@@ -4856,25 +4734,24 @@
           </a:ln>
         </p:spPr>
         <p:txBody>
-          <a:bodyPr lIns="91440" rIns="91440" tIns="45720" bIns="45720" anchor="t" vert="eaVert">
+          <a:bodyPr lIns="91440" rIns="91440" tIns="45720" bIns="45720" anchor="b">
             <a:noAutofit/>
           </a:bodyPr>
           <a:p>
-            <a:pPr marL="228600" indent="-228600" defTabSz="914400">
+            <a:pPr indent="0" defTabSz="914400">
               <a:lnSpc>
                 <a:spcPct val="90000"/>
               </a:lnSpc>
               <a:spcBef>
                 <a:spcPts val="1001"/>
               </a:spcBef>
-              <a:buClr>
-                <a:srgbClr val="000000"/>
-              </a:buClr>
-              <a:buFont typeface="Arial"/>
-              <a:buChar char="•"/>
+              <a:buNone/>
+              <a:tabLst>
+                <a:tab algn="l" pos="0"/>
+              </a:tabLst>
             </a:pPr>
             <a:r>
-              <a:rPr lang="pt-BR" sz="2800" b="0" u="none" strike="noStrike">
+              <a:rPr lang="pt-BR" sz="2400" b="1" u="none" strike="noStrike">
                 <a:solidFill>
                   <a:schemeClr val="dk1"/>
                 </a:solidFill>
@@ -4884,143 +4761,7 @@
               </a:rPr>
               <a:t>Clique para editar os estilos de texto Mestres</a:t>
             </a:r>
-            <a:endParaRPr lang="pt-BR" sz="2800" b="0" u="none" strike="noStrike">
-              <a:solidFill>
-                <a:srgbClr val="000000"/>
-              </a:solidFill>
-              <a:effectLst/>
-              <a:uFillTx/>
-              <a:latin typeface="Arial"/>
-            </a:endParaRPr>
-          </a:p>
-          <a:p>
-            <a:pPr marL="685800" lvl="1" indent="-228600" defTabSz="914400">
-              <a:lnSpc>
-                <a:spcPct val="90000"/>
-              </a:lnSpc>
-              <a:spcBef>
-                <a:spcPts val="499"/>
-              </a:spcBef>
-              <a:buClr>
-                <a:srgbClr val="000000"/>
-              </a:buClr>
-              <a:buFont typeface="Arial"/>
-              <a:buChar char="•"/>
-            </a:pPr>
-            <a:r>
-              <a:rPr lang="pt-BR" sz="2400" b="0" u="none" strike="noStrike">
-                <a:solidFill>
-                  <a:schemeClr val="dk1"/>
-                </a:solidFill>
-                <a:effectLst/>
-                <a:uFillTx/>
-                <a:latin typeface="Calibri"/>
-              </a:rPr>
-              <a:t>Segundo nível</a:t>
-            </a:r>
             <a:endParaRPr lang="pt-BR" sz="2400" b="0" u="none" strike="noStrike">
-              <a:solidFill>
-                <a:srgbClr val="000000"/>
-              </a:solidFill>
-              <a:effectLst/>
-              <a:uFillTx/>
-              <a:latin typeface="Arial"/>
-            </a:endParaRPr>
-          </a:p>
-          <a:p>
-            <a:pPr marL="1143000" lvl="2" indent="-228600" defTabSz="914400">
-              <a:lnSpc>
-                <a:spcPct val="90000"/>
-              </a:lnSpc>
-              <a:spcBef>
-                <a:spcPts val="499"/>
-              </a:spcBef>
-              <a:buClr>
-                <a:srgbClr val="000000"/>
-              </a:buClr>
-              <a:buFont typeface="Arial"/>
-              <a:buChar char="•"/>
-            </a:pPr>
-            <a:r>
-              <a:rPr lang="pt-BR" sz="2000" b="0" u="none" strike="noStrike">
-                <a:solidFill>
-                  <a:schemeClr val="dk1"/>
-                </a:solidFill>
-                <a:effectLst/>
-                <a:uFillTx/>
-                <a:latin typeface="Calibri"/>
-              </a:rPr>
-              <a:t>Terceiro nível</a:t>
-            </a:r>
-            <a:endParaRPr lang="pt-BR" sz="2000" b="0" u="none" strike="noStrike">
-              <a:solidFill>
-                <a:srgbClr val="000000"/>
-              </a:solidFill>
-              <a:effectLst/>
-              <a:uFillTx/>
-              <a:latin typeface="Arial"/>
-            </a:endParaRPr>
-          </a:p>
-          <a:p>
-            <a:pPr marL="1600200" lvl="3" indent="-228600" defTabSz="914400">
-              <a:lnSpc>
-                <a:spcPct val="90000"/>
-              </a:lnSpc>
-              <a:spcBef>
-                <a:spcPts val="499"/>
-              </a:spcBef>
-              <a:buClr>
-                <a:srgbClr val="000000"/>
-              </a:buClr>
-              <a:buFont typeface="Arial"/>
-              <a:buChar char="•"/>
-            </a:pPr>
-            <a:r>
-              <a:rPr lang="pt-BR" sz="1800" b="0" u="none" strike="noStrike">
-                <a:solidFill>
-                  <a:schemeClr val="dk1"/>
-                </a:solidFill>
-                <a:effectLst/>
-                <a:uFillTx/>
-                <a:latin typeface="Calibri"/>
-              </a:rPr>
-              <a:t>Quarto nível</a:t>
-            </a:r>
-            <a:endParaRPr lang="pt-BR" sz="1800" b="0" u="none" strike="noStrike">
-              <a:solidFill>
-                <a:srgbClr val="000000"/>
-              </a:solidFill>
-              <a:effectLst/>
-              <a:uFillTx/>
-              <a:latin typeface="Arial"/>
-            </a:endParaRPr>
-          </a:p>
-          <a:p>
-            <a:pPr marL="2057400" lvl="4" indent="-228600" defTabSz="914400">
-              <a:lnSpc>
-                <a:spcPct val="90000"/>
-              </a:lnSpc>
-              <a:spcBef>
-                <a:spcPts val="499"/>
-              </a:spcBef>
-              <a:buClr>
-                <a:srgbClr val="000000"/>
-              </a:buClr>
-              <a:buFont typeface="Arial"/>
-              <a:buChar char="•"/>
-            </a:pPr>
-            <a:r>
-              <a:rPr lang="pt-BR" sz="1800" b="0" u="none" strike="noStrike">
-                <a:solidFill>
-                  <a:schemeClr val="dk1"/>
-                </a:solidFill>
-                <a:effectLst/>
-                <a:uFillTx/>
-                <a:latin typeface="Calibri"/>
-              </a:rPr>
-              <a:t>Quinto nível</a:t>
-            </a:r>
-            <a:endParaRPr lang="pt-BR" sz="1800" b="0" u="none" strike="noStrike">
               <a:solidFill>
                 <a:srgbClr val="000000"/>
               </a:solidFill>
@@ -5033,7 +4774,467 @@
       </p:sp>
       <p:sp>
         <p:nvSpPr>
-          <p:cNvPr id="41" name="PlaceHolder 3"/>
+          <p:cNvPr id="40" name="PlaceHolder 3"/>
+          <p:cNvSpPr>
+            <a:spLocks noGrp="1"/>
+          </p:cNvSpPr>
+          <p:nvPr>
+            <p:ph type="body"/>
+          </p:nvPr>
+        </p:nvSpPr>
+        <p:spPr>
+          <a:xfrm>
+            <a:off x="839880" y="2505240"/>
+            <a:ext cx="5155920" cy="3682800"/>
+          </a:xfrm>
+          <a:prstGeom prst="rect">
+            <a:avLst/>
+          </a:prstGeom>
+          <a:noFill/>
+          <a:ln w="0">
+            <a:noFill/>
+          </a:ln>
+        </p:spPr>
+        <p:txBody>
+          <a:bodyPr lIns="91440" rIns="91440" tIns="45720" bIns="45720" anchor="t">
+            <a:noAutofit/>
+          </a:bodyPr>
+          <a:p>
+            <a:pPr marL="228600" indent="-228600" defTabSz="914400">
+              <a:lnSpc>
+                <a:spcPct val="90000"/>
+              </a:lnSpc>
+              <a:spcBef>
+                <a:spcPts val="1001"/>
+              </a:spcBef>
+              <a:buClr>
+                <a:srgbClr val="000000"/>
+              </a:buClr>
+              <a:buFont typeface="Arial"/>
+              <a:buChar char="•"/>
+            </a:pPr>
+            <a:r>
+              <a:rPr lang="pt-BR" sz="2800" b="0" u="none" strike="noStrike">
+                <a:solidFill>
+                  <a:schemeClr val="dk1"/>
+                </a:solidFill>
+                <a:effectLst/>
+                <a:uFillTx/>
+                <a:latin typeface="Calibri"/>
+              </a:rPr>
+              <a:t>Clique para editar os estilos de texto Mestres</a:t>
+            </a:r>
+            <a:endParaRPr lang="pt-BR" sz="2800" b="0" u="none" strike="noStrike">
+              <a:solidFill>
+                <a:srgbClr val="000000"/>
+              </a:solidFill>
+              <a:effectLst/>
+              <a:uFillTx/>
+              <a:latin typeface="Arial"/>
+            </a:endParaRPr>
+          </a:p>
+          <a:p>
+            <a:pPr marL="685800" lvl="1" indent="-228600" defTabSz="914400">
+              <a:lnSpc>
+                <a:spcPct val="90000"/>
+              </a:lnSpc>
+              <a:spcBef>
+                <a:spcPts val="499"/>
+              </a:spcBef>
+              <a:buClr>
+                <a:srgbClr val="000000"/>
+              </a:buClr>
+              <a:buFont typeface="Arial"/>
+              <a:buChar char="•"/>
+            </a:pPr>
+            <a:r>
+              <a:rPr lang="pt-BR" sz="2400" b="0" u="none" strike="noStrike">
+                <a:solidFill>
+                  <a:schemeClr val="dk1"/>
+                </a:solidFill>
+                <a:effectLst/>
+                <a:uFillTx/>
+                <a:latin typeface="Calibri"/>
+              </a:rPr>
+              <a:t>Segundo nível</a:t>
+            </a:r>
+            <a:endParaRPr lang="pt-BR" sz="2400" b="0" u="none" strike="noStrike">
+              <a:solidFill>
+                <a:srgbClr val="000000"/>
+              </a:solidFill>
+              <a:effectLst/>
+              <a:uFillTx/>
+              <a:latin typeface="Arial"/>
+            </a:endParaRPr>
+          </a:p>
+          <a:p>
+            <a:pPr marL="1143000" lvl="2" indent="-228600" defTabSz="914400">
+              <a:lnSpc>
+                <a:spcPct val="90000"/>
+              </a:lnSpc>
+              <a:spcBef>
+                <a:spcPts val="499"/>
+              </a:spcBef>
+              <a:buClr>
+                <a:srgbClr val="000000"/>
+              </a:buClr>
+              <a:buFont typeface="Arial"/>
+              <a:buChar char="•"/>
+            </a:pPr>
+            <a:r>
+              <a:rPr lang="pt-BR" sz="2000" b="0" u="none" strike="noStrike">
+                <a:solidFill>
+                  <a:schemeClr val="dk1"/>
+                </a:solidFill>
+                <a:effectLst/>
+                <a:uFillTx/>
+                <a:latin typeface="Calibri"/>
+              </a:rPr>
+              <a:t>Terceiro nível</a:t>
+            </a:r>
+            <a:endParaRPr lang="pt-BR" sz="2000" b="0" u="none" strike="noStrike">
+              <a:solidFill>
+                <a:srgbClr val="000000"/>
+              </a:solidFill>
+              <a:effectLst/>
+              <a:uFillTx/>
+              <a:latin typeface="Arial"/>
+            </a:endParaRPr>
+          </a:p>
+          <a:p>
+            <a:pPr marL="1600200" lvl="3" indent="-228600" defTabSz="914400">
+              <a:lnSpc>
+                <a:spcPct val="90000"/>
+              </a:lnSpc>
+              <a:spcBef>
+                <a:spcPts val="499"/>
+              </a:spcBef>
+              <a:buClr>
+                <a:srgbClr val="000000"/>
+              </a:buClr>
+              <a:buFont typeface="Arial"/>
+              <a:buChar char="•"/>
+            </a:pPr>
+            <a:r>
+              <a:rPr lang="pt-BR" sz="1800" b="0" u="none" strike="noStrike">
+                <a:solidFill>
+                  <a:schemeClr val="dk1"/>
+                </a:solidFill>
+                <a:effectLst/>
+                <a:uFillTx/>
+                <a:latin typeface="Calibri"/>
+              </a:rPr>
+              <a:t>Quarto nível</a:t>
+            </a:r>
+            <a:endParaRPr lang="pt-BR" sz="1800" b="0" u="none" strike="noStrike">
+              <a:solidFill>
+                <a:srgbClr val="000000"/>
+              </a:solidFill>
+              <a:effectLst/>
+              <a:uFillTx/>
+              <a:latin typeface="Arial"/>
+            </a:endParaRPr>
+          </a:p>
+          <a:p>
+            <a:pPr marL="2057400" lvl="4" indent="-228600" defTabSz="914400">
+              <a:lnSpc>
+                <a:spcPct val="90000"/>
+              </a:lnSpc>
+              <a:spcBef>
+                <a:spcPts val="499"/>
+              </a:spcBef>
+              <a:buClr>
+                <a:srgbClr val="000000"/>
+              </a:buClr>
+              <a:buFont typeface="Arial"/>
+              <a:buChar char="•"/>
+            </a:pPr>
+            <a:r>
+              <a:rPr lang="pt-BR" sz="1800" b="0" u="none" strike="noStrike">
+                <a:solidFill>
+                  <a:schemeClr val="dk1"/>
+                </a:solidFill>
+                <a:effectLst/>
+                <a:uFillTx/>
+                <a:latin typeface="Calibri"/>
+              </a:rPr>
+              <a:t>Quinto nível</a:t>
+            </a:r>
+            <a:endParaRPr lang="pt-BR" sz="1800" b="0" u="none" strike="noStrike">
+              <a:solidFill>
+                <a:srgbClr val="000000"/>
+              </a:solidFill>
+              <a:effectLst/>
+              <a:uFillTx/>
+              <a:latin typeface="Arial"/>
+            </a:endParaRPr>
+          </a:p>
+        </p:txBody>
+      </p:sp>
+      <p:sp>
+        <p:nvSpPr>
+          <p:cNvPr id="41" name="PlaceHolder 4"/>
+          <p:cNvSpPr>
+            <a:spLocks noGrp="1"/>
+          </p:cNvSpPr>
+          <p:nvPr>
+            <p:ph type="body"/>
+          </p:nvPr>
+        </p:nvSpPr>
+        <p:spPr>
+          <a:xfrm>
+            <a:off x="6172200" y="1681200"/>
+            <a:ext cx="5181480" cy="822240"/>
+          </a:xfrm>
+          <a:prstGeom prst="rect">
+            <a:avLst/>
+          </a:prstGeom>
+          <a:noFill/>
+          <a:ln w="0">
+            <a:noFill/>
+          </a:ln>
+        </p:spPr>
+        <p:txBody>
+          <a:bodyPr lIns="91440" rIns="91440" tIns="45720" bIns="45720" anchor="b">
+            <a:noAutofit/>
+          </a:bodyPr>
+          <a:p>
+            <a:pPr indent="0" defTabSz="914400">
+              <a:lnSpc>
+                <a:spcPct val="90000"/>
+              </a:lnSpc>
+              <a:spcBef>
+                <a:spcPts val="1001"/>
+              </a:spcBef>
+              <a:buNone/>
+              <a:tabLst>
+                <a:tab algn="l" pos="0"/>
+              </a:tabLst>
+            </a:pPr>
+            <a:r>
+              <a:rPr lang="pt-BR" sz="2400" b="1" u="none" strike="noStrike">
+                <a:solidFill>
+                  <a:schemeClr val="dk1"/>
+                </a:solidFill>
+                <a:effectLst/>
+                <a:uFillTx/>
+                <a:latin typeface="Calibri"/>
+              </a:rPr>
+              <a:t>Clique para editar os estilos de texto Mestres</a:t>
+            </a:r>
+            <a:endParaRPr lang="pt-BR" sz="2400" b="0" u="none" strike="noStrike">
+              <a:solidFill>
+                <a:srgbClr val="000000"/>
+              </a:solidFill>
+              <a:effectLst/>
+              <a:uFillTx/>
+              <a:latin typeface="Arial"/>
+            </a:endParaRPr>
+          </a:p>
+        </p:txBody>
+      </p:sp>
+      <p:sp>
+        <p:nvSpPr>
+          <p:cNvPr id="42" name="PlaceHolder 5"/>
+          <p:cNvSpPr>
+            <a:spLocks noGrp="1"/>
+          </p:cNvSpPr>
+          <p:nvPr>
+            <p:ph type="body"/>
+          </p:nvPr>
+        </p:nvSpPr>
+        <p:spPr>
+          <a:xfrm>
+            <a:off x="6172200" y="2505240"/>
+            <a:ext cx="5181480" cy="3682800"/>
+          </a:xfrm>
+          <a:prstGeom prst="rect">
+            <a:avLst/>
+          </a:prstGeom>
+          <a:noFill/>
+          <a:ln w="0">
+            <a:noFill/>
+          </a:ln>
+        </p:spPr>
+        <p:txBody>
+          <a:bodyPr lIns="91440" rIns="91440" tIns="45720" bIns="45720" anchor="t">
+            <a:noAutofit/>
+          </a:bodyPr>
+          <a:p>
+            <a:pPr marL="228600" indent="-228600" defTabSz="914400">
+              <a:lnSpc>
+                <a:spcPct val="90000"/>
+              </a:lnSpc>
+              <a:spcBef>
+                <a:spcPts val="1001"/>
+              </a:spcBef>
+              <a:buClr>
+                <a:srgbClr val="000000"/>
+              </a:buClr>
+              <a:buFont typeface="Arial"/>
+              <a:buChar char="•"/>
+            </a:pPr>
+            <a:r>
+              <a:rPr lang="pt-BR" sz="2800" b="0" u="none" strike="noStrike">
+                <a:solidFill>
+                  <a:schemeClr val="dk1"/>
+                </a:solidFill>
+                <a:effectLst/>
+                <a:uFillTx/>
+                <a:latin typeface="Calibri"/>
+              </a:rPr>
+              <a:t>Clique para editar os estilos de texto Mestres</a:t>
+            </a:r>
+            <a:endParaRPr lang="pt-BR" sz="2800" b="0" u="none" strike="noStrike">
+              <a:solidFill>
+                <a:srgbClr val="000000"/>
+              </a:solidFill>
+              <a:effectLst/>
+              <a:uFillTx/>
+              <a:latin typeface="Arial"/>
+            </a:endParaRPr>
+          </a:p>
+          <a:p>
+            <a:pPr marL="685800" lvl="1" indent="-228600" defTabSz="914400">
+              <a:lnSpc>
+                <a:spcPct val="90000"/>
+              </a:lnSpc>
+              <a:spcBef>
+                <a:spcPts val="499"/>
+              </a:spcBef>
+              <a:buClr>
+                <a:srgbClr val="000000"/>
+              </a:buClr>
+              <a:buFont typeface="Arial"/>
+              <a:buChar char="•"/>
+            </a:pPr>
+            <a:r>
+              <a:rPr lang="pt-BR" sz="2400" b="0" u="none" strike="noStrike">
+                <a:solidFill>
+                  <a:schemeClr val="dk1"/>
+                </a:solidFill>
+                <a:effectLst/>
+                <a:uFillTx/>
+                <a:latin typeface="Calibri"/>
+              </a:rPr>
+              <a:t>Segundo nível</a:t>
+            </a:r>
+            <a:endParaRPr lang="pt-BR" sz="2400" b="0" u="none" strike="noStrike">
+              <a:solidFill>
+                <a:srgbClr val="000000"/>
+              </a:solidFill>
+              <a:effectLst/>
+              <a:uFillTx/>
+              <a:latin typeface="Arial"/>
+            </a:endParaRPr>
+          </a:p>
+          <a:p>
+            <a:pPr marL="1143000" lvl="2" indent="-228600" defTabSz="914400">
+              <a:lnSpc>
+                <a:spcPct val="90000"/>
+              </a:lnSpc>
+              <a:spcBef>
+                <a:spcPts val="499"/>
+              </a:spcBef>
+              <a:buClr>
+                <a:srgbClr val="000000"/>
+              </a:buClr>
+              <a:buFont typeface="Arial"/>
+              <a:buChar char="•"/>
+            </a:pPr>
+            <a:r>
+              <a:rPr lang="pt-BR" sz="2000" b="0" u="none" strike="noStrike">
+                <a:solidFill>
+                  <a:schemeClr val="dk1"/>
+                </a:solidFill>
+                <a:effectLst/>
+                <a:uFillTx/>
+                <a:latin typeface="Calibri"/>
+              </a:rPr>
+              <a:t>Terceiro nível</a:t>
+            </a:r>
+            <a:endParaRPr lang="pt-BR" sz="2000" b="0" u="none" strike="noStrike">
+              <a:solidFill>
+                <a:srgbClr val="000000"/>
+              </a:solidFill>
+              <a:effectLst/>
+              <a:uFillTx/>
+              <a:latin typeface="Arial"/>
+            </a:endParaRPr>
+          </a:p>
+          <a:p>
+            <a:pPr marL="1600200" lvl="3" indent="-228600" defTabSz="914400">
+              <a:lnSpc>
+                <a:spcPct val="90000"/>
+              </a:lnSpc>
+              <a:spcBef>
+                <a:spcPts val="499"/>
+              </a:spcBef>
+              <a:buClr>
+                <a:srgbClr val="000000"/>
+              </a:buClr>
+              <a:buFont typeface="Arial"/>
+              <a:buChar char="•"/>
+            </a:pPr>
+            <a:r>
+              <a:rPr lang="pt-BR" sz="1800" b="0" u="none" strike="noStrike">
+                <a:solidFill>
+                  <a:schemeClr val="dk1"/>
+                </a:solidFill>
+                <a:effectLst/>
+                <a:uFillTx/>
+                <a:latin typeface="Calibri"/>
+              </a:rPr>
+              <a:t>Quarto nível</a:t>
+            </a:r>
+            <a:endParaRPr lang="pt-BR" sz="1800" b="0" u="none" strike="noStrike">
+              <a:solidFill>
+                <a:srgbClr val="000000"/>
+              </a:solidFill>
+              <a:effectLst/>
+              <a:uFillTx/>
+              <a:latin typeface="Arial"/>
+            </a:endParaRPr>
+          </a:p>
+          <a:p>
+            <a:pPr marL="2057400" lvl="4" indent="-228600" defTabSz="914400">
+              <a:lnSpc>
+                <a:spcPct val="90000"/>
+              </a:lnSpc>
+              <a:spcBef>
+                <a:spcPts val="499"/>
+              </a:spcBef>
+              <a:buClr>
+                <a:srgbClr val="000000"/>
+              </a:buClr>
+              <a:buFont typeface="Arial"/>
+              <a:buChar char="•"/>
+            </a:pPr>
+            <a:r>
+              <a:rPr lang="pt-BR" sz="1800" b="0" u="none" strike="noStrike">
+                <a:solidFill>
+                  <a:schemeClr val="dk1"/>
+                </a:solidFill>
+                <a:effectLst/>
+                <a:uFillTx/>
+                <a:latin typeface="Calibri"/>
+              </a:rPr>
+              <a:t>Quinto nível</a:t>
+            </a:r>
+            <a:endParaRPr lang="pt-BR" sz="1800" b="0" u="none" strike="noStrike">
+              <a:solidFill>
+                <a:srgbClr val="000000"/>
+              </a:solidFill>
+              <a:effectLst/>
+              <a:uFillTx/>
+              <a:latin typeface="Arial"/>
+            </a:endParaRPr>
+          </a:p>
+        </p:txBody>
+      </p:sp>
+      <p:sp>
+        <p:nvSpPr>
+          <p:cNvPr id="43" name="PlaceHolder 6"/>
           <p:cNvSpPr>
             <a:spLocks noGrp="1"/>
           </p:cNvSpPr>
@@ -5044,7 +5245,7 @@
         <p:spPr>
           <a:xfrm>
             <a:off x="838080" y="6356520"/>
-            <a:ext cx="2742120" cy="363960"/>
+            <a:ext cx="2741400" cy="363240"/>
           </a:xfrm>
           <a:prstGeom prst="rect">
             <a:avLst/>
@@ -5115,7 +5316,7 @@
       </p:sp>
       <p:sp>
         <p:nvSpPr>
-          <p:cNvPr id="42" name="PlaceHolder 4"/>
+          <p:cNvPr id="44" name="PlaceHolder 7"/>
           <p:cNvSpPr>
             <a:spLocks noGrp="1"/>
           </p:cNvSpPr>
@@ -5126,7 +5327,7 @@
         <p:spPr>
           <a:xfrm>
             <a:off x="4038480" y="6356520"/>
-            <a:ext cx="4113720" cy="363960"/>
+            <a:ext cx="4113000" cy="363240"/>
           </a:xfrm>
           <a:prstGeom prst="rect">
             <a:avLst/>
@@ -5193,7 +5394,7 @@
       </p:sp>
       <p:sp>
         <p:nvSpPr>
-          <p:cNvPr id="43" name="PlaceHolder 5"/>
+          <p:cNvPr id="45" name="PlaceHolder 8"/>
           <p:cNvSpPr>
             <a:spLocks noGrp="1"/>
           </p:cNvSpPr>
@@ -5204,7 +5405,7 @@
         <p:spPr>
           <a:xfrm>
             <a:off x="8610480" y="6356520"/>
-            <a:ext cx="2742120" cy="363960"/>
+            <a:ext cx="2741400" cy="363240"/>
           </a:xfrm>
           <a:prstGeom prst="rect">
             <a:avLst/>
@@ -5249,7 +5450,7 @@
                 <a:tab algn="l" pos="0"/>
               </a:tabLst>
             </a:pPr>
-            <a:fld id="{A6191730-A5AA-4EF2-8CDC-8DA275C62B1C}" type="slidenum">
+            <a:fld id="{64B83230-6F7E-407D-B47E-22BDA0A5B2B0}" type="slidenum">
               <a:rPr lang="pt-BR" sz="1200" b="0" u="none" strike="noStrike">
                 <a:solidFill>
                   <a:schemeClr val="dk1">
@@ -5279,14 +5480,14 @@
 </file>
 
 <file path=ppt/slideLayouts/slideLayout9.xml><?xml version="1.0" encoding="utf-8"?>
-<p:sldLayout xmlns:a="http://schemas.openxmlformats.org/drawingml/2006/main" xmlns:p="http://schemas.openxmlformats.org/presentationml/2006/main" xmlns:r="http://schemas.openxmlformats.org/officeDocument/2006/relationships" xmlns:p14="http://schemas.microsoft.com/office/powerpoint/2010/main" xmlns:p15="http://schemas.microsoft.com/office/powerpoint/2012/main" xmlns:mc="http://schemas.openxmlformats.org/markup-compatibility/2006" type="vertTitleAndTx" preserve="1">
-  <p:cSld name="Texto e Título Vertical">
+<p:sldLayout xmlns:a="http://schemas.openxmlformats.org/drawingml/2006/main" xmlns:p="http://schemas.openxmlformats.org/presentationml/2006/main" xmlns:r="http://schemas.openxmlformats.org/officeDocument/2006/relationships" xmlns:p14="http://schemas.microsoft.com/office/powerpoint/2010/main" xmlns:p15="http://schemas.microsoft.com/office/powerpoint/2012/main" xmlns:mc="http://schemas.openxmlformats.org/markup-compatibility/2006" type="titleOnly" preserve="1">
+  <p:cSld name="Somente Título">
     <p:bg>
       <p:bgPr>
         <a:blipFill rotWithShape="0">
           <a:blip r:embed="rId2"/>
           <a:stretch>
-            <a:fillRect l="-996" r="-996"/>
+            <a:fillRect l="-993" r="-993"/>
           </a:stretch>
         </a:blipFill>
       </p:bgPr>
@@ -5307,7 +5508,7 @@
       </p:grpSpPr>
       <p:sp>
         <p:nvSpPr>
-          <p:cNvPr id="44" name="PlaceHolder 1"/>
+          <p:cNvPr id="46" name="PlaceHolder 1"/>
           <p:cNvSpPr>
             <a:spLocks noGrp="1"/>
           </p:cNvSpPr>
@@ -5317,8 +5518,8 @@
         </p:nvSpPr>
         <p:spPr>
           <a:xfrm>
-            <a:off x="8724960" y="365040"/>
-            <a:ext cx="2628000" cy="5810760"/>
+            <a:off x="838080" y="365040"/>
+            <a:ext cx="10513800" cy="1323720"/>
           </a:xfrm>
           <a:prstGeom prst="rect">
             <a:avLst/>
@@ -5329,7 +5530,7 @@
           </a:ln>
         </p:spPr>
         <p:txBody>
-          <a:bodyPr lIns="91440" rIns="91440" tIns="45720" bIns="45720" anchor="ctr" vert="eaVert">
+          <a:bodyPr lIns="91440" rIns="91440" tIns="45720" bIns="45720" anchor="ctr">
             <a:noAutofit/>
           </a:bodyPr>
           <a:p>
@@ -5366,206 +5567,7 @@
       </p:sp>
       <p:sp>
         <p:nvSpPr>
-          <p:cNvPr id="45" name="PlaceHolder 2"/>
-          <p:cNvSpPr>
-            <a:spLocks noGrp="1"/>
-          </p:cNvSpPr>
-          <p:nvPr>
-            <p:ph type="body"/>
-          </p:nvPr>
-        </p:nvSpPr>
-        <p:spPr>
-          <a:xfrm>
-            <a:off x="838080" y="365040"/>
-            <a:ext cx="7733160" cy="5810760"/>
-          </a:xfrm>
-          <a:prstGeom prst="rect">
-            <a:avLst/>
-          </a:prstGeom>
-          <a:noFill/>
-          <a:ln w="0">
-            <a:noFill/>
-          </a:ln>
-        </p:spPr>
-        <p:txBody>
-          <a:bodyPr lIns="91440" rIns="91440" tIns="45720" bIns="45720" anchor="t" vert="eaVert">
-            <a:noAutofit/>
-          </a:bodyPr>
-          <a:p>
-            <a:pPr marL="228600" indent="-228600" defTabSz="914400">
-              <a:lnSpc>
-                <a:spcPct val="90000"/>
-              </a:lnSpc>
-              <a:spcBef>
-                <a:spcPts val="1001"/>
-              </a:spcBef>
-              <a:buClr>
-                <a:srgbClr val="000000"/>
-              </a:buClr>
-              <a:buFont typeface="Arial"/>
-              <a:buChar char="•"/>
-            </a:pPr>
-            <a:r>
-              <a:rPr lang="pt-BR" sz="2800" b="0" u="none" strike="noStrike">
-                <a:solidFill>
-                  <a:schemeClr val="dk1"/>
-                </a:solidFill>
-                <a:effectLst/>
-                <a:uFillTx/>
-                <a:latin typeface="Calibri"/>
-              </a:rPr>
-              <a:t>Clique para editar os estilos de texto Mestres</a:t>
-            </a:r>
-            <a:endParaRPr lang="pt-BR" sz="2800" b="0" u="none" strike="noStrike">
-              <a:solidFill>
-                <a:srgbClr val="000000"/>
-              </a:solidFill>
-              <a:effectLst/>
-              <a:uFillTx/>
-              <a:latin typeface="Arial"/>
-            </a:endParaRPr>
-          </a:p>
-          <a:p>
-            <a:pPr marL="685800" lvl="1" indent="-228600" defTabSz="914400">
-              <a:lnSpc>
-                <a:spcPct val="90000"/>
-              </a:lnSpc>
-              <a:spcBef>
-                <a:spcPts val="499"/>
-              </a:spcBef>
-              <a:buClr>
-                <a:srgbClr val="000000"/>
-              </a:buClr>
-              <a:buFont typeface="Arial"/>
-              <a:buChar char="•"/>
-            </a:pPr>
-            <a:r>
-              <a:rPr lang="pt-BR" sz="2400" b="0" u="none" strike="noStrike">
-                <a:solidFill>
-                  <a:schemeClr val="dk1"/>
-                </a:solidFill>
-                <a:effectLst/>
-                <a:uFillTx/>
-                <a:latin typeface="Calibri"/>
-              </a:rPr>
-              <a:t>Segundo nível</a:t>
-            </a:r>
-            <a:endParaRPr lang="pt-BR" sz="2400" b="0" u="none" strike="noStrike">
-              <a:solidFill>
-                <a:srgbClr val="000000"/>
-              </a:solidFill>
-              <a:effectLst/>
-              <a:uFillTx/>
-              <a:latin typeface="Arial"/>
-            </a:endParaRPr>
-          </a:p>
-          <a:p>
-            <a:pPr marL="1143000" lvl="2" indent="-228600" defTabSz="914400">
-              <a:lnSpc>
-                <a:spcPct val="90000"/>
-              </a:lnSpc>
-              <a:spcBef>
-                <a:spcPts val="499"/>
-              </a:spcBef>
-              <a:buClr>
-                <a:srgbClr val="000000"/>
-              </a:buClr>
-              <a:buFont typeface="Arial"/>
-              <a:buChar char="•"/>
-            </a:pPr>
-            <a:r>
-              <a:rPr lang="pt-BR" sz="2000" b="0" u="none" strike="noStrike">
-                <a:solidFill>
-                  <a:schemeClr val="dk1"/>
-                </a:solidFill>
-                <a:effectLst/>
-                <a:uFillTx/>
-                <a:latin typeface="Calibri"/>
-              </a:rPr>
-              <a:t>Terceiro nível</a:t>
-            </a:r>
-            <a:endParaRPr lang="pt-BR" sz="2000" b="0" u="none" strike="noStrike">
-              <a:solidFill>
-                <a:srgbClr val="000000"/>
-              </a:solidFill>
-              <a:effectLst/>
-              <a:uFillTx/>
-              <a:latin typeface="Arial"/>
-            </a:endParaRPr>
-          </a:p>
-          <a:p>
-            <a:pPr marL="1600200" lvl="3" indent="-228600" defTabSz="914400">
-              <a:lnSpc>
-                <a:spcPct val="90000"/>
-              </a:lnSpc>
-              <a:spcBef>
-                <a:spcPts val="499"/>
-              </a:spcBef>
-              <a:buClr>
-                <a:srgbClr val="000000"/>
-              </a:buClr>
-              <a:buFont typeface="Arial"/>
-              <a:buChar char="•"/>
-            </a:pPr>
-            <a:r>
-              <a:rPr lang="pt-BR" sz="1800" b="0" u="none" strike="noStrike">
-                <a:solidFill>
-                  <a:schemeClr val="dk1"/>
-                </a:solidFill>
-                <a:effectLst/>
-                <a:uFillTx/>
-                <a:latin typeface="Calibri"/>
-              </a:rPr>
-              <a:t>Quarto nível</a:t>
-            </a:r>
-            <a:endParaRPr lang="pt-BR" sz="1800" b="0" u="none" strike="noStrike">
-              <a:solidFill>
-                <a:srgbClr val="000000"/>
-              </a:solidFill>
-              <a:effectLst/>
-              <a:uFillTx/>
-              <a:latin typeface="Arial"/>
-            </a:endParaRPr>
-          </a:p>
-          <a:p>
-            <a:pPr marL="2057400" lvl="4" indent="-228600" defTabSz="914400">
-              <a:lnSpc>
-                <a:spcPct val="90000"/>
-              </a:lnSpc>
-              <a:spcBef>
-                <a:spcPts val="499"/>
-              </a:spcBef>
-              <a:buClr>
-                <a:srgbClr val="000000"/>
-              </a:buClr>
-              <a:buFont typeface="Arial"/>
-              <a:buChar char="•"/>
-            </a:pPr>
-            <a:r>
-              <a:rPr lang="pt-BR" sz="1800" b="0" u="none" strike="noStrike">
-                <a:solidFill>
-                  <a:schemeClr val="dk1"/>
-                </a:solidFill>
-                <a:effectLst/>
-                <a:uFillTx/>
-                <a:latin typeface="Calibri"/>
-              </a:rPr>
-              <a:t>Quinto nível</a:t>
-            </a:r>
-            <a:endParaRPr lang="pt-BR" sz="1800" b="0" u="none" strike="noStrike">
-              <a:solidFill>
-                <a:srgbClr val="000000"/>
-              </a:solidFill>
-              <a:effectLst/>
-              <a:uFillTx/>
-              <a:latin typeface="Arial"/>
-            </a:endParaRPr>
-          </a:p>
-        </p:txBody>
-      </p:sp>
-      <p:sp>
-        <p:nvSpPr>
-          <p:cNvPr id="46" name="PlaceHolder 3"/>
+          <p:cNvPr id="47" name="PlaceHolder 2"/>
           <p:cNvSpPr>
             <a:spLocks noGrp="1"/>
           </p:cNvSpPr>
@@ -5576,7 +5578,7 @@
         <p:spPr>
           <a:xfrm>
             <a:off x="838080" y="6356520"/>
-            <a:ext cx="2742120" cy="363960"/>
+            <a:ext cx="2741400" cy="363240"/>
           </a:xfrm>
           <a:prstGeom prst="rect">
             <a:avLst/>
@@ -5647,7 +5649,7 @@
       </p:sp>
       <p:sp>
         <p:nvSpPr>
-          <p:cNvPr id="47" name="PlaceHolder 4"/>
+          <p:cNvPr id="48" name="PlaceHolder 3"/>
           <p:cNvSpPr>
             <a:spLocks noGrp="1"/>
           </p:cNvSpPr>
@@ -5658,7 +5660,7 @@
         <p:spPr>
           <a:xfrm>
             <a:off x="4038480" y="6356520"/>
-            <a:ext cx="4113720" cy="363960"/>
+            <a:ext cx="4113000" cy="363240"/>
           </a:xfrm>
           <a:prstGeom prst="rect">
             <a:avLst/>
@@ -5725,7 +5727,7 @@
       </p:sp>
       <p:sp>
         <p:nvSpPr>
-          <p:cNvPr id="48" name="PlaceHolder 5"/>
+          <p:cNvPr id="49" name="PlaceHolder 4"/>
           <p:cNvSpPr>
             <a:spLocks noGrp="1"/>
           </p:cNvSpPr>
@@ -5736,7 +5738,7 @@
         <p:spPr>
           <a:xfrm>
             <a:off x="8610480" y="6356520"/>
-            <a:ext cx="2742120" cy="363960"/>
+            <a:ext cx="2741400" cy="363240"/>
           </a:xfrm>
           <a:prstGeom prst="rect">
             <a:avLst/>
@@ -5781,7 +5783,7 @@
                 <a:tab algn="l" pos="0"/>
               </a:tabLst>
             </a:pPr>
-            <a:fld id="{55DC0C14-D31F-4579-8451-B751A6DC91E4}" type="slidenum">
+            <a:fld id="{DBA024C3-4021-480E-A708-CBBA60B979F7}" type="slidenum">
               <a:rPr lang="pt-BR" sz="1200" b="0" u="none" strike="noStrike">
                 <a:solidFill>
                   <a:schemeClr val="dk1">
@@ -5876,7 +5878,7 @@
         <p:spPr>
           <a:xfrm>
             <a:off x="-40320" y="0"/>
-            <a:ext cx="12270600" cy="6904440"/>
+            <a:ext cx="12269880" cy="6903720"/>
           </a:xfrm>
           <a:prstGeom prst="rect">
             <a:avLst/>
@@ -5896,7 +5898,7 @@
         <p:spPr>
           <a:xfrm>
             <a:off x="8097480" y="997560"/>
-            <a:ext cx="3551040" cy="1065240"/>
+            <a:ext cx="3550320" cy="1065240"/>
           </a:xfrm>
           <a:prstGeom prst="rect">
             <a:avLst/>
@@ -5954,7 +5956,7 @@
         <p:spPr>
           <a:xfrm>
             <a:off x="7867080" y="2820240"/>
-            <a:ext cx="4012200" cy="577080"/>
+            <a:ext cx="4011480" cy="577080"/>
           </a:xfrm>
           <a:prstGeom prst="rect">
             <a:avLst/>
@@ -6015,7 +6017,7 @@
         <p:spPr>
           <a:xfrm>
             <a:off x="695160" y="2619000"/>
-            <a:ext cx="6548760" cy="846720"/>
+            <a:ext cx="6548040" cy="846000"/>
           </a:xfrm>
           <a:prstGeom prst="rect">
             <a:avLst/>
@@ -6035,7 +6037,7 @@
         <p:spPr>
           <a:xfrm>
             <a:off x="7867080" y="4155480"/>
-            <a:ext cx="4012200" cy="1064520"/>
+            <a:ext cx="4011480" cy="1064520"/>
           </a:xfrm>
           <a:prstGeom prst="rect">
             <a:avLst/>
@@ -6147,7 +6149,7 @@
         <p:spPr>
           <a:xfrm>
             <a:off x="7983720" y="5362200"/>
-            <a:ext cx="4012200" cy="333360"/>
+            <a:ext cx="4011480" cy="332640"/>
           </a:xfrm>
           <a:prstGeom prst="rect">
             <a:avLst/>
@@ -6222,8 +6224,8 @@
         </p:nvSpPr>
         <p:spPr>
           <a:xfrm>
-            <a:off x="1409760" y="608760"/>
-            <a:ext cx="2909880" cy="470880"/>
+            <a:off x="1620000" y="608760"/>
+            <a:ext cx="1017720" cy="470160"/>
           </a:xfrm>
           <a:prstGeom prst="rect">
             <a:avLst/>
@@ -6258,6 +6260,343 @@
                 <a:uFillTx/>
                 <a:latin typeface="Kanit"/>
               </a:rPr>
+              <a:t>DADOS</a:t>
+            </a:r>
+            <a:endParaRPr lang="pt-BR" sz="2000" b="0" u="none" strike="noStrike">
+              <a:solidFill>
+                <a:srgbClr val="000000"/>
+              </a:solidFill>
+              <a:effectLst/>
+              <a:uFillTx/>
+              <a:latin typeface="Arial"/>
+            </a:endParaRPr>
+          </a:p>
+        </p:txBody>
+      </p:sp>
+      <p:sp>
+        <p:nvSpPr>
+          <p:cNvPr id="88" name=""/>
+          <p:cNvSpPr/>
+          <p:nvPr/>
+        </p:nvSpPr>
+        <p:spPr>
+          <a:xfrm>
+            <a:off x="1620000" y="1008000"/>
+            <a:ext cx="8475840" cy="470160"/>
+          </a:xfrm>
+          <a:prstGeom prst="rect">
+            <a:avLst/>
+          </a:prstGeom>
+          <a:noFill/>
+          <a:ln w="0">
+            <a:noFill/>
+          </a:ln>
+        </p:spPr>
+        <p:style>
+          <a:lnRef idx="0"/>
+          <a:fillRef idx="0"/>
+          <a:effectRef idx="0"/>
+          <a:fontRef idx="minor"/>
+        </p:style>
+        <p:txBody>
+          <a:bodyPr wrap="none" lIns="90000" rIns="90000" tIns="45000" bIns="45000" anchor="t">
+            <a:spAutoFit/>
+          </a:bodyPr>
+          <a:p>
+            <a:pPr>
+              <a:lnSpc>
+                <a:spcPct val="100000"/>
+              </a:lnSpc>
+            </a:pPr>
+            <a:r>
+              <a:rPr lang="pt-BR" sz="2000" b="0" u="none" strike="noStrike">
+                <a:solidFill>
+                  <a:srgbClr val="000000"/>
+                </a:solidFill>
+                <a:effectLst/>
+                <a:uFillTx/>
+                <a:latin typeface="Kanit"/>
+              </a:rPr>
+              <a:t>PERFIL DA RENDA NA BASE DE DADOS: ANTES DO VALOR DO CARTÃO CSF</a:t>
+            </a:r>
+            <a:endParaRPr lang="pt-BR" sz="2000" b="0" u="none" strike="noStrike">
+              <a:solidFill>
+                <a:srgbClr val="000000"/>
+              </a:solidFill>
+              <a:effectLst/>
+              <a:uFillTx/>
+              <a:latin typeface="Arial"/>
+            </a:endParaRPr>
+          </a:p>
+        </p:txBody>
+      </p:sp>
+      <p:pic>
+        <p:nvPicPr>
+          <p:cNvPr id="89" name=""/>
+          <p:cNvPicPr/>
+          <p:nvPr/>
+        </p:nvPicPr>
+        <p:blipFill>
+          <a:blip r:embed="rId1"/>
+          <a:stretch/>
+        </p:blipFill>
+        <p:spPr>
+          <a:xfrm>
+            <a:off x="2438280" y="1359000"/>
+            <a:ext cx="7314120" cy="4570920"/>
+          </a:xfrm>
+          <a:prstGeom prst="rect">
+            <a:avLst/>
+          </a:prstGeom>
+          <a:noFill/>
+          <a:ln w="0">
+            <a:noFill/>
+          </a:ln>
+        </p:spPr>
+      </p:pic>
+    </p:spTree>
+  </p:cSld>
+  <mc:AlternateContent>
+    <mc:Choice Requires="p14">
+      <p:transition spd="slow" p14:dur="2000"/>
+    </mc:Choice>
+    <mc:Fallback>
+      <p:transition spd="slow"/>
+    </mc:Fallback>
+  </mc:AlternateContent>
+</p:sld>
+</file>
+
+<file path=ppt/slides/slide11.xml><?xml version="1.0" encoding="utf-8"?>
+<p:sld xmlns:a="http://schemas.openxmlformats.org/drawingml/2006/main" xmlns:p="http://schemas.openxmlformats.org/presentationml/2006/main" xmlns:r="http://schemas.openxmlformats.org/officeDocument/2006/relationships" xmlns:p14="http://schemas.microsoft.com/office/powerpoint/2010/main" xmlns:p15="http://schemas.microsoft.com/office/powerpoint/2012/main" xmlns:mc="http://schemas.openxmlformats.org/markup-compatibility/2006">
+  <p:cSld>
+    <p:spTree>
+      <p:nvGrpSpPr>
+        <p:cNvPr id="1" name=""/>
+        <p:cNvGrpSpPr/>
+        <p:nvPr/>
+      </p:nvGrpSpPr>
+      <p:grpSpPr>
+        <a:xfrm>
+          <a:off x="0" y="0"/>
+          <a:ext cx="0" cy="0"/>
+          <a:chOff x="0" y="0"/>
+          <a:chExt cx="0" cy="0"/>
+        </a:xfrm>
+      </p:grpSpPr>
+      <p:sp>
+        <p:nvSpPr>
+          <p:cNvPr id="90" name=""/>
+          <p:cNvSpPr/>
+          <p:nvPr/>
+        </p:nvSpPr>
+        <p:spPr>
+          <a:xfrm>
+            <a:off x="1620000" y="608760"/>
+            <a:ext cx="1017720" cy="470160"/>
+          </a:xfrm>
+          <a:prstGeom prst="rect">
+            <a:avLst/>
+          </a:prstGeom>
+          <a:noFill/>
+          <a:ln w="0">
+            <a:noFill/>
+          </a:ln>
+        </p:spPr>
+        <p:style>
+          <a:lnRef idx="0"/>
+          <a:fillRef idx="0"/>
+          <a:effectRef idx="0"/>
+          <a:fontRef idx="minor"/>
+        </p:style>
+        <p:txBody>
+          <a:bodyPr wrap="none" lIns="90000" rIns="90000" tIns="45000" bIns="45000" anchor="t">
+            <a:spAutoFit/>
+          </a:bodyPr>
+          <a:p>
+            <a:pPr>
+              <a:lnSpc>
+                <a:spcPct val="100000"/>
+              </a:lnSpc>
+            </a:pPr>
+            <a:r>
+              <a:rPr lang="pt-BR" sz="2000" b="1" u="none" strike="noStrike">
+                <a:solidFill>
+                  <a:srgbClr val="000000"/>
+                </a:solidFill>
+                <a:effectLst/>
+                <a:uFillTx/>
+                <a:latin typeface="Kanit"/>
+              </a:rPr>
+              <a:t>DADOS</a:t>
+            </a:r>
+            <a:endParaRPr lang="pt-BR" sz="2000" b="0" u="none" strike="noStrike">
+              <a:solidFill>
+                <a:srgbClr val="000000"/>
+              </a:solidFill>
+              <a:effectLst/>
+              <a:uFillTx/>
+              <a:latin typeface="Arial"/>
+            </a:endParaRPr>
+          </a:p>
+        </p:txBody>
+      </p:sp>
+      <p:sp>
+        <p:nvSpPr>
+          <p:cNvPr id="91" name=""/>
+          <p:cNvSpPr/>
+          <p:nvPr/>
+        </p:nvSpPr>
+        <p:spPr>
+          <a:xfrm>
+            <a:off x="1620000" y="1008000"/>
+            <a:ext cx="8540640" cy="470160"/>
+          </a:xfrm>
+          <a:prstGeom prst="rect">
+            <a:avLst/>
+          </a:prstGeom>
+          <a:noFill/>
+          <a:ln w="0">
+            <a:noFill/>
+          </a:ln>
+        </p:spPr>
+        <p:style>
+          <a:lnRef idx="0"/>
+          <a:fillRef idx="0"/>
+          <a:effectRef idx="0"/>
+          <a:fontRef idx="minor"/>
+        </p:style>
+        <p:txBody>
+          <a:bodyPr wrap="none" lIns="90000" rIns="90000" tIns="45000" bIns="45000" anchor="t">
+            <a:spAutoFit/>
+          </a:bodyPr>
+          <a:p>
+            <a:pPr>
+              <a:lnSpc>
+                <a:spcPct val="100000"/>
+              </a:lnSpc>
+            </a:pPr>
+            <a:r>
+              <a:rPr lang="pt-BR" sz="2000" b="0" u="none" strike="noStrike">
+                <a:solidFill>
+                  <a:srgbClr val="000000"/>
+                </a:solidFill>
+                <a:effectLst/>
+                <a:uFillTx/>
+                <a:latin typeface="Kanit"/>
+                <a:ea typeface="Microsoft YaHei"/>
+              </a:rPr>
+              <a:t>PERFIL DA RENDA NA BASE DE DADOS: DEPOIS DO VALOR DO CARTÃO CSF</a:t>
+            </a:r>
+            <a:endParaRPr lang="pt-BR" sz="2000" b="0" u="none" strike="noStrike">
+              <a:solidFill>
+                <a:srgbClr val="000000"/>
+              </a:solidFill>
+              <a:effectLst/>
+              <a:uFillTx/>
+              <a:latin typeface="Arial"/>
+            </a:endParaRPr>
+          </a:p>
+        </p:txBody>
+      </p:sp>
+      <p:pic>
+        <p:nvPicPr>
+          <p:cNvPr id="92" name=""/>
+          <p:cNvPicPr/>
+          <p:nvPr/>
+        </p:nvPicPr>
+        <p:blipFill>
+          <a:blip r:embed="rId1"/>
+          <a:stretch/>
+        </p:blipFill>
+        <p:spPr>
+          <a:xfrm>
+            <a:off x="2438280" y="1359000"/>
+            <a:ext cx="7314120" cy="4570920"/>
+          </a:xfrm>
+          <a:prstGeom prst="rect">
+            <a:avLst/>
+          </a:prstGeom>
+          <a:noFill/>
+          <a:ln w="0">
+            <a:noFill/>
+          </a:ln>
+        </p:spPr>
+      </p:pic>
+    </p:spTree>
+  </p:cSld>
+  <mc:AlternateContent>
+    <mc:Choice Requires="p14">
+      <p:transition spd="slow" p14:dur="2000"/>
+    </mc:Choice>
+    <mc:Fallback>
+      <p:transition spd="slow"/>
+    </mc:Fallback>
+  </mc:AlternateContent>
+</p:sld>
+</file>
+
+<file path=ppt/slides/slide12.xml><?xml version="1.0" encoding="utf-8"?>
+<p:sld xmlns:a="http://schemas.openxmlformats.org/drawingml/2006/main" xmlns:p="http://schemas.openxmlformats.org/presentationml/2006/main" xmlns:r="http://schemas.openxmlformats.org/officeDocument/2006/relationships" xmlns:p14="http://schemas.microsoft.com/office/powerpoint/2010/main" xmlns:p15="http://schemas.microsoft.com/office/powerpoint/2012/main" xmlns:mc="http://schemas.openxmlformats.org/markup-compatibility/2006">
+  <p:cSld>
+    <p:spTree>
+      <p:nvGrpSpPr>
+        <p:cNvPr id="1" name=""/>
+        <p:cNvGrpSpPr/>
+        <p:nvPr/>
+      </p:nvGrpSpPr>
+      <p:grpSpPr>
+        <a:xfrm>
+          <a:off x="0" y="0"/>
+          <a:ext cx="0" cy="0"/>
+          <a:chOff x="0" y="0"/>
+          <a:chExt cx="0" cy="0"/>
+        </a:xfrm>
+      </p:grpSpPr>
+      <p:sp>
+        <p:nvSpPr>
+          <p:cNvPr id="93" name=""/>
+          <p:cNvSpPr/>
+          <p:nvPr/>
+        </p:nvSpPr>
+        <p:spPr>
+          <a:xfrm>
+            <a:off x="1409760" y="608760"/>
+            <a:ext cx="2909160" cy="470160"/>
+          </a:xfrm>
+          <a:prstGeom prst="rect">
+            <a:avLst/>
+          </a:prstGeom>
+          <a:noFill/>
+          <a:ln w="0">
+            <a:noFill/>
+          </a:ln>
+        </p:spPr>
+        <p:style>
+          <a:lnRef idx="0"/>
+          <a:fillRef idx="0"/>
+          <a:effectRef idx="0"/>
+          <a:fontRef idx="minor"/>
+        </p:style>
+        <p:txBody>
+          <a:bodyPr wrap="none" lIns="90000" rIns="90000" tIns="45000" bIns="45000" anchor="t">
+            <a:spAutoFit/>
+          </a:bodyPr>
+          <a:p>
+            <a:pPr>
+              <a:lnSpc>
+                <a:spcPct val="100000"/>
+              </a:lnSpc>
+            </a:pPr>
+            <a:r>
+              <a:rPr lang="pt-BR" sz="2000" b="1" u="none" strike="noStrike">
+                <a:solidFill>
+                  <a:srgbClr val="000000"/>
+                </a:solidFill>
+                <a:effectLst/>
+                <a:uFillTx/>
+                <a:latin typeface="Kanit"/>
+              </a:rPr>
               <a:t>VARIÁVEIS UTILIZADAS</a:t>
             </a:r>
             <a:endParaRPr lang="pt-BR" sz="2000" b="0" u="none" strike="noStrike">
@@ -6273,7 +6612,7 @@
       </p:sp>
       <p:graphicFrame>
         <p:nvGraphicFramePr>
-          <p:cNvPr id="88" name=""/>
+          <p:cNvPr id="94" name=""/>
           <p:cNvGraphicFramePr/>
           <p:nvPr/>
         </p:nvGraphicFramePr>
@@ -7404,7 +7743,7 @@
 </p:sld>
 </file>
 
-<file path=ppt/slides/slide11.xml><?xml version="1.0" encoding="utf-8"?>
+<file path=ppt/slides/slide13.xml><?xml version="1.0" encoding="utf-8"?>
 <p:sld xmlns:a="http://schemas.openxmlformats.org/drawingml/2006/main" xmlns:p="http://schemas.openxmlformats.org/presentationml/2006/main" xmlns:r="http://schemas.openxmlformats.org/officeDocument/2006/relationships" xmlns:p14="http://schemas.microsoft.com/office/powerpoint/2010/main" xmlns:p15="http://schemas.microsoft.com/office/powerpoint/2012/main" xmlns:mc="http://schemas.openxmlformats.org/markup-compatibility/2006">
   <p:cSld>
     <p:spTree>
@@ -7423,14 +7762,14 @@
       </p:grpSpPr>
       <p:sp>
         <p:nvSpPr>
-          <p:cNvPr id="89" name="CaixaDeTexto 5"/>
+          <p:cNvPr id="95" name="CaixaDeTexto 5"/>
           <p:cNvSpPr/>
           <p:nvPr/>
         </p:nvSpPr>
         <p:spPr>
           <a:xfrm>
             <a:off x="903600" y="3140280"/>
-            <a:ext cx="10384560" cy="577440"/>
+            <a:ext cx="10383840" cy="577440"/>
           </a:xfrm>
           <a:prstGeom prst="rect">
             <a:avLst/>
@@ -7507,7 +7846,7 @@
 </p:sld>
 </file>
 
-<file path=ppt/slides/slide12.xml><?xml version="1.0" encoding="utf-8"?>
+<file path=ppt/slides/slide14.xml><?xml version="1.0" encoding="utf-8"?>
 <p:sld xmlns:a="http://schemas.openxmlformats.org/drawingml/2006/main" xmlns:p="http://schemas.openxmlformats.org/presentationml/2006/main" xmlns:r="http://schemas.openxmlformats.org/officeDocument/2006/relationships" xmlns:p14="http://schemas.microsoft.com/office/powerpoint/2010/main" xmlns:p15="http://schemas.microsoft.com/office/powerpoint/2012/main" xmlns:mc="http://schemas.openxmlformats.org/markup-compatibility/2006">
   <p:cSld>
     <p:spTree>
@@ -7526,13 +7865,13 @@
       </p:grpSpPr>
       <p:graphicFrame>
         <p:nvGraphicFramePr>
-          <p:cNvPr id="90" name=""/>
+          <p:cNvPr id="96" name=""/>
           <p:cNvGraphicFramePr/>
           <p:nvPr/>
         </p:nvGraphicFramePr>
         <p:xfrm>
-          <a:off x="474480" y="1800000"/>
-          <a:ext cx="11246760" cy="3059640"/>
+          <a:off x="1060920" y="2473200"/>
+          <a:ext cx="11246760" cy="2910240"/>
         </p:xfrm>
         <a:graphic>
           <a:graphicData uri="http://schemas.openxmlformats.org/drawingml/2006/table">
@@ -7547,7 +7886,6 @@
                 <a:gridCol w="1174320"/>
                 <a:gridCol w="1423440"/>
                 <a:gridCol w="1174320"/>
-                <a:gridCol w="1176840"/>
               </a:tblGrid>
               <a:tr h="1047240">
                 <a:tc>
@@ -7674,7 +8012,7 @@
                           <a:uFillTx/>
                           <a:latin typeface="Maitree"/>
                         </a:rPr>
-                        <a:t>Familias em IA grave sem o Cartão</a:t>
+                        <a:t>Famílias em IA grave sem o Cartão</a:t>
                       </a:r>
                       <a:endParaRPr lang="pt-BR" sz="1600" b="0" u="none" strike="noStrike">
                         <a:solidFill>
@@ -7734,7 +8072,7 @@
                           <a:uFillTx/>
                           <a:latin typeface="Maitree"/>
                         </a:rPr>
-                        <a:t>Proporção sem Cartão</a:t>
+                        <a:t>Proporção de famílias em IA grave sem Cartão</a:t>
                       </a:r>
                       <a:endParaRPr lang="pt-BR" sz="1600" b="0" u="none" strike="noStrike">
                         <a:solidFill>
@@ -7794,7 +8132,7 @@
                           <a:uFillTx/>
                           <a:latin typeface="Maitree"/>
                         </a:rPr>
-                        <a:t>Familias em IA grave com o Cartão</a:t>
+                        <a:t>Famílias em IA grave com o Cartão</a:t>
                       </a:r>
                       <a:endParaRPr lang="pt-BR" sz="1600" b="0" u="none" strike="noStrike">
                         <a:solidFill>
@@ -7853,8 +8191,20 @@
                           <a:effectLst/>
                           <a:uFillTx/>
                           <a:latin typeface="Maitree"/>
+                          <a:ea typeface="Microsoft YaHei"/>
                         </a:rPr>
-                        <a:t>Proporção com Cartão</a:t>
+                        <a:t>Proporção</a:t>
+                      </a:r>
+                      <a:r>
+                        <a:rPr lang="pt-BR" sz="1600" b="0" u="none" strike="noStrike">
+                          <a:solidFill>
+                            <a:srgbClr val="000000"/>
+                          </a:solidFill>
+                          <a:effectLst/>
+                          <a:uFillTx/>
+                          <a:latin typeface="Maitree"/>
+                        </a:rPr>
+                        <a:t> de famílias em IA grave com Cartão</a:t>
                       </a:r>
                       <a:endParaRPr lang="pt-BR" sz="1600" b="0" u="none" strike="noStrike">
                         <a:solidFill>
@@ -8014,66 +8364,6 @@
                     <a:noFill/>
                   </a:tcPr>
                 </a:tc>
-                <a:tc>
-                  <a:txBody>
-                    <a:bodyPr lIns="36000" rIns="36000" tIns="36000" bIns="36000" anchor="ctr">
-                      <a:noAutofit/>
-                    </a:bodyPr>
-                    <a:p>
-                      <a:pPr algn="ctr">
-                        <a:lnSpc>
-                          <a:spcPct val="100000"/>
-                        </a:lnSpc>
-                      </a:pPr>
-                      <a:r>
-                        <a:rPr lang="pt-BR" sz="1600" b="0" u="none" strike="noStrike">
-                          <a:solidFill>
-                            <a:srgbClr val="000000"/>
-                          </a:solidFill>
-                          <a:effectLst/>
-                          <a:uFillTx/>
-                          <a:latin typeface="Maitree"/>
-                        </a:rPr>
-                        <a:t>Sensibilidade do modelo</a:t>
-                      </a:r>
-                      <a:endParaRPr lang="pt-BR" sz="1600" b="0" u="none" strike="noStrike">
-                        <a:solidFill>
-                          <a:srgbClr val="000000"/>
-                        </a:solidFill>
-                        <a:effectLst/>
-                        <a:uFillTx/>
-                        <a:latin typeface="Arial"/>
-                      </a:endParaRPr>
-                    </a:p>
-                  </a:txBody>
-                  <a:tcPr anchor="ctr" marL="36000" marR="36000" marT="36000" marB="36000">
-                    <a:lnL w="7200">
-                      <a:solidFill>
-                        <a:srgbClr val="000000"/>
-                      </a:solidFill>
-                      <a:prstDash val="solid"/>
-                    </a:lnL>
-                    <a:lnR w="7200">
-                      <a:solidFill>
-                        <a:srgbClr val="000000"/>
-                      </a:solidFill>
-                      <a:prstDash val="solid"/>
-                    </a:lnR>
-                    <a:lnT w="7200">
-                      <a:solidFill>
-                        <a:srgbClr val="000000"/>
-                      </a:solidFill>
-                      <a:prstDash val="solid"/>
-                    </a:lnT>
-                    <a:lnB w="7200">
-                      <a:solidFill>
-                        <a:srgbClr val="000000"/>
-                      </a:solidFill>
-                      <a:prstDash val="solid"/>
-                    </a:lnB>
-                    <a:noFill/>
-                  </a:tcPr>
-                </a:tc>
               </a:tr>
               <a:tr h="621000">
                 <a:tc>
@@ -8096,7 +8386,7 @@
                           <a:uFillTx/>
                           <a:latin typeface="Maitree"/>
                         </a:rPr>
-                        <a:t>Ceara (modelo 1)</a:t>
+                        <a:t>Ceará</a:t>
                       </a:r>
                       <a:endParaRPr lang="pt-BR" sz="1800" b="0" u="none" strike="noStrike">
                         <a:solidFill>
@@ -8216,548 +8506,6 @@
                           <a:uFillTx/>
                           <a:latin typeface="Maitree"/>
                         </a:rPr>
-                        <a:t>36764</a:t>
-                      </a:r>
-                      <a:endParaRPr lang="pt-BR" sz="1800" b="0" u="none" strike="noStrike">
-                        <a:solidFill>
-                          <a:srgbClr val="000000"/>
-                        </a:solidFill>
-                        <a:effectLst/>
-                        <a:uFillTx/>
-                        <a:latin typeface="Arial"/>
-                      </a:endParaRPr>
-                    </a:p>
-                  </a:txBody>
-                  <a:tcPr anchor="t" marL="36000" marR="36000" marT="36000" marB="36000">
-                    <a:lnL w="7200">
-                      <a:solidFill>
-                        <a:srgbClr val="000000"/>
-                      </a:solidFill>
-                      <a:prstDash val="solid"/>
-                    </a:lnL>
-                    <a:lnR w="7200">
-                      <a:solidFill>
-                        <a:srgbClr val="000000"/>
-                      </a:solidFill>
-                      <a:prstDash val="solid"/>
-                    </a:lnR>
-                    <a:lnT w="7200">
-                      <a:solidFill>
-                        <a:srgbClr val="000000"/>
-                      </a:solidFill>
-                      <a:prstDash val="solid"/>
-                    </a:lnT>
-                    <a:lnB w="7200">
-                      <a:solidFill>
-                        <a:srgbClr val="000000"/>
-                      </a:solidFill>
-                      <a:prstDash val="solid"/>
-                    </a:lnB>
-                    <a:noFill/>
-                  </a:tcPr>
-                </a:tc>
-                <a:tc>
-                  <a:txBody>
-                    <a:bodyPr lIns="36000" rIns="36000" tIns="36000" bIns="36000" anchor="t">
-                      <a:noAutofit/>
-                    </a:bodyPr>
-                    <a:p>
-                      <a:pPr algn="r">
-                        <a:lnSpc>
-                          <a:spcPct val="100000"/>
-                        </a:lnSpc>
-                      </a:pPr>
-                      <a:r>
-                        <a:rPr lang="pt-BR" sz="1800" b="0" u="none" strike="noStrike">
-                          <a:solidFill>
-                            <a:srgbClr val="000000"/>
-                          </a:solidFill>
-                          <a:effectLst/>
-                          <a:uFillTx/>
-                          <a:latin typeface="Maitree"/>
-                        </a:rPr>
-                        <a:t>77,4%</a:t>
-                      </a:r>
-                      <a:endParaRPr lang="pt-BR" sz="1800" b="0" u="none" strike="noStrike">
-                        <a:solidFill>
-                          <a:srgbClr val="000000"/>
-                        </a:solidFill>
-                        <a:effectLst/>
-                        <a:uFillTx/>
-                        <a:latin typeface="Arial"/>
-                      </a:endParaRPr>
-                    </a:p>
-                  </a:txBody>
-                  <a:tcPr anchor="t" marL="36000" marR="36000" marT="36000" marB="36000">
-                    <a:lnL w="7200">
-                      <a:solidFill>
-                        <a:srgbClr val="000000"/>
-                      </a:solidFill>
-                      <a:prstDash val="solid"/>
-                    </a:lnL>
-                    <a:lnR w="7200">
-                      <a:solidFill>
-                        <a:srgbClr val="000000"/>
-                      </a:solidFill>
-                      <a:prstDash val="solid"/>
-                    </a:lnR>
-                    <a:lnT w="7200">
-                      <a:solidFill>
-                        <a:srgbClr val="000000"/>
-                      </a:solidFill>
-                      <a:prstDash val="solid"/>
-                    </a:lnT>
-                    <a:lnB w="7200">
-                      <a:solidFill>
-                        <a:srgbClr val="000000"/>
-                      </a:solidFill>
-                      <a:prstDash val="solid"/>
-                    </a:lnB>
-                    <a:noFill/>
-                  </a:tcPr>
-                </a:tc>
-                <a:tc>
-                  <a:txBody>
-                    <a:bodyPr lIns="36000" rIns="36000" tIns="36000" bIns="36000" anchor="t">
-                      <a:noAutofit/>
-                    </a:bodyPr>
-                    <a:p>
-                      <a:pPr algn="r">
-                        <a:lnSpc>
-                          <a:spcPct val="100000"/>
-                        </a:lnSpc>
-                      </a:pPr>
-                      <a:r>
-                        <a:rPr lang="pt-BR" sz="1800" b="0" u="none" strike="noStrike">
-                          <a:solidFill>
-                            <a:srgbClr val="000000"/>
-                          </a:solidFill>
-                          <a:effectLst/>
-                          <a:uFillTx/>
-                          <a:latin typeface="Maitree"/>
-                        </a:rPr>
-                        <a:t>31021</a:t>
-                      </a:r>
-                      <a:endParaRPr lang="pt-BR" sz="1800" b="0" u="none" strike="noStrike">
-                        <a:solidFill>
-                          <a:srgbClr val="000000"/>
-                        </a:solidFill>
-                        <a:effectLst/>
-                        <a:uFillTx/>
-                        <a:latin typeface="Arial"/>
-                      </a:endParaRPr>
-                    </a:p>
-                  </a:txBody>
-                  <a:tcPr anchor="t" marL="36000" marR="36000" marT="36000" marB="36000">
-                    <a:lnL w="7200">
-                      <a:solidFill>
-                        <a:srgbClr val="000000"/>
-                      </a:solidFill>
-                      <a:prstDash val="solid"/>
-                    </a:lnL>
-                    <a:lnR w="7200">
-                      <a:solidFill>
-                        <a:srgbClr val="000000"/>
-                      </a:solidFill>
-                      <a:prstDash val="solid"/>
-                    </a:lnR>
-                    <a:lnT w="7200">
-                      <a:solidFill>
-                        <a:srgbClr val="000000"/>
-                      </a:solidFill>
-                      <a:prstDash val="solid"/>
-                    </a:lnT>
-                    <a:lnB w="7200">
-                      <a:solidFill>
-                        <a:srgbClr val="000000"/>
-                      </a:solidFill>
-                      <a:prstDash val="solid"/>
-                    </a:lnB>
-                    <a:noFill/>
-                  </a:tcPr>
-                </a:tc>
-                <a:tc>
-                  <a:txBody>
-                    <a:bodyPr lIns="36000" rIns="36000" tIns="36000" bIns="36000" anchor="t">
-                      <a:noAutofit/>
-                    </a:bodyPr>
-                    <a:p>
-                      <a:pPr algn="r">
-                        <a:lnSpc>
-                          <a:spcPct val="100000"/>
-                        </a:lnSpc>
-                      </a:pPr>
-                      <a:r>
-                        <a:rPr lang="pt-BR" sz="1800" b="0" u="none" strike="noStrike">
-                          <a:solidFill>
-                            <a:srgbClr val="000000"/>
-                          </a:solidFill>
-                          <a:effectLst/>
-                          <a:uFillTx/>
-                          <a:latin typeface="Maitree"/>
-                        </a:rPr>
-                        <a:t>65,3%</a:t>
-                      </a:r>
-                      <a:endParaRPr lang="pt-BR" sz="1800" b="0" u="none" strike="noStrike">
-                        <a:solidFill>
-                          <a:srgbClr val="000000"/>
-                        </a:solidFill>
-                        <a:effectLst/>
-                        <a:uFillTx/>
-                        <a:latin typeface="Arial"/>
-                      </a:endParaRPr>
-                    </a:p>
-                  </a:txBody>
-                  <a:tcPr anchor="t" marL="36000" marR="36000" marT="36000" marB="36000">
-                    <a:lnL w="7200">
-                      <a:solidFill>
-                        <a:srgbClr val="000000"/>
-                      </a:solidFill>
-                      <a:prstDash val="solid"/>
-                    </a:lnL>
-                    <a:lnR w="7200">
-                      <a:solidFill>
-                        <a:srgbClr val="000000"/>
-                      </a:solidFill>
-                      <a:prstDash val="solid"/>
-                    </a:lnR>
-                    <a:lnT w="7200">
-                      <a:solidFill>
-                        <a:srgbClr val="000000"/>
-                      </a:solidFill>
-                      <a:prstDash val="solid"/>
-                    </a:lnT>
-                    <a:lnB w="7200">
-                      <a:solidFill>
-                        <a:srgbClr val="000000"/>
-                      </a:solidFill>
-                      <a:prstDash val="solid"/>
-                    </a:lnB>
-                    <a:noFill/>
-                  </a:tcPr>
-                </a:tc>
-                <a:tc>
-                  <a:txBody>
-                    <a:bodyPr lIns="36000" rIns="36000" tIns="36000" bIns="36000" anchor="t">
-                      <a:noAutofit/>
-                    </a:bodyPr>
-                    <a:p>
-                      <a:pPr algn="r">
-                        <a:lnSpc>
-                          <a:spcPct val="100000"/>
-                        </a:lnSpc>
-                      </a:pPr>
-                      <a:r>
-                        <a:rPr lang="pt-BR" sz="1800" b="0" u="none" strike="noStrike">
-                          <a:solidFill>
-                            <a:srgbClr val="000000"/>
-                          </a:solidFill>
-                          <a:effectLst/>
-                          <a:uFillTx/>
-                          <a:latin typeface="Maitree"/>
-                        </a:rPr>
-                        <a:t>12</a:t>
-                      </a:r>
-                      <a:endParaRPr lang="pt-BR" sz="1800" b="0" u="none" strike="noStrike">
-                        <a:solidFill>
-                          <a:srgbClr val="000000"/>
-                        </a:solidFill>
-                        <a:effectLst/>
-                        <a:uFillTx/>
-                        <a:latin typeface="Arial"/>
-                      </a:endParaRPr>
-                    </a:p>
-                  </a:txBody>
-                  <a:tcPr anchor="t" marL="36000" marR="36000" marT="36000" marB="36000">
-                    <a:lnL w="7200">
-                      <a:solidFill>
-                        <a:srgbClr val="000000"/>
-                      </a:solidFill>
-                      <a:prstDash val="solid"/>
-                    </a:lnL>
-                    <a:lnR w="7200">
-                      <a:solidFill>
-                        <a:srgbClr val="000000"/>
-                      </a:solidFill>
-                      <a:prstDash val="solid"/>
-                    </a:lnR>
-                    <a:lnT w="7200">
-                      <a:solidFill>
-                        <a:srgbClr val="000000"/>
-                      </a:solidFill>
-                      <a:prstDash val="solid"/>
-                    </a:lnT>
-                    <a:lnB w="7200">
-                      <a:solidFill>
-                        <a:srgbClr val="000000"/>
-                      </a:solidFill>
-                      <a:prstDash val="solid"/>
-                    </a:lnB>
-                    <a:noFill/>
-                  </a:tcPr>
-                </a:tc>
-                <a:tc>
-                  <a:txBody>
-                    <a:bodyPr lIns="36000" rIns="36000" tIns="36000" bIns="36000" anchor="t">
-                      <a:noAutofit/>
-                    </a:bodyPr>
-                    <a:p>
-                      <a:pPr algn="r">
-                        <a:lnSpc>
-                          <a:spcPct val="100000"/>
-                        </a:lnSpc>
-                      </a:pPr>
-                      <a:r>
-                        <a:rPr lang="pt-BR" sz="1800" b="1" i="1" u="none" strike="noStrike">
-                          <a:solidFill>
-                            <a:srgbClr val="000000"/>
-                          </a:solidFill>
-                          <a:effectLst/>
-                          <a:uFillTx/>
-                          <a:latin typeface="Maitree"/>
-                        </a:rPr>
-                        <a:t>16%</a:t>
-                      </a:r>
-                      <a:endParaRPr lang="pt-BR" sz="1800" b="0" u="none" strike="noStrike">
-                        <a:solidFill>
-                          <a:srgbClr val="000000"/>
-                        </a:solidFill>
-                        <a:effectLst/>
-                        <a:uFillTx/>
-                        <a:latin typeface="Arial"/>
-                      </a:endParaRPr>
-                    </a:p>
-                  </a:txBody>
-                  <a:tcPr anchor="t" marL="36000" marR="36000" marT="36000" marB="36000">
-                    <a:lnL w="7200">
-                      <a:solidFill>
-                        <a:srgbClr val="000000"/>
-                      </a:solidFill>
-                      <a:prstDash val="solid"/>
-                    </a:lnL>
-                    <a:lnR w="7200">
-                      <a:solidFill>
-                        <a:srgbClr val="000000"/>
-                      </a:solidFill>
-                      <a:prstDash val="solid"/>
-                    </a:lnR>
-                    <a:lnT w="7200">
-                      <a:solidFill>
-                        <a:srgbClr val="000000"/>
-                      </a:solidFill>
-                      <a:prstDash val="solid"/>
-                    </a:lnT>
-                    <a:lnB w="7200">
-                      <a:solidFill>
-                        <a:srgbClr val="000000"/>
-                      </a:solidFill>
-                      <a:prstDash val="solid"/>
-                    </a:lnB>
-                    <a:noFill/>
-                  </a:tcPr>
-                </a:tc>
-                <a:tc>
-                  <a:txBody>
-                    <a:bodyPr lIns="36000" rIns="36000" tIns="36000" bIns="36000" anchor="t">
-                      <a:noAutofit/>
-                    </a:bodyPr>
-                    <a:p>
-                      <a:pPr algn="r">
-                        <a:lnSpc>
-                          <a:spcPct val="100000"/>
-                        </a:lnSpc>
-                      </a:pPr>
-                      <a:r>
-                        <a:rPr lang="pt-BR" sz="1800" b="0" u="none" strike="noStrike">
-                          <a:solidFill>
-                            <a:srgbClr val="000000"/>
-                          </a:solidFill>
-                          <a:effectLst/>
-                          <a:uFillTx/>
-                          <a:latin typeface="Maitree"/>
-                        </a:rPr>
-                        <a:t>59,22%</a:t>
-                      </a:r>
-                      <a:endParaRPr lang="pt-BR" sz="1800" b="0" u="none" strike="noStrike">
-                        <a:solidFill>
-                          <a:srgbClr val="000000"/>
-                        </a:solidFill>
-                        <a:effectLst/>
-                        <a:uFillTx/>
-                        <a:latin typeface="Arial"/>
-                      </a:endParaRPr>
-                    </a:p>
-                  </a:txBody>
-                  <a:tcPr anchor="t" marL="36000" marR="36000" marT="36000" marB="36000">
-                    <a:lnL w="7200">
-                      <a:solidFill>
-                        <a:srgbClr val="000000"/>
-                      </a:solidFill>
-                      <a:prstDash val="solid"/>
-                    </a:lnL>
-                    <a:lnR w="7200">
-                      <a:solidFill>
-                        <a:srgbClr val="000000"/>
-                      </a:solidFill>
-                      <a:prstDash val="solid"/>
-                    </a:lnR>
-                    <a:lnT w="7200">
-                      <a:solidFill>
-                        <a:srgbClr val="000000"/>
-                      </a:solidFill>
-                      <a:prstDash val="solid"/>
-                    </a:lnT>
-                    <a:lnB w="7200">
-                      <a:solidFill>
-                        <a:srgbClr val="000000"/>
-                      </a:solidFill>
-                      <a:prstDash val="solid"/>
-                    </a:lnB>
-                    <a:noFill/>
-                  </a:tcPr>
-                </a:tc>
-              </a:tr>
-              <a:tr h="621000">
-                <a:tc>
-                  <a:txBody>
-                    <a:bodyPr lIns="36000" rIns="36000" tIns="36000" bIns="36000" anchor="t">
-                      <a:noAutofit/>
-                    </a:bodyPr>
-                    <a:p>
-                      <a:pPr>
-                        <a:lnSpc>
-                          <a:spcPct val="100000"/>
-                        </a:lnSpc>
-                      </a:pPr>
-                      <a:r>
-                        <a:rPr lang="pt-BR" sz="1800" b="0" u="none" strike="noStrike">
-                          <a:solidFill>
-                            <a:srgbClr val="000000"/>
-                          </a:solidFill>
-                          <a:effectLst/>
-                          <a:uFillTx/>
-                          <a:latin typeface="Maitree"/>
-                        </a:rPr>
-                        <a:t>Ceara (modelo 2)</a:t>
-                      </a:r>
-                      <a:endParaRPr lang="pt-BR" sz="1800" b="0" u="none" strike="noStrike">
-                        <a:solidFill>
-                          <a:srgbClr val="000000"/>
-                        </a:solidFill>
-                        <a:effectLst/>
-                        <a:uFillTx/>
-                        <a:latin typeface="Arial"/>
-                      </a:endParaRPr>
-                    </a:p>
-                  </a:txBody>
-                  <a:tcPr anchor="t" marL="36000" marR="36000" marT="36000" marB="36000">
-                    <a:lnL w="7200">
-                      <a:solidFill>
-                        <a:srgbClr val="000000"/>
-                      </a:solidFill>
-                      <a:prstDash val="solid"/>
-                    </a:lnL>
-                    <a:lnR w="7200">
-                      <a:solidFill>
-                        <a:srgbClr val="000000"/>
-                      </a:solidFill>
-                      <a:prstDash val="solid"/>
-                    </a:lnR>
-                    <a:lnT w="7200">
-                      <a:solidFill>
-                        <a:srgbClr val="000000"/>
-                      </a:solidFill>
-                      <a:prstDash val="solid"/>
-                    </a:lnT>
-                    <a:lnB w="7200">
-                      <a:solidFill>
-                        <a:srgbClr val="000000"/>
-                      </a:solidFill>
-                      <a:prstDash val="solid"/>
-                    </a:lnB>
-                    <a:noFill/>
-                  </a:tcPr>
-                </a:tc>
-                <a:tc>
-                  <a:txBody>
-                    <a:bodyPr lIns="36000" rIns="36000" tIns="36000" bIns="36000" anchor="t">
-                      <a:noAutofit/>
-                    </a:bodyPr>
-                    <a:p>
-                      <a:pPr algn="r">
-                        <a:lnSpc>
-                          <a:spcPct val="100000"/>
-                        </a:lnSpc>
-                      </a:pPr>
-                      <a:r>
-                        <a:rPr lang="pt-BR" sz="1800" b="0" u="none" strike="noStrike">
-                          <a:solidFill>
-                            <a:srgbClr val="000000"/>
-                          </a:solidFill>
-                          <a:effectLst/>
-                          <a:uFillTx/>
-                          <a:latin typeface="Maitree"/>
-                        </a:rPr>
-                        <a:t>47519</a:t>
-                      </a:r>
-                      <a:endParaRPr lang="pt-BR" sz="1800" b="0" u="none" strike="noStrike">
-                        <a:solidFill>
-                          <a:srgbClr val="000000"/>
-                        </a:solidFill>
-                        <a:effectLst/>
-                        <a:uFillTx/>
-                        <a:latin typeface="Arial"/>
-                      </a:endParaRPr>
-                    </a:p>
-                  </a:txBody>
-                  <a:tcPr anchor="t" marL="36000" marR="36000" marT="36000" marB="36000">
-                    <a:lnL w="7200">
-                      <a:solidFill>
-                        <a:srgbClr val="000000"/>
-                      </a:solidFill>
-                      <a:prstDash val="solid"/>
-                    </a:lnL>
-                    <a:lnR w="7200">
-                      <a:solidFill>
-                        <a:srgbClr val="000000"/>
-                      </a:solidFill>
-                      <a:prstDash val="solid"/>
-                    </a:lnR>
-                    <a:lnT w="7200">
-                      <a:solidFill>
-                        <a:srgbClr val="000000"/>
-                      </a:solidFill>
-                      <a:prstDash val="solid"/>
-                    </a:lnT>
-                    <a:lnB w="7200">
-                      <a:solidFill>
-                        <a:srgbClr val="000000"/>
-                      </a:solidFill>
-                      <a:prstDash val="solid"/>
-                    </a:lnB>
-                    <a:noFill/>
-                  </a:tcPr>
-                </a:tc>
-                <a:tc>
-                  <a:txBody>
-                    <a:bodyPr lIns="36000" rIns="36000" tIns="36000" bIns="36000" anchor="t">
-                      <a:noAutofit/>
-                    </a:bodyPr>
-                    <a:p>
-                      <a:pPr algn="r">
-                        <a:lnSpc>
-                          <a:spcPct val="100000"/>
-                        </a:lnSpc>
-                      </a:pPr>
-                      <a:r>
-                        <a:rPr lang="pt-BR" sz="1800" b="0" u="none" strike="noStrike">
-                          <a:solidFill>
-                            <a:srgbClr val="000000"/>
-                          </a:solidFill>
-                          <a:effectLst/>
-                          <a:uFillTx/>
-                          <a:latin typeface="Maitree"/>
-                        </a:rPr>
                         <a:t>35062</a:t>
                       </a:r>
                       <a:endParaRPr lang="pt-BR" sz="1800" b="0" u="none" strike="noStrike">
@@ -9098,608 +8846,6 @@
                     <a:noFill/>
                   </a:tcPr>
                 </a:tc>
-                <a:tc>
-                  <a:txBody>
-                    <a:bodyPr lIns="36000" rIns="36000" tIns="36000" bIns="36000" anchor="t">
-                      <a:noAutofit/>
-                    </a:bodyPr>
-                    <a:p>
-                      <a:pPr algn="r">
-                        <a:lnSpc>
-                          <a:spcPct val="100000"/>
-                        </a:lnSpc>
-                      </a:pPr>
-                      <a:r>
-                        <a:rPr lang="pt-BR" sz="1800" b="0" u="none" strike="noStrike">
-                          <a:solidFill>
-                            <a:srgbClr val="000000"/>
-                          </a:solidFill>
-                          <a:effectLst/>
-                          <a:uFillTx/>
-                          <a:latin typeface="Maitree"/>
-                        </a:rPr>
-                        <a:t>49,51%</a:t>
-                      </a:r>
-                      <a:endParaRPr lang="pt-BR" sz="1800" b="0" u="none" strike="noStrike">
-                        <a:solidFill>
-                          <a:srgbClr val="000000"/>
-                        </a:solidFill>
-                        <a:effectLst/>
-                        <a:uFillTx/>
-                        <a:latin typeface="Arial"/>
-                      </a:endParaRPr>
-                    </a:p>
-                  </a:txBody>
-                  <a:tcPr anchor="t" marL="36000" marR="36000" marT="36000" marB="36000">
-                    <a:lnL w="7200">
-                      <a:solidFill>
-                        <a:srgbClr val="000000"/>
-                      </a:solidFill>
-                      <a:prstDash val="solid"/>
-                    </a:lnL>
-                    <a:lnR w="7200">
-                      <a:solidFill>
-                        <a:srgbClr val="000000"/>
-                      </a:solidFill>
-                      <a:prstDash val="solid"/>
-                    </a:lnR>
-                    <a:lnT w="7200">
-                      <a:solidFill>
-                        <a:srgbClr val="000000"/>
-                      </a:solidFill>
-                      <a:prstDash val="solid"/>
-                    </a:lnT>
-                    <a:lnB w="7200">
-                      <a:solidFill>
-                        <a:srgbClr val="000000"/>
-                      </a:solidFill>
-                      <a:prstDash val="solid"/>
-                    </a:lnB>
-                    <a:noFill/>
-                  </a:tcPr>
-                </a:tc>
-              </a:tr>
-              <a:tr h="621000">
-                <a:tc>
-                  <a:txBody>
-                    <a:bodyPr lIns="36000" rIns="36000" tIns="36000" bIns="36000" anchor="t">
-                      <a:noAutofit/>
-                    </a:bodyPr>
-                    <a:p>
-                      <a:pPr>
-                        <a:lnSpc>
-                          <a:spcPct val="100000"/>
-                        </a:lnSpc>
-                      </a:pPr>
-                      <a:r>
-                        <a:rPr lang="pt-BR" sz="1800" b="0" u="none" strike="noStrike">
-                          <a:solidFill>
-                            <a:srgbClr val="000000"/>
-                          </a:solidFill>
-                          <a:effectLst/>
-                          <a:uFillTx/>
-                          <a:latin typeface="Maitree"/>
-                        </a:rPr>
-                        <a:t>Ceara (modelo 3)</a:t>
-                      </a:r>
-                      <a:endParaRPr lang="pt-BR" sz="1800" b="0" u="none" strike="noStrike">
-                        <a:solidFill>
-                          <a:srgbClr val="000000"/>
-                        </a:solidFill>
-                        <a:effectLst/>
-                        <a:uFillTx/>
-                        <a:latin typeface="Arial"/>
-                      </a:endParaRPr>
-                    </a:p>
-                  </a:txBody>
-                  <a:tcPr anchor="t" marL="36000" marR="36000" marT="36000" marB="36000">
-                    <a:lnL w="7200">
-                      <a:solidFill>
-                        <a:srgbClr val="000000"/>
-                      </a:solidFill>
-                      <a:prstDash val="solid"/>
-                    </a:lnL>
-                    <a:lnR w="7200">
-                      <a:solidFill>
-                        <a:srgbClr val="000000"/>
-                      </a:solidFill>
-                      <a:prstDash val="solid"/>
-                    </a:lnR>
-                    <a:lnT w="7200">
-                      <a:solidFill>
-                        <a:srgbClr val="000000"/>
-                      </a:solidFill>
-                      <a:prstDash val="solid"/>
-                    </a:lnT>
-                    <a:lnB w="7200">
-                      <a:solidFill>
-                        <a:srgbClr val="000000"/>
-                      </a:solidFill>
-                      <a:prstDash val="solid"/>
-                    </a:lnB>
-                    <a:noFill/>
-                  </a:tcPr>
-                </a:tc>
-                <a:tc>
-                  <a:txBody>
-                    <a:bodyPr lIns="36000" rIns="36000" tIns="36000" bIns="36000" anchor="t">
-                      <a:noAutofit/>
-                    </a:bodyPr>
-                    <a:p>
-                      <a:pPr algn="r">
-                        <a:lnSpc>
-                          <a:spcPct val="100000"/>
-                        </a:lnSpc>
-                      </a:pPr>
-                      <a:r>
-                        <a:rPr lang="pt-BR" sz="1800" b="0" u="none" strike="noStrike">
-                          <a:solidFill>
-                            <a:srgbClr val="000000"/>
-                          </a:solidFill>
-                          <a:effectLst/>
-                          <a:uFillTx/>
-                          <a:latin typeface="Maitree"/>
-                        </a:rPr>
-                        <a:t>47519</a:t>
-                      </a:r>
-                      <a:endParaRPr lang="pt-BR" sz="1800" b="0" u="none" strike="noStrike">
-                        <a:solidFill>
-                          <a:srgbClr val="000000"/>
-                        </a:solidFill>
-                        <a:effectLst/>
-                        <a:uFillTx/>
-                        <a:latin typeface="Arial"/>
-                      </a:endParaRPr>
-                    </a:p>
-                  </a:txBody>
-                  <a:tcPr anchor="t" marL="36000" marR="36000" marT="36000" marB="36000">
-                    <a:lnL w="7200">
-                      <a:solidFill>
-                        <a:srgbClr val="000000"/>
-                      </a:solidFill>
-                      <a:prstDash val="solid"/>
-                    </a:lnL>
-                    <a:lnR w="7200">
-                      <a:solidFill>
-                        <a:srgbClr val="000000"/>
-                      </a:solidFill>
-                      <a:prstDash val="solid"/>
-                    </a:lnR>
-                    <a:lnT w="7200">
-                      <a:solidFill>
-                        <a:srgbClr val="000000"/>
-                      </a:solidFill>
-                      <a:prstDash val="solid"/>
-                    </a:lnT>
-                    <a:lnB w="7200">
-                      <a:solidFill>
-                        <a:srgbClr val="000000"/>
-                      </a:solidFill>
-                      <a:prstDash val="solid"/>
-                    </a:lnB>
-                    <a:noFill/>
-                  </a:tcPr>
-                </a:tc>
-                <a:tc>
-                  <a:txBody>
-                    <a:bodyPr lIns="36000" rIns="36000" tIns="36000" bIns="36000" anchor="t">
-                      <a:noAutofit/>
-                    </a:bodyPr>
-                    <a:p>
-                      <a:pPr algn="r">
-                        <a:lnSpc>
-                          <a:spcPct val="100000"/>
-                        </a:lnSpc>
-                      </a:pPr>
-                      <a:r>
-                        <a:rPr lang="pt-BR" sz="1800" b="0" u="none" strike="noStrike">
-                          <a:solidFill>
-                            <a:srgbClr val="000000"/>
-                          </a:solidFill>
-                          <a:effectLst/>
-                          <a:uFillTx/>
-                          <a:latin typeface="Maitree"/>
-                        </a:rPr>
-                        <a:t>37764</a:t>
-                      </a:r>
-                      <a:endParaRPr lang="pt-BR" sz="1800" b="0" u="none" strike="noStrike">
-                        <a:solidFill>
-                          <a:srgbClr val="000000"/>
-                        </a:solidFill>
-                        <a:effectLst/>
-                        <a:uFillTx/>
-                        <a:latin typeface="Arial"/>
-                      </a:endParaRPr>
-                    </a:p>
-                  </a:txBody>
-                  <a:tcPr anchor="t" marL="36000" marR="36000" marT="36000" marB="36000">
-                    <a:lnL w="7200">
-                      <a:solidFill>
-                        <a:srgbClr val="000000"/>
-                      </a:solidFill>
-                      <a:prstDash val="solid"/>
-                    </a:lnL>
-                    <a:lnR w="7200">
-                      <a:solidFill>
-                        <a:srgbClr val="000000"/>
-                      </a:solidFill>
-                      <a:prstDash val="solid"/>
-                    </a:lnR>
-                    <a:lnT w="7200">
-                      <a:solidFill>
-                        <a:srgbClr val="000000"/>
-                      </a:solidFill>
-                      <a:prstDash val="solid"/>
-                    </a:lnT>
-                    <a:lnB w="7200">
-                      <a:solidFill>
-                        <a:srgbClr val="000000"/>
-                      </a:solidFill>
-                      <a:prstDash val="solid"/>
-                    </a:lnB>
-                    <a:noFill/>
-                  </a:tcPr>
-                </a:tc>
-                <a:tc>
-                  <a:txBody>
-                    <a:bodyPr lIns="36000" rIns="36000" tIns="36000" bIns="36000" anchor="t">
-                      <a:noAutofit/>
-                    </a:bodyPr>
-                    <a:p>
-                      <a:pPr algn="r">
-                        <a:lnSpc>
-                          <a:spcPct val="100000"/>
-                        </a:lnSpc>
-                      </a:pPr>
-                      <a:r>
-                        <a:rPr lang="pt-BR" sz="1800" b="0" u="none" strike="noStrike">
-                          <a:solidFill>
-                            <a:srgbClr val="000000"/>
-                          </a:solidFill>
-                          <a:effectLst/>
-                          <a:uFillTx/>
-                          <a:latin typeface="Maitree"/>
-                        </a:rPr>
-                        <a:t>79,5%</a:t>
-                      </a:r>
-                      <a:endParaRPr lang="pt-BR" sz="1800" b="0" u="none" strike="noStrike">
-                        <a:solidFill>
-                          <a:srgbClr val="000000"/>
-                        </a:solidFill>
-                        <a:effectLst/>
-                        <a:uFillTx/>
-                        <a:latin typeface="Arial"/>
-                      </a:endParaRPr>
-                    </a:p>
-                  </a:txBody>
-                  <a:tcPr anchor="t" marL="36000" marR="36000" marT="36000" marB="36000">
-                    <a:lnL w="7200">
-                      <a:solidFill>
-                        <a:srgbClr val="000000"/>
-                      </a:solidFill>
-                      <a:prstDash val="solid"/>
-                    </a:lnL>
-                    <a:lnR w="7200">
-                      <a:solidFill>
-                        <a:srgbClr val="000000"/>
-                      </a:solidFill>
-                      <a:prstDash val="solid"/>
-                    </a:lnR>
-                    <a:lnT w="7200">
-                      <a:solidFill>
-                        <a:srgbClr val="000000"/>
-                      </a:solidFill>
-                      <a:prstDash val="solid"/>
-                    </a:lnT>
-                    <a:lnB w="7200">
-                      <a:solidFill>
-                        <a:srgbClr val="000000"/>
-                      </a:solidFill>
-                      <a:prstDash val="solid"/>
-                    </a:lnB>
-                    <a:noFill/>
-                  </a:tcPr>
-                </a:tc>
-                <a:tc>
-                  <a:txBody>
-                    <a:bodyPr lIns="36000" rIns="36000" tIns="36000" bIns="36000" anchor="t">
-                      <a:noAutofit/>
-                    </a:bodyPr>
-                    <a:p>
-                      <a:pPr algn="r">
-                        <a:lnSpc>
-                          <a:spcPct val="100000"/>
-                        </a:lnSpc>
-                      </a:pPr>
-                      <a:r>
-                        <a:rPr lang="pt-BR" sz="1800" b="0" u="none" strike="noStrike">
-                          <a:solidFill>
-                            <a:srgbClr val="000000"/>
-                          </a:solidFill>
-                          <a:effectLst/>
-                          <a:uFillTx/>
-                          <a:latin typeface="Maitree"/>
-                        </a:rPr>
-                        <a:t>26515</a:t>
-                      </a:r>
-                      <a:endParaRPr lang="pt-BR" sz="1800" b="0" u="none" strike="noStrike">
-                        <a:solidFill>
-                          <a:srgbClr val="000000"/>
-                        </a:solidFill>
-                        <a:effectLst/>
-                        <a:uFillTx/>
-                        <a:latin typeface="Arial"/>
-                      </a:endParaRPr>
-                    </a:p>
-                  </a:txBody>
-                  <a:tcPr anchor="t" marL="36000" marR="36000" marT="36000" marB="36000">
-                    <a:lnL w="7200">
-                      <a:solidFill>
-                        <a:srgbClr val="000000"/>
-                      </a:solidFill>
-                      <a:prstDash val="solid"/>
-                    </a:lnL>
-                    <a:lnR w="7200">
-                      <a:solidFill>
-                        <a:srgbClr val="000000"/>
-                      </a:solidFill>
-                      <a:prstDash val="solid"/>
-                    </a:lnR>
-                    <a:lnT w="7200">
-                      <a:solidFill>
-                        <a:srgbClr val="000000"/>
-                      </a:solidFill>
-                      <a:prstDash val="solid"/>
-                    </a:lnT>
-                    <a:lnB w="7200">
-                      <a:solidFill>
-                        <a:srgbClr val="000000"/>
-                      </a:solidFill>
-                      <a:prstDash val="solid"/>
-                    </a:lnB>
-                    <a:noFill/>
-                  </a:tcPr>
-                </a:tc>
-                <a:tc>
-                  <a:txBody>
-                    <a:bodyPr lIns="36000" rIns="36000" tIns="36000" bIns="36000" anchor="t">
-                      <a:noAutofit/>
-                    </a:bodyPr>
-                    <a:p>
-                      <a:pPr algn="r">
-                        <a:lnSpc>
-                          <a:spcPct val="100000"/>
-                        </a:lnSpc>
-                      </a:pPr>
-                      <a:r>
-                        <a:rPr lang="pt-BR" sz="1800" b="0" u="none" strike="noStrike">
-                          <a:solidFill>
-                            <a:srgbClr val="000000"/>
-                          </a:solidFill>
-                          <a:effectLst/>
-                          <a:uFillTx/>
-                          <a:latin typeface="Maitree"/>
-                        </a:rPr>
-                        <a:t>55,8%</a:t>
-                      </a:r>
-                      <a:endParaRPr lang="pt-BR" sz="1800" b="0" u="none" strike="noStrike">
-                        <a:solidFill>
-                          <a:srgbClr val="000000"/>
-                        </a:solidFill>
-                        <a:effectLst/>
-                        <a:uFillTx/>
-                        <a:latin typeface="Arial"/>
-                      </a:endParaRPr>
-                    </a:p>
-                  </a:txBody>
-                  <a:tcPr anchor="t" marL="36000" marR="36000" marT="36000" marB="36000">
-                    <a:lnL w="7200">
-                      <a:solidFill>
-                        <a:srgbClr val="000000"/>
-                      </a:solidFill>
-                      <a:prstDash val="solid"/>
-                    </a:lnL>
-                    <a:lnR w="7200">
-                      <a:solidFill>
-                        <a:srgbClr val="000000"/>
-                      </a:solidFill>
-                      <a:prstDash val="solid"/>
-                    </a:lnR>
-                    <a:lnT w="7200">
-                      <a:solidFill>
-                        <a:srgbClr val="000000"/>
-                      </a:solidFill>
-                      <a:prstDash val="solid"/>
-                    </a:lnT>
-                    <a:lnB w="7200">
-                      <a:solidFill>
-                        <a:srgbClr val="000000"/>
-                      </a:solidFill>
-                      <a:prstDash val="solid"/>
-                    </a:lnB>
-                    <a:noFill/>
-                  </a:tcPr>
-                </a:tc>
-                <a:tc>
-                  <a:txBody>
-                    <a:bodyPr lIns="36000" rIns="36000" tIns="36000" bIns="36000" anchor="t">
-                      <a:noAutofit/>
-                    </a:bodyPr>
-                    <a:p>
-                      <a:pPr algn="r">
-                        <a:lnSpc>
-                          <a:spcPct val="100000"/>
-                        </a:lnSpc>
-                      </a:pPr>
-                      <a:r>
-                        <a:rPr lang="pt-BR" sz="1800" b="0" u="none" strike="noStrike">
-                          <a:solidFill>
-                            <a:srgbClr val="000000"/>
-                          </a:solidFill>
-                          <a:effectLst/>
-                          <a:uFillTx/>
-                          <a:latin typeface="Maitree"/>
-                        </a:rPr>
-                        <a:t>24</a:t>
-                      </a:r>
-                      <a:endParaRPr lang="pt-BR" sz="1800" b="0" u="none" strike="noStrike">
-                        <a:solidFill>
-                          <a:srgbClr val="000000"/>
-                        </a:solidFill>
-                        <a:effectLst/>
-                        <a:uFillTx/>
-                        <a:latin typeface="Arial"/>
-                      </a:endParaRPr>
-                    </a:p>
-                  </a:txBody>
-                  <a:tcPr anchor="t" marL="36000" marR="36000" marT="36000" marB="36000">
-                    <a:lnL w="7200">
-                      <a:solidFill>
-                        <a:srgbClr val="000000"/>
-                      </a:solidFill>
-                      <a:prstDash val="solid"/>
-                    </a:lnL>
-                    <a:lnR w="7200">
-                      <a:solidFill>
-                        <a:srgbClr val="000000"/>
-                      </a:solidFill>
-                      <a:prstDash val="solid"/>
-                    </a:lnR>
-                    <a:lnT w="7200">
-                      <a:solidFill>
-                        <a:srgbClr val="000000"/>
-                      </a:solidFill>
-                      <a:prstDash val="solid"/>
-                    </a:lnT>
-                    <a:lnB w="7200">
-                      <a:solidFill>
-                        <a:srgbClr val="000000"/>
-                      </a:solidFill>
-                      <a:prstDash val="solid"/>
-                    </a:lnB>
-                    <a:noFill/>
-                  </a:tcPr>
-                </a:tc>
-                <a:tc>
-                  <a:txBody>
-                    <a:bodyPr lIns="36000" rIns="36000" tIns="36000" bIns="36000" anchor="t">
-                      <a:noAutofit/>
-                    </a:bodyPr>
-                    <a:p>
-                      <a:pPr algn="r">
-                        <a:lnSpc>
-                          <a:spcPct val="100000"/>
-                        </a:lnSpc>
-                      </a:pPr>
-                      <a:r>
-                        <a:rPr lang="pt-BR" sz="1800" b="1" i="1" u="none" strike="noStrike">
-                          <a:solidFill>
-                            <a:srgbClr val="000000"/>
-                          </a:solidFill>
-                          <a:effectLst/>
-                          <a:uFillTx/>
-                          <a:latin typeface="Maitree"/>
-                        </a:rPr>
-                        <a:t>30%</a:t>
-                      </a:r>
-                      <a:endParaRPr lang="pt-BR" sz="1800" b="0" u="none" strike="noStrike">
-                        <a:solidFill>
-                          <a:srgbClr val="000000"/>
-                        </a:solidFill>
-                        <a:effectLst/>
-                        <a:uFillTx/>
-                        <a:latin typeface="Arial"/>
-                      </a:endParaRPr>
-                    </a:p>
-                  </a:txBody>
-                  <a:tcPr anchor="t" marL="36000" marR="36000" marT="36000" marB="36000">
-                    <a:lnL w="7200">
-                      <a:solidFill>
-                        <a:srgbClr val="000000"/>
-                      </a:solidFill>
-                      <a:prstDash val="solid"/>
-                    </a:lnL>
-                    <a:lnR w="7200">
-                      <a:solidFill>
-                        <a:srgbClr val="000000"/>
-                      </a:solidFill>
-                      <a:prstDash val="solid"/>
-                    </a:lnR>
-                    <a:lnT w="7200">
-                      <a:solidFill>
-                        <a:srgbClr val="000000"/>
-                      </a:solidFill>
-                      <a:prstDash val="solid"/>
-                    </a:lnT>
-                    <a:lnB w="7200">
-                      <a:solidFill>
-                        <a:srgbClr val="000000"/>
-                      </a:solidFill>
-                      <a:prstDash val="solid"/>
-                    </a:lnB>
-                    <a:noFill/>
-                  </a:tcPr>
-                </a:tc>
-                <a:tc>
-                  <a:txBody>
-                    <a:bodyPr lIns="36000" rIns="36000" tIns="36000" bIns="36000" anchor="t">
-                      <a:noAutofit/>
-                    </a:bodyPr>
-                    <a:p>
-                      <a:pPr algn="r">
-                        <a:lnSpc>
-                          <a:spcPct val="100000"/>
-                        </a:lnSpc>
-                      </a:pPr>
-                      <a:r>
-                        <a:rPr lang="pt-BR" sz="1800" b="0" u="none" strike="noStrike">
-                          <a:solidFill>
-                            <a:srgbClr val="000000"/>
-                          </a:solidFill>
-                          <a:effectLst/>
-                          <a:uFillTx/>
-                          <a:latin typeface="Maitree"/>
-                        </a:rPr>
-                        <a:t>51,46%</a:t>
-                      </a:r>
-                      <a:endParaRPr lang="pt-BR" sz="1800" b="0" u="none" strike="noStrike">
-                        <a:solidFill>
-                          <a:srgbClr val="000000"/>
-                        </a:solidFill>
-                        <a:effectLst/>
-                        <a:uFillTx/>
-                        <a:latin typeface="Arial"/>
-                      </a:endParaRPr>
-                    </a:p>
-                  </a:txBody>
-                  <a:tcPr anchor="t" marL="36000" marR="36000" marT="36000" marB="36000">
-                    <a:lnL w="7200">
-                      <a:solidFill>
-                        <a:srgbClr val="000000"/>
-                      </a:solidFill>
-                      <a:prstDash val="solid"/>
-                    </a:lnL>
-                    <a:lnR w="7200">
-                      <a:solidFill>
-                        <a:srgbClr val="000000"/>
-                      </a:solidFill>
-                      <a:prstDash val="solid"/>
-                    </a:lnR>
-                    <a:lnT w="7200">
-                      <a:solidFill>
-                        <a:srgbClr val="000000"/>
-                      </a:solidFill>
-                      <a:prstDash val="solid"/>
-                    </a:lnT>
-                    <a:lnB w="7200">
-                      <a:solidFill>
-                        <a:srgbClr val="000000"/>
-                      </a:solidFill>
-                      <a:prstDash val="solid"/>
-                    </a:lnB>
-                    <a:noFill/>
-                  </a:tcPr>
-                </a:tc>
               </a:tr>
             </a:tbl>
           </a:graphicData>
@@ -9707,163 +8853,14 @@
       </p:graphicFrame>
       <p:sp>
         <p:nvSpPr>
-          <p:cNvPr id="91" name=""/>
-          <p:cNvSpPr txBox="1"/>
+          <p:cNvPr id="97" name=""/>
+          <p:cNvSpPr/>
           <p:nvPr/>
         </p:nvSpPr>
         <p:spPr>
           <a:xfrm>
             <a:off x="468000" y="5040000"/>
-            <a:ext cx="11160000" cy="761400"/>
-          </a:xfrm>
-          <a:prstGeom prst="rect">
-            <a:avLst/>
-          </a:prstGeom>
-          <a:noFill/>
-          <a:ln w="0">
-            <a:noFill/>
-          </a:ln>
-        </p:spPr>
-        <p:txBody>
-          <a:bodyPr lIns="90000" rIns="90000" tIns="45000" bIns="45000" anchor="t">
-            <a:spAutoFit/>
-          </a:bodyPr>
-          <a:p>
-            <a:r>
-              <a:rPr lang="pt-BR" sz="1600" b="0" u="none" strike="noStrike">
-                <a:solidFill>
-                  <a:srgbClr val="000000"/>
-                </a:solidFill>
-                <a:effectLst/>
-                <a:uFillTx/>
-                <a:latin typeface="Maitree"/>
-              </a:rPr>
-              <a:t>Nota: Importante ressaltar que mesmo com recebimento do Bolsa Família, mais de 70% das famílias aptas a receber o Cartão continuam em Insan Grave.</a:t>
-            </a:r>
-            <a:endParaRPr lang="pt-BR" sz="1600" b="0" u="none" strike="noStrike">
-              <a:solidFill>
-                <a:srgbClr val="000000"/>
-              </a:solidFill>
-              <a:effectLst/>
-              <a:uFillTx/>
-              <a:latin typeface="Maitree"/>
-            </a:endParaRPr>
-          </a:p>
-        </p:txBody>
-      </p:sp>
-    </p:spTree>
-  </p:cSld>
-  <mc:AlternateContent>
-    <mc:Choice Requires="p14">
-      <p:transition spd="slow" p14:dur="2000"/>
-    </mc:Choice>
-    <mc:Fallback>
-      <p:transition spd="slow"/>
-    </mc:Fallback>
-  </mc:AlternateContent>
-</p:sld>
-</file>
-
-<file path=ppt/slides/slide13.xml><?xml version="1.0" encoding="utf-8"?>
-<p:sld xmlns:a="http://schemas.openxmlformats.org/drawingml/2006/main" xmlns:p="http://schemas.openxmlformats.org/presentationml/2006/main" xmlns:r="http://schemas.openxmlformats.org/officeDocument/2006/relationships" xmlns:p14="http://schemas.microsoft.com/office/powerpoint/2010/main" xmlns:p15="http://schemas.microsoft.com/office/powerpoint/2012/main" xmlns:mc="http://schemas.openxmlformats.org/markup-compatibility/2006">
-  <p:cSld>
-    <p:spTree>
-      <p:nvGrpSpPr>
-        <p:cNvPr id="1" name=""/>
-        <p:cNvGrpSpPr/>
-        <p:nvPr/>
-      </p:nvGrpSpPr>
-      <p:grpSpPr>
-        <a:xfrm>
-          <a:off x="0" y="0"/>
-          <a:ext cx="0" cy="0"/>
-          <a:chOff x="0" y="0"/>
-          <a:chExt cx="0" cy="0"/>
-        </a:xfrm>
-      </p:grpSpPr>
-      <p:sp>
-        <p:nvSpPr>
-          <p:cNvPr id="92" name="CaixaDeTexto 5"/>
-          <p:cNvSpPr/>
-          <p:nvPr/>
-        </p:nvSpPr>
-        <p:spPr>
-          <a:xfrm>
-            <a:off x="1080000" y="1976040"/>
-            <a:ext cx="10384560" cy="363960"/>
-          </a:xfrm>
-          <a:prstGeom prst="rect">
-            <a:avLst/>
-          </a:prstGeom>
-          <a:solidFill>
-            <a:srgbClr val="0f9200"/>
-          </a:solidFill>
-          <a:ln w="0">
-            <a:noFill/>
-          </a:ln>
-          <a:effectLst>
-            <a:outerShdw algn="ctr" blurRad="57240" dir="5400000" dist="19080" rotWithShape="0">
-              <a:srgbClr val="000000">
-                <a:alpha val="63000"/>
-              </a:srgbClr>
-            </a:outerShdw>
-          </a:effectLst>
-        </p:spPr>
-        <p:style>
-          <a:lnRef idx="0">
-            <a:schemeClr val="accent6"/>
-          </a:lnRef>
-          <a:fillRef idx="3">
-            <a:schemeClr val="accent6"/>
-          </a:fillRef>
-          <a:effectRef idx="3">
-            <a:schemeClr val="accent6"/>
-          </a:effectRef>
-          <a:fontRef idx="minor"/>
-        </p:style>
-        <p:txBody>
-          <a:bodyPr lIns="90000" rIns="90000" tIns="45000" bIns="45000" anchor="t">
-            <a:spAutoFit/>
-          </a:bodyPr>
-          <a:p>
-            <a:pPr algn="ctr" defTabSz="914400">
-              <a:lnSpc>
-                <a:spcPct val="100000"/>
-              </a:lnSpc>
-            </a:pPr>
-            <a:r>
-              <a:rPr lang="pt-BR" sz="1800" b="1" u="none" strike="noStrike">
-                <a:solidFill>
-                  <a:schemeClr val="lt1"/>
-                </a:solidFill>
-                <a:effectLst/>
-                <a:uFillTx/>
-                <a:latin typeface="Verdana"/>
-                <a:ea typeface="Verdana"/>
-              </a:rPr>
-              <a:t>PRINCIPAIS CONCLUSÕES</a:t>
-            </a:r>
-            <a:endParaRPr lang="pt-BR" sz="1800" b="0" u="none" strike="noStrike">
-              <a:solidFill>
-                <a:srgbClr val="ffffff"/>
-              </a:solidFill>
-              <a:effectLst/>
-              <a:uFillTx/>
-              <a:latin typeface="Arial"/>
-            </a:endParaRPr>
-          </a:p>
-        </p:txBody>
-      </p:sp>
-      <p:sp>
-        <p:nvSpPr>
-          <p:cNvPr id="93" name=""/>
-          <p:cNvSpPr/>
-          <p:nvPr/>
-        </p:nvSpPr>
-        <p:spPr>
-          <a:xfrm>
-            <a:off x="900000" y="2752560"/>
-            <a:ext cx="10439640" cy="1352520"/>
+            <a:ext cx="11159280" cy="760680"/>
           </a:xfrm>
           <a:prstGeom prst="rect">
             <a:avLst/>
@@ -9880,189 +8877,17 @@
           <a:fontRef idx="minor"/>
         </p:style>
         <p:txBody>
-          <a:bodyPr lIns="90000" rIns="90000" tIns="45000" bIns="45000" anchor="t" anchorCtr="1">
-            <a:spAutoFit/>
-          </a:bodyPr>
-          <a:p>
-            <a:pPr algn="ctr">
-              <a:lnSpc>
-                <a:spcPct val="100000"/>
-              </a:lnSpc>
-              <a:spcBef>
-                <a:spcPts val="1191"/>
-              </a:spcBef>
-              <a:spcAft>
-                <a:spcPts val="992"/>
-              </a:spcAft>
-            </a:pPr>
-            <a:r>
-              <a:rPr lang="pt-BR" sz="2000" b="0" u="none" strike="noStrike">
-                <a:solidFill>
-                  <a:srgbClr val="000000"/>
-                </a:solidFill>
-                <a:effectLst/>
-                <a:uFillTx/>
-                <a:latin typeface="Maitree"/>
-              </a:rPr>
-              <a:t>Os melhores modelos encontrados a partir das variáveis selecionadas, que possuem sensibilidade acima de 50%, identificam que entre 12% e 27% dos domicílios beneficiados podem ter saído da situação de insegurança alimentar grave. </a:t>
-            </a:r>
-            <a:endParaRPr lang="pt-BR" sz="2000" b="0" u="none" strike="noStrike">
-              <a:solidFill>
-                <a:srgbClr val="000000"/>
-              </a:solidFill>
-              <a:effectLst/>
-              <a:uFillTx/>
-              <a:latin typeface="Arial"/>
-            </a:endParaRPr>
-          </a:p>
-        </p:txBody>
-      </p:sp>
-    </p:spTree>
-  </p:cSld>
-  <mc:AlternateContent>
-    <mc:Choice Requires="p14">
-      <p:transition spd="slow" p14:dur="2000"/>
-    </mc:Choice>
-    <mc:Fallback>
-      <p:transition spd="slow"/>
-    </mc:Fallback>
-  </mc:AlternateContent>
-</p:sld>
-</file>
-
-<file path=ppt/slides/slide14.xml><?xml version="1.0" encoding="utf-8"?>
-<p:sld xmlns:a="http://schemas.openxmlformats.org/drawingml/2006/main" xmlns:p="http://schemas.openxmlformats.org/presentationml/2006/main" xmlns:r="http://schemas.openxmlformats.org/officeDocument/2006/relationships" xmlns:p14="http://schemas.microsoft.com/office/powerpoint/2010/main" xmlns:p15="http://schemas.microsoft.com/office/powerpoint/2012/main" xmlns:mc="http://schemas.openxmlformats.org/markup-compatibility/2006">
-  <p:cSld>
-    <p:spTree>
-      <p:nvGrpSpPr>
-        <p:cNvPr id="1" name=""/>
-        <p:cNvGrpSpPr/>
-        <p:nvPr/>
-      </p:nvGrpSpPr>
-      <p:grpSpPr>
-        <a:xfrm>
-          <a:off x="0" y="0"/>
-          <a:ext cx="0" cy="0"/>
-          <a:chOff x="0" y="0"/>
-          <a:chExt cx="0" cy="0"/>
-        </a:xfrm>
-      </p:grpSpPr>
-      <p:sp>
-        <p:nvSpPr>
-          <p:cNvPr id="94" name="CaixaDeTexto 8"/>
-          <p:cNvSpPr/>
-          <p:nvPr/>
-        </p:nvSpPr>
-        <p:spPr>
-          <a:xfrm>
-            <a:off x="1080000" y="1976040"/>
-            <a:ext cx="10384560" cy="363960"/>
-          </a:xfrm>
-          <a:prstGeom prst="rect">
-            <a:avLst/>
-          </a:prstGeom>
-          <a:solidFill>
-            <a:srgbClr val="0f9200"/>
-          </a:solidFill>
-          <a:ln w="0">
-            <a:noFill/>
-          </a:ln>
-          <a:effectLst>
-            <a:outerShdw algn="ctr" blurRad="57240" dir="5400000" dist="19080" rotWithShape="0">
-              <a:srgbClr val="000000">
-                <a:alpha val="63000"/>
-              </a:srgbClr>
-            </a:outerShdw>
-          </a:effectLst>
-        </p:spPr>
-        <p:style>
-          <a:lnRef idx="0">
-            <a:schemeClr val="accent6"/>
-          </a:lnRef>
-          <a:fillRef idx="3">
-            <a:schemeClr val="accent6"/>
-          </a:fillRef>
-          <a:effectRef idx="3">
-            <a:schemeClr val="accent6"/>
-          </a:effectRef>
-          <a:fontRef idx="minor"/>
-        </p:style>
-        <p:txBody>
           <a:bodyPr lIns="90000" rIns="90000" tIns="45000" bIns="45000" anchor="t">
             <a:spAutoFit/>
           </a:bodyPr>
           <a:p>
-            <a:pPr algn="ctr" defTabSz="914400">
+            <a:pPr>
               <a:lnSpc>
                 <a:spcPct val="100000"/>
               </a:lnSpc>
             </a:pPr>
             <a:r>
-              <a:rPr lang="pt-BR" sz="1800" b="1" u="none" strike="noStrike">
-                <a:solidFill>
-                  <a:schemeClr val="lt1"/>
-                </a:solidFill>
-                <a:effectLst/>
-                <a:uFillTx/>
-                <a:latin typeface="Verdana"/>
-                <a:ea typeface="Verdana"/>
-              </a:rPr>
-              <a:t>LIMITAÇÕES</a:t>
-            </a:r>
-            <a:endParaRPr lang="pt-BR" sz="1800" b="0" u="none" strike="noStrike">
-              <a:solidFill>
-                <a:srgbClr val="ffffff"/>
-              </a:solidFill>
-              <a:effectLst/>
-              <a:uFillTx/>
-              <a:latin typeface="Arial"/>
-            </a:endParaRPr>
-          </a:p>
-        </p:txBody>
-      </p:sp>
-      <p:sp>
-        <p:nvSpPr>
-          <p:cNvPr id="95" name=""/>
-          <p:cNvSpPr/>
-          <p:nvPr/>
-        </p:nvSpPr>
-        <p:spPr>
-          <a:xfrm>
-            <a:off x="900000" y="2752560"/>
-            <a:ext cx="10439640" cy="2194200"/>
-          </a:xfrm>
-          <a:prstGeom prst="rect">
-            <a:avLst/>
-          </a:prstGeom>
-          <a:noFill/>
-          <a:ln w="0">
-            <a:noFill/>
-          </a:ln>
-        </p:spPr>
-        <p:style>
-          <a:lnRef idx="0"/>
-          <a:fillRef idx="0"/>
-          <a:effectRef idx="0"/>
-          <a:fontRef idx="minor"/>
-        </p:style>
-        <p:txBody>
-          <a:bodyPr lIns="90000" rIns="90000" tIns="45000" bIns="45000" anchor="t" anchorCtr="1">
-            <a:spAutoFit/>
-          </a:bodyPr>
-          <a:p>
-            <a:pPr algn="ctr">
-              <a:lnSpc>
-                <a:spcPct val="100000"/>
-              </a:lnSpc>
-              <a:spcBef>
-                <a:spcPts val="1191"/>
-              </a:spcBef>
-              <a:spcAft>
-                <a:spcPts val="992"/>
-              </a:spcAft>
-            </a:pPr>
-            <a:r>
-              <a:rPr lang="pt-BR" sz="2000" b="0" u="none" strike="noStrike">
+              <a:rPr lang="pt-BR" sz="1600" b="0" u="none" strike="noStrike">
                 <a:solidFill>
                   <a:srgbClr val="000000"/>
                 </a:solidFill>
@@ -10070,9 +8895,9 @@
                 <a:uFillTx/>
                 <a:latin typeface="Maitree"/>
               </a:rPr>
-              <a:t>Os números apresentados são uma medição da probabilidade de Insan, por isso devem ser interpretados com cautela. O presente trabalho é um exercício estatístico a partir de dados administrativos do IBGE e do CadÚnico e tem muito a ganhar caso haja um acompanhamento e coleta primária de dados com os próprios beneficiários do Cartão CSF. </a:t>
+              <a:t>Nota: Importante ressaltar que mesmo com recebimento do Bolsa Família, mais de 70% das famílias aptas a receber o Cartão continuam em Insan Grave.</a:t>
             </a:r>
-            <a:endParaRPr lang="pt-BR" sz="2000" b="0" u="none" strike="noStrike">
+            <a:endParaRPr lang="pt-BR" sz="1600" b="0" u="none" strike="noStrike">
               <a:solidFill>
                 <a:srgbClr val="000000"/>
               </a:solidFill>
@@ -10115,14 +8940,14 @@
       </p:grpSpPr>
       <p:sp>
         <p:nvSpPr>
-          <p:cNvPr id="96" name="CaixaDeTexto 9"/>
+          <p:cNvPr id="98" name="CaixaDeTexto 5"/>
           <p:cNvSpPr/>
           <p:nvPr/>
         </p:nvSpPr>
         <p:spPr>
           <a:xfrm>
             <a:off x="1080000" y="1976040"/>
-            <a:ext cx="10384560" cy="363960"/>
+            <a:ext cx="10383840" cy="455400"/>
           </a:xfrm>
           <a:prstGeom prst="rect">
             <a:avLst/>
@@ -10164,7 +8989,7 @@
               </a:lnSpc>
             </a:pPr>
             <a:r>
-              <a:rPr lang="pt-BR" sz="1800" b="1" u="none" strike="noStrike">
+              <a:rPr lang="pt-BR" sz="2400" b="1" u="none" strike="noStrike">
                 <a:solidFill>
                   <a:schemeClr val="lt1"/>
                 </a:solidFill>
@@ -10173,9 +8998,9 @@
                 <a:latin typeface="Verdana"/>
                 <a:ea typeface="Verdana"/>
               </a:rPr>
-              <a:t>PRÓXIMOS PASSOS</a:t>
+              <a:t>PRINCIPAIS CONCLUSÕES</a:t>
             </a:r>
-            <a:endParaRPr lang="pt-BR" sz="1800" b="0" u="none" strike="noStrike">
+            <a:endParaRPr lang="pt-BR" sz="2400" b="0" u="none" strike="noStrike">
               <a:solidFill>
                 <a:srgbClr val="ffffff"/>
               </a:solidFill>
@@ -10188,14 +9013,14 @@
       </p:sp>
       <p:sp>
         <p:nvSpPr>
-          <p:cNvPr id="97" name=""/>
+          <p:cNvPr id="99" name=""/>
           <p:cNvSpPr/>
           <p:nvPr/>
         </p:nvSpPr>
         <p:spPr>
           <a:xfrm>
             <a:off x="900000" y="2752560"/>
-            <a:ext cx="10439640" cy="1352520"/>
+            <a:ext cx="10438920" cy="2196360"/>
           </a:xfrm>
           <a:prstGeom prst="rect">
             <a:avLst/>
@@ -10236,7 +9061,39 @@
                 <a:uFillTx/>
                 <a:latin typeface="Maitree"/>
               </a:rPr>
-              <a:t>Outros exercícios podem ser realizados, como calcular diferentes valores para o cartão e ver como eles alteram a probabilidade de Insan grave. </a:t>
+              <a:t>O programa consegue identificar corretamente os cidadãos que mais precisam, ou seja, tem uma boa focalização. Isso decorre do fato de capturar que 70% dos beneficiários ainda precisam sair da situação de fome mesmo recebendo Bolsa Família</a:t>
+            </a:r>
+            <a:endParaRPr lang="pt-BR" sz="2000" b="0" u="none" strike="noStrike">
+              <a:solidFill>
+                <a:srgbClr val="000000"/>
+              </a:solidFill>
+              <a:effectLst/>
+              <a:uFillTx/>
+              <a:latin typeface="Arial"/>
+            </a:endParaRPr>
+          </a:p>
+          <a:p>
+            <a:pPr algn="ctr">
+              <a:lnSpc>
+                <a:spcPct val="100000"/>
+              </a:lnSpc>
+              <a:spcBef>
+                <a:spcPts val="1191"/>
+              </a:spcBef>
+              <a:spcAft>
+                <a:spcPts val="992"/>
+              </a:spcAft>
+            </a:pPr>
+            <a:r>
+              <a:rPr lang="pt-BR" sz="2000" b="0" u="none" strike="noStrike">
+                <a:solidFill>
+                  <a:srgbClr val="000000"/>
+                </a:solidFill>
+                <a:effectLst/>
+                <a:uFillTx/>
+                <a:latin typeface="Maitree"/>
+              </a:rPr>
+              <a:t>O modelo encontrado a partir das variáveis selecionadas identifica que 27% dos domicílios beneficiados tem risco de insegurança alimentar grave diminuído com o recebimento da renda complementar.</a:t>
             </a:r>
             <a:endParaRPr lang="pt-BR" sz="2000" b="0" u="none" strike="noStrike">
               <a:solidFill>
@@ -10281,14 +9138,87 @@
       </p:grpSpPr>
       <p:sp>
         <p:nvSpPr>
-          <p:cNvPr id="98" name=""/>
+          <p:cNvPr id="100" name="CaixaDeTexto 8"/>
           <p:cNvSpPr/>
           <p:nvPr/>
         </p:nvSpPr>
         <p:spPr>
           <a:xfrm>
-            <a:off x="1620000" y="2340000"/>
-            <a:ext cx="9179640" cy="1308240"/>
+            <a:off x="1080000" y="1976040"/>
+            <a:ext cx="10383840" cy="455400"/>
+          </a:xfrm>
+          <a:prstGeom prst="rect">
+            <a:avLst/>
+          </a:prstGeom>
+          <a:solidFill>
+            <a:srgbClr val="0f9200"/>
+          </a:solidFill>
+          <a:ln w="0">
+            <a:noFill/>
+          </a:ln>
+          <a:effectLst>
+            <a:outerShdw algn="ctr" blurRad="57240" dir="5400000" dist="19080" rotWithShape="0">
+              <a:srgbClr val="000000">
+                <a:alpha val="63000"/>
+              </a:srgbClr>
+            </a:outerShdw>
+          </a:effectLst>
+        </p:spPr>
+        <p:style>
+          <a:lnRef idx="0">
+            <a:schemeClr val="accent6"/>
+          </a:lnRef>
+          <a:fillRef idx="3">
+            <a:schemeClr val="accent6"/>
+          </a:fillRef>
+          <a:effectRef idx="3">
+            <a:schemeClr val="accent6"/>
+          </a:effectRef>
+          <a:fontRef idx="minor"/>
+        </p:style>
+        <p:txBody>
+          <a:bodyPr lIns="90000" rIns="90000" tIns="45000" bIns="45000" anchor="t">
+            <a:spAutoFit/>
+          </a:bodyPr>
+          <a:p>
+            <a:pPr algn="ctr" defTabSz="914400">
+              <a:lnSpc>
+                <a:spcPct val="100000"/>
+              </a:lnSpc>
+            </a:pPr>
+            <a:r>
+              <a:rPr lang="pt-BR" sz="2400" b="1" u="none" strike="noStrike">
+                <a:solidFill>
+                  <a:schemeClr val="lt1"/>
+                </a:solidFill>
+                <a:effectLst/>
+                <a:uFillTx/>
+                <a:latin typeface="Verdana"/>
+                <a:ea typeface="Verdana"/>
+              </a:rPr>
+              <a:t>LIMITAÇÕES</a:t>
+            </a:r>
+            <a:endParaRPr lang="pt-BR" sz="2400" b="0" u="none" strike="noStrike">
+              <a:solidFill>
+                <a:srgbClr val="ffffff"/>
+              </a:solidFill>
+              <a:effectLst/>
+              <a:uFillTx/>
+              <a:latin typeface="Arial"/>
+            </a:endParaRPr>
+          </a:p>
+        </p:txBody>
+      </p:sp>
+      <p:sp>
+        <p:nvSpPr>
+          <p:cNvPr id="101" name=""/>
+          <p:cNvSpPr/>
+          <p:nvPr/>
+        </p:nvSpPr>
+        <p:spPr>
+          <a:xfrm>
+            <a:off x="900000" y="2752560"/>
+            <a:ext cx="10438920" cy="3083400"/>
           </a:xfrm>
           <a:prstGeom prst="rect">
             <a:avLst/>
@@ -10305,11 +9235,11 @@
           <a:fontRef idx="minor"/>
         </p:style>
         <p:txBody>
-          <a:bodyPr lIns="90000" rIns="90000" tIns="45000" bIns="45000" anchor="t">
+          <a:bodyPr lIns="90000" rIns="90000" tIns="45000" bIns="45000" anchor="t" anchorCtr="1">
             <a:spAutoFit/>
           </a:bodyPr>
           <a:p>
-            <a:pPr marL="216000" indent="-216000">
+            <a:pPr algn="ctr">
               <a:lnSpc>
                 <a:spcPct val="100000"/>
               </a:lnSpc>
@@ -10319,14 +9249,9 @@
               <a:spcAft>
                 <a:spcPts val="992"/>
               </a:spcAft>
-              <a:buClr>
-                <a:srgbClr val="000000"/>
-              </a:buClr>
-              <a:buFont typeface="Wingdings" charset="2"/>
-              <a:buChar char=""/>
             </a:pPr>
             <a:r>
-              <a:rPr lang="pt-BR" sz="1600" b="0" u="none" strike="noStrike">
+              <a:rPr lang="pt-BR" sz="2000" b="0" u="none" strike="noStrike">
                 <a:solidFill>
                   <a:srgbClr val="000000"/>
                 </a:solidFill>
@@ -10334,9 +9259,31 @@
                 <a:uFillTx/>
                 <a:latin typeface="Maitree"/>
               </a:rPr>
-              <a:t>BRASIL, Ministério do Desenvolvimento e Assistência Social, Família e Combate à Fome. CADINSAN: indicador de risco de insegurança alimentar municipal a partir dos dados do cadunico. Brasilía, 2025. Disponível em https://www.gov.br/mds/pt-br/Sisan/monitoramento-da-san/Relatorio_CadINSAN.pdf Acesso em jan/2026. </a:t>
+              <a:t>Os números apresentados são uma medição da probabilidade de Insan, por isso devem ser interpretados com cautela. O efeito encontrado é de variação no </a:t>
             </a:r>
-            <a:endParaRPr lang="pt-BR" sz="1600" b="0" u="none" strike="noStrike">
+            <a:r>
+              <a:rPr lang="pt-BR" sz="2000" b="1" u="none" strike="noStrike">
+                <a:solidFill>
+                  <a:srgbClr val="000000"/>
+                </a:solidFill>
+                <a:effectLst/>
+                <a:uFillTx/>
+                <a:latin typeface="Maitree"/>
+              </a:rPr>
+              <a:t>risco</a:t>
+            </a:r>
+            <a:r>
+              <a:rPr lang="pt-BR" sz="2000" b="0" u="none" strike="noStrike">
+                <a:solidFill>
+                  <a:srgbClr val="000000"/>
+                </a:solidFill>
+                <a:effectLst/>
+                <a:uFillTx/>
+                <a:latin typeface="Maitree"/>
+              </a:rPr>
+              <a:t>, que é diferente da variação efetiva na redução da fome dos beneficiários. </a:t>
+            </a:r>
+            <a:endParaRPr lang="pt-BR" sz="2000" b="0" u="none" strike="noStrike">
               <a:solidFill>
                 <a:srgbClr val="000000"/>
               </a:solidFill>
@@ -10345,53 +9292,60 @@
               <a:latin typeface="Arial"/>
             </a:endParaRPr>
           </a:p>
-        </p:txBody>
-      </p:sp>
-      <p:sp>
-        <p:nvSpPr>
-          <p:cNvPr id="99" name=""/>
-          <p:cNvSpPr/>
-          <p:nvPr/>
-        </p:nvSpPr>
-        <p:spPr>
-          <a:xfrm>
-            <a:off x="1620000" y="1586520"/>
-            <a:ext cx="1780560" cy="470880"/>
-          </a:xfrm>
-          <a:prstGeom prst="rect">
-            <a:avLst/>
-          </a:prstGeom>
-          <a:noFill/>
-          <a:ln w="0">
-            <a:noFill/>
-          </a:ln>
-        </p:spPr>
-        <p:style>
-          <a:lnRef idx="0"/>
-          <a:fillRef idx="0"/>
-          <a:effectRef idx="0"/>
-          <a:fontRef idx="minor"/>
-        </p:style>
-        <p:txBody>
-          <a:bodyPr wrap="none" lIns="90000" rIns="90000" tIns="45000" bIns="45000" anchor="t">
-            <a:spAutoFit/>
-          </a:bodyPr>
           <a:p>
-            <a:pPr>
+            <a:pPr algn="ctr">
               <a:lnSpc>
                 <a:spcPct val="100000"/>
               </a:lnSpc>
+              <a:spcBef>
+                <a:spcPts val="1191"/>
+              </a:spcBef>
+              <a:spcAft>
+                <a:spcPts val="992"/>
+              </a:spcAft>
             </a:pPr>
             <a:r>
-              <a:rPr lang="pt-BR" sz="2000" b="1" u="none" strike="noStrike">
+              <a:rPr lang="pt-BR" sz="2000" b="0" u="none" strike="noStrike">
                 <a:solidFill>
                   <a:srgbClr val="000000"/>
                 </a:solidFill>
                 <a:effectLst/>
                 <a:uFillTx/>
-                <a:latin typeface="Kanit"/>
+                <a:latin typeface="Maitree"/>
               </a:rPr>
-              <a:t>REFERÊNCIAS</a:t>
+              <a:t>O presente trabalho é um exercício estatístico a partir de dados administrativos do IBGE e do CadÚnico e tem muito a ganhar caso haja um acompanhamento e coleta primária de dados com os próprios beneficiários do Cartão CSF. </a:t>
+            </a:r>
+            <a:endParaRPr lang="pt-BR" sz="2000" b="0" u="none" strike="noStrike">
+              <a:solidFill>
+                <a:srgbClr val="000000"/>
+              </a:solidFill>
+              <a:effectLst/>
+              <a:uFillTx/>
+              <a:latin typeface="Arial"/>
+            </a:endParaRPr>
+          </a:p>
+          <a:p>
+            <a:pPr algn="ctr">
+              <a:lnSpc>
+                <a:spcPct val="100000"/>
+              </a:lnSpc>
+              <a:spcBef>
+                <a:spcPts val="1191"/>
+              </a:spcBef>
+              <a:spcAft>
+                <a:spcPts val="992"/>
+              </a:spcAft>
+            </a:pPr>
+            <a:r>
+              <a:rPr lang="pt-BR" sz="2000" b="0" u="none" strike="noStrike">
+                <a:solidFill>
+                  <a:srgbClr val="000000"/>
+                </a:solidFill>
+                <a:effectLst/>
+                <a:uFillTx/>
+                <a:latin typeface="Maitree"/>
+              </a:rPr>
+              <a:t>O efeito encontrado é puramente da renda. Lembramos que o risco de Insan pode ser afetado por outras ações, como a qualificação e a presença de cozinhas.</a:t>
             </a:r>
             <a:endParaRPr lang="pt-BR" sz="2000" b="0" u="none" strike="noStrike">
               <a:solidFill>
@@ -10436,207 +9390,14 @@
       </p:grpSpPr>
       <p:sp>
         <p:nvSpPr>
-          <p:cNvPr id="100" name="CaixaDeTexto 2"/>
+          <p:cNvPr id="102" name="CaixaDeTexto 9"/>
           <p:cNvSpPr/>
           <p:nvPr/>
         </p:nvSpPr>
         <p:spPr>
           <a:xfrm>
-            <a:off x="1952640" y="2180520"/>
-            <a:ext cx="8667000" cy="2319480"/>
-          </a:xfrm>
-          <a:prstGeom prst="rect">
-            <a:avLst/>
-          </a:prstGeom>
-          <a:noFill/>
-          <a:ln w="0">
-            <a:noFill/>
-          </a:ln>
-        </p:spPr>
-        <p:style>
-          <a:lnRef idx="0"/>
-          <a:fillRef idx="0"/>
-          <a:effectRef idx="0"/>
-          <a:fontRef idx="minor"/>
-        </p:style>
-        <p:txBody>
-          <a:bodyPr lIns="90000" rIns="90000" tIns="45000" bIns="45000" anchor="t" anchorCtr="1">
-            <a:spAutoFit/>
-          </a:bodyPr>
-          <a:p>
-            <a:pPr algn="ctr" defTabSz="914400">
-              <a:lnSpc>
-                <a:spcPct val="100000"/>
-              </a:lnSpc>
-            </a:pPr>
-            <a:r>
-              <a:rPr lang="pt-BR" sz="4000" b="1" u="none" strike="noStrike">
-                <a:solidFill>
-                  <a:srgbClr val="000000"/>
-                </a:solidFill>
-                <a:effectLst/>
-                <a:uFillTx/>
-                <a:latin typeface="Kanit"/>
-              </a:rPr>
-              <a:t>Obrigado</a:t>
-            </a:r>
-            <a:endParaRPr lang="pt-BR" sz="4000" b="0" u="none" strike="noStrike">
-              <a:solidFill>
-                <a:srgbClr val="000000"/>
-              </a:solidFill>
-              <a:effectLst/>
-              <a:uFillTx/>
-              <a:latin typeface="Arial"/>
-            </a:endParaRPr>
-          </a:p>
-          <a:p>
-            <a:pPr algn="ctr" defTabSz="914400">
-              <a:lnSpc>
-                <a:spcPct val="100000"/>
-              </a:lnSpc>
-              <a:spcBef>
-                <a:spcPts val="1191"/>
-              </a:spcBef>
-              <a:spcAft>
-                <a:spcPts val="992"/>
-              </a:spcAft>
-            </a:pPr>
-            <a:r>
-              <a:rPr lang="pt-BR" sz="2000" b="0" u="none" strike="noStrike">
-                <a:solidFill>
-                  <a:srgbClr val="000000"/>
-                </a:solidFill>
-                <a:effectLst/>
-                <a:uFillTx/>
-                <a:latin typeface="Maitree"/>
-              </a:rPr>
-              <a:t>João Victor Batista Lopes</a:t>
-            </a:r>
-            <a:endParaRPr lang="pt-BR" sz="2000" b="0" u="none" strike="noStrike">
-              <a:solidFill>
-                <a:srgbClr val="000000"/>
-              </a:solidFill>
-              <a:effectLst/>
-              <a:uFillTx/>
-              <a:latin typeface="Arial"/>
-            </a:endParaRPr>
-          </a:p>
-          <a:p>
-            <a:pPr algn="ctr" defTabSz="914400">
-              <a:lnSpc>
-                <a:spcPct val="100000"/>
-              </a:lnSpc>
-              <a:spcBef>
-                <a:spcPts val="1191"/>
-              </a:spcBef>
-              <a:spcAft>
-                <a:spcPts val="992"/>
-              </a:spcAft>
-            </a:pPr>
-            <a:r>
-              <a:rPr lang="pt-BR" sz="2000" b="0" u="none" strike="noStrike">
-                <a:solidFill>
-                  <a:srgbClr val="000000"/>
-                </a:solidFill>
-                <a:effectLst/>
-                <a:uFillTx/>
-                <a:latin typeface="Maitree"/>
-              </a:rPr>
-              <a:t>Assessor Técnico | DISOC – IPECE</a:t>
-            </a:r>
-            <a:endParaRPr lang="pt-BR" sz="2000" b="0" u="none" strike="noStrike">
-              <a:solidFill>
-                <a:srgbClr val="000000"/>
-              </a:solidFill>
-              <a:effectLst/>
-              <a:uFillTx/>
-              <a:latin typeface="Arial"/>
-            </a:endParaRPr>
-          </a:p>
-          <a:p>
-            <a:pPr algn="ctr" defTabSz="914400">
-              <a:lnSpc>
-                <a:spcPct val="100000"/>
-              </a:lnSpc>
-              <a:spcBef>
-                <a:spcPts val="1191"/>
-              </a:spcBef>
-              <a:spcAft>
-                <a:spcPts val="992"/>
-              </a:spcAft>
-            </a:pPr>
-            <a:r>
-              <a:rPr lang="pt-BR" sz="2000" b="0" u="none" strike="noStrike">
-                <a:solidFill>
-                  <a:srgbClr val="000000"/>
-                </a:solidFill>
-                <a:effectLst/>
-                <a:uFillTx/>
-                <a:latin typeface="Maitree"/>
-              </a:rPr>
-              <a:t>Dados abertos · Código aberto · Ciência reprodutível</a:t>
-            </a:r>
-            <a:endParaRPr lang="pt-BR" sz="2000" b="0" u="none" strike="noStrike">
-              <a:solidFill>
-                <a:srgbClr val="000000"/>
-              </a:solidFill>
-              <a:effectLst/>
-              <a:uFillTx/>
-              <a:latin typeface="Arial"/>
-            </a:endParaRPr>
-          </a:p>
-        </p:txBody>
-      </p:sp>
-    </p:spTree>
-  </p:cSld>
-  <mc:AlternateContent>
-    <mc:Choice Requires="p14">
-      <p:transition spd="slow" p14:dur="2000"/>
-    </mc:Choice>
-    <mc:Fallback>
-      <p:transition spd="slow"/>
-    </mc:Fallback>
-  </mc:AlternateContent>
-</p:sld>
-</file>
-
-<file path=ppt/slides/slide2.xml><?xml version="1.0" encoding="utf-8"?>
-<p:sld xmlns:a="http://schemas.openxmlformats.org/drawingml/2006/main" xmlns:p="http://schemas.openxmlformats.org/presentationml/2006/main" xmlns:r="http://schemas.openxmlformats.org/officeDocument/2006/relationships" xmlns:p14="http://schemas.microsoft.com/office/powerpoint/2010/main" xmlns:p15="http://schemas.microsoft.com/office/powerpoint/2012/main" xmlns:mc="http://schemas.openxmlformats.org/markup-compatibility/2006">
-  <p:cSld>
-    <p:bg>
-      <p:bgPr>
-        <a:blipFill rotWithShape="0">
-          <a:blip r:embed="rId1"/>
-          <a:stretch>
-            <a:fillRect l="-996" r="-996"/>
-          </a:stretch>
-        </a:blipFill>
-      </p:bgPr>
-    </p:bg>
-    <p:spTree>
-      <p:nvGrpSpPr>
-        <p:cNvPr id="1" name=""/>
-        <p:cNvGrpSpPr/>
-        <p:nvPr/>
-      </p:nvGrpSpPr>
-      <p:grpSpPr>
-        <a:xfrm>
-          <a:off x="0" y="0"/>
-          <a:ext cx="0" cy="0"/>
-          <a:chOff x="0" y="0"/>
-          <a:chExt cx="0" cy="0"/>
-        </a:xfrm>
-      </p:grpSpPr>
-      <p:sp>
-        <p:nvSpPr>
-          <p:cNvPr id="65" name="CaixaDeTexto 5"/>
-          <p:cNvSpPr/>
-          <p:nvPr/>
-        </p:nvSpPr>
-        <p:spPr>
-          <a:xfrm>
-            <a:off x="903240" y="1455840"/>
-            <a:ext cx="10384560" cy="363960"/>
+            <a:off x="1080000" y="1976040"/>
+            <a:ext cx="10383840" cy="455400"/>
           </a:xfrm>
           <a:prstGeom prst="rect">
             <a:avLst/>
@@ -10678,6 +9439,552 @@
               </a:lnSpc>
             </a:pPr>
             <a:r>
+              <a:rPr lang="pt-BR" sz="2400" b="1" u="none" strike="noStrike">
+                <a:solidFill>
+                  <a:schemeClr val="lt1"/>
+                </a:solidFill>
+                <a:effectLst/>
+                <a:uFillTx/>
+                <a:latin typeface="Verdana"/>
+                <a:ea typeface="Verdana"/>
+              </a:rPr>
+              <a:t>PRÓXIMOS PASSOS</a:t>
+            </a:r>
+            <a:endParaRPr lang="pt-BR" sz="2400" b="0" u="none" strike="noStrike">
+              <a:solidFill>
+                <a:srgbClr val="ffffff"/>
+              </a:solidFill>
+              <a:effectLst/>
+              <a:uFillTx/>
+              <a:latin typeface="Arial"/>
+            </a:endParaRPr>
+          </a:p>
+        </p:txBody>
+      </p:sp>
+      <p:sp>
+        <p:nvSpPr>
+          <p:cNvPr id="103" name=""/>
+          <p:cNvSpPr/>
+          <p:nvPr/>
+        </p:nvSpPr>
+        <p:spPr>
+          <a:xfrm>
+            <a:off x="900000" y="2752560"/>
+            <a:ext cx="10438920" cy="1282320"/>
+          </a:xfrm>
+          <a:prstGeom prst="rect">
+            <a:avLst/>
+          </a:prstGeom>
+          <a:noFill/>
+          <a:ln w="0">
+            <a:noFill/>
+          </a:ln>
+        </p:spPr>
+        <p:style>
+          <a:lnRef idx="0"/>
+          <a:fillRef idx="0"/>
+          <a:effectRef idx="0"/>
+          <a:fontRef idx="minor"/>
+        </p:style>
+        <p:txBody>
+          <a:bodyPr lIns="90000" rIns="90000" tIns="45000" bIns="45000" anchor="t" anchorCtr="1">
+            <a:spAutoFit/>
+          </a:bodyPr>
+          <a:p>
+            <a:pPr algn="ctr">
+              <a:lnSpc>
+                <a:spcPct val="100000"/>
+              </a:lnSpc>
+              <a:spcBef>
+                <a:spcPts val="1191"/>
+              </a:spcBef>
+              <a:spcAft>
+                <a:spcPts val="992"/>
+              </a:spcAft>
+            </a:pPr>
+            <a:r>
+              <a:rPr lang="pt-BR" sz="2000" b="0" u="none" strike="noStrike">
+                <a:solidFill>
+                  <a:srgbClr val="000000"/>
+                </a:solidFill>
+                <a:effectLst/>
+                <a:uFillTx/>
+                <a:latin typeface="Maitree"/>
+              </a:rPr>
+              <a:t>Outros exercícios podem ser realizados, como calcular diferentes valores para o cartão e ver como eles alteram a probabilidade de Insan grave.</a:t>
+            </a:r>
+            <a:endParaRPr lang="pt-BR" sz="2000" b="0" u="none" strike="noStrike">
+              <a:solidFill>
+                <a:srgbClr val="000000"/>
+              </a:solidFill>
+              <a:effectLst/>
+              <a:uFillTx/>
+              <a:latin typeface="Arial"/>
+            </a:endParaRPr>
+          </a:p>
+          <a:p>
+            <a:pPr algn="ctr">
+              <a:lnSpc>
+                <a:spcPct val="100000"/>
+              </a:lnSpc>
+              <a:spcBef>
+                <a:spcPts val="1191"/>
+              </a:spcBef>
+              <a:spcAft>
+                <a:spcPts val="992"/>
+              </a:spcAft>
+            </a:pPr>
+            <a:r>
+              <a:rPr lang="pt-BR" sz="2000" b="0" u="none" strike="noStrike">
+                <a:solidFill>
+                  <a:srgbClr val="000000"/>
+                </a:solidFill>
+                <a:effectLst/>
+                <a:uFillTx/>
+                <a:latin typeface="Maitree"/>
+              </a:rPr>
+              <a:t>Utilizar outras fontes de dados sobre Insan, como a aplicação da TRIA. </a:t>
+            </a:r>
+            <a:endParaRPr lang="pt-BR" sz="2000" b="0" u="none" strike="noStrike">
+              <a:solidFill>
+                <a:srgbClr val="000000"/>
+              </a:solidFill>
+              <a:effectLst/>
+              <a:uFillTx/>
+              <a:latin typeface="Arial"/>
+            </a:endParaRPr>
+          </a:p>
+        </p:txBody>
+      </p:sp>
+    </p:spTree>
+  </p:cSld>
+  <mc:AlternateContent>
+    <mc:Choice Requires="p14">
+      <p:transition spd="slow" p14:dur="2000"/>
+    </mc:Choice>
+    <mc:Fallback>
+      <p:transition spd="slow"/>
+    </mc:Fallback>
+  </mc:AlternateContent>
+</p:sld>
+</file>
+
+<file path=ppt/slides/slide18.xml><?xml version="1.0" encoding="utf-8"?>
+<p:sld xmlns:a="http://schemas.openxmlformats.org/drawingml/2006/main" xmlns:p="http://schemas.openxmlformats.org/presentationml/2006/main" xmlns:r="http://schemas.openxmlformats.org/officeDocument/2006/relationships" xmlns:p14="http://schemas.microsoft.com/office/powerpoint/2010/main" xmlns:p15="http://schemas.microsoft.com/office/powerpoint/2012/main" xmlns:mc="http://schemas.openxmlformats.org/markup-compatibility/2006">
+  <p:cSld>
+    <p:spTree>
+      <p:nvGrpSpPr>
+        <p:cNvPr id="1" name=""/>
+        <p:cNvGrpSpPr/>
+        <p:nvPr/>
+      </p:nvGrpSpPr>
+      <p:grpSpPr>
+        <a:xfrm>
+          <a:off x="0" y="0"/>
+          <a:ext cx="0" cy="0"/>
+          <a:chOff x="0" y="0"/>
+          <a:chExt cx="0" cy="0"/>
+        </a:xfrm>
+      </p:grpSpPr>
+      <p:sp>
+        <p:nvSpPr>
+          <p:cNvPr id="104" name=""/>
+          <p:cNvSpPr/>
+          <p:nvPr/>
+        </p:nvSpPr>
+        <p:spPr>
+          <a:xfrm>
+            <a:off x="1620000" y="2340000"/>
+            <a:ext cx="9178920" cy="1308240"/>
+          </a:xfrm>
+          <a:prstGeom prst="rect">
+            <a:avLst/>
+          </a:prstGeom>
+          <a:noFill/>
+          <a:ln w="0">
+            <a:noFill/>
+          </a:ln>
+        </p:spPr>
+        <p:style>
+          <a:lnRef idx="0"/>
+          <a:fillRef idx="0"/>
+          <a:effectRef idx="0"/>
+          <a:fontRef idx="minor"/>
+        </p:style>
+        <p:txBody>
+          <a:bodyPr lIns="90000" rIns="90000" tIns="45000" bIns="45000" anchor="t">
+            <a:spAutoFit/>
+          </a:bodyPr>
+          <a:p>
+            <a:pPr marL="216000" indent="-216000">
+              <a:lnSpc>
+                <a:spcPct val="100000"/>
+              </a:lnSpc>
+              <a:spcBef>
+                <a:spcPts val="1191"/>
+              </a:spcBef>
+              <a:spcAft>
+                <a:spcPts val="992"/>
+              </a:spcAft>
+              <a:buClr>
+                <a:srgbClr val="000000"/>
+              </a:buClr>
+              <a:buFont typeface="Wingdings" charset="2"/>
+              <a:buChar char=""/>
+            </a:pPr>
+            <a:r>
+              <a:rPr lang="pt-BR" sz="1600" b="0" u="none" strike="noStrike">
+                <a:solidFill>
+                  <a:srgbClr val="000000"/>
+                </a:solidFill>
+                <a:effectLst/>
+                <a:uFillTx/>
+                <a:latin typeface="Maitree"/>
+              </a:rPr>
+              <a:t>BRASIL, Ministério do Desenvolvimento e Assistência Social, Família e Combate à Fome. CADINSAN: indicador de risco de insegurança alimentar municipal a partir dos dados do cadunico. Brasilía, 2025. Disponível em https://www.gov.br/mds/pt-br/Sisan/monitoramento-da-san/Relatorio_CadINSAN.pdf Acesso em jan/2026. </a:t>
+            </a:r>
+            <a:endParaRPr lang="pt-BR" sz="1600" b="0" u="none" strike="noStrike">
+              <a:solidFill>
+                <a:srgbClr val="000000"/>
+              </a:solidFill>
+              <a:effectLst/>
+              <a:uFillTx/>
+              <a:latin typeface="Arial"/>
+            </a:endParaRPr>
+          </a:p>
+        </p:txBody>
+      </p:sp>
+      <p:sp>
+        <p:nvSpPr>
+          <p:cNvPr id="105" name=""/>
+          <p:cNvSpPr/>
+          <p:nvPr/>
+        </p:nvSpPr>
+        <p:spPr>
+          <a:xfrm>
+            <a:off x="1620000" y="1586520"/>
+            <a:ext cx="1779840" cy="470160"/>
+          </a:xfrm>
+          <a:prstGeom prst="rect">
+            <a:avLst/>
+          </a:prstGeom>
+          <a:noFill/>
+          <a:ln w="0">
+            <a:noFill/>
+          </a:ln>
+        </p:spPr>
+        <p:style>
+          <a:lnRef idx="0"/>
+          <a:fillRef idx="0"/>
+          <a:effectRef idx="0"/>
+          <a:fontRef idx="minor"/>
+        </p:style>
+        <p:txBody>
+          <a:bodyPr wrap="none" lIns="90000" rIns="90000" tIns="45000" bIns="45000" anchor="t">
+            <a:spAutoFit/>
+          </a:bodyPr>
+          <a:p>
+            <a:pPr>
+              <a:lnSpc>
+                <a:spcPct val="100000"/>
+              </a:lnSpc>
+            </a:pPr>
+            <a:r>
+              <a:rPr lang="pt-BR" sz="2000" b="1" u="none" strike="noStrike">
+                <a:solidFill>
+                  <a:srgbClr val="000000"/>
+                </a:solidFill>
+                <a:effectLst/>
+                <a:uFillTx/>
+                <a:latin typeface="Kanit"/>
+              </a:rPr>
+              <a:t>REFERÊNCIAS</a:t>
+            </a:r>
+            <a:endParaRPr lang="pt-BR" sz="2000" b="0" u="none" strike="noStrike">
+              <a:solidFill>
+                <a:srgbClr val="000000"/>
+              </a:solidFill>
+              <a:effectLst/>
+              <a:uFillTx/>
+              <a:latin typeface="Arial"/>
+            </a:endParaRPr>
+          </a:p>
+        </p:txBody>
+      </p:sp>
+    </p:spTree>
+  </p:cSld>
+  <mc:AlternateContent>
+    <mc:Choice Requires="p14">
+      <p:transition spd="slow" p14:dur="2000"/>
+    </mc:Choice>
+    <mc:Fallback>
+      <p:transition spd="slow"/>
+    </mc:Fallback>
+  </mc:AlternateContent>
+</p:sld>
+</file>
+
+<file path=ppt/slides/slide19.xml><?xml version="1.0" encoding="utf-8"?>
+<p:sld xmlns:a="http://schemas.openxmlformats.org/drawingml/2006/main" xmlns:p="http://schemas.openxmlformats.org/presentationml/2006/main" xmlns:r="http://schemas.openxmlformats.org/officeDocument/2006/relationships" xmlns:p14="http://schemas.microsoft.com/office/powerpoint/2010/main" xmlns:p15="http://schemas.microsoft.com/office/powerpoint/2012/main" xmlns:mc="http://schemas.openxmlformats.org/markup-compatibility/2006">
+  <p:cSld>
+    <p:spTree>
+      <p:nvGrpSpPr>
+        <p:cNvPr id="1" name=""/>
+        <p:cNvGrpSpPr/>
+        <p:nvPr/>
+      </p:nvGrpSpPr>
+      <p:grpSpPr>
+        <a:xfrm>
+          <a:off x="0" y="0"/>
+          <a:ext cx="0" cy="0"/>
+          <a:chOff x="0" y="0"/>
+          <a:chExt cx="0" cy="0"/>
+        </a:xfrm>
+      </p:grpSpPr>
+      <p:sp>
+        <p:nvSpPr>
+          <p:cNvPr id="106" name="CaixaDeTexto 2"/>
+          <p:cNvSpPr/>
+          <p:nvPr/>
+        </p:nvSpPr>
+        <p:spPr>
+          <a:xfrm>
+            <a:off x="1952640" y="2180520"/>
+            <a:ext cx="8666280" cy="2319480"/>
+          </a:xfrm>
+          <a:prstGeom prst="rect">
+            <a:avLst/>
+          </a:prstGeom>
+          <a:noFill/>
+          <a:ln w="0">
+            <a:noFill/>
+          </a:ln>
+        </p:spPr>
+        <p:style>
+          <a:lnRef idx="0"/>
+          <a:fillRef idx="0"/>
+          <a:effectRef idx="0"/>
+          <a:fontRef idx="minor"/>
+        </p:style>
+        <p:txBody>
+          <a:bodyPr lIns="90000" rIns="90000" tIns="45000" bIns="45000" anchor="t" anchorCtr="1">
+            <a:spAutoFit/>
+          </a:bodyPr>
+          <a:p>
+            <a:pPr algn="ctr" defTabSz="914400">
+              <a:lnSpc>
+                <a:spcPct val="100000"/>
+              </a:lnSpc>
+            </a:pPr>
+            <a:r>
+              <a:rPr lang="pt-BR" sz="4000" b="1" u="none" strike="noStrike">
+                <a:solidFill>
+                  <a:srgbClr val="000000"/>
+                </a:solidFill>
+                <a:effectLst/>
+                <a:uFillTx/>
+                <a:latin typeface="Kanit"/>
+              </a:rPr>
+              <a:t>Obrigado</a:t>
+            </a:r>
+            <a:endParaRPr lang="pt-BR" sz="4000" b="0" u="none" strike="noStrike">
+              <a:solidFill>
+                <a:srgbClr val="000000"/>
+              </a:solidFill>
+              <a:effectLst/>
+              <a:uFillTx/>
+              <a:latin typeface="Arial"/>
+            </a:endParaRPr>
+          </a:p>
+          <a:p>
+            <a:pPr algn="ctr" defTabSz="914400">
+              <a:lnSpc>
+                <a:spcPct val="100000"/>
+              </a:lnSpc>
+              <a:spcBef>
+                <a:spcPts val="1191"/>
+              </a:spcBef>
+              <a:spcAft>
+                <a:spcPts val="992"/>
+              </a:spcAft>
+            </a:pPr>
+            <a:r>
+              <a:rPr lang="pt-BR" sz="2000" b="0" u="none" strike="noStrike">
+                <a:solidFill>
+                  <a:srgbClr val="000000"/>
+                </a:solidFill>
+                <a:effectLst/>
+                <a:uFillTx/>
+                <a:latin typeface="Maitree"/>
+              </a:rPr>
+              <a:t>João Victor Batista Lopes</a:t>
+            </a:r>
+            <a:endParaRPr lang="pt-BR" sz="2000" b="0" u="none" strike="noStrike">
+              <a:solidFill>
+                <a:srgbClr val="000000"/>
+              </a:solidFill>
+              <a:effectLst/>
+              <a:uFillTx/>
+              <a:latin typeface="Arial"/>
+            </a:endParaRPr>
+          </a:p>
+          <a:p>
+            <a:pPr algn="ctr" defTabSz="914400">
+              <a:lnSpc>
+                <a:spcPct val="100000"/>
+              </a:lnSpc>
+              <a:spcBef>
+                <a:spcPts val="1191"/>
+              </a:spcBef>
+              <a:spcAft>
+                <a:spcPts val="992"/>
+              </a:spcAft>
+            </a:pPr>
+            <a:r>
+              <a:rPr lang="pt-BR" sz="2000" b="0" u="none" strike="noStrike">
+                <a:solidFill>
+                  <a:srgbClr val="000000"/>
+                </a:solidFill>
+                <a:effectLst/>
+                <a:uFillTx/>
+                <a:latin typeface="Maitree"/>
+              </a:rPr>
+              <a:t>Assessor Técnico | DISOC – IPECE</a:t>
+            </a:r>
+            <a:endParaRPr lang="pt-BR" sz="2000" b="0" u="none" strike="noStrike">
+              <a:solidFill>
+                <a:srgbClr val="000000"/>
+              </a:solidFill>
+              <a:effectLst/>
+              <a:uFillTx/>
+              <a:latin typeface="Arial"/>
+            </a:endParaRPr>
+          </a:p>
+          <a:p>
+            <a:pPr algn="ctr" defTabSz="914400">
+              <a:lnSpc>
+                <a:spcPct val="100000"/>
+              </a:lnSpc>
+              <a:spcBef>
+                <a:spcPts val="1191"/>
+              </a:spcBef>
+              <a:spcAft>
+                <a:spcPts val="992"/>
+              </a:spcAft>
+            </a:pPr>
+            <a:r>
+              <a:rPr lang="pt-BR" sz="2000" b="0" u="none" strike="noStrike">
+                <a:solidFill>
+                  <a:srgbClr val="000000"/>
+                </a:solidFill>
+                <a:effectLst/>
+                <a:uFillTx/>
+                <a:latin typeface="Maitree"/>
+              </a:rPr>
+              <a:t>Dados abertos · Código aberto · Ciência reprodutível</a:t>
+            </a:r>
+            <a:endParaRPr lang="pt-BR" sz="2000" b="0" u="none" strike="noStrike">
+              <a:solidFill>
+                <a:srgbClr val="000000"/>
+              </a:solidFill>
+              <a:effectLst/>
+              <a:uFillTx/>
+              <a:latin typeface="Arial"/>
+            </a:endParaRPr>
+          </a:p>
+        </p:txBody>
+      </p:sp>
+    </p:spTree>
+  </p:cSld>
+  <mc:AlternateContent>
+    <mc:Choice Requires="p14">
+      <p:transition spd="slow" p14:dur="2000"/>
+    </mc:Choice>
+    <mc:Fallback>
+      <p:transition spd="slow"/>
+    </mc:Fallback>
+  </mc:AlternateContent>
+</p:sld>
+</file>
+
+<file path=ppt/slides/slide2.xml><?xml version="1.0" encoding="utf-8"?>
+<p:sld xmlns:a="http://schemas.openxmlformats.org/drawingml/2006/main" xmlns:p="http://schemas.openxmlformats.org/presentationml/2006/main" xmlns:r="http://schemas.openxmlformats.org/officeDocument/2006/relationships" xmlns:p14="http://schemas.microsoft.com/office/powerpoint/2010/main" xmlns:p15="http://schemas.microsoft.com/office/powerpoint/2012/main" xmlns:mc="http://schemas.openxmlformats.org/markup-compatibility/2006">
+  <p:cSld>
+    <p:bg>
+      <p:bgPr>
+        <a:blipFill rotWithShape="0">
+          <a:blip r:embed="rId1"/>
+          <a:stretch>
+            <a:fillRect l="-993" r="-993"/>
+          </a:stretch>
+        </a:blipFill>
+      </p:bgPr>
+    </p:bg>
+    <p:spTree>
+      <p:nvGrpSpPr>
+        <p:cNvPr id="1" name=""/>
+        <p:cNvGrpSpPr/>
+        <p:nvPr/>
+      </p:nvGrpSpPr>
+      <p:grpSpPr>
+        <a:xfrm>
+          <a:off x="0" y="0"/>
+          <a:ext cx="0" cy="0"/>
+          <a:chOff x="0" y="0"/>
+          <a:chExt cx="0" cy="0"/>
+        </a:xfrm>
+      </p:grpSpPr>
+      <p:sp>
+        <p:nvSpPr>
+          <p:cNvPr id="65" name="CaixaDeTexto 5"/>
+          <p:cNvSpPr/>
+          <p:nvPr/>
+        </p:nvSpPr>
+        <p:spPr>
+          <a:xfrm>
+            <a:off x="903240" y="1455840"/>
+            <a:ext cx="10383840" cy="363960"/>
+          </a:xfrm>
+          <a:prstGeom prst="rect">
+            <a:avLst/>
+          </a:prstGeom>
+          <a:solidFill>
+            <a:srgbClr val="0f9200"/>
+          </a:solidFill>
+          <a:ln w="0">
+            <a:noFill/>
+          </a:ln>
+          <a:effectLst>
+            <a:outerShdw algn="ctr" blurRad="57240" dir="5400000" dist="19080" rotWithShape="0">
+              <a:srgbClr val="000000">
+                <a:alpha val="63000"/>
+              </a:srgbClr>
+            </a:outerShdw>
+          </a:effectLst>
+        </p:spPr>
+        <p:style>
+          <a:lnRef idx="0">
+            <a:schemeClr val="accent6"/>
+          </a:lnRef>
+          <a:fillRef idx="3">
+            <a:schemeClr val="accent6"/>
+          </a:fillRef>
+          <a:effectRef idx="3">
+            <a:schemeClr val="accent6"/>
+          </a:effectRef>
+          <a:fontRef idx="minor"/>
+        </p:style>
+        <p:txBody>
+          <a:bodyPr lIns="90000" rIns="90000" tIns="45000" bIns="45000" anchor="t">
+            <a:spAutoFit/>
+          </a:bodyPr>
+          <a:p>
+            <a:pPr algn="ctr" defTabSz="914400">
+              <a:lnSpc>
+                <a:spcPct val="100000"/>
+              </a:lnSpc>
+            </a:pPr>
+            <a:r>
               <a:rPr lang="pt-BR" sz="1800" b="1" u="none" strike="noStrike">
                 <a:solidFill>
                   <a:schemeClr val="lt1"/>
@@ -10709,7 +10016,7 @@
         <p:spPr>
           <a:xfrm>
             <a:off x="903240" y="2573280"/>
-            <a:ext cx="10384560" cy="912600"/>
+            <a:ext cx="10383840" cy="912600"/>
           </a:xfrm>
           <a:prstGeom prst="rect">
             <a:avLst/>
@@ -10744,7 +10051,29 @@
                 <a:uFillTx/>
                 <a:latin typeface="Maitree"/>
               </a:rPr>
-              <a:t>Qual é o tamanho do impacto do Cartão Ceará Sem Fome na probabilidade de seus beneficiários estarem  em Insegurança Alimentar e Nutricional Grave?</a:t>
+              <a:t>Qual é o tamanho do impacto do Cartão Ceará Sem Fome no </a:t>
+            </a:r>
+            <a:r>
+              <a:rPr lang="pt-BR" sz="1800" b="1" u="none" strike="noStrike">
+                <a:solidFill>
+                  <a:schemeClr val="dk1"/>
+                </a:solidFill>
+                <a:effectLst/>
+                <a:uFillTx/>
+                <a:latin typeface="Maitree"/>
+              </a:rPr>
+              <a:t>risco</a:t>
+            </a:r>
+            <a:r>
+              <a:rPr lang="pt-BR" sz="1800" b="0" u="none" strike="noStrike">
+                <a:solidFill>
+                  <a:schemeClr val="dk1"/>
+                </a:solidFill>
+                <a:effectLst/>
+                <a:uFillTx/>
+                <a:latin typeface="Maitree"/>
+              </a:rPr>
+              <a:t> de seus beneficiários estarem  em Insegurança Alimentar e Nutricional Grave?</a:t>
             </a:r>
             <a:endParaRPr lang="pt-BR" sz="1800" b="0" u="none" strike="noStrike">
               <a:solidFill>
@@ -10796,7 +10125,7 @@
         <p:spPr>
           <a:xfrm>
             <a:off x="903240" y="936360"/>
-            <a:ext cx="10384560" cy="363960"/>
+            <a:ext cx="10383840" cy="363960"/>
           </a:xfrm>
           <a:prstGeom prst="rect">
             <a:avLst/>
@@ -10873,7 +10202,7 @@
         <p:spPr>
           <a:xfrm>
             <a:off x="1691280" y="1440000"/>
-            <a:ext cx="8928360" cy="4869720"/>
+            <a:ext cx="8927640" cy="4869000"/>
           </a:xfrm>
           <a:prstGeom prst="rect">
             <a:avLst/>
@@ -10892,8 +10221,8 @@
         </p:nvSpPr>
         <p:spPr>
           <a:xfrm flipV="1">
-            <a:off x="2376000" y="5507280"/>
-            <a:ext cx="1079640" cy="179640"/>
+            <a:off x="2376000" y="5506560"/>
+            <a:ext cx="1078920" cy="178920"/>
           </a:xfrm>
           <a:prstGeom prst="rect">
             <a:avLst/>
@@ -10940,8 +10269,8 @@
         </p:nvSpPr>
         <p:spPr>
           <a:xfrm flipV="1">
-            <a:off x="6264000" y="3815280"/>
-            <a:ext cx="539640" cy="179640"/>
+            <a:off x="6264000" y="3814560"/>
+            <a:ext cx="538920" cy="178920"/>
           </a:xfrm>
           <a:prstGeom prst="rect">
             <a:avLst/>
@@ -11019,7 +10348,7 @@
         <p:spPr>
           <a:xfrm>
             <a:off x="903240" y="936360"/>
-            <a:ext cx="10384560" cy="363960"/>
+            <a:ext cx="10383840" cy="363960"/>
           </a:xfrm>
           <a:prstGeom prst="rect">
             <a:avLst/>
@@ -11092,7 +10421,7 @@
         <p:spPr>
           <a:xfrm>
             <a:off x="1771200" y="1370520"/>
-            <a:ext cx="8667000" cy="394560"/>
+            <a:ext cx="8666280" cy="394560"/>
           </a:xfrm>
           <a:prstGeom prst="rect">
             <a:avLst/>
@@ -11149,7 +10478,7 @@
         <p:spPr>
           <a:xfrm>
             <a:off x="432000" y="1832760"/>
-            <a:ext cx="11358000" cy="4024800"/>
+            <a:ext cx="11357280" cy="4024080"/>
           </a:xfrm>
           <a:prstGeom prst="rect">
             <a:avLst/>
@@ -11353,7 +10682,7 @@
         <p:spPr>
           <a:xfrm>
             <a:off x="903240" y="936360"/>
-            <a:ext cx="10384560" cy="363960"/>
+            <a:ext cx="10383840" cy="363960"/>
           </a:xfrm>
           <a:prstGeom prst="rect">
             <a:avLst/>
@@ -11426,7 +10755,7 @@
         <p:spPr>
           <a:xfrm>
             <a:off x="1771200" y="1370520"/>
-            <a:ext cx="8667000" cy="394560"/>
+            <a:ext cx="8666280" cy="394560"/>
           </a:xfrm>
           <a:prstGeom prst="rect">
             <a:avLst/>
@@ -11461,7 +10790,7 @@
                 <a:uFillTx/>
                 <a:latin typeface="Kanit"/>
               </a:rPr>
-              <a:t>CADINSAN, do MDS</a:t>
+              <a:t>CADINSAN, do MDS: dados de 2023</a:t>
             </a:r>
             <a:endParaRPr lang="pt-BR" sz="2000" b="0" u="none" strike="noStrike">
               <a:solidFill>
@@ -11505,11 +10834,6 @@
                       <a:noAutofit/>
                     </a:bodyPr>
                     <a:p>
-                      <a:pPr>
-                        <a:lnSpc>
-                          <a:spcPct val="100000"/>
-                        </a:lnSpc>
-                      </a:pPr>
                       <a:endParaRPr lang="pt-BR" sz="1800" b="0" u="none" strike="noStrike">
                         <a:solidFill>
                           <a:srgbClr val="000000"/>
@@ -11688,7 +11012,7 @@
                           <a:uFillTx/>
                           <a:latin typeface="Maitree"/>
                         </a:rPr>
-                        <a:t>Proporção sem benefícios sociais</a:t>
+                        <a:t>Proporção de famílias em IA grave sem benefícios sociais</a:t>
                       </a:r>
                       <a:endParaRPr lang="pt-BR" sz="1600" b="0" u="none" strike="noStrike">
                         <a:solidFill>
@@ -11807,8 +11131,20 @@
                           <a:effectLst/>
                           <a:uFillTx/>
                           <a:latin typeface="Maitree"/>
+                          <a:ea typeface="Microsoft YaHei"/>
                         </a:rPr>
-                        <a:t>Proporção com benefícios sociais</a:t>
+                        <a:t>Proporção</a:t>
+                      </a:r>
+                      <a:r>
+                        <a:rPr lang="pt-BR" sz="1600" b="0" u="none" strike="noStrike">
+                          <a:solidFill>
+                            <a:srgbClr val="000000"/>
+                          </a:solidFill>
+                          <a:effectLst/>
+                          <a:uFillTx/>
+                          <a:latin typeface="Maitree"/>
+                        </a:rPr>
+                        <a:t> de famílias em IA grave com benefícios sociais</a:t>
                       </a:r>
                       <a:endParaRPr lang="pt-BR" sz="1600" b="0" u="none" strike="noStrike">
                         <a:solidFill>
@@ -14904,7 +14240,7 @@
         <p:spPr>
           <a:xfrm>
             <a:off x="903240" y="946080"/>
-            <a:ext cx="10384560" cy="363960"/>
+            <a:ext cx="10383840" cy="455400"/>
           </a:xfrm>
           <a:prstGeom prst="rect">
             <a:avLst/>
@@ -14946,7 +14282,7 @@
               </a:lnSpc>
             </a:pPr>
             <a:r>
-              <a:rPr lang="pt-BR" sz="1800" b="1" u="none" strike="noStrike">
+              <a:rPr lang="pt-BR" sz="2400" b="1" u="none" strike="noStrike">
                 <a:solidFill>
                   <a:schemeClr val="lt1"/>
                 </a:solidFill>
@@ -14957,7 +14293,7 @@
               </a:rPr>
               <a:t>METODOLOGIA</a:t>
             </a:r>
-            <a:endParaRPr lang="pt-BR" sz="1800" b="0" u="none" strike="noStrike">
+            <a:endParaRPr lang="pt-BR" sz="2400" b="0" u="none" strike="noStrike">
               <a:solidFill>
                 <a:srgbClr val="ffffff"/>
               </a:solidFill>
@@ -14977,7 +14313,7 @@
         <p:spPr>
           <a:xfrm>
             <a:off x="3041640" y="2774880"/>
-            <a:ext cx="6108120" cy="1308240"/>
+            <a:ext cx="6107400" cy="1919160"/>
           </a:xfrm>
           <a:prstGeom prst="rect">
             <a:avLst/>
@@ -15004,7 +14340,7 @@
               </a:lnSpc>
             </a:pPr>
             <a:r>
-              <a:rPr lang="pt-BR" sz="1600" b="0" u="none" strike="noStrike">
+              <a:rPr lang="pt-BR" sz="2000" b="0" u="none" strike="noStrike">
                 <a:solidFill>
                   <a:srgbClr val="000000"/>
                 </a:solidFill>
@@ -15014,7 +14350,7 @@
               </a:rPr>
               <a:t>Treinar um modelo preditivo com dados da PNAD Contínua e aplicar os estimadores encontrados na população do CadÚnico beneficiada com o Cartão Ceará Sem Fome. O resultado será uma previsão do domicílio com aquelas características estar ou não em INSAN Grave. </a:t>
             </a:r>
-            <a:endParaRPr lang="pt-BR" sz="1600" b="0" u="none" strike="noStrike">
+            <a:endParaRPr lang="pt-BR" sz="2000" b="0" u="none" strike="noStrike">
               <a:solidFill>
                 <a:srgbClr val="000000"/>
               </a:solidFill>
@@ -15064,7 +14400,7 @@
         <p:spPr>
           <a:xfrm>
             <a:off x="3071520" y="2340000"/>
-            <a:ext cx="6108120" cy="2106360"/>
+            <a:ext cx="6107400" cy="3083400"/>
           </a:xfrm>
           <a:prstGeom prst="rect">
             <a:avLst/>
@@ -15102,7 +14438,7 @@
               <a:buChar char=""/>
             </a:pPr>
             <a:r>
-              <a:rPr lang="pt-BR" sz="1600" b="0" u="none" strike="noStrike">
+              <a:rPr lang="pt-BR" sz="2000" b="0" u="none" strike="noStrike">
                 <a:solidFill>
                   <a:srgbClr val="000000"/>
                 </a:solidFill>
@@ -15112,7 +14448,7 @@
               </a:rPr>
               <a:t>PNAD Contínua 2024, 4º trimestre: Informações socioeconômicas e sobre a segurança alimentar dos domicílio. Utilizou-se somente informações do Ceará.</a:t>
             </a:r>
-            <a:endParaRPr lang="pt-BR" sz="1600" b="0" u="none" strike="noStrike">
+            <a:endParaRPr lang="pt-BR" sz="2000" b="0" u="none" strike="noStrike">
               <a:solidFill>
                 <a:srgbClr val="000000"/>
               </a:solidFill>
@@ -15139,7 +14475,7 @@
               <a:buChar char=""/>
             </a:pPr>
             <a:r>
-              <a:rPr lang="pt-BR" sz="1600" b="0" u="none" strike="noStrike">
+              <a:rPr lang="pt-BR" sz="2000" b="0" u="none" strike="noStrike">
                 <a:solidFill>
                   <a:srgbClr val="000000"/>
                 </a:solidFill>
@@ -15149,7 +14485,7 @@
               </a:rPr>
               <a:t>CadÚnico: dados de março de 2026.</a:t>
             </a:r>
-            <a:endParaRPr lang="pt-BR" sz="1600" b="0" u="none" strike="noStrike">
+            <a:endParaRPr lang="pt-BR" sz="2000" b="0" u="none" strike="noStrike">
               <a:solidFill>
                 <a:srgbClr val="000000"/>
               </a:solidFill>
@@ -15176,7 +14512,7 @@
               <a:buChar char=""/>
             </a:pPr>
             <a:r>
-              <a:rPr lang="pt-BR" sz="1600" b="0" u="none" strike="noStrike">
+              <a:rPr lang="pt-BR" sz="2000" b="0" u="none" strike="noStrike">
                 <a:solidFill>
                   <a:srgbClr val="000000"/>
                 </a:solidFill>
@@ -15186,7 +14522,7 @@
               </a:rPr>
               <a:t>Beneficiários do Cartão Ceará Sem Fome: Abril de 2025. Mesma base utilizada na pesquisa de satisfação da CGE</a:t>
             </a:r>
-            <a:endParaRPr lang="pt-BR" sz="1600" b="0" u="none" strike="noStrike">
+            <a:endParaRPr lang="pt-BR" sz="2000" b="0" u="none" strike="noStrike">
               <a:solidFill>
                 <a:srgbClr val="000000"/>
               </a:solidFill>
@@ -15206,7 +14542,7 @@
         <p:spPr>
           <a:xfrm>
             <a:off x="1620000" y="1586520"/>
-            <a:ext cx="1018440" cy="470880"/>
+            <a:ext cx="1017720" cy="470160"/>
           </a:xfrm>
           <a:prstGeom prst="rect">
             <a:avLst/>
@@ -15292,8 +14628,224 @@
         </p:nvSpPr>
         <p:spPr>
           <a:xfrm>
-            <a:off x="1620000" y="608760"/>
-            <a:ext cx="1018440" cy="470880"/>
+            <a:off x="605880" y="1457640"/>
+            <a:ext cx="10980000" cy="3942720"/>
+          </a:xfrm>
+          <a:prstGeom prst="rect">
+            <a:avLst/>
+          </a:prstGeom>
+          <a:noFill/>
+          <a:ln w="0">
+            <a:noFill/>
+          </a:ln>
+        </p:spPr>
+        <p:style>
+          <a:lnRef idx="0"/>
+          <a:fillRef idx="0"/>
+          <a:effectRef idx="0"/>
+          <a:fontRef idx="minor"/>
+        </p:style>
+        <p:txBody>
+          <a:bodyPr lIns="90000" rIns="90000" tIns="45000" bIns="45000" anchor="t">
+            <a:spAutoFit/>
+          </a:bodyPr>
+          <a:p>
+            <a:pPr marL="216000" indent="-216000">
+              <a:lnSpc>
+                <a:spcPct val="100000"/>
+              </a:lnSpc>
+              <a:spcBef>
+                <a:spcPts val="1191"/>
+              </a:spcBef>
+              <a:spcAft>
+                <a:spcPts val="992"/>
+              </a:spcAft>
+              <a:buClr>
+                <a:srgbClr val="000000"/>
+              </a:buClr>
+              <a:buFont typeface="Wingdings" charset="2"/>
+              <a:buChar char=""/>
+            </a:pPr>
+            <a:r>
+              <a:rPr lang="pt-BR" sz="2000" b="0" u="none" strike="noStrike">
+                <a:solidFill>
+                  <a:srgbClr val="000000"/>
+                </a:solidFill>
+                <a:effectLst/>
+                <a:uFillTx/>
+                <a:latin typeface="Maitree"/>
+              </a:rPr>
+              <a:t>Ser beneficiária do Programa Bolsa Família, com renda per capita de até R$ 218,00, já incluídos nesse cálculo os valores recebidos do próprio Bolsa Família, excetuando-se o Benefício Variável Nutriz (BVN);</a:t>
+            </a:r>
+            <a:endParaRPr lang="pt-BR" sz="2000" b="0" u="none" strike="noStrike">
+              <a:solidFill>
+                <a:srgbClr val="000000"/>
+              </a:solidFill>
+              <a:effectLst/>
+              <a:uFillTx/>
+              <a:latin typeface="Arial"/>
+            </a:endParaRPr>
+          </a:p>
+          <a:p>
+            <a:pPr marL="216000" indent="-216000">
+              <a:lnSpc>
+                <a:spcPct val="100000"/>
+              </a:lnSpc>
+              <a:spcBef>
+                <a:spcPts val="1191"/>
+              </a:spcBef>
+              <a:spcAft>
+                <a:spcPts val="992"/>
+              </a:spcAft>
+              <a:buClr>
+                <a:srgbClr val="000000"/>
+              </a:buClr>
+              <a:buFont typeface="Wingdings" charset="2"/>
+              <a:buChar char=""/>
+            </a:pPr>
+            <a:r>
+              <a:rPr lang="pt-BR" sz="2000" b="0" u="none" strike="noStrike">
+                <a:solidFill>
+                  <a:srgbClr val="000000"/>
+                </a:solidFill>
+                <a:effectLst/>
+                <a:uFillTx/>
+                <a:latin typeface="Maitree"/>
+              </a:rPr>
+              <a:t>Ter como responsável familiar no CadÚnico, preferencialmente, uma pessoa do sexo feminino; </a:t>
+            </a:r>
+            <a:endParaRPr lang="pt-BR" sz="2000" b="0" u="none" strike="noStrike">
+              <a:solidFill>
+                <a:srgbClr val="000000"/>
+              </a:solidFill>
+              <a:effectLst/>
+              <a:uFillTx/>
+              <a:latin typeface="Arial"/>
+            </a:endParaRPr>
+          </a:p>
+          <a:p>
+            <a:pPr marL="216000" indent="-216000">
+              <a:lnSpc>
+                <a:spcPct val="100000"/>
+              </a:lnSpc>
+              <a:spcBef>
+                <a:spcPts val="1191"/>
+              </a:spcBef>
+              <a:spcAft>
+                <a:spcPts val="992"/>
+              </a:spcAft>
+              <a:buClr>
+                <a:srgbClr val="000000"/>
+              </a:buClr>
+              <a:buFont typeface="Wingdings" charset="2"/>
+              <a:buChar char=""/>
+            </a:pPr>
+            <a:r>
+              <a:rPr lang="pt-BR" sz="2000" b="0" u="none" strike="noStrike">
+                <a:solidFill>
+                  <a:srgbClr val="000000"/>
+                </a:solidFill>
+                <a:effectLst/>
+                <a:uFillTx/>
+                <a:latin typeface="Maitree"/>
+              </a:rPr>
+              <a:t>Ter, preferencialmente, como responsável familiar pessoa com baixa escolaridade (sem ensino fundamental completo); </a:t>
+            </a:r>
+            <a:endParaRPr lang="pt-BR" sz="2000" b="0" u="none" strike="noStrike">
+              <a:solidFill>
+                <a:srgbClr val="000000"/>
+              </a:solidFill>
+              <a:effectLst/>
+              <a:uFillTx/>
+              <a:latin typeface="Arial"/>
+            </a:endParaRPr>
+          </a:p>
+          <a:p>
+            <a:pPr marL="216000" indent="-216000">
+              <a:lnSpc>
+                <a:spcPct val="100000"/>
+              </a:lnSpc>
+              <a:spcBef>
+                <a:spcPts val="1191"/>
+              </a:spcBef>
+              <a:spcAft>
+                <a:spcPts val="992"/>
+              </a:spcAft>
+              <a:buClr>
+                <a:srgbClr val="000000"/>
+              </a:buClr>
+              <a:buFont typeface="Wingdings" charset="2"/>
+              <a:buChar char=""/>
+            </a:pPr>
+            <a:r>
+              <a:rPr lang="pt-BR" sz="2000" b="0" u="none" strike="noStrike">
+                <a:solidFill>
+                  <a:srgbClr val="000000"/>
+                </a:solidFill>
+                <a:effectLst/>
+                <a:uFillTx/>
+                <a:latin typeface="Maitree"/>
+              </a:rPr>
+              <a:t>Ter, em sua composição, ao menos uma criança ou adolescente de até 14 anos; e </a:t>
+            </a:r>
+            <a:endParaRPr lang="pt-BR" sz="2000" b="0" u="none" strike="noStrike">
+              <a:solidFill>
+                <a:srgbClr val="000000"/>
+              </a:solidFill>
+              <a:effectLst/>
+              <a:uFillTx/>
+              <a:latin typeface="Arial"/>
+            </a:endParaRPr>
+          </a:p>
+          <a:p>
+            <a:pPr marL="216000" indent="-216000">
+              <a:lnSpc>
+                <a:spcPct val="100000"/>
+              </a:lnSpc>
+              <a:spcBef>
+                <a:spcPts val="1191"/>
+              </a:spcBef>
+              <a:spcAft>
+                <a:spcPts val="992"/>
+              </a:spcAft>
+              <a:buClr>
+                <a:srgbClr val="000000"/>
+              </a:buClr>
+              <a:buFont typeface="Wingdings" charset="2"/>
+              <a:buChar char=""/>
+            </a:pPr>
+            <a:r>
+              <a:rPr lang="pt-BR" sz="2000" b="0" u="none" strike="noStrike">
+                <a:solidFill>
+                  <a:srgbClr val="000000"/>
+                </a:solidFill>
+                <a:effectLst/>
+                <a:uFillTx/>
+                <a:latin typeface="Maitree"/>
+              </a:rPr>
+              <a:t>Não estar com o benefício do Bolsa Família bloqueado ou suspenso. </a:t>
+            </a:r>
+            <a:endParaRPr lang="pt-BR" sz="2000" b="0" u="none" strike="noStrike">
+              <a:solidFill>
+                <a:srgbClr val="000000"/>
+              </a:solidFill>
+              <a:effectLst/>
+              <a:uFillTx/>
+              <a:latin typeface="Arial"/>
+            </a:endParaRPr>
+          </a:p>
+        </p:txBody>
+      </p:sp>
+      <p:sp>
+        <p:nvSpPr>
+          <p:cNvPr id="82" name=""/>
+          <p:cNvSpPr/>
+          <p:nvPr/>
+        </p:nvSpPr>
+        <p:spPr>
+          <a:xfrm>
+            <a:off x="1620000" y="900000"/>
+            <a:ext cx="5827680" cy="395280"/>
           </a:xfrm>
           <a:prstGeom prst="rect">
             <a:avLst/>
@@ -15328,7 +14880,7 @@
                 <a:uFillTx/>
                 <a:latin typeface="Kanit"/>
               </a:rPr>
-              <a:t>DADOS</a:t>
+              <a:t>CRITÉRIOS DAS FAMÍLIAS BENEFICIÁRIAS DO CSF</a:t>
             </a:r>
             <a:endParaRPr lang="pt-BR" sz="2000" b="0" u="none" strike="noStrike">
               <a:solidFill>
@@ -15341,87 +14893,6 @@
           </a:p>
         </p:txBody>
       </p:sp>
-      <p:sp>
-        <p:nvSpPr>
-          <p:cNvPr id="82" name=""/>
-          <p:cNvSpPr/>
-          <p:nvPr/>
-        </p:nvSpPr>
-        <p:spPr>
-          <a:xfrm>
-            <a:off x="1620000" y="1008000"/>
-            <a:ext cx="8476560" cy="470880"/>
-          </a:xfrm>
-          <a:prstGeom prst="rect">
-            <a:avLst/>
-          </a:prstGeom>
-          <a:noFill/>
-          <a:ln w="0">
-            <a:noFill/>
-          </a:ln>
-        </p:spPr>
-        <p:style>
-          <a:lnRef idx="0"/>
-          <a:fillRef idx="0"/>
-          <a:effectRef idx="0"/>
-          <a:fontRef idx="minor"/>
-        </p:style>
-        <p:txBody>
-          <a:bodyPr wrap="none" lIns="90000" rIns="90000" tIns="45000" bIns="45000" anchor="t">
-            <a:spAutoFit/>
-          </a:bodyPr>
-          <a:p>
-            <a:pPr>
-              <a:lnSpc>
-                <a:spcPct val="100000"/>
-              </a:lnSpc>
-            </a:pPr>
-            <a:r>
-              <a:rPr lang="pt-BR" sz="2000" b="0" u="none" strike="noStrike">
-                <a:solidFill>
-                  <a:srgbClr val="000000"/>
-                </a:solidFill>
-                <a:effectLst/>
-                <a:uFillTx/>
-                <a:latin typeface="Kanit"/>
-              </a:rPr>
-              <a:t>PERFIL DA RENDA NA BASE DE DADOS: ANTES DO VALOR DO CARTÃO CSF</a:t>
-            </a:r>
-            <a:endParaRPr lang="pt-BR" sz="2000" b="0" u="none" strike="noStrike">
-              <a:solidFill>
-                <a:srgbClr val="000000"/>
-              </a:solidFill>
-              <a:effectLst/>
-              <a:uFillTx/>
-              <a:latin typeface="Arial"/>
-            </a:endParaRPr>
-          </a:p>
-        </p:txBody>
-      </p:sp>
-      <p:pic>
-        <p:nvPicPr>
-          <p:cNvPr id="83" name=""/>
-          <p:cNvPicPr/>
-          <p:nvPr/>
-        </p:nvPicPr>
-        <p:blipFill>
-          <a:blip r:embed="rId1"/>
-          <a:stretch/>
-        </p:blipFill>
-        <p:spPr>
-          <a:xfrm>
-            <a:off x="2438280" y="1359000"/>
-            <a:ext cx="7314840" cy="4571640"/>
-          </a:xfrm>
-          <a:prstGeom prst="rect">
-            <a:avLst/>
-          </a:prstGeom>
-          <a:noFill/>
-          <a:ln w="0">
-            <a:noFill/>
-          </a:ln>
-        </p:spPr>
-      </p:pic>
     </p:spTree>
   </p:cSld>
   <mc:AlternateContent>
@@ -15452,16 +14923,64 @@
           <a:chExt cx="0" cy="0"/>
         </a:xfrm>
       </p:grpSpPr>
+      <p:pic>
+        <p:nvPicPr>
+          <p:cNvPr id="83" name=""/>
+          <p:cNvPicPr/>
+          <p:nvPr/>
+        </p:nvPicPr>
+        <p:blipFill>
+          <a:blip r:embed="rId1"/>
+          <a:stretch/>
+        </p:blipFill>
+        <p:spPr>
+          <a:xfrm>
+            <a:off x="3352680" y="1600200"/>
+            <a:ext cx="5486760" cy="3657600"/>
+          </a:xfrm>
+          <a:prstGeom prst="rect">
+            <a:avLst/>
+          </a:prstGeom>
+          <a:noFill/>
+          <a:ln w="0">
+            <a:noFill/>
+          </a:ln>
+        </p:spPr>
+      </p:pic>
+      <p:pic>
+        <p:nvPicPr>
+          <p:cNvPr id="84" name=""/>
+          <p:cNvPicPr/>
+          <p:nvPr/>
+        </p:nvPicPr>
+        <p:blipFill>
+          <a:blip r:embed="rId2"/>
+          <a:stretch/>
+        </p:blipFill>
+        <p:spPr>
+          <a:xfrm>
+            <a:off x="2741760" y="1673280"/>
+            <a:ext cx="6780240" cy="4519800"/>
+          </a:xfrm>
+          <a:prstGeom prst="rect">
+            <a:avLst/>
+          </a:prstGeom>
+          <a:noFill/>
+          <a:ln w="0">
+            <a:noFill/>
+          </a:ln>
+        </p:spPr>
+      </p:pic>
       <p:sp>
         <p:nvSpPr>
-          <p:cNvPr id="84" name=""/>
+          <p:cNvPr id="85" name=""/>
           <p:cNvSpPr/>
           <p:nvPr/>
         </p:nvSpPr>
         <p:spPr>
           <a:xfrm>
-            <a:off x="1620000" y="608760"/>
-            <a:ext cx="1018440" cy="470880"/>
+            <a:off x="1423800" y="756000"/>
+            <a:ext cx="1018080" cy="395280"/>
           </a:xfrm>
           <a:prstGeom prst="rect">
             <a:avLst/>
@@ -15511,14 +15030,14 @@
       </p:sp>
       <p:sp>
         <p:nvSpPr>
-          <p:cNvPr id="85" name=""/>
+          <p:cNvPr id="86" name=""/>
           <p:cNvSpPr/>
           <p:nvPr/>
         </p:nvSpPr>
         <p:spPr>
           <a:xfrm>
-            <a:off x="1620000" y="1008000"/>
-            <a:ext cx="8541360" cy="470880"/>
+            <a:off x="1423800" y="1155240"/>
+            <a:ext cx="10080720" cy="395280"/>
           </a:xfrm>
           <a:prstGeom prst="rect">
             <a:avLst/>
@@ -15543,6 +15062,12 @@
               <a:lnSpc>
                 <a:spcPct val="100000"/>
               </a:lnSpc>
+              <a:spcBef>
+                <a:spcPts val="1191"/>
+              </a:spcBef>
+              <a:spcAft>
+                <a:spcPts val="992"/>
+              </a:spcAft>
             </a:pPr>
             <a:r>
               <a:rPr lang="pt-BR" sz="2000" b="0" u="none" strike="noStrike">
@@ -15552,9 +15077,8 @@
                 <a:effectLst/>
                 <a:uFillTx/>
                 <a:latin typeface="Kanit"/>
-                <a:ea typeface="Microsoft YaHei"/>
               </a:rPr>
-              <a:t>PERFIL DA RENDA NA BASE DE DADOS: DEPOIS DO VALOR DO CARTÃO CSF</a:t>
+              <a:t>Domicílios  por situação de segurança alimentar, segundo a renda domiciliar per capita </a:t>
             </a:r>
             <a:endParaRPr lang="pt-BR" sz="2000" b="0" u="none" strike="noStrike">
               <a:solidFill>
@@ -15567,30 +15091,6 @@
           </a:p>
         </p:txBody>
       </p:sp>
-      <p:pic>
-        <p:nvPicPr>
-          <p:cNvPr id="86" name=""/>
-          <p:cNvPicPr/>
-          <p:nvPr/>
-        </p:nvPicPr>
-        <p:blipFill>
-          <a:blip r:embed="rId1"/>
-          <a:stretch/>
-        </p:blipFill>
-        <p:spPr>
-          <a:xfrm>
-            <a:off x="2438280" y="1359000"/>
-            <a:ext cx="7314840" cy="4571640"/>
-          </a:xfrm>
-          <a:prstGeom prst="rect">
-            <a:avLst/>
-          </a:prstGeom>
-          <a:noFill/>
-          <a:ln w="0">
-            <a:noFill/>
-          </a:ln>
-        </p:spPr>
-      </p:pic>
     </p:spTree>
   </p:cSld>
   <mc:AlternateContent>

--- a/outputs/apresentacao_resultados.pptx
+++ b/outputs/apresentacao_resultados.pptx
@@ -31,14 +31,14 @@
 </file>
 
 <file path=ppt/slideLayouts/slideLayout1.xml><?xml version="1.0" encoding="utf-8"?>
-<p:sldLayout xmlns:a="http://schemas.openxmlformats.org/drawingml/2006/main" xmlns:p="http://schemas.openxmlformats.org/presentationml/2006/main" xmlns:r="http://schemas.openxmlformats.org/officeDocument/2006/relationships" xmlns:p14="http://schemas.microsoft.com/office/powerpoint/2010/main" xmlns:p15="http://schemas.microsoft.com/office/powerpoint/2012/main" xmlns:mc="http://schemas.openxmlformats.org/markup-compatibility/2006" type="blank" preserve="1">
-  <p:cSld name="Imagem com Legenda">
+<p:sldLayout xmlns:a="http://schemas.openxmlformats.org/drawingml/2006/main" xmlns:p="http://schemas.openxmlformats.org/presentationml/2006/main" xmlns:r="http://schemas.openxmlformats.org/officeDocument/2006/relationships" xmlns:p14="http://schemas.microsoft.com/office/powerpoint/2010/main" xmlns:p15="http://schemas.microsoft.com/office/powerpoint/2012/main" xmlns:mc="http://schemas.openxmlformats.org/markup-compatibility/2006" type="titleOnly" preserve="1">
+  <p:cSld name="Somente Título">
     <p:bg>
       <p:bgPr>
         <a:blipFill rotWithShape="0">
           <a:blip r:embed="rId2"/>
           <a:stretch>
-            <a:fillRect l="-993" r="-993"/>
+            <a:fillRect l="-992" r="-992"/>
           </a:stretch>
         </a:blipFill>
       </p:bgPr>
@@ -69,8 +69,8 @@
         </p:nvSpPr>
         <p:spPr>
           <a:xfrm>
-            <a:off x="839880" y="457200"/>
-            <a:ext cx="3930480" cy="1598400"/>
+            <a:off x="838080" y="365040"/>
+            <a:ext cx="10513440" cy="1323360"/>
           </a:xfrm>
           <a:prstGeom prst="rect">
             <a:avLst/>
@@ -81,7 +81,7 @@
           </a:ln>
         </p:spPr>
         <p:txBody>
-          <a:bodyPr lIns="91440" rIns="91440" tIns="45720" bIns="45720" anchor="b">
+          <a:bodyPr lIns="91440" rIns="91440" tIns="45720" bIns="45720" anchor="ctr">
             <a:noAutofit/>
           </a:bodyPr>
           <a:p>
@@ -95,7 +95,7 @@
               </a:tabLst>
             </a:pPr>
             <a:r>
-              <a:rPr lang="pt-BR" sz="3200" b="0" u="none" strike="noStrike">
+              <a:rPr lang="pt-BR" sz="4400" b="0" u="none" strike="noStrike">
                 <a:solidFill>
                   <a:schemeClr val="dk1"/>
                 </a:solidFill>
@@ -105,7 +105,7 @@
               </a:rPr>
               <a:t>Clique para editar o título Mestre</a:t>
             </a:r>
-            <a:endParaRPr lang="pt-BR" sz="3200" b="0" u="none" strike="noStrike">
+            <a:endParaRPr lang="pt-BR" sz="4400" b="0" u="none" strike="noStrike">
               <a:solidFill>
                 <a:srgbClr val="000000"/>
               </a:solidFill>
@@ -123,349 +123,13 @@
             <a:spLocks noGrp="1"/>
           </p:cNvSpPr>
           <p:nvPr>
-            <p:ph type="body"/>
-          </p:nvPr>
-        </p:nvSpPr>
-        <p:spPr>
-          <a:xfrm>
-            <a:off x="5183280" y="987480"/>
-            <a:ext cx="6170400" cy="4871880"/>
-          </a:xfrm>
-          <a:prstGeom prst="rect">
-            <a:avLst/>
-          </a:prstGeom>
-          <a:noFill/>
-          <a:ln w="0">
-            <a:noFill/>
-          </a:ln>
-        </p:spPr>
-        <p:txBody>
-          <a:bodyPr lIns="90000" rIns="90000" tIns="45000" bIns="45000" anchor="t">
-            <a:noAutofit/>
-          </a:bodyPr>
-          <a:p>
-            <a:pPr marL="432000" indent="-324000">
-              <a:lnSpc>
-                <a:spcPct val="90000"/>
-              </a:lnSpc>
-              <a:spcBef>
-                <a:spcPts val="1417"/>
-              </a:spcBef>
-              <a:buClr>
-                <a:srgbClr val="000000"/>
-              </a:buClr>
-              <a:buSzPct val="45000"/>
-              <a:buFont typeface="Wingdings" charset="2"/>
-              <a:buChar char=""/>
-            </a:pPr>
-            <a:r>
-              <a:rPr lang="pt-BR" sz="3200" b="0" u="none" strike="noStrike">
-                <a:solidFill>
-                  <a:schemeClr val="dk1"/>
-                </a:solidFill>
-                <a:effectLst/>
-                <a:uFillTx/>
-                <a:latin typeface="Calibri"/>
-              </a:rPr>
-              <a:t>Clique para editar o formato de texto dos tópicos</a:t>
-            </a:r>
-            <a:endParaRPr lang="pt-BR" sz="3200" b="0" u="none" strike="noStrike">
-              <a:solidFill>
-                <a:srgbClr val="000000"/>
-              </a:solidFill>
-              <a:effectLst/>
-              <a:uFillTx/>
-              <a:latin typeface="Arial"/>
-            </a:endParaRPr>
-          </a:p>
-          <a:p>
-            <a:pPr marL="864000" lvl="1" indent="-324000">
-              <a:lnSpc>
-                <a:spcPct val="90000"/>
-              </a:lnSpc>
-              <a:spcBef>
-                <a:spcPts val="1134"/>
-              </a:spcBef>
-              <a:buClr>
-                <a:srgbClr val="000000"/>
-              </a:buClr>
-              <a:buSzPct val="75000"/>
-              <a:buFont typeface="Symbol" charset="2"/>
-              <a:buChar char=""/>
-            </a:pPr>
-            <a:r>
-              <a:rPr lang="pt-BR" sz="3200" b="0" u="none" strike="noStrike">
-                <a:solidFill>
-                  <a:schemeClr val="dk1"/>
-                </a:solidFill>
-                <a:effectLst/>
-                <a:uFillTx/>
-                <a:latin typeface="Calibri"/>
-              </a:rPr>
-              <a:t>2.º nível de tópicos</a:t>
-            </a:r>
-            <a:endParaRPr lang="pt-BR" sz="3200" b="0" u="none" strike="noStrike">
-              <a:solidFill>
-                <a:srgbClr val="000000"/>
-              </a:solidFill>
-              <a:effectLst/>
-              <a:uFillTx/>
-              <a:latin typeface="Arial"/>
-            </a:endParaRPr>
-          </a:p>
-          <a:p>
-            <a:pPr marL="1296000" lvl="2" indent="-288000">
-              <a:lnSpc>
-                <a:spcPct val="90000"/>
-              </a:lnSpc>
-              <a:spcBef>
-                <a:spcPts val="850"/>
-              </a:spcBef>
-              <a:buClr>
-                <a:srgbClr val="000000"/>
-              </a:buClr>
-              <a:buSzPct val="45000"/>
-              <a:buFont typeface="Wingdings" charset="2"/>
-              <a:buChar char=""/>
-            </a:pPr>
-            <a:r>
-              <a:rPr lang="pt-BR" sz="3200" b="0" u="none" strike="noStrike">
-                <a:solidFill>
-                  <a:schemeClr val="dk1"/>
-                </a:solidFill>
-                <a:effectLst/>
-                <a:uFillTx/>
-                <a:latin typeface="Calibri"/>
-              </a:rPr>
-              <a:t>3.º nível de tópicos</a:t>
-            </a:r>
-            <a:endParaRPr lang="pt-BR" sz="3200" b="0" u="none" strike="noStrike">
-              <a:solidFill>
-                <a:srgbClr val="000000"/>
-              </a:solidFill>
-              <a:effectLst/>
-              <a:uFillTx/>
-              <a:latin typeface="Arial"/>
-            </a:endParaRPr>
-          </a:p>
-          <a:p>
-            <a:pPr marL="1728000" lvl="3" indent="-216000">
-              <a:lnSpc>
-                <a:spcPct val="90000"/>
-              </a:lnSpc>
-              <a:spcBef>
-                <a:spcPts val="567"/>
-              </a:spcBef>
-              <a:buClr>
-                <a:srgbClr val="000000"/>
-              </a:buClr>
-              <a:buSzPct val="75000"/>
-              <a:buFont typeface="Symbol" charset="2"/>
-              <a:buChar char=""/>
-            </a:pPr>
-            <a:r>
-              <a:rPr lang="pt-BR" sz="3200" b="0" u="none" strike="noStrike">
-                <a:solidFill>
-                  <a:schemeClr val="dk1"/>
-                </a:solidFill>
-                <a:effectLst/>
-                <a:uFillTx/>
-                <a:latin typeface="Calibri"/>
-              </a:rPr>
-              <a:t>4.º nível de tópicos</a:t>
-            </a:r>
-            <a:endParaRPr lang="pt-BR" sz="3200" b="0" u="none" strike="noStrike">
-              <a:solidFill>
-                <a:srgbClr val="000000"/>
-              </a:solidFill>
-              <a:effectLst/>
-              <a:uFillTx/>
-              <a:latin typeface="Arial"/>
-            </a:endParaRPr>
-          </a:p>
-          <a:p>
-            <a:pPr marL="2160000" lvl="4" indent="-216000">
-              <a:lnSpc>
-                <a:spcPct val="90000"/>
-              </a:lnSpc>
-              <a:spcBef>
-                <a:spcPts val="283"/>
-              </a:spcBef>
-              <a:buClr>
-                <a:srgbClr val="000000"/>
-              </a:buClr>
-              <a:buSzPct val="45000"/>
-              <a:buFont typeface="Wingdings" charset="2"/>
-              <a:buChar char=""/>
-            </a:pPr>
-            <a:r>
-              <a:rPr lang="pt-BR" sz="3200" b="0" u="none" strike="noStrike">
-                <a:solidFill>
-                  <a:schemeClr val="dk1"/>
-                </a:solidFill>
-                <a:effectLst/>
-                <a:uFillTx/>
-                <a:latin typeface="Calibri"/>
-              </a:rPr>
-              <a:t>5.º nível de tópicos</a:t>
-            </a:r>
-            <a:endParaRPr lang="pt-BR" sz="3200" b="0" u="none" strike="noStrike">
-              <a:solidFill>
-                <a:srgbClr val="000000"/>
-              </a:solidFill>
-              <a:effectLst/>
-              <a:uFillTx/>
-              <a:latin typeface="Arial"/>
-            </a:endParaRPr>
-          </a:p>
-          <a:p>
-            <a:pPr marL="2592000" lvl="5" indent="-216000">
-              <a:lnSpc>
-                <a:spcPct val="90000"/>
-              </a:lnSpc>
-              <a:spcBef>
-                <a:spcPts val="283"/>
-              </a:spcBef>
-              <a:buClr>
-                <a:srgbClr val="000000"/>
-              </a:buClr>
-              <a:buSzPct val="45000"/>
-              <a:buFont typeface="Wingdings" charset="2"/>
-              <a:buChar char=""/>
-            </a:pPr>
-            <a:r>
-              <a:rPr lang="pt-BR" sz="3200" b="0" u="none" strike="noStrike">
-                <a:solidFill>
-                  <a:schemeClr val="dk1"/>
-                </a:solidFill>
-                <a:effectLst/>
-                <a:uFillTx/>
-                <a:latin typeface="Calibri"/>
-              </a:rPr>
-              <a:t>6.º nível de tópicos</a:t>
-            </a:r>
-            <a:endParaRPr lang="pt-BR" sz="3200" b="0" u="none" strike="noStrike">
-              <a:solidFill>
-                <a:srgbClr val="000000"/>
-              </a:solidFill>
-              <a:effectLst/>
-              <a:uFillTx/>
-              <a:latin typeface="Arial"/>
-            </a:endParaRPr>
-          </a:p>
-          <a:p>
-            <a:pPr marL="3024000" lvl="6" indent="-216000">
-              <a:lnSpc>
-                <a:spcPct val="90000"/>
-              </a:lnSpc>
-              <a:spcBef>
-                <a:spcPts val="283"/>
-              </a:spcBef>
-              <a:buClr>
-                <a:srgbClr val="000000"/>
-              </a:buClr>
-              <a:buSzPct val="45000"/>
-              <a:buFont typeface="Wingdings" charset="2"/>
-              <a:buChar char=""/>
-            </a:pPr>
-            <a:r>
-              <a:rPr lang="pt-BR" sz="3200" b="0" u="none" strike="noStrike">
-                <a:solidFill>
-                  <a:schemeClr val="dk1"/>
-                </a:solidFill>
-                <a:effectLst/>
-                <a:uFillTx/>
-                <a:latin typeface="Calibri"/>
-              </a:rPr>
-              <a:t>7.º nível de tópicos</a:t>
-            </a:r>
-            <a:endParaRPr lang="pt-BR" sz="3200" b="0" u="none" strike="noStrike">
-              <a:solidFill>
-                <a:srgbClr val="000000"/>
-              </a:solidFill>
-              <a:effectLst/>
-              <a:uFillTx/>
-              <a:latin typeface="Arial"/>
-            </a:endParaRPr>
-          </a:p>
-        </p:txBody>
-      </p:sp>
-      <p:sp>
-        <p:nvSpPr>
-          <p:cNvPr id="4" name="PlaceHolder 3"/>
-          <p:cNvSpPr>
-            <a:spLocks noGrp="1"/>
-          </p:cNvSpPr>
-          <p:nvPr>
-            <p:ph type="body"/>
-          </p:nvPr>
-        </p:nvSpPr>
-        <p:spPr>
-          <a:xfrm>
-            <a:off x="839880" y="2057400"/>
-            <a:ext cx="3930480" cy="3809880"/>
-          </a:xfrm>
-          <a:prstGeom prst="rect">
-            <a:avLst/>
-          </a:prstGeom>
-          <a:noFill/>
-          <a:ln w="0">
-            <a:noFill/>
-          </a:ln>
-        </p:spPr>
-        <p:txBody>
-          <a:bodyPr lIns="91440" rIns="91440" tIns="45720" bIns="45720" anchor="t">
-            <a:noAutofit/>
-          </a:bodyPr>
-          <a:p>
-            <a:pPr indent="0" defTabSz="914400">
-              <a:lnSpc>
-                <a:spcPct val="90000"/>
-              </a:lnSpc>
-              <a:spcBef>
-                <a:spcPts val="1001"/>
-              </a:spcBef>
-              <a:buNone/>
-              <a:tabLst>
-                <a:tab algn="l" pos="0"/>
-              </a:tabLst>
-            </a:pPr>
-            <a:r>
-              <a:rPr lang="pt-BR" sz="1600" b="0" u="none" strike="noStrike">
-                <a:solidFill>
-                  <a:schemeClr val="dk1"/>
-                </a:solidFill>
-                <a:effectLst/>
-                <a:uFillTx/>
-                <a:latin typeface="Calibri"/>
-              </a:rPr>
-              <a:t>Clique para editar os estilos de texto Mestres</a:t>
-            </a:r>
-            <a:endParaRPr lang="pt-BR" sz="1600" b="0" u="none" strike="noStrike">
-              <a:solidFill>
-                <a:srgbClr val="000000"/>
-              </a:solidFill>
-              <a:effectLst/>
-              <a:uFillTx/>
-              <a:latin typeface="Arial"/>
-            </a:endParaRPr>
-          </a:p>
-        </p:txBody>
-      </p:sp>
-      <p:sp>
-        <p:nvSpPr>
-          <p:cNvPr id="5" name="PlaceHolder 4"/>
-          <p:cNvSpPr>
-            <a:spLocks noGrp="1"/>
-          </p:cNvSpPr>
-          <p:nvPr>
             <p:ph type="dt" idx="1"/>
           </p:nvPr>
         </p:nvSpPr>
         <p:spPr>
           <a:xfrm>
             <a:off x="838080" y="6356520"/>
-            <a:ext cx="2741400" cy="363240"/>
+            <a:ext cx="2741040" cy="362880"/>
           </a:xfrm>
           <a:prstGeom prst="rect">
             <a:avLst/>
@@ -536,7 +200,7 @@
       </p:sp>
       <p:sp>
         <p:nvSpPr>
-          <p:cNvPr id="6" name="PlaceHolder 5"/>
+          <p:cNvPr id="4" name="PlaceHolder 3"/>
           <p:cNvSpPr>
             <a:spLocks noGrp="1"/>
           </p:cNvSpPr>
@@ -547,7 +211,7 @@
         <p:spPr>
           <a:xfrm>
             <a:off x="4038480" y="6356520"/>
-            <a:ext cx="4113000" cy="363240"/>
+            <a:ext cx="4112640" cy="362880"/>
           </a:xfrm>
           <a:prstGeom prst="rect">
             <a:avLst/>
@@ -614,7 +278,7 @@
       </p:sp>
       <p:sp>
         <p:nvSpPr>
-          <p:cNvPr id="7" name="PlaceHolder 6"/>
+          <p:cNvPr id="5" name="PlaceHolder 4"/>
           <p:cNvSpPr>
             <a:spLocks noGrp="1"/>
           </p:cNvSpPr>
@@ -625,7 +289,7 @@
         <p:spPr>
           <a:xfrm>
             <a:off x="8610480" y="6356520"/>
-            <a:ext cx="2741400" cy="363240"/>
+            <a:ext cx="2741040" cy="362880"/>
           </a:xfrm>
           <a:prstGeom prst="rect">
             <a:avLst/>
@@ -670,7 +334,7 @@
                 <a:tab algn="l" pos="0"/>
               </a:tabLst>
             </a:pPr>
-            <a:fld id="{C9E92C05-6FCE-4D47-9939-0143D188FC73}" type="slidenum">
+            <a:fld id="{015D42EF-C5AA-4F37-A823-C0A01E9EAD69}" type="slidenum">
               <a:rPr lang="pt-BR" sz="1200" b="0" u="none" strike="noStrike">
                 <a:solidFill>
                   <a:schemeClr val="dk1">
@@ -700,14 +364,14 @@
 </file>
 
 <file path=ppt/slideLayouts/slideLayout10.xml><?xml version="1.0" encoding="utf-8"?>
-<p:sldLayout xmlns:a="http://schemas.openxmlformats.org/drawingml/2006/main" xmlns:p="http://schemas.openxmlformats.org/presentationml/2006/main" xmlns:r="http://schemas.openxmlformats.org/officeDocument/2006/relationships" xmlns:p14="http://schemas.microsoft.com/office/powerpoint/2010/main" xmlns:p15="http://schemas.microsoft.com/office/powerpoint/2012/main" xmlns:mc="http://schemas.openxmlformats.org/markup-compatibility/2006" type="blank" preserve="1">
-  <p:cSld name="Em Branco">
+<p:sldLayout xmlns:a="http://schemas.openxmlformats.org/drawingml/2006/main" xmlns:p="http://schemas.openxmlformats.org/presentationml/2006/main" xmlns:r="http://schemas.openxmlformats.org/officeDocument/2006/relationships" xmlns:p14="http://schemas.microsoft.com/office/powerpoint/2010/main" xmlns:p15="http://schemas.microsoft.com/office/powerpoint/2012/main" xmlns:mc="http://schemas.openxmlformats.org/markup-compatibility/2006" type="twoObj" preserve="1">
+  <p:cSld name="Duas Partes de Conteúdo">
     <p:bg>
       <p:bgPr>
         <a:blipFill rotWithShape="0">
           <a:blip r:embed="rId2"/>
           <a:stretch>
-            <a:fillRect l="-993" r="-993"/>
+            <a:fillRect l="-992" r="-992"/>
           </a:stretch>
         </a:blipFill>
       </p:bgPr>
@@ -728,7 +392,464 @@
       </p:grpSpPr>
       <p:sp>
         <p:nvSpPr>
-          <p:cNvPr id="50" name="PlaceHolder 1"/>
+          <p:cNvPr id="45" name="PlaceHolder 1"/>
+          <p:cNvSpPr>
+            <a:spLocks noGrp="1"/>
+          </p:cNvSpPr>
+          <p:nvPr>
+            <p:ph type="title"/>
+          </p:nvPr>
+        </p:nvSpPr>
+        <p:spPr>
+          <a:xfrm>
+            <a:off x="838080" y="365040"/>
+            <a:ext cx="10513440" cy="1323360"/>
+          </a:xfrm>
+          <a:prstGeom prst="rect">
+            <a:avLst/>
+          </a:prstGeom>
+          <a:noFill/>
+          <a:ln w="0">
+            <a:noFill/>
+          </a:ln>
+        </p:spPr>
+        <p:txBody>
+          <a:bodyPr lIns="91440" rIns="91440" tIns="45720" bIns="45720" anchor="ctr">
+            <a:noAutofit/>
+          </a:bodyPr>
+          <a:p>
+            <a:pPr indent="0" defTabSz="914400">
+              <a:lnSpc>
+                <a:spcPct val="90000"/>
+              </a:lnSpc>
+              <a:buNone/>
+              <a:tabLst>
+                <a:tab algn="l" pos="0"/>
+              </a:tabLst>
+            </a:pPr>
+            <a:r>
+              <a:rPr lang="pt-BR" sz="4400" b="0" u="none" strike="noStrike">
+                <a:solidFill>
+                  <a:schemeClr val="dk1"/>
+                </a:solidFill>
+                <a:effectLst/>
+                <a:uFillTx/>
+                <a:latin typeface="Calibri Light"/>
+              </a:rPr>
+              <a:t>Clique para editar o título Mestre</a:t>
+            </a:r>
+            <a:endParaRPr lang="pt-BR" sz="4400" b="0" u="none" strike="noStrike">
+              <a:solidFill>
+                <a:srgbClr val="000000"/>
+              </a:solidFill>
+              <a:effectLst/>
+              <a:uFillTx/>
+              <a:latin typeface="Arial"/>
+            </a:endParaRPr>
+          </a:p>
+        </p:txBody>
+      </p:sp>
+      <p:sp>
+        <p:nvSpPr>
+          <p:cNvPr id="46" name="PlaceHolder 2"/>
+          <p:cNvSpPr>
+            <a:spLocks noGrp="1"/>
+          </p:cNvSpPr>
+          <p:nvPr>
+            <p:ph type="body"/>
+          </p:nvPr>
+        </p:nvSpPr>
+        <p:spPr>
+          <a:xfrm>
+            <a:off x="838080" y="1825560"/>
+            <a:ext cx="5179320" cy="4349160"/>
+          </a:xfrm>
+          <a:prstGeom prst="rect">
+            <a:avLst/>
+          </a:prstGeom>
+          <a:noFill/>
+          <a:ln w="0">
+            <a:noFill/>
+          </a:ln>
+        </p:spPr>
+        <p:txBody>
+          <a:bodyPr lIns="91440" rIns="91440" tIns="45720" bIns="45720" anchor="t">
+            <a:noAutofit/>
+          </a:bodyPr>
+          <a:p>
+            <a:pPr marL="228600" indent="-228600" defTabSz="914400">
+              <a:lnSpc>
+                <a:spcPct val="90000"/>
+              </a:lnSpc>
+              <a:spcBef>
+                <a:spcPts val="1001"/>
+              </a:spcBef>
+              <a:buClr>
+                <a:srgbClr val="000000"/>
+              </a:buClr>
+              <a:buFont typeface="Arial"/>
+              <a:buChar char="•"/>
+            </a:pPr>
+            <a:r>
+              <a:rPr lang="pt-BR" sz="2800" b="0" u="none" strike="noStrike">
+                <a:solidFill>
+                  <a:schemeClr val="dk1"/>
+                </a:solidFill>
+                <a:effectLst/>
+                <a:uFillTx/>
+                <a:latin typeface="Calibri"/>
+              </a:rPr>
+              <a:t>Clique para editar os estilos de texto Mestres</a:t>
+            </a:r>
+            <a:endParaRPr lang="pt-BR" sz="2800" b="0" u="none" strike="noStrike">
+              <a:solidFill>
+                <a:srgbClr val="000000"/>
+              </a:solidFill>
+              <a:effectLst/>
+              <a:uFillTx/>
+              <a:latin typeface="Arial"/>
+            </a:endParaRPr>
+          </a:p>
+          <a:p>
+            <a:pPr marL="685800" lvl="1" indent="-228600" defTabSz="914400">
+              <a:lnSpc>
+                <a:spcPct val="90000"/>
+              </a:lnSpc>
+              <a:spcBef>
+                <a:spcPts val="499"/>
+              </a:spcBef>
+              <a:buClr>
+                <a:srgbClr val="000000"/>
+              </a:buClr>
+              <a:buFont typeface="Arial"/>
+              <a:buChar char="•"/>
+            </a:pPr>
+            <a:r>
+              <a:rPr lang="pt-BR" sz="2400" b="0" u="none" strike="noStrike">
+                <a:solidFill>
+                  <a:schemeClr val="dk1"/>
+                </a:solidFill>
+                <a:effectLst/>
+                <a:uFillTx/>
+                <a:latin typeface="Calibri"/>
+              </a:rPr>
+              <a:t>Segundo nível</a:t>
+            </a:r>
+            <a:endParaRPr lang="pt-BR" sz="2400" b="0" u="none" strike="noStrike">
+              <a:solidFill>
+                <a:srgbClr val="000000"/>
+              </a:solidFill>
+              <a:effectLst/>
+              <a:uFillTx/>
+              <a:latin typeface="Arial"/>
+            </a:endParaRPr>
+          </a:p>
+          <a:p>
+            <a:pPr marL="1143000" lvl="2" indent="-228600" defTabSz="914400">
+              <a:lnSpc>
+                <a:spcPct val="90000"/>
+              </a:lnSpc>
+              <a:spcBef>
+                <a:spcPts val="499"/>
+              </a:spcBef>
+              <a:buClr>
+                <a:srgbClr val="000000"/>
+              </a:buClr>
+              <a:buFont typeface="Arial"/>
+              <a:buChar char="•"/>
+            </a:pPr>
+            <a:r>
+              <a:rPr lang="pt-BR" sz="2000" b="0" u="none" strike="noStrike">
+                <a:solidFill>
+                  <a:schemeClr val="dk1"/>
+                </a:solidFill>
+                <a:effectLst/>
+                <a:uFillTx/>
+                <a:latin typeface="Calibri"/>
+              </a:rPr>
+              <a:t>Terceiro nível</a:t>
+            </a:r>
+            <a:endParaRPr lang="pt-BR" sz="2000" b="0" u="none" strike="noStrike">
+              <a:solidFill>
+                <a:srgbClr val="000000"/>
+              </a:solidFill>
+              <a:effectLst/>
+              <a:uFillTx/>
+              <a:latin typeface="Arial"/>
+            </a:endParaRPr>
+          </a:p>
+          <a:p>
+            <a:pPr marL="1600200" lvl="3" indent="-228600" defTabSz="914400">
+              <a:lnSpc>
+                <a:spcPct val="90000"/>
+              </a:lnSpc>
+              <a:spcBef>
+                <a:spcPts val="499"/>
+              </a:spcBef>
+              <a:buClr>
+                <a:srgbClr val="000000"/>
+              </a:buClr>
+              <a:buFont typeface="Arial"/>
+              <a:buChar char="•"/>
+            </a:pPr>
+            <a:r>
+              <a:rPr lang="pt-BR" sz="1800" b="0" u="none" strike="noStrike">
+                <a:solidFill>
+                  <a:schemeClr val="dk1"/>
+                </a:solidFill>
+                <a:effectLst/>
+                <a:uFillTx/>
+                <a:latin typeface="Calibri"/>
+              </a:rPr>
+              <a:t>Quarto nível</a:t>
+            </a:r>
+            <a:endParaRPr lang="pt-BR" sz="1800" b="0" u="none" strike="noStrike">
+              <a:solidFill>
+                <a:srgbClr val="000000"/>
+              </a:solidFill>
+              <a:effectLst/>
+              <a:uFillTx/>
+              <a:latin typeface="Arial"/>
+            </a:endParaRPr>
+          </a:p>
+          <a:p>
+            <a:pPr marL="2057400" lvl="4" indent="-228600" defTabSz="914400">
+              <a:lnSpc>
+                <a:spcPct val="90000"/>
+              </a:lnSpc>
+              <a:spcBef>
+                <a:spcPts val="499"/>
+              </a:spcBef>
+              <a:buClr>
+                <a:srgbClr val="000000"/>
+              </a:buClr>
+              <a:buFont typeface="Arial"/>
+              <a:buChar char="•"/>
+            </a:pPr>
+            <a:r>
+              <a:rPr lang="pt-BR" sz="1800" b="0" u="none" strike="noStrike">
+                <a:solidFill>
+                  <a:schemeClr val="dk1"/>
+                </a:solidFill>
+                <a:effectLst/>
+                <a:uFillTx/>
+                <a:latin typeface="Calibri"/>
+              </a:rPr>
+              <a:t>Quinto nível</a:t>
+            </a:r>
+            <a:endParaRPr lang="pt-BR" sz="1800" b="0" u="none" strike="noStrike">
+              <a:solidFill>
+                <a:srgbClr val="000000"/>
+              </a:solidFill>
+              <a:effectLst/>
+              <a:uFillTx/>
+              <a:latin typeface="Arial"/>
+            </a:endParaRPr>
+          </a:p>
+        </p:txBody>
+      </p:sp>
+      <p:sp>
+        <p:nvSpPr>
+          <p:cNvPr id="47" name="PlaceHolder 3"/>
+          <p:cNvSpPr>
+            <a:spLocks noGrp="1"/>
+          </p:cNvSpPr>
+          <p:nvPr>
+            <p:ph type="body"/>
+          </p:nvPr>
+        </p:nvSpPr>
+        <p:spPr>
+          <a:xfrm>
+            <a:off x="6172200" y="1825560"/>
+            <a:ext cx="5179320" cy="4349160"/>
+          </a:xfrm>
+          <a:prstGeom prst="rect">
+            <a:avLst/>
+          </a:prstGeom>
+          <a:noFill/>
+          <a:ln w="0">
+            <a:noFill/>
+          </a:ln>
+        </p:spPr>
+        <p:txBody>
+          <a:bodyPr lIns="91440" rIns="91440" tIns="45720" bIns="45720" anchor="t">
+            <a:noAutofit/>
+          </a:bodyPr>
+          <a:p>
+            <a:pPr marL="228600" indent="-228600" defTabSz="914400">
+              <a:lnSpc>
+                <a:spcPct val="90000"/>
+              </a:lnSpc>
+              <a:spcBef>
+                <a:spcPts val="1001"/>
+              </a:spcBef>
+              <a:buClr>
+                <a:srgbClr val="000000"/>
+              </a:buClr>
+              <a:buFont typeface="Arial"/>
+              <a:buChar char="•"/>
+            </a:pPr>
+            <a:r>
+              <a:rPr lang="pt-BR" sz="2800" b="0" u="none" strike="noStrike">
+                <a:solidFill>
+                  <a:schemeClr val="dk1"/>
+                </a:solidFill>
+                <a:effectLst/>
+                <a:uFillTx/>
+                <a:latin typeface="Calibri"/>
+              </a:rPr>
+              <a:t>Clique para editar os estilos de texto Mestres</a:t>
+            </a:r>
+            <a:endParaRPr lang="pt-BR" sz="2800" b="0" u="none" strike="noStrike">
+              <a:solidFill>
+                <a:srgbClr val="000000"/>
+              </a:solidFill>
+              <a:effectLst/>
+              <a:uFillTx/>
+              <a:latin typeface="Arial"/>
+            </a:endParaRPr>
+          </a:p>
+          <a:p>
+            <a:pPr marL="685800" lvl="1" indent="-228600" defTabSz="914400">
+              <a:lnSpc>
+                <a:spcPct val="90000"/>
+              </a:lnSpc>
+              <a:spcBef>
+                <a:spcPts val="499"/>
+              </a:spcBef>
+              <a:buClr>
+                <a:srgbClr val="000000"/>
+              </a:buClr>
+              <a:buFont typeface="Arial"/>
+              <a:buChar char="•"/>
+            </a:pPr>
+            <a:r>
+              <a:rPr lang="pt-BR" sz="2400" b="0" u="none" strike="noStrike">
+                <a:solidFill>
+                  <a:schemeClr val="dk1"/>
+                </a:solidFill>
+                <a:effectLst/>
+                <a:uFillTx/>
+                <a:latin typeface="Calibri"/>
+              </a:rPr>
+              <a:t>Segundo nível</a:t>
+            </a:r>
+            <a:endParaRPr lang="pt-BR" sz="2400" b="0" u="none" strike="noStrike">
+              <a:solidFill>
+                <a:srgbClr val="000000"/>
+              </a:solidFill>
+              <a:effectLst/>
+              <a:uFillTx/>
+              <a:latin typeface="Arial"/>
+            </a:endParaRPr>
+          </a:p>
+          <a:p>
+            <a:pPr marL="1143000" lvl="2" indent="-228600" defTabSz="914400">
+              <a:lnSpc>
+                <a:spcPct val="90000"/>
+              </a:lnSpc>
+              <a:spcBef>
+                <a:spcPts val="499"/>
+              </a:spcBef>
+              <a:buClr>
+                <a:srgbClr val="000000"/>
+              </a:buClr>
+              <a:buFont typeface="Arial"/>
+              <a:buChar char="•"/>
+            </a:pPr>
+            <a:r>
+              <a:rPr lang="pt-BR" sz="2000" b="0" u="none" strike="noStrike">
+                <a:solidFill>
+                  <a:schemeClr val="dk1"/>
+                </a:solidFill>
+                <a:effectLst/>
+                <a:uFillTx/>
+                <a:latin typeface="Calibri"/>
+              </a:rPr>
+              <a:t>Terceiro nível</a:t>
+            </a:r>
+            <a:endParaRPr lang="pt-BR" sz="2000" b="0" u="none" strike="noStrike">
+              <a:solidFill>
+                <a:srgbClr val="000000"/>
+              </a:solidFill>
+              <a:effectLst/>
+              <a:uFillTx/>
+              <a:latin typeface="Arial"/>
+            </a:endParaRPr>
+          </a:p>
+          <a:p>
+            <a:pPr marL="1600200" lvl="3" indent="-228600" defTabSz="914400">
+              <a:lnSpc>
+                <a:spcPct val="90000"/>
+              </a:lnSpc>
+              <a:spcBef>
+                <a:spcPts val="499"/>
+              </a:spcBef>
+              <a:buClr>
+                <a:srgbClr val="000000"/>
+              </a:buClr>
+              <a:buFont typeface="Arial"/>
+              <a:buChar char="•"/>
+            </a:pPr>
+            <a:r>
+              <a:rPr lang="pt-BR" sz="1800" b="0" u="none" strike="noStrike">
+                <a:solidFill>
+                  <a:schemeClr val="dk1"/>
+                </a:solidFill>
+                <a:effectLst/>
+                <a:uFillTx/>
+                <a:latin typeface="Calibri"/>
+              </a:rPr>
+              <a:t>Quarto nível</a:t>
+            </a:r>
+            <a:endParaRPr lang="pt-BR" sz="1800" b="0" u="none" strike="noStrike">
+              <a:solidFill>
+                <a:srgbClr val="000000"/>
+              </a:solidFill>
+              <a:effectLst/>
+              <a:uFillTx/>
+              <a:latin typeface="Arial"/>
+            </a:endParaRPr>
+          </a:p>
+          <a:p>
+            <a:pPr marL="2057400" lvl="4" indent="-228600" defTabSz="914400">
+              <a:lnSpc>
+                <a:spcPct val="90000"/>
+              </a:lnSpc>
+              <a:spcBef>
+                <a:spcPts val="499"/>
+              </a:spcBef>
+              <a:buClr>
+                <a:srgbClr val="000000"/>
+              </a:buClr>
+              <a:buFont typeface="Arial"/>
+              <a:buChar char="•"/>
+            </a:pPr>
+            <a:r>
+              <a:rPr lang="pt-BR" sz="1800" b="0" u="none" strike="noStrike">
+                <a:solidFill>
+                  <a:schemeClr val="dk1"/>
+                </a:solidFill>
+                <a:effectLst/>
+                <a:uFillTx/>
+                <a:latin typeface="Calibri"/>
+              </a:rPr>
+              <a:t>Quinto nível</a:t>
+            </a:r>
+            <a:endParaRPr lang="pt-BR" sz="1800" b="0" u="none" strike="noStrike">
+              <a:solidFill>
+                <a:srgbClr val="000000"/>
+              </a:solidFill>
+              <a:effectLst/>
+              <a:uFillTx/>
+              <a:latin typeface="Arial"/>
+            </a:endParaRPr>
+          </a:p>
+        </p:txBody>
+      </p:sp>
+      <p:sp>
+        <p:nvSpPr>
+          <p:cNvPr id="48" name="PlaceHolder 4"/>
           <p:cNvSpPr>
             <a:spLocks noGrp="1"/>
           </p:cNvSpPr>
@@ -739,7 +860,7 @@
         <p:spPr>
           <a:xfrm>
             <a:off x="838080" y="6356520"/>
-            <a:ext cx="2741400" cy="363240"/>
+            <a:ext cx="2741040" cy="362880"/>
           </a:xfrm>
           <a:prstGeom prst="rect">
             <a:avLst/>
@@ -810,7 +931,7 @@
       </p:sp>
       <p:sp>
         <p:nvSpPr>
-          <p:cNvPr id="51" name="PlaceHolder 2"/>
+          <p:cNvPr id="49" name="PlaceHolder 5"/>
           <p:cNvSpPr>
             <a:spLocks noGrp="1"/>
           </p:cNvSpPr>
@@ -821,7 +942,7 @@
         <p:spPr>
           <a:xfrm>
             <a:off x="4038480" y="6356520"/>
-            <a:ext cx="4113000" cy="363240"/>
+            <a:ext cx="4112640" cy="362880"/>
           </a:xfrm>
           <a:prstGeom prst="rect">
             <a:avLst/>
@@ -888,7 +1009,7 @@
       </p:sp>
       <p:sp>
         <p:nvSpPr>
-          <p:cNvPr id="52" name="PlaceHolder 3"/>
+          <p:cNvPr id="50" name="PlaceHolder 6"/>
           <p:cNvSpPr>
             <a:spLocks noGrp="1"/>
           </p:cNvSpPr>
@@ -899,7 +1020,7 @@
         <p:spPr>
           <a:xfrm>
             <a:off x="8610480" y="6356520"/>
-            <a:ext cx="2741400" cy="363240"/>
+            <a:ext cx="2741040" cy="362880"/>
           </a:xfrm>
           <a:prstGeom prst="rect">
             <a:avLst/>
@@ -944,7 +1065,7 @@
                 <a:tab algn="l" pos="0"/>
               </a:tabLst>
             </a:pPr>
-            <a:fld id="{F1005ABB-FB0E-46A8-8DFC-4DB3C6E0EC93}" type="slidenum">
+            <a:fld id="{B4625D77-BFD7-4140-B802-71A08418CE76}" type="slidenum">
               <a:rPr lang="pt-BR" sz="1200" b="0" u="none" strike="noStrike">
                 <a:solidFill>
                   <a:schemeClr val="dk1">
@@ -975,13 +1096,13 @@
 
 <file path=ppt/slideLayouts/slideLayout11.xml><?xml version="1.0" encoding="utf-8"?>
 <p:sldLayout xmlns:a="http://schemas.openxmlformats.org/drawingml/2006/main" xmlns:p="http://schemas.openxmlformats.org/presentationml/2006/main" xmlns:r="http://schemas.openxmlformats.org/officeDocument/2006/relationships" xmlns:p14="http://schemas.microsoft.com/office/powerpoint/2010/main" xmlns:p15="http://schemas.microsoft.com/office/powerpoint/2012/main" xmlns:mc="http://schemas.openxmlformats.org/markup-compatibility/2006" type="blank" preserve="1">
-  <p:cSld name="Conteúdo com Legenda">
+  <p:cSld name="Comparação">
     <p:bg>
       <p:bgPr>
         <a:blipFill rotWithShape="0">
           <a:blip r:embed="rId2"/>
           <a:stretch>
-            <a:fillRect l="-993" r="-993"/>
+            <a:fillRect l="-992" r="-992"/>
           </a:stretch>
         </a:blipFill>
       </p:bgPr>
@@ -1002,7 +1123,7 @@
       </p:grpSpPr>
       <p:sp>
         <p:nvSpPr>
-          <p:cNvPr id="53" name="PlaceHolder 1"/>
+          <p:cNvPr id="51" name="PlaceHolder 1"/>
           <p:cNvSpPr>
             <a:spLocks noGrp="1"/>
           </p:cNvSpPr>
@@ -1012,8 +1133,67 @@
         </p:nvSpPr>
         <p:spPr>
           <a:xfrm>
-            <a:off x="839880" y="457200"/>
-            <a:ext cx="3930480" cy="1598400"/>
+            <a:off x="839880" y="365040"/>
+            <a:ext cx="10513440" cy="1323360"/>
+          </a:xfrm>
+          <a:prstGeom prst="rect">
+            <a:avLst/>
+          </a:prstGeom>
+          <a:noFill/>
+          <a:ln w="0">
+            <a:noFill/>
+          </a:ln>
+        </p:spPr>
+        <p:txBody>
+          <a:bodyPr lIns="91440" rIns="91440" tIns="45720" bIns="45720" anchor="ctr">
+            <a:noAutofit/>
+          </a:bodyPr>
+          <a:p>
+            <a:pPr indent="0" defTabSz="914400">
+              <a:lnSpc>
+                <a:spcPct val="90000"/>
+              </a:lnSpc>
+              <a:buNone/>
+              <a:tabLst>
+                <a:tab algn="l" pos="0"/>
+              </a:tabLst>
+            </a:pPr>
+            <a:r>
+              <a:rPr lang="pt-BR" sz="4400" b="0" u="none" strike="noStrike">
+                <a:solidFill>
+                  <a:schemeClr val="dk1"/>
+                </a:solidFill>
+                <a:effectLst/>
+                <a:uFillTx/>
+                <a:latin typeface="Calibri Light"/>
+              </a:rPr>
+              <a:t>Clique para editar o título Mestre</a:t>
+            </a:r>
+            <a:endParaRPr lang="pt-BR" sz="4400" b="0" u="none" strike="noStrike">
+              <a:solidFill>
+                <a:srgbClr val="000000"/>
+              </a:solidFill>
+              <a:effectLst/>
+              <a:uFillTx/>
+              <a:latin typeface="Arial"/>
+            </a:endParaRPr>
+          </a:p>
+        </p:txBody>
+      </p:sp>
+      <p:sp>
+        <p:nvSpPr>
+          <p:cNvPr id="52" name="PlaceHolder 2"/>
+          <p:cNvSpPr>
+            <a:spLocks noGrp="1"/>
+          </p:cNvSpPr>
+          <p:nvPr>
+            <p:ph type="body"/>
+          </p:nvPr>
+        </p:nvSpPr>
+        <p:spPr>
+          <a:xfrm>
+            <a:off x="839880" y="1681200"/>
+            <a:ext cx="5155560" cy="821880"/>
           </a:xfrm>
           <a:prstGeom prst="rect">
             <a:avLst/>
@@ -1032,23 +1212,26 @@
               <a:lnSpc>
                 <a:spcPct val="90000"/>
               </a:lnSpc>
+              <a:spcBef>
+                <a:spcPts val="1001"/>
+              </a:spcBef>
               <a:buNone/>
               <a:tabLst>
                 <a:tab algn="l" pos="0"/>
               </a:tabLst>
             </a:pPr>
             <a:r>
-              <a:rPr lang="pt-BR" sz="3200" b="0" u="none" strike="noStrike">
+              <a:rPr lang="pt-BR" sz="2400" b="1" u="none" strike="noStrike">
                 <a:solidFill>
                   <a:schemeClr val="dk1"/>
                 </a:solidFill>
                 <a:effectLst/>
                 <a:uFillTx/>
-                <a:latin typeface="Calibri Light"/>
-              </a:rPr>
-              <a:t>Clique para editar o título Mestre</a:t>
+                <a:latin typeface="Calibri"/>
+              </a:rPr>
+              <a:t>Clique para editar os estilos de texto Mestres</a:t>
             </a:r>
-            <a:endParaRPr lang="pt-BR" sz="3200" b="0" u="none" strike="noStrike">
+            <a:endParaRPr lang="pt-BR" sz="2400" b="0" u="none" strike="noStrike">
               <a:solidFill>
                 <a:srgbClr val="000000"/>
               </a:solidFill>
@@ -1061,7 +1244,7 @@
       </p:sp>
       <p:sp>
         <p:nvSpPr>
-          <p:cNvPr id="54" name="PlaceHolder 2"/>
+          <p:cNvPr id="53" name="PlaceHolder 3"/>
           <p:cNvSpPr>
             <a:spLocks noGrp="1"/>
           </p:cNvSpPr>
@@ -1071,8 +1254,8 @@
         </p:nvSpPr>
         <p:spPr>
           <a:xfrm>
-            <a:off x="5183280" y="987480"/>
-            <a:ext cx="6170400" cy="4871880"/>
+            <a:off x="839880" y="2505240"/>
+            <a:ext cx="5155560" cy="3682440"/>
           </a:xfrm>
           <a:prstGeom prst="rect">
             <a:avLst/>
@@ -1101,7 +1284,7 @@
               <a:buChar char="•"/>
             </a:pPr>
             <a:r>
-              <a:rPr lang="pt-BR" sz="3200" b="0" u="none" strike="noStrike">
+              <a:rPr lang="pt-BR" sz="2800" b="0" u="none" strike="noStrike">
                 <a:solidFill>
                   <a:schemeClr val="dk1"/>
                 </a:solidFill>
@@ -1111,7 +1294,7 @@
               </a:rPr>
               <a:t>Clique para editar os estilos de texto Mestres</a:t>
             </a:r>
-            <a:endParaRPr lang="pt-BR" sz="3200" b="0" u="none" strike="noStrike">
+            <a:endParaRPr lang="pt-BR" sz="2800" b="0" u="none" strike="noStrike">
               <a:solidFill>
                 <a:srgbClr val="000000"/>
               </a:solidFill>
@@ -1135,7 +1318,7 @@
               <a:buChar char="•"/>
             </a:pPr>
             <a:r>
-              <a:rPr lang="pt-BR" sz="2800" b="0" u="none" strike="noStrike">
+              <a:rPr lang="pt-BR" sz="2400" b="0" u="none" strike="noStrike">
                 <a:solidFill>
                   <a:schemeClr val="dk1"/>
                 </a:solidFill>
@@ -1145,7 +1328,7 @@
               </a:rPr>
               <a:t>Segundo nível</a:t>
             </a:r>
-            <a:endParaRPr lang="pt-BR" sz="2800" b="0" u="none" strike="noStrike">
+            <a:endParaRPr lang="pt-BR" sz="2400" b="0" u="none" strike="noStrike">
               <a:solidFill>
                 <a:srgbClr val="000000"/>
               </a:solidFill>
@@ -1169,7 +1352,7 @@
               <a:buChar char="•"/>
             </a:pPr>
             <a:r>
-              <a:rPr lang="pt-BR" sz="2400" b="0" u="none" strike="noStrike">
+              <a:rPr lang="pt-BR" sz="2000" b="0" u="none" strike="noStrike">
                 <a:solidFill>
                   <a:schemeClr val="dk1"/>
                 </a:solidFill>
@@ -1179,7 +1362,7 @@
               </a:rPr>
               <a:t>Terceiro nível</a:t>
             </a:r>
-            <a:endParaRPr lang="pt-BR" sz="2400" b="0" u="none" strike="noStrike">
+            <a:endParaRPr lang="pt-BR" sz="2000" b="0" u="none" strike="noStrike">
               <a:solidFill>
                 <a:srgbClr val="000000"/>
               </a:solidFill>
@@ -1203,7 +1386,7 @@
               <a:buChar char="•"/>
             </a:pPr>
             <a:r>
-              <a:rPr lang="pt-BR" sz="2000" b="0" u="none" strike="noStrike">
+              <a:rPr lang="pt-BR" sz="1800" b="0" u="none" strike="noStrike">
                 <a:solidFill>
                   <a:schemeClr val="dk1"/>
                 </a:solidFill>
@@ -1213,7 +1396,7 @@
               </a:rPr>
               <a:t>Quarto nível</a:t>
             </a:r>
-            <a:endParaRPr lang="pt-BR" sz="2000" b="0" u="none" strike="noStrike">
+            <a:endParaRPr lang="pt-BR" sz="1800" b="0" u="none" strike="noStrike">
               <a:solidFill>
                 <a:srgbClr val="000000"/>
               </a:solidFill>
@@ -1237,7 +1420,7 @@
               <a:buChar char="•"/>
             </a:pPr>
             <a:r>
-              <a:rPr lang="pt-BR" sz="2000" b="0" u="none" strike="noStrike">
+              <a:rPr lang="pt-BR" sz="1800" b="0" u="none" strike="noStrike">
                 <a:solidFill>
                   <a:schemeClr val="dk1"/>
                 </a:solidFill>
@@ -1247,7 +1430,7 @@
               </a:rPr>
               <a:t>Quinto nível</a:t>
             </a:r>
-            <a:endParaRPr lang="pt-BR" sz="2000" b="0" u="none" strike="noStrike">
+            <a:endParaRPr lang="pt-BR" sz="1800" b="0" u="none" strike="noStrike">
               <a:solidFill>
                 <a:srgbClr val="000000"/>
               </a:solidFill>
@@ -1260,7 +1443,7 @@
       </p:sp>
       <p:sp>
         <p:nvSpPr>
-          <p:cNvPr id="55" name="PlaceHolder 3"/>
+          <p:cNvPr id="54" name="PlaceHolder 4"/>
           <p:cNvSpPr>
             <a:spLocks noGrp="1"/>
           </p:cNvSpPr>
@@ -1270,8 +1453,70 @@
         </p:nvSpPr>
         <p:spPr>
           <a:xfrm>
-            <a:off x="839880" y="2057400"/>
-            <a:ext cx="3930480" cy="3809880"/>
+            <a:off x="6172200" y="1681200"/>
+            <a:ext cx="5181120" cy="821880"/>
+          </a:xfrm>
+          <a:prstGeom prst="rect">
+            <a:avLst/>
+          </a:prstGeom>
+          <a:noFill/>
+          <a:ln w="0">
+            <a:noFill/>
+          </a:ln>
+        </p:spPr>
+        <p:txBody>
+          <a:bodyPr lIns="91440" rIns="91440" tIns="45720" bIns="45720" anchor="b">
+            <a:noAutofit/>
+          </a:bodyPr>
+          <a:p>
+            <a:pPr indent="0" defTabSz="914400">
+              <a:lnSpc>
+                <a:spcPct val="90000"/>
+              </a:lnSpc>
+              <a:spcBef>
+                <a:spcPts val="1001"/>
+              </a:spcBef>
+              <a:buNone/>
+              <a:tabLst>
+                <a:tab algn="l" pos="0"/>
+              </a:tabLst>
+            </a:pPr>
+            <a:r>
+              <a:rPr lang="pt-BR" sz="2400" b="1" u="none" strike="noStrike">
+                <a:solidFill>
+                  <a:schemeClr val="dk1"/>
+                </a:solidFill>
+                <a:effectLst/>
+                <a:uFillTx/>
+                <a:latin typeface="Calibri"/>
+              </a:rPr>
+              <a:t>Clique para editar os estilos de texto Mestres</a:t>
+            </a:r>
+            <a:endParaRPr lang="pt-BR" sz="2400" b="0" u="none" strike="noStrike">
+              <a:solidFill>
+                <a:srgbClr val="000000"/>
+              </a:solidFill>
+              <a:effectLst/>
+              <a:uFillTx/>
+              <a:latin typeface="Arial"/>
+            </a:endParaRPr>
+          </a:p>
+        </p:txBody>
+      </p:sp>
+      <p:sp>
+        <p:nvSpPr>
+          <p:cNvPr id="55" name="PlaceHolder 5"/>
+          <p:cNvSpPr>
+            <a:spLocks noGrp="1"/>
+          </p:cNvSpPr>
+          <p:nvPr>
+            <p:ph type="body"/>
+          </p:nvPr>
+        </p:nvSpPr>
+        <p:spPr>
+          <a:xfrm>
+            <a:off x="6172200" y="2505240"/>
+            <a:ext cx="5181120" cy="3682440"/>
           </a:xfrm>
           <a:prstGeom prst="rect">
             <a:avLst/>
@@ -1286,20 +1531,21 @@
             <a:noAutofit/>
           </a:bodyPr>
           <a:p>
-            <a:pPr indent="0" defTabSz="914400">
+            <a:pPr marL="228600" indent="-228600" defTabSz="914400">
               <a:lnSpc>
                 <a:spcPct val="90000"/>
               </a:lnSpc>
               <a:spcBef>
                 <a:spcPts val="1001"/>
               </a:spcBef>
-              <a:buNone/>
-              <a:tabLst>
-                <a:tab algn="l" pos="0"/>
-              </a:tabLst>
+              <a:buClr>
+                <a:srgbClr val="000000"/>
+              </a:buClr>
+              <a:buFont typeface="Arial"/>
+              <a:buChar char="•"/>
             </a:pPr>
             <a:r>
-              <a:rPr lang="pt-BR" sz="1600" b="0" u="none" strike="noStrike">
+              <a:rPr lang="pt-BR" sz="2800" b="0" u="none" strike="noStrike">
                 <a:solidFill>
                   <a:schemeClr val="dk1"/>
                 </a:solidFill>
@@ -1309,7 +1555,143 @@
               </a:rPr>
               <a:t>Clique para editar os estilos de texto Mestres</a:t>
             </a:r>
-            <a:endParaRPr lang="pt-BR" sz="1600" b="0" u="none" strike="noStrike">
+            <a:endParaRPr lang="pt-BR" sz="2800" b="0" u="none" strike="noStrike">
+              <a:solidFill>
+                <a:srgbClr val="000000"/>
+              </a:solidFill>
+              <a:effectLst/>
+              <a:uFillTx/>
+              <a:latin typeface="Arial"/>
+            </a:endParaRPr>
+          </a:p>
+          <a:p>
+            <a:pPr marL="685800" lvl="1" indent="-228600" defTabSz="914400">
+              <a:lnSpc>
+                <a:spcPct val="90000"/>
+              </a:lnSpc>
+              <a:spcBef>
+                <a:spcPts val="499"/>
+              </a:spcBef>
+              <a:buClr>
+                <a:srgbClr val="000000"/>
+              </a:buClr>
+              <a:buFont typeface="Arial"/>
+              <a:buChar char="•"/>
+            </a:pPr>
+            <a:r>
+              <a:rPr lang="pt-BR" sz="2400" b="0" u="none" strike="noStrike">
+                <a:solidFill>
+                  <a:schemeClr val="dk1"/>
+                </a:solidFill>
+                <a:effectLst/>
+                <a:uFillTx/>
+                <a:latin typeface="Calibri"/>
+              </a:rPr>
+              <a:t>Segundo nível</a:t>
+            </a:r>
+            <a:endParaRPr lang="pt-BR" sz="2400" b="0" u="none" strike="noStrike">
+              <a:solidFill>
+                <a:srgbClr val="000000"/>
+              </a:solidFill>
+              <a:effectLst/>
+              <a:uFillTx/>
+              <a:latin typeface="Arial"/>
+            </a:endParaRPr>
+          </a:p>
+          <a:p>
+            <a:pPr marL="1143000" lvl="2" indent="-228600" defTabSz="914400">
+              <a:lnSpc>
+                <a:spcPct val="90000"/>
+              </a:lnSpc>
+              <a:spcBef>
+                <a:spcPts val="499"/>
+              </a:spcBef>
+              <a:buClr>
+                <a:srgbClr val="000000"/>
+              </a:buClr>
+              <a:buFont typeface="Arial"/>
+              <a:buChar char="•"/>
+            </a:pPr>
+            <a:r>
+              <a:rPr lang="pt-BR" sz="2000" b="0" u="none" strike="noStrike">
+                <a:solidFill>
+                  <a:schemeClr val="dk1"/>
+                </a:solidFill>
+                <a:effectLst/>
+                <a:uFillTx/>
+                <a:latin typeface="Calibri"/>
+              </a:rPr>
+              <a:t>Terceiro nível</a:t>
+            </a:r>
+            <a:endParaRPr lang="pt-BR" sz="2000" b="0" u="none" strike="noStrike">
+              <a:solidFill>
+                <a:srgbClr val="000000"/>
+              </a:solidFill>
+              <a:effectLst/>
+              <a:uFillTx/>
+              <a:latin typeface="Arial"/>
+            </a:endParaRPr>
+          </a:p>
+          <a:p>
+            <a:pPr marL="1600200" lvl="3" indent="-228600" defTabSz="914400">
+              <a:lnSpc>
+                <a:spcPct val="90000"/>
+              </a:lnSpc>
+              <a:spcBef>
+                <a:spcPts val="499"/>
+              </a:spcBef>
+              <a:buClr>
+                <a:srgbClr val="000000"/>
+              </a:buClr>
+              <a:buFont typeface="Arial"/>
+              <a:buChar char="•"/>
+            </a:pPr>
+            <a:r>
+              <a:rPr lang="pt-BR" sz="1800" b="0" u="none" strike="noStrike">
+                <a:solidFill>
+                  <a:schemeClr val="dk1"/>
+                </a:solidFill>
+                <a:effectLst/>
+                <a:uFillTx/>
+                <a:latin typeface="Calibri"/>
+              </a:rPr>
+              <a:t>Quarto nível</a:t>
+            </a:r>
+            <a:endParaRPr lang="pt-BR" sz="1800" b="0" u="none" strike="noStrike">
+              <a:solidFill>
+                <a:srgbClr val="000000"/>
+              </a:solidFill>
+              <a:effectLst/>
+              <a:uFillTx/>
+              <a:latin typeface="Arial"/>
+            </a:endParaRPr>
+          </a:p>
+          <a:p>
+            <a:pPr marL="2057400" lvl="4" indent="-228600" defTabSz="914400">
+              <a:lnSpc>
+                <a:spcPct val="90000"/>
+              </a:lnSpc>
+              <a:spcBef>
+                <a:spcPts val="499"/>
+              </a:spcBef>
+              <a:buClr>
+                <a:srgbClr val="000000"/>
+              </a:buClr>
+              <a:buFont typeface="Arial"/>
+              <a:buChar char="•"/>
+            </a:pPr>
+            <a:r>
+              <a:rPr lang="pt-BR" sz="1800" b="0" u="none" strike="noStrike">
+                <a:solidFill>
+                  <a:schemeClr val="dk1"/>
+                </a:solidFill>
+                <a:effectLst/>
+                <a:uFillTx/>
+                <a:latin typeface="Calibri"/>
+              </a:rPr>
+              <a:t>Quinto nível</a:t>
+            </a:r>
+            <a:endParaRPr lang="pt-BR" sz="1800" b="0" u="none" strike="noStrike">
               <a:solidFill>
                 <a:srgbClr val="000000"/>
               </a:solidFill>
@@ -1322,7 +1704,7 @@
       </p:sp>
       <p:sp>
         <p:nvSpPr>
-          <p:cNvPr id="56" name="PlaceHolder 4"/>
+          <p:cNvPr id="56" name="PlaceHolder 6"/>
           <p:cNvSpPr>
             <a:spLocks noGrp="1"/>
           </p:cNvSpPr>
@@ -1333,7 +1715,7 @@
         <p:spPr>
           <a:xfrm>
             <a:off x="838080" y="6356520"/>
-            <a:ext cx="2741400" cy="363240"/>
+            <a:ext cx="2741040" cy="362880"/>
           </a:xfrm>
           <a:prstGeom prst="rect">
             <a:avLst/>
@@ -1404,7 +1786,7 @@
       </p:sp>
       <p:sp>
         <p:nvSpPr>
-          <p:cNvPr id="57" name="PlaceHolder 5"/>
+          <p:cNvPr id="57" name="PlaceHolder 7"/>
           <p:cNvSpPr>
             <a:spLocks noGrp="1"/>
           </p:cNvSpPr>
@@ -1415,7 +1797,7 @@
         <p:spPr>
           <a:xfrm>
             <a:off x="4038480" y="6356520"/>
-            <a:ext cx="4113000" cy="363240"/>
+            <a:ext cx="4112640" cy="362880"/>
           </a:xfrm>
           <a:prstGeom prst="rect">
             <a:avLst/>
@@ -1482,7 +1864,7 @@
       </p:sp>
       <p:sp>
         <p:nvSpPr>
-          <p:cNvPr id="58" name="PlaceHolder 6"/>
+          <p:cNvPr id="58" name="PlaceHolder 8"/>
           <p:cNvSpPr>
             <a:spLocks noGrp="1"/>
           </p:cNvSpPr>
@@ -1493,7 +1875,7 @@
         <p:spPr>
           <a:xfrm>
             <a:off x="8610480" y="6356520"/>
-            <a:ext cx="2741400" cy="363240"/>
+            <a:ext cx="2741040" cy="362880"/>
           </a:xfrm>
           <a:prstGeom prst="rect">
             <a:avLst/>
@@ -1538,7 +1920,7 @@
                 <a:tab algn="l" pos="0"/>
               </a:tabLst>
             </a:pPr>
-            <a:fld id="{0F2EFBC8-21BC-4FE1-B94A-4D29A7A405A6}" type="slidenum">
+            <a:fld id="{D336BF69-1FF7-4E68-826E-50A5FBABCAA6}" type="slidenum">
               <a:rPr lang="pt-BR" sz="1200" b="0" u="none" strike="noStrike">
                 <a:solidFill>
                   <a:schemeClr val="dk1">
@@ -1568,14 +1950,14 @@
 </file>
 
 <file path=ppt/slideLayouts/slideLayout2.xml><?xml version="1.0" encoding="utf-8"?>
-<p:sldLayout xmlns:a="http://schemas.openxmlformats.org/drawingml/2006/main" xmlns:p="http://schemas.openxmlformats.org/presentationml/2006/main" xmlns:r="http://schemas.openxmlformats.org/officeDocument/2006/relationships" xmlns:p14="http://schemas.microsoft.com/office/powerpoint/2010/main" xmlns:p15="http://schemas.microsoft.com/office/powerpoint/2012/main" xmlns:mc="http://schemas.openxmlformats.org/markup-compatibility/2006" type="title" preserve="1">
-  <p:cSld name="Slide de Título">
+<p:sldLayout xmlns:a="http://schemas.openxmlformats.org/drawingml/2006/main" xmlns:p="http://schemas.openxmlformats.org/presentationml/2006/main" xmlns:r="http://schemas.openxmlformats.org/officeDocument/2006/relationships" xmlns:p14="http://schemas.microsoft.com/office/powerpoint/2010/main" xmlns:p15="http://schemas.microsoft.com/office/powerpoint/2012/main" xmlns:mc="http://schemas.openxmlformats.org/markup-compatibility/2006" type="blank" preserve="1">
+  <p:cSld name="Em Branco">
     <p:bg>
       <p:bgPr>
         <a:blipFill rotWithShape="0">
           <a:blip r:embed="rId2"/>
           <a:stretch>
-            <a:fillRect l="-993" r="-993"/>
+            <a:fillRect l="-992" r="-992"/>
           </a:stretch>
         </a:blipFill>
       </p:bgPr>
@@ -1596,66 +1978,7 @@
       </p:grpSpPr>
       <p:sp>
         <p:nvSpPr>
-          <p:cNvPr id="8" name="PlaceHolder 1"/>
-          <p:cNvSpPr>
-            <a:spLocks noGrp="1"/>
-          </p:cNvSpPr>
-          <p:nvPr>
-            <p:ph type="title"/>
-          </p:nvPr>
-        </p:nvSpPr>
-        <p:spPr>
-          <a:xfrm>
-            <a:off x="1523880" y="1122480"/>
-            <a:ext cx="9142200" cy="2385720"/>
-          </a:xfrm>
-          <a:prstGeom prst="rect">
-            <a:avLst/>
-          </a:prstGeom>
-          <a:noFill/>
-          <a:ln w="0">
-            <a:noFill/>
-          </a:ln>
-        </p:spPr>
-        <p:txBody>
-          <a:bodyPr lIns="91440" rIns="91440" tIns="45720" bIns="45720" anchor="b">
-            <a:noAutofit/>
-          </a:bodyPr>
-          <a:p>
-            <a:pPr indent="0" algn="ctr" defTabSz="914400">
-              <a:lnSpc>
-                <a:spcPct val="90000"/>
-              </a:lnSpc>
-              <a:buNone/>
-              <a:tabLst>
-                <a:tab algn="l" pos="0"/>
-              </a:tabLst>
-            </a:pPr>
-            <a:r>
-              <a:rPr lang="pt-BR" sz="6000" b="0" u="none" strike="noStrike">
-                <a:solidFill>
-                  <a:schemeClr val="dk1"/>
-                </a:solidFill>
-                <a:effectLst/>
-                <a:uFillTx/>
-                <a:latin typeface="Calibri Light"/>
-              </a:rPr>
-              <a:t>Clique para editar o título Mestre</a:t>
-            </a:r>
-            <a:endParaRPr lang="pt-BR" sz="6000" b="0" u="none" strike="noStrike">
-              <a:solidFill>
-                <a:srgbClr val="000000"/>
-              </a:solidFill>
-              <a:effectLst/>
-              <a:uFillTx/>
-              <a:latin typeface="Arial"/>
-            </a:endParaRPr>
-          </a:p>
-        </p:txBody>
-      </p:sp>
-      <p:sp>
-        <p:nvSpPr>
-          <p:cNvPr id="9" name="PlaceHolder 2"/>
+          <p:cNvPr id="6" name="PlaceHolder 1"/>
           <p:cNvSpPr>
             <a:spLocks noGrp="1"/>
           </p:cNvSpPr>
@@ -1666,7 +1989,7 @@
         <p:spPr>
           <a:xfrm>
             <a:off x="838080" y="6356520"/>
-            <a:ext cx="2741400" cy="363240"/>
+            <a:ext cx="2741040" cy="362880"/>
           </a:xfrm>
           <a:prstGeom prst="rect">
             <a:avLst/>
@@ -1737,7 +2060,7 @@
       </p:sp>
       <p:sp>
         <p:nvSpPr>
-          <p:cNvPr id="10" name="PlaceHolder 3"/>
+          <p:cNvPr id="7" name="PlaceHolder 2"/>
           <p:cNvSpPr>
             <a:spLocks noGrp="1"/>
           </p:cNvSpPr>
@@ -1748,7 +2071,7 @@
         <p:spPr>
           <a:xfrm>
             <a:off x="4038480" y="6356520"/>
-            <a:ext cx="4113000" cy="363240"/>
+            <a:ext cx="4112640" cy="362880"/>
           </a:xfrm>
           <a:prstGeom prst="rect">
             <a:avLst/>
@@ -1815,7 +2138,7 @@
       </p:sp>
       <p:sp>
         <p:nvSpPr>
-          <p:cNvPr id="11" name="PlaceHolder 4"/>
+          <p:cNvPr id="8" name="PlaceHolder 3"/>
           <p:cNvSpPr>
             <a:spLocks noGrp="1"/>
           </p:cNvSpPr>
@@ -1826,7 +2149,7 @@
         <p:spPr>
           <a:xfrm>
             <a:off x="8610480" y="6356520"/>
-            <a:ext cx="2741400" cy="363240"/>
+            <a:ext cx="2741040" cy="362880"/>
           </a:xfrm>
           <a:prstGeom prst="rect">
             <a:avLst/>
@@ -1871,7 +2194,7 @@
                 <a:tab algn="l" pos="0"/>
               </a:tabLst>
             </a:pPr>
-            <a:fld id="{5E36066E-7A59-4E30-9C96-435F940BD933}" type="slidenum">
+            <a:fld id="{0EBF38B2-0B6A-4326-A2BD-FAE0F826F580}" type="slidenum">
               <a:rPr lang="pt-BR" sz="1200" b="0" u="none" strike="noStrike">
                 <a:solidFill>
                   <a:schemeClr val="dk1">
@@ -1901,14 +2224,14 @@
 </file>
 
 <file path=ppt/slideLayouts/slideLayout3.xml><?xml version="1.0" encoding="utf-8"?>
-<p:sldLayout xmlns:a="http://schemas.openxmlformats.org/drawingml/2006/main" xmlns:p="http://schemas.openxmlformats.org/presentationml/2006/main" xmlns:r="http://schemas.openxmlformats.org/officeDocument/2006/relationships" xmlns:p14="http://schemas.microsoft.com/office/powerpoint/2010/main" xmlns:p15="http://schemas.microsoft.com/office/powerpoint/2012/main" xmlns:mc="http://schemas.openxmlformats.org/markup-compatibility/2006" type="vertTx" preserve="1">
-  <p:cSld name="Título e Texto Vertical">
+<p:sldLayout xmlns:a="http://schemas.openxmlformats.org/drawingml/2006/main" xmlns:p="http://schemas.openxmlformats.org/presentationml/2006/main" xmlns:r="http://schemas.openxmlformats.org/officeDocument/2006/relationships" xmlns:p14="http://schemas.microsoft.com/office/powerpoint/2010/main" xmlns:p15="http://schemas.microsoft.com/office/powerpoint/2012/main" xmlns:mc="http://schemas.openxmlformats.org/markup-compatibility/2006" type="blank" preserve="1">
+  <p:cSld name="Conteúdo com Legenda">
     <p:bg>
       <p:bgPr>
         <a:blipFill rotWithShape="0">
           <a:blip r:embed="rId2"/>
           <a:stretch>
-            <a:fillRect l="-993" r="-993"/>
+            <a:fillRect l="-992" r="-992"/>
           </a:stretch>
         </a:blipFill>
       </p:bgPr>
@@ -1929,7 +2252,7 @@
       </p:grpSpPr>
       <p:sp>
         <p:nvSpPr>
-          <p:cNvPr id="12" name="PlaceHolder 1"/>
+          <p:cNvPr id="9" name="PlaceHolder 1"/>
           <p:cNvSpPr>
             <a:spLocks noGrp="1"/>
           </p:cNvSpPr>
@@ -1939,8 +2262,8 @@
         </p:nvSpPr>
         <p:spPr>
           <a:xfrm>
-            <a:off x="838080" y="365040"/>
-            <a:ext cx="10513800" cy="1323720"/>
+            <a:off x="839880" y="457200"/>
+            <a:ext cx="3930120" cy="1598040"/>
           </a:xfrm>
           <a:prstGeom prst="rect">
             <a:avLst/>
@@ -1951,7 +2274,7 @@
           </a:ln>
         </p:spPr>
         <p:txBody>
-          <a:bodyPr lIns="91440" rIns="91440" tIns="45720" bIns="45720" anchor="ctr">
+          <a:bodyPr lIns="91440" rIns="91440" tIns="45720" bIns="45720" anchor="b">
             <a:noAutofit/>
           </a:bodyPr>
           <a:p>
@@ -1965,7 +2288,7 @@
               </a:tabLst>
             </a:pPr>
             <a:r>
-              <a:rPr lang="pt-BR" sz="4400" b="0" u="none" strike="noStrike">
+              <a:rPr lang="pt-BR" sz="3200" b="0" u="none" strike="noStrike">
                 <a:solidFill>
                   <a:schemeClr val="dk1"/>
                 </a:solidFill>
@@ -1975,7 +2298,7 @@
               </a:rPr>
               <a:t>Clique para editar o título Mestre</a:t>
             </a:r>
-            <a:endParaRPr lang="pt-BR" sz="4400" b="0" u="none" strike="noStrike">
+            <a:endParaRPr lang="pt-BR" sz="3200" b="0" u="none" strike="noStrike">
               <a:solidFill>
                 <a:srgbClr val="000000"/>
               </a:solidFill>
@@ -1988,7 +2311,7 @@
       </p:sp>
       <p:sp>
         <p:nvSpPr>
-          <p:cNvPr id="13" name="PlaceHolder 2"/>
+          <p:cNvPr id="10" name="PlaceHolder 2"/>
           <p:cNvSpPr>
             <a:spLocks noGrp="1"/>
           </p:cNvSpPr>
@@ -1998,8 +2321,8 @@
         </p:nvSpPr>
         <p:spPr>
           <a:xfrm>
-            <a:off x="838080" y="1825560"/>
-            <a:ext cx="10513800" cy="4349520"/>
+            <a:off x="5183280" y="987480"/>
+            <a:ext cx="6170040" cy="4871520"/>
           </a:xfrm>
           <a:prstGeom prst="rect">
             <a:avLst/>
@@ -2010,7 +2333,7 @@
           </a:ln>
         </p:spPr>
         <p:txBody>
-          <a:bodyPr lIns="91440" rIns="91440" tIns="45720" bIns="45720" anchor="t" vert="eaVert">
+          <a:bodyPr lIns="91440" rIns="91440" tIns="45720" bIns="45720" anchor="t">
             <a:noAutofit/>
           </a:bodyPr>
           <a:p>
@@ -2028,7 +2351,7 @@
               <a:buChar char="•"/>
             </a:pPr>
             <a:r>
-              <a:rPr lang="pt-BR" sz="2800" b="0" u="none" strike="noStrike">
+              <a:rPr lang="pt-BR" sz="3200" b="0" u="none" strike="noStrike">
                 <a:solidFill>
                   <a:schemeClr val="dk1"/>
                 </a:solidFill>
@@ -2038,7 +2361,7 @@
               </a:rPr>
               <a:t>Clique para editar os estilos de texto Mestres</a:t>
             </a:r>
-            <a:endParaRPr lang="pt-BR" sz="2800" b="0" u="none" strike="noStrike">
+            <a:endParaRPr lang="pt-BR" sz="3200" b="0" u="none" strike="noStrike">
               <a:solidFill>
                 <a:srgbClr val="000000"/>
               </a:solidFill>
@@ -2062,7 +2385,7 @@
               <a:buChar char="•"/>
             </a:pPr>
             <a:r>
-              <a:rPr lang="pt-BR" sz="2400" b="0" u="none" strike="noStrike">
+              <a:rPr lang="pt-BR" sz="2800" b="0" u="none" strike="noStrike">
                 <a:solidFill>
                   <a:schemeClr val="dk1"/>
                 </a:solidFill>
@@ -2072,7 +2395,7 @@
               </a:rPr>
               <a:t>Segundo nível</a:t>
             </a:r>
-            <a:endParaRPr lang="pt-BR" sz="2400" b="0" u="none" strike="noStrike">
+            <a:endParaRPr lang="pt-BR" sz="2800" b="0" u="none" strike="noStrike">
               <a:solidFill>
                 <a:srgbClr val="000000"/>
               </a:solidFill>
@@ -2096,7 +2419,7 @@
               <a:buChar char="•"/>
             </a:pPr>
             <a:r>
-              <a:rPr lang="pt-BR" sz="2000" b="0" u="none" strike="noStrike">
+              <a:rPr lang="pt-BR" sz="2400" b="0" u="none" strike="noStrike">
                 <a:solidFill>
                   <a:schemeClr val="dk1"/>
                 </a:solidFill>
@@ -2106,7 +2429,7 @@
               </a:rPr>
               <a:t>Terceiro nível</a:t>
             </a:r>
-            <a:endParaRPr lang="pt-BR" sz="2000" b="0" u="none" strike="noStrike">
+            <a:endParaRPr lang="pt-BR" sz="2400" b="0" u="none" strike="noStrike">
               <a:solidFill>
                 <a:srgbClr val="000000"/>
               </a:solidFill>
@@ -2130,7 +2453,7 @@
               <a:buChar char="•"/>
             </a:pPr>
             <a:r>
-              <a:rPr lang="pt-BR" sz="1800" b="0" u="none" strike="noStrike">
+              <a:rPr lang="pt-BR" sz="2000" b="0" u="none" strike="noStrike">
                 <a:solidFill>
                   <a:schemeClr val="dk1"/>
                 </a:solidFill>
@@ -2140,7 +2463,7 @@
               </a:rPr>
               <a:t>Quarto nível</a:t>
             </a:r>
-            <a:endParaRPr lang="pt-BR" sz="1800" b="0" u="none" strike="noStrike">
+            <a:endParaRPr lang="pt-BR" sz="2000" b="0" u="none" strike="noStrike">
               <a:solidFill>
                 <a:srgbClr val="000000"/>
               </a:solidFill>
@@ -2164,7 +2487,7 @@
               <a:buChar char="•"/>
             </a:pPr>
             <a:r>
-              <a:rPr lang="pt-BR" sz="1800" b="0" u="none" strike="noStrike">
+              <a:rPr lang="pt-BR" sz="2000" b="0" u="none" strike="noStrike">
                 <a:solidFill>
                   <a:schemeClr val="dk1"/>
                 </a:solidFill>
@@ -2174,7 +2497,7 @@
               </a:rPr>
               <a:t>Quinto nível</a:t>
             </a:r>
-            <a:endParaRPr lang="pt-BR" sz="1800" b="0" u="none" strike="noStrike">
+            <a:endParaRPr lang="pt-BR" sz="2000" b="0" u="none" strike="noStrike">
               <a:solidFill>
                 <a:srgbClr val="000000"/>
               </a:solidFill>
@@ -2187,7 +2510,69 @@
       </p:sp>
       <p:sp>
         <p:nvSpPr>
-          <p:cNvPr id="14" name="PlaceHolder 3"/>
+          <p:cNvPr id="11" name="PlaceHolder 3"/>
+          <p:cNvSpPr>
+            <a:spLocks noGrp="1"/>
+          </p:cNvSpPr>
+          <p:nvPr>
+            <p:ph type="body"/>
+          </p:nvPr>
+        </p:nvSpPr>
+        <p:spPr>
+          <a:xfrm>
+            <a:off x="839880" y="2057400"/>
+            <a:ext cx="3930120" cy="3809520"/>
+          </a:xfrm>
+          <a:prstGeom prst="rect">
+            <a:avLst/>
+          </a:prstGeom>
+          <a:noFill/>
+          <a:ln w="0">
+            <a:noFill/>
+          </a:ln>
+        </p:spPr>
+        <p:txBody>
+          <a:bodyPr lIns="91440" rIns="91440" tIns="45720" bIns="45720" anchor="t">
+            <a:noAutofit/>
+          </a:bodyPr>
+          <a:p>
+            <a:pPr indent="0" defTabSz="914400">
+              <a:lnSpc>
+                <a:spcPct val="90000"/>
+              </a:lnSpc>
+              <a:spcBef>
+                <a:spcPts val="1001"/>
+              </a:spcBef>
+              <a:buNone/>
+              <a:tabLst>
+                <a:tab algn="l" pos="0"/>
+              </a:tabLst>
+            </a:pPr>
+            <a:r>
+              <a:rPr lang="pt-BR" sz="1600" b="0" u="none" strike="noStrike">
+                <a:solidFill>
+                  <a:schemeClr val="dk1"/>
+                </a:solidFill>
+                <a:effectLst/>
+                <a:uFillTx/>
+                <a:latin typeface="Calibri"/>
+              </a:rPr>
+              <a:t>Clique para editar os estilos de texto Mestres</a:t>
+            </a:r>
+            <a:endParaRPr lang="pt-BR" sz="1600" b="0" u="none" strike="noStrike">
+              <a:solidFill>
+                <a:srgbClr val="000000"/>
+              </a:solidFill>
+              <a:effectLst/>
+              <a:uFillTx/>
+              <a:latin typeface="Arial"/>
+            </a:endParaRPr>
+          </a:p>
+        </p:txBody>
+      </p:sp>
+      <p:sp>
+        <p:nvSpPr>
+          <p:cNvPr id="12" name="PlaceHolder 4"/>
           <p:cNvSpPr>
             <a:spLocks noGrp="1"/>
           </p:cNvSpPr>
@@ -2198,7 +2583,7 @@
         <p:spPr>
           <a:xfrm>
             <a:off x="838080" y="6356520"/>
-            <a:ext cx="2741400" cy="363240"/>
+            <a:ext cx="2741040" cy="362880"/>
           </a:xfrm>
           <a:prstGeom prst="rect">
             <a:avLst/>
@@ -2269,7 +2654,7 @@
       </p:sp>
       <p:sp>
         <p:nvSpPr>
-          <p:cNvPr id="15" name="PlaceHolder 4"/>
+          <p:cNvPr id="13" name="PlaceHolder 5"/>
           <p:cNvSpPr>
             <a:spLocks noGrp="1"/>
           </p:cNvSpPr>
@@ -2280,7 +2665,7 @@
         <p:spPr>
           <a:xfrm>
             <a:off x="4038480" y="6356520"/>
-            <a:ext cx="4113000" cy="363240"/>
+            <a:ext cx="4112640" cy="362880"/>
           </a:xfrm>
           <a:prstGeom prst="rect">
             <a:avLst/>
@@ -2347,7 +2732,7 @@
       </p:sp>
       <p:sp>
         <p:nvSpPr>
-          <p:cNvPr id="16" name="PlaceHolder 5"/>
+          <p:cNvPr id="14" name="PlaceHolder 6"/>
           <p:cNvSpPr>
             <a:spLocks noGrp="1"/>
           </p:cNvSpPr>
@@ -2358,7 +2743,7 @@
         <p:spPr>
           <a:xfrm>
             <a:off x="8610480" y="6356520"/>
-            <a:ext cx="2741400" cy="363240"/>
+            <a:ext cx="2741040" cy="362880"/>
           </a:xfrm>
           <a:prstGeom prst="rect">
             <a:avLst/>
@@ -2403,7 +2788,7 @@
                 <a:tab algn="l" pos="0"/>
               </a:tabLst>
             </a:pPr>
-            <a:fld id="{3D6C1C46-6D6C-4EB5-BAA3-08D48F859E64}" type="slidenum">
+            <a:fld id="{05A55E9B-66EE-4E0D-9559-A0EC67483A74}" type="slidenum">
               <a:rPr lang="pt-BR" sz="1200" b="0" u="none" strike="noStrike">
                 <a:solidFill>
                   <a:schemeClr val="dk1">
@@ -2433,14 +2818,14 @@
 </file>
 
 <file path=ppt/slideLayouts/slideLayout4.xml><?xml version="1.0" encoding="utf-8"?>
-<p:sldLayout xmlns:a="http://schemas.openxmlformats.org/drawingml/2006/main" xmlns:p="http://schemas.openxmlformats.org/presentationml/2006/main" xmlns:r="http://schemas.openxmlformats.org/officeDocument/2006/relationships" xmlns:p14="http://schemas.microsoft.com/office/powerpoint/2010/main" xmlns:p15="http://schemas.microsoft.com/office/powerpoint/2012/main" xmlns:mc="http://schemas.openxmlformats.org/markup-compatibility/2006" type="vertTitleAndTx" preserve="1">
-  <p:cSld name="Texto e Título Vertical">
+<p:sldLayout xmlns:a="http://schemas.openxmlformats.org/drawingml/2006/main" xmlns:p="http://schemas.openxmlformats.org/presentationml/2006/main" xmlns:r="http://schemas.openxmlformats.org/officeDocument/2006/relationships" xmlns:p14="http://schemas.microsoft.com/office/powerpoint/2010/main" xmlns:p15="http://schemas.microsoft.com/office/powerpoint/2012/main" xmlns:mc="http://schemas.openxmlformats.org/markup-compatibility/2006" type="blank" preserve="1">
+  <p:cSld name="Imagem com Legenda">
     <p:bg>
       <p:bgPr>
         <a:blipFill rotWithShape="0">
           <a:blip r:embed="rId2"/>
           <a:stretch>
-            <a:fillRect l="-993" r="-993"/>
+            <a:fillRect l="-992" r="-992"/>
           </a:stretch>
         </a:blipFill>
       </p:bgPr>
@@ -2461,7 +2846,7 @@
       </p:grpSpPr>
       <p:sp>
         <p:nvSpPr>
-          <p:cNvPr id="17" name="PlaceHolder 1"/>
+          <p:cNvPr id="15" name="PlaceHolder 1"/>
           <p:cNvSpPr>
             <a:spLocks noGrp="1"/>
           </p:cNvSpPr>
@@ -2471,8 +2856,8 @@
         </p:nvSpPr>
         <p:spPr>
           <a:xfrm>
-            <a:off x="8724960" y="365040"/>
-            <a:ext cx="2627280" cy="5810040"/>
+            <a:off x="839880" y="457200"/>
+            <a:ext cx="3930120" cy="1598040"/>
           </a:xfrm>
           <a:prstGeom prst="rect">
             <a:avLst/>
@@ -2483,7 +2868,7 @@
           </a:ln>
         </p:spPr>
         <p:txBody>
-          <a:bodyPr lIns="91440" rIns="91440" tIns="45720" bIns="45720" anchor="ctr" vert="eaVert">
+          <a:bodyPr lIns="91440" rIns="91440" tIns="45720" bIns="45720" anchor="b">
             <a:noAutofit/>
           </a:bodyPr>
           <a:p>
@@ -2497,7 +2882,7 @@
               </a:tabLst>
             </a:pPr>
             <a:r>
-              <a:rPr lang="pt-BR" sz="4400" b="0" u="none" strike="noStrike">
+              <a:rPr lang="pt-BR" sz="3200" b="0" u="none" strike="noStrike">
                 <a:solidFill>
                   <a:schemeClr val="dk1"/>
                 </a:solidFill>
@@ -2507,7 +2892,7 @@
               </a:rPr>
               <a:t>Clique para editar o título Mestre</a:t>
             </a:r>
-            <a:endParaRPr lang="pt-BR" sz="4400" b="0" u="none" strike="noStrike">
+            <a:endParaRPr lang="pt-BR" sz="3200" b="0" u="none" strike="noStrike">
               <a:solidFill>
                 <a:srgbClr val="000000"/>
               </a:solidFill>
@@ -2520,7 +2905,7 @@
       </p:sp>
       <p:sp>
         <p:nvSpPr>
-          <p:cNvPr id="18" name="PlaceHolder 2"/>
+          <p:cNvPr id="16" name="PlaceHolder 2"/>
           <p:cNvSpPr>
             <a:spLocks noGrp="1"/>
           </p:cNvSpPr>
@@ -2530,8 +2915,8 @@
         </p:nvSpPr>
         <p:spPr>
           <a:xfrm>
-            <a:off x="838080" y="365040"/>
-            <a:ext cx="7732440" cy="5810040"/>
+            <a:off x="5183280" y="987480"/>
+            <a:ext cx="6170040" cy="4871520"/>
           </a:xfrm>
           <a:prstGeom prst="rect">
             <a:avLst/>
@@ -2542,25 +2927,26 @@
           </a:ln>
         </p:spPr>
         <p:txBody>
-          <a:bodyPr lIns="91440" rIns="91440" tIns="45720" bIns="45720" anchor="t" vert="eaVert">
+          <a:bodyPr lIns="90000" rIns="90000" tIns="45000" bIns="45000" anchor="t">
             <a:noAutofit/>
           </a:bodyPr>
           <a:p>
-            <a:pPr marL="228600" indent="-228600" defTabSz="914400">
+            <a:pPr marL="432000" indent="-324000">
               <a:lnSpc>
                 <a:spcPct val="90000"/>
               </a:lnSpc>
               <a:spcBef>
-                <a:spcPts val="1001"/>
+                <a:spcPts val="1417"/>
               </a:spcBef>
               <a:buClr>
                 <a:srgbClr val="000000"/>
               </a:buClr>
-              <a:buFont typeface="Arial"/>
-              <a:buChar char="•"/>
+              <a:buSzPct val="45000"/>
+              <a:buFont typeface="Wingdings" charset="2"/>
+              <a:buChar char=""/>
             </a:pPr>
             <a:r>
-              <a:rPr lang="pt-BR" sz="2800" b="0" u="none" strike="noStrike">
+              <a:rPr lang="pt-BR" sz="3200" b="0" u="none" strike="noStrike">
                 <a:solidFill>
                   <a:schemeClr val="dk1"/>
                 </a:solidFill>
@@ -2568,9 +2954,9 @@
                 <a:uFillTx/>
                 <a:latin typeface="Calibri"/>
               </a:rPr>
-              <a:t>Clique para editar os estilos de texto Mestres</a:t>
+              <a:t>Clique para editar o formato de texto dos tópicos</a:t>
             </a:r>
-            <a:endParaRPr lang="pt-BR" sz="2800" b="0" u="none" strike="noStrike">
+            <a:endParaRPr lang="pt-BR" sz="3200" b="0" u="none" strike="noStrike">
               <a:solidFill>
                 <a:srgbClr val="000000"/>
               </a:solidFill>
@@ -2580,21 +2966,22 @@
             </a:endParaRPr>
           </a:p>
           <a:p>
-            <a:pPr marL="685800" lvl="1" indent="-228600" defTabSz="914400">
+            <a:pPr marL="864000" lvl="1" indent="-324000">
               <a:lnSpc>
                 <a:spcPct val="90000"/>
               </a:lnSpc>
               <a:spcBef>
-                <a:spcPts val="499"/>
+                <a:spcPts val="1134"/>
               </a:spcBef>
               <a:buClr>
                 <a:srgbClr val="000000"/>
               </a:buClr>
-              <a:buFont typeface="Arial"/>
-              <a:buChar char="•"/>
+              <a:buSzPct val="75000"/>
+              <a:buFont typeface="Symbol" charset="2"/>
+              <a:buChar char=""/>
             </a:pPr>
             <a:r>
-              <a:rPr lang="pt-BR" sz="2400" b="0" u="none" strike="noStrike">
+              <a:rPr lang="pt-BR" sz="3200" b="0" u="none" strike="noStrike">
                 <a:solidFill>
                   <a:schemeClr val="dk1"/>
                 </a:solidFill>
@@ -2602,9 +2989,9 @@
                 <a:uFillTx/>
                 <a:latin typeface="Calibri"/>
               </a:rPr>
-              <a:t>Segundo nível</a:t>
+              <a:t>2.º nível de tópicos</a:t>
             </a:r>
-            <a:endParaRPr lang="pt-BR" sz="2400" b="0" u="none" strike="noStrike">
+            <a:endParaRPr lang="pt-BR" sz="3200" b="0" u="none" strike="noStrike">
               <a:solidFill>
                 <a:srgbClr val="000000"/>
               </a:solidFill>
@@ -2614,21 +3001,22 @@
             </a:endParaRPr>
           </a:p>
           <a:p>
-            <a:pPr marL="1143000" lvl="2" indent="-228600" defTabSz="914400">
+            <a:pPr marL="1296000" lvl="2" indent="-288000">
               <a:lnSpc>
                 <a:spcPct val="90000"/>
               </a:lnSpc>
               <a:spcBef>
-                <a:spcPts val="499"/>
+                <a:spcPts val="850"/>
               </a:spcBef>
               <a:buClr>
                 <a:srgbClr val="000000"/>
               </a:buClr>
-              <a:buFont typeface="Arial"/>
-              <a:buChar char="•"/>
+              <a:buSzPct val="45000"/>
+              <a:buFont typeface="Wingdings" charset="2"/>
+              <a:buChar char=""/>
             </a:pPr>
             <a:r>
-              <a:rPr lang="pt-BR" sz="2000" b="0" u="none" strike="noStrike">
+              <a:rPr lang="pt-BR" sz="3200" b="0" u="none" strike="noStrike">
                 <a:solidFill>
                   <a:schemeClr val="dk1"/>
                 </a:solidFill>
@@ -2636,9 +3024,9 @@
                 <a:uFillTx/>
                 <a:latin typeface="Calibri"/>
               </a:rPr>
-              <a:t>Terceiro nível</a:t>
+              <a:t>3.º nível de tópicos</a:t>
             </a:r>
-            <a:endParaRPr lang="pt-BR" sz="2000" b="0" u="none" strike="noStrike">
+            <a:endParaRPr lang="pt-BR" sz="3200" b="0" u="none" strike="noStrike">
               <a:solidFill>
                 <a:srgbClr val="000000"/>
               </a:solidFill>
@@ -2648,21 +3036,22 @@
             </a:endParaRPr>
           </a:p>
           <a:p>
-            <a:pPr marL="1600200" lvl="3" indent="-228600" defTabSz="914400">
+            <a:pPr marL="1728000" lvl="3" indent="-216000">
               <a:lnSpc>
                 <a:spcPct val="90000"/>
               </a:lnSpc>
               <a:spcBef>
-                <a:spcPts val="499"/>
+                <a:spcPts val="567"/>
               </a:spcBef>
               <a:buClr>
                 <a:srgbClr val="000000"/>
               </a:buClr>
-              <a:buFont typeface="Arial"/>
-              <a:buChar char="•"/>
+              <a:buSzPct val="75000"/>
+              <a:buFont typeface="Symbol" charset="2"/>
+              <a:buChar char=""/>
             </a:pPr>
             <a:r>
-              <a:rPr lang="pt-BR" sz="1800" b="0" u="none" strike="noStrike">
+              <a:rPr lang="pt-BR" sz="3200" b="0" u="none" strike="noStrike">
                 <a:solidFill>
                   <a:schemeClr val="dk1"/>
                 </a:solidFill>
@@ -2670,9 +3059,9 @@
                 <a:uFillTx/>
                 <a:latin typeface="Calibri"/>
               </a:rPr>
-              <a:t>Quarto nível</a:t>
+              <a:t>4.º nível de tópicos</a:t>
             </a:r>
-            <a:endParaRPr lang="pt-BR" sz="1800" b="0" u="none" strike="noStrike">
+            <a:endParaRPr lang="pt-BR" sz="3200" b="0" u="none" strike="noStrike">
               <a:solidFill>
                 <a:srgbClr val="000000"/>
               </a:solidFill>
@@ -2682,21 +3071,22 @@
             </a:endParaRPr>
           </a:p>
           <a:p>
-            <a:pPr marL="2057400" lvl="4" indent="-228600" defTabSz="914400">
+            <a:pPr marL="2160000" lvl="4" indent="-216000">
               <a:lnSpc>
                 <a:spcPct val="90000"/>
               </a:lnSpc>
               <a:spcBef>
-                <a:spcPts val="499"/>
+                <a:spcPts val="283"/>
               </a:spcBef>
               <a:buClr>
                 <a:srgbClr val="000000"/>
               </a:buClr>
-              <a:buFont typeface="Arial"/>
-              <a:buChar char="•"/>
+              <a:buSzPct val="45000"/>
+              <a:buFont typeface="Wingdings" charset="2"/>
+              <a:buChar char=""/>
             </a:pPr>
             <a:r>
-              <a:rPr lang="pt-BR" sz="1800" b="0" u="none" strike="noStrike">
+              <a:rPr lang="pt-BR" sz="3200" b="0" u="none" strike="noStrike">
                 <a:solidFill>
                   <a:schemeClr val="dk1"/>
                 </a:solidFill>
@@ -2704,9 +3094,79 @@
                 <a:uFillTx/>
                 <a:latin typeface="Calibri"/>
               </a:rPr>
-              <a:t>Quinto nível</a:t>
+              <a:t>5.º nível de tópicos</a:t>
             </a:r>
-            <a:endParaRPr lang="pt-BR" sz="1800" b="0" u="none" strike="noStrike">
+            <a:endParaRPr lang="pt-BR" sz="3200" b="0" u="none" strike="noStrike">
+              <a:solidFill>
+                <a:srgbClr val="000000"/>
+              </a:solidFill>
+              <a:effectLst/>
+              <a:uFillTx/>
+              <a:latin typeface="Arial"/>
+            </a:endParaRPr>
+          </a:p>
+          <a:p>
+            <a:pPr marL="2592000" lvl="5" indent="-216000">
+              <a:lnSpc>
+                <a:spcPct val="90000"/>
+              </a:lnSpc>
+              <a:spcBef>
+                <a:spcPts val="283"/>
+              </a:spcBef>
+              <a:buClr>
+                <a:srgbClr val="000000"/>
+              </a:buClr>
+              <a:buSzPct val="45000"/>
+              <a:buFont typeface="Wingdings" charset="2"/>
+              <a:buChar char=""/>
+            </a:pPr>
+            <a:r>
+              <a:rPr lang="pt-BR" sz="3200" b="0" u="none" strike="noStrike">
+                <a:solidFill>
+                  <a:schemeClr val="dk1"/>
+                </a:solidFill>
+                <a:effectLst/>
+                <a:uFillTx/>
+                <a:latin typeface="Calibri"/>
+              </a:rPr>
+              <a:t>6.º nível de tópicos</a:t>
+            </a:r>
+            <a:endParaRPr lang="pt-BR" sz="3200" b="0" u="none" strike="noStrike">
+              <a:solidFill>
+                <a:srgbClr val="000000"/>
+              </a:solidFill>
+              <a:effectLst/>
+              <a:uFillTx/>
+              <a:latin typeface="Arial"/>
+            </a:endParaRPr>
+          </a:p>
+          <a:p>
+            <a:pPr marL="3024000" lvl="6" indent="-216000">
+              <a:lnSpc>
+                <a:spcPct val="90000"/>
+              </a:lnSpc>
+              <a:spcBef>
+                <a:spcPts val="283"/>
+              </a:spcBef>
+              <a:buClr>
+                <a:srgbClr val="000000"/>
+              </a:buClr>
+              <a:buSzPct val="45000"/>
+              <a:buFont typeface="Wingdings" charset="2"/>
+              <a:buChar char=""/>
+            </a:pPr>
+            <a:r>
+              <a:rPr lang="pt-BR" sz="3200" b="0" u="none" strike="noStrike">
+                <a:solidFill>
+                  <a:schemeClr val="dk1"/>
+                </a:solidFill>
+                <a:effectLst/>
+                <a:uFillTx/>
+                <a:latin typeface="Calibri"/>
+              </a:rPr>
+              <a:t>7.º nível de tópicos</a:t>
+            </a:r>
+            <a:endParaRPr lang="pt-BR" sz="3200" b="0" u="none" strike="noStrike">
               <a:solidFill>
                 <a:srgbClr val="000000"/>
               </a:solidFill>
@@ -2719,7 +3179,69 @@
       </p:sp>
       <p:sp>
         <p:nvSpPr>
-          <p:cNvPr id="19" name="PlaceHolder 3"/>
+          <p:cNvPr id="17" name="PlaceHolder 3"/>
+          <p:cNvSpPr>
+            <a:spLocks noGrp="1"/>
+          </p:cNvSpPr>
+          <p:nvPr>
+            <p:ph type="body"/>
+          </p:nvPr>
+        </p:nvSpPr>
+        <p:spPr>
+          <a:xfrm>
+            <a:off x="839880" y="2057400"/>
+            <a:ext cx="3930120" cy="3809520"/>
+          </a:xfrm>
+          <a:prstGeom prst="rect">
+            <a:avLst/>
+          </a:prstGeom>
+          <a:noFill/>
+          <a:ln w="0">
+            <a:noFill/>
+          </a:ln>
+        </p:spPr>
+        <p:txBody>
+          <a:bodyPr lIns="91440" rIns="91440" tIns="45720" bIns="45720" anchor="t">
+            <a:noAutofit/>
+          </a:bodyPr>
+          <a:p>
+            <a:pPr indent="0" defTabSz="914400">
+              <a:lnSpc>
+                <a:spcPct val="90000"/>
+              </a:lnSpc>
+              <a:spcBef>
+                <a:spcPts val="1001"/>
+              </a:spcBef>
+              <a:buNone/>
+              <a:tabLst>
+                <a:tab algn="l" pos="0"/>
+              </a:tabLst>
+            </a:pPr>
+            <a:r>
+              <a:rPr lang="pt-BR" sz="1600" b="0" u="none" strike="noStrike">
+                <a:solidFill>
+                  <a:schemeClr val="dk1"/>
+                </a:solidFill>
+                <a:effectLst/>
+                <a:uFillTx/>
+                <a:latin typeface="Calibri"/>
+              </a:rPr>
+              <a:t>Clique para editar os estilos de texto Mestres</a:t>
+            </a:r>
+            <a:endParaRPr lang="pt-BR" sz="1600" b="0" u="none" strike="noStrike">
+              <a:solidFill>
+                <a:srgbClr val="000000"/>
+              </a:solidFill>
+              <a:effectLst/>
+              <a:uFillTx/>
+              <a:latin typeface="Arial"/>
+            </a:endParaRPr>
+          </a:p>
+        </p:txBody>
+      </p:sp>
+      <p:sp>
+        <p:nvSpPr>
+          <p:cNvPr id="18" name="PlaceHolder 4"/>
           <p:cNvSpPr>
             <a:spLocks noGrp="1"/>
           </p:cNvSpPr>
@@ -2730,7 +3252,7 @@
         <p:spPr>
           <a:xfrm>
             <a:off x="838080" y="6356520"/>
-            <a:ext cx="2741400" cy="363240"/>
+            <a:ext cx="2741040" cy="362880"/>
           </a:xfrm>
           <a:prstGeom prst="rect">
             <a:avLst/>
@@ -2801,7 +3323,7 @@
       </p:sp>
       <p:sp>
         <p:nvSpPr>
-          <p:cNvPr id="20" name="PlaceHolder 4"/>
+          <p:cNvPr id="19" name="PlaceHolder 5"/>
           <p:cNvSpPr>
             <a:spLocks noGrp="1"/>
           </p:cNvSpPr>
@@ -2812,7 +3334,7 @@
         <p:spPr>
           <a:xfrm>
             <a:off x="4038480" y="6356520"/>
-            <a:ext cx="4113000" cy="363240"/>
+            <a:ext cx="4112640" cy="362880"/>
           </a:xfrm>
           <a:prstGeom prst="rect">
             <a:avLst/>
@@ -2879,7 +3401,7 @@
       </p:sp>
       <p:sp>
         <p:nvSpPr>
-          <p:cNvPr id="21" name="PlaceHolder 5"/>
+          <p:cNvPr id="20" name="PlaceHolder 6"/>
           <p:cNvSpPr>
             <a:spLocks noGrp="1"/>
           </p:cNvSpPr>
@@ -2890,7 +3412,7 @@
         <p:spPr>
           <a:xfrm>
             <a:off x="8610480" y="6356520"/>
-            <a:ext cx="2741400" cy="363240"/>
+            <a:ext cx="2741040" cy="362880"/>
           </a:xfrm>
           <a:prstGeom prst="rect">
             <a:avLst/>
@@ -2935,7 +3457,7 @@
                 <a:tab algn="l" pos="0"/>
               </a:tabLst>
             </a:pPr>
-            <a:fld id="{845A41CF-1571-4F77-86E9-3EFEE305924B}" type="slidenum">
+            <a:fld id="{88671D41-3135-4D46-A120-182EA513F9E9}" type="slidenum">
               <a:rPr lang="pt-BR" sz="1200" b="0" u="none" strike="noStrike">
                 <a:solidFill>
                   <a:schemeClr val="dk1">
@@ -2965,14 +3487,14 @@
 </file>
 
 <file path=ppt/slideLayouts/slideLayout5.xml><?xml version="1.0" encoding="utf-8"?>
-<p:sldLayout xmlns:a="http://schemas.openxmlformats.org/drawingml/2006/main" xmlns:p="http://schemas.openxmlformats.org/presentationml/2006/main" xmlns:r="http://schemas.openxmlformats.org/officeDocument/2006/relationships" xmlns:p14="http://schemas.microsoft.com/office/powerpoint/2010/main" xmlns:p15="http://schemas.microsoft.com/office/powerpoint/2012/main" xmlns:mc="http://schemas.openxmlformats.org/markup-compatibility/2006" type="obj" preserve="1">
-  <p:cSld name="Título e Conteúdo">
+<p:sldLayout xmlns:a="http://schemas.openxmlformats.org/drawingml/2006/main" xmlns:p="http://schemas.openxmlformats.org/presentationml/2006/main" xmlns:r="http://schemas.openxmlformats.org/officeDocument/2006/relationships" xmlns:p14="http://schemas.microsoft.com/office/powerpoint/2010/main" xmlns:p15="http://schemas.microsoft.com/office/powerpoint/2012/main" xmlns:mc="http://schemas.openxmlformats.org/markup-compatibility/2006" type="title" preserve="1">
+  <p:cSld name="Slide de Título">
     <p:bg>
       <p:bgPr>
         <a:blipFill rotWithShape="0">
           <a:blip r:embed="rId2"/>
           <a:stretch>
-            <a:fillRect l="-993" r="-993"/>
+            <a:fillRect l="-992" r="-992"/>
           </a:stretch>
         </a:blipFill>
       </p:bgPr>
@@ -2993,7 +3515,7 @@
       </p:grpSpPr>
       <p:sp>
         <p:nvSpPr>
-          <p:cNvPr id="22" name="PlaceHolder 1"/>
+          <p:cNvPr id="21" name="PlaceHolder 1"/>
           <p:cNvSpPr>
             <a:spLocks noGrp="1"/>
           </p:cNvSpPr>
@@ -3003,8 +3525,8 @@
         </p:nvSpPr>
         <p:spPr>
           <a:xfrm>
-            <a:off x="838080" y="365040"/>
-            <a:ext cx="10513800" cy="1323720"/>
+            <a:off x="1523880" y="1122480"/>
+            <a:ext cx="9141840" cy="2385360"/>
           </a:xfrm>
           <a:prstGeom prst="rect">
             <a:avLst/>
@@ -3015,11 +3537,11 @@
           </a:ln>
         </p:spPr>
         <p:txBody>
-          <a:bodyPr lIns="91440" rIns="91440" tIns="45720" bIns="45720" anchor="ctr">
+          <a:bodyPr lIns="91440" rIns="91440" tIns="45720" bIns="45720" anchor="b">
             <a:noAutofit/>
           </a:bodyPr>
           <a:p>
-            <a:pPr indent="0" defTabSz="914400">
+            <a:pPr indent="0" algn="ctr" defTabSz="914400">
               <a:lnSpc>
                 <a:spcPct val="90000"/>
               </a:lnSpc>
@@ -3029,7 +3551,7 @@
               </a:tabLst>
             </a:pPr>
             <a:r>
-              <a:rPr lang="pt-BR" sz="4400" b="0" u="none" strike="noStrike">
+              <a:rPr lang="pt-BR" sz="6000" b="0" u="none" strike="noStrike">
                 <a:solidFill>
                   <a:schemeClr val="dk1"/>
                 </a:solidFill>
@@ -3039,7 +3561,7 @@
               </a:rPr>
               <a:t>Clique para editar o título Mestre</a:t>
             </a:r>
-            <a:endParaRPr lang="pt-BR" sz="4400" b="0" u="none" strike="noStrike">
+            <a:endParaRPr lang="pt-BR" sz="6000" b="0" u="none" strike="noStrike">
               <a:solidFill>
                 <a:srgbClr val="000000"/>
               </a:solidFill>
@@ -3052,206 +3574,7 @@
       </p:sp>
       <p:sp>
         <p:nvSpPr>
-          <p:cNvPr id="23" name="PlaceHolder 2"/>
-          <p:cNvSpPr>
-            <a:spLocks noGrp="1"/>
-          </p:cNvSpPr>
-          <p:nvPr>
-            <p:ph type="body"/>
-          </p:nvPr>
-        </p:nvSpPr>
-        <p:spPr>
-          <a:xfrm>
-            <a:off x="838080" y="1825560"/>
-            <a:ext cx="10513800" cy="4349520"/>
-          </a:xfrm>
-          <a:prstGeom prst="rect">
-            <a:avLst/>
-          </a:prstGeom>
-          <a:noFill/>
-          <a:ln w="0">
-            <a:noFill/>
-          </a:ln>
-        </p:spPr>
-        <p:txBody>
-          <a:bodyPr lIns="91440" rIns="91440" tIns="45720" bIns="45720" anchor="t">
-            <a:noAutofit/>
-          </a:bodyPr>
-          <a:p>
-            <a:pPr marL="228600" indent="-228600" defTabSz="914400">
-              <a:lnSpc>
-                <a:spcPct val="90000"/>
-              </a:lnSpc>
-              <a:spcBef>
-                <a:spcPts val="1001"/>
-              </a:spcBef>
-              <a:buClr>
-                <a:srgbClr val="000000"/>
-              </a:buClr>
-              <a:buFont typeface="Arial"/>
-              <a:buChar char="•"/>
-            </a:pPr>
-            <a:r>
-              <a:rPr lang="pt-BR" sz="2800" b="0" u="none" strike="noStrike">
-                <a:solidFill>
-                  <a:schemeClr val="dk1"/>
-                </a:solidFill>
-                <a:effectLst/>
-                <a:uFillTx/>
-                <a:latin typeface="Calibri"/>
-              </a:rPr>
-              <a:t>Clique para editar os estilos de texto Mestres</a:t>
-            </a:r>
-            <a:endParaRPr lang="pt-BR" sz="2800" b="0" u="none" strike="noStrike">
-              <a:solidFill>
-                <a:srgbClr val="000000"/>
-              </a:solidFill>
-              <a:effectLst/>
-              <a:uFillTx/>
-              <a:latin typeface="Arial"/>
-            </a:endParaRPr>
-          </a:p>
-          <a:p>
-            <a:pPr marL="685800" lvl="1" indent="-228600" defTabSz="914400">
-              <a:lnSpc>
-                <a:spcPct val="90000"/>
-              </a:lnSpc>
-              <a:spcBef>
-                <a:spcPts val="499"/>
-              </a:spcBef>
-              <a:buClr>
-                <a:srgbClr val="000000"/>
-              </a:buClr>
-              <a:buFont typeface="Arial"/>
-              <a:buChar char="•"/>
-            </a:pPr>
-            <a:r>
-              <a:rPr lang="pt-BR" sz="2400" b="0" u="none" strike="noStrike">
-                <a:solidFill>
-                  <a:schemeClr val="dk1"/>
-                </a:solidFill>
-                <a:effectLst/>
-                <a:uFillTx/>
-                <a:latin typeface="Calibri"/>
-              </a:rPr>
-              <a:t>Segundo nível</a:t>
-            </a:r>
-            <a:endParaRPr lang="pt-BR" sz="2400" b="0" u="none" strike="noStrike">
-              <a:solidFill>
-                <a:srgbClr val="000000"/>
-              </a:solidFill>
-              <a:effectLst/>
-              <a:uFillTx/>
-              <a:latin typeface="Arial"/>
-            </a:endParaRPr>
-          </a:p>
-          <a:p>
-            <a:pPr marL="1143000" lvl="2" indent="-228600" defTabSz="914400">
-              <a:lnSpc>
-                <a:spcPct val="90000"/>
-              </a:lnSpc>
-              <a:spcBef>
-                <a:spcPts val="499"/>
-              </a:spcBef>
-              <a:buClr>
-                <a:srgbClr val="000000"/>
-              </a:buClr>
-              <a:buFont typeface="Arial"/>
-              <a:buChar char="•"/>
-            </a:pPr>
-            <a:r>
-              <a:rPr lang="pt-BR" sz="2000" b="0" u="none" strike="noStrike">
-                <a:solidFill>
-                  <a:schemeClr val="dk1"/>
-                </a:solidFill>
-                <a:effectLst/>
-                <a:uFillTx/>
-                <a:latin typeface="Calibri"/>
-              </a:rPr>
-              <a:t>Terceiro nível</a:t>
-            </a:r>
-            <a:endParaRPr lang="pt-BR" sz="2000" b="0" u="none" strike="noStrike">
-              <a:solidFill>
-                <a:srgbClr val="000000"/>
-              </a:solidFill>
-              <a:effectLst/>
-              <a:uFillTx/>
-              <a:latin typeface="Arial"/>
-            </a:endParaRPr>
-          </a:p>
-          <a:p>
-            <a:pPr marL="1600200" lvl="3" indent="-228600" defTabSz="914400">
-              <a:lnSpc>
-                <a:spcPct val="90000"/>
-              </a:lnSpc>
-              <a:spcBef>
-                <a:spcPts val="499"/>
-              </a:spcBef>
-              <a:buClr>
-                <a:srgbClr val="000000"/>
-              </a:buClr>
-              <a:buFont typeface="Arial"/>
-              <a:buChar char="•"/>
-            </a:pPr>
-            <a:r>
-              <a:rPr lang="pt-BR" sz="1800" b="0" u="none" strike="noStrike">
-                <a:solidFill>
-                  <a:schemeClr val="dk1"/>
-                </a:solidFill>
-                <a:effectLst/>
-                <a:uFillTx/>
-                <a:latin typeface="Calibri"/>
-              </a:rPr>
-              <a:t>Quarto nível</a:t>
-            </a:r>
-            <a:endParaRPr lang="pt-BR" sz="1800" b="0" u="none" strike="noStrike">
-              <a:solidFill>
-                <a:srgbClr val="000000"/>
-              </a:solidFill>
-              <a:effectLst/>
-              <a:uFillTx/>
-              <a:latin typeface="Arial"/>
-            </a:endParaRPr>
-          </a:p>
-          <a:p>
-            <a:pPr marL="2057400" lvl="4" indent="-228600" defTabSz="914400">
-              <a:lnSpc>
-                <a:spcPct val="90000"/>
-              </a:lnSpc>
-              <a:spcBef>
-                <a:spcPts val="499"/>
-              </a:spcBef>
-              <a:buClr>
-                <a:srgbClr val="000000"/>
-              </a:buClr>
-              <a:buFont typeface="Arial"/>
-              <a:buChar char="•"/>
-            </a:pPr>
-            <a:r>
-              <a:rPr lang="pt-BR" sz="1800" b="0" u="none" strike="noStrike">
-                <a:solidFill>
-                  <a:schemeClr val="dk1"/>
-                </a:solidFill>
-                <a:effectLst/>
-                <a:uFillTx/>
-                <a:latin typeface="Calibri"/>
-              </a:rPr>
-              <a:t>Quinto nível</a:t>
-            </a:r>
-            <a:endParaRPr lang="pt-BR" sz="1800" b="0" u="none" strike="noStrike">
-              <a:solidFill>
-                <a:srgbClr val="000000"/>
-              </a:solidFill>
-              <a:effectLst/>
-              <a:uFillTx/>
-              <a:latin typeface="Arial"/>
-            </a:endParaRPr>
-          </a:p>
-        </p:txBody>
-      </p:sp>
-      <p:sp>
-        <p:nvSpPr>
-          <p:cNvPr id="24" name="PlaceHolder 3"/>
+          <p:cNvPr id="22" name="PlaceHolder 2"/>
           <p:cNvSpPr>
             <a:spLocks noGrp="1"/>
           </p:cNvSpPr>
@@ -3262,7 +3585,7 @@
         <p:spPr>
           <a:xfrm>
             <a:off x="838080" y="6356520"/>
-            <a:ext cx="2741400" cy="363240"/>
+            <a:ext cx="2741040" cy="362880"/>
           </a:xfrm>
           <a:prstGeom prst="rect">
             <a:avLst/>
@@ -3333,7 +3656,7 @@
       </p:sp>
       <p:sp>
         <p:nvSpPr>
-          <p:cNvPr id="25" name="PlaceHolder 4"/>
+          <p:cNvPr id="23" name="PlaceHolder 3"/>
           <p:cNvSpPr>
             <a:spLocks noGrp="1"/>
           </p:cNvSpPr>
@@ -3344,7 +3667,7 @@
         <p:spPr>
           <a:xfrm>
             <a:off x="4038480" y="6356520"/>
-            <a:ext cx="4113000" cy="363240"/>
+            <a:ext cx="4112640" cy="362880"/>
           </a:xfrm>
           <a:prstGeom prst="rect">
             <a:avLst/>
@@ -3411,7 +3734,7 @@
       </p:sp>
       <p:sp>
         <p:nvSpPr>
-          <p:cNvPr id="26" name="PlaceHolder 5"/>
+          <p:cNvPr id="24" name="PlaceHolder 4"/>
           <p:cNvSpPr>
             <a:spLocks noGrp="1"/>
           </p:cNvSpPr>
@@ -3422,7 +3745,7 @@
         <p:spPr>
           <a:xfrm>
             <a:off x="8610480" y="6356520"/>
-            <a:ext cx="2741400" cy="363240"/>
+            <a:ext cx="2741040" cy="362880"/>
           </a:xfrm>
           <a:prstGeom prst="rect">
             <a:avLst/>
@@ -3467,7 +3790,7 @@
                 <a:tab algn="l" pos="0"/>
               </a:tabLst>
             </a:pPr>
-            <a:fld id="{EEC5967B-1327-4E02-BE89-F91156D6C7F8}" type="slidenum">
+            <a:fld id="{3FA7B94E-2F54-4D4B-AA2F-8A2EFFF0FB6B}" type="slidenum">
               <a:rPr lang="pt-BR" sz="1200" b="0" u="none" strike="noStrike">
                 <a:solidFill>
                   <a:schemeClr val="dk1">
@@ -3497,14 +3820,14 @@
 </file>
 
 <file path=ppt/slideLayouts/slideLayout6.xml><?xml version="1.0" encoding="utf-8"?>
-<p:sldLayout xmlns:a="http://schemas.openxmlformats.org/drawingml/2006/main" xmlns:p="http://schemas.openxmlformats.org/presentationml/2006/main" xmlns:r="http://schemas.openxmlformats.org/officeDocument/2006/relationships" xmlns:p14="http://schemas.microsoft.com/office/powerpoint/2010/main" xmlns:p15="http://schemas.microsoft.com/office/powerpoint/2012/main" xmlns:mc="http://schemas.openxmlformats.org/markup-compatibility/2006" type="blank" preserve="1">
-  <p:cSld name="Cabeçalho da Seção">
+<p:sldLayout xmlns:a="http://schemas.openxmlformats.org/drawingml/2006/main" xmlns:p="http://schemas.openxmlformats.org/presentationml/2006/main" xmlns:r="http://schemas.openxmlformats.org/officeDocument/2006/relationships" xmlns:p14="http://schemas.microsoft.com/office/powerpoint/2010/main" xmlns:p15="http://schemas.microsoft.com/office/powerpoint/2012/main" xmlns:mc="http://schemas.openxmlformats.org/markup-compatibility/2006" type="vertTx" preserve="1">
+  <p:cSld name="Título e Texto Vertical">
     <p:bg>
       <p:bgPr>
         <a:blipFill rotWithShape="0">
           <a:blip r:embed="rId2"/>
           <a:stretch>
-            <a:fillRect l="-993" r="-993"/>
+            <a:fillRect l="-992" r="-992"/>
           </a:stretch>
         </a:blipFill>
       </p:bgPr>
@@ -3525,7 +3848,7 @@
       </p:grpSpPr>
       <p:sp>
         <p:nvSpPr>
-          <p:cNvPr id="27" name="PlaceHolder 1"/>
+          <p:cNvPr id="25" name="PlaceHolder 1"/>
           <p:cNvSpPr>
             <a:spLocks noGrp="1"/>
           </p:cNvSpPr>
@@ -3535,8 +3858,8 @@
         </p:nvSpPr>
         <p:spPr>
           <a:xfrm>
-            <a:off x="831960" y="1709640"/>
-            <a:ext cx="10513800" cy="2850840"/>
+            <a:off x="838080" y="365040"/>
+            <a:ext cx="10513440" cy="1323360"/>
           </a:xfrm>
           <a:prstGeom prst="rect">
             <a:avLst/>
@@ -3547,7 +3870,7 @@
           </a:ln>
         </p:spPr>
         <p:txBody>
-          <a:bodyPr lIns="91440" rIns="91440" tIns="45720" bIns="45720" anchor="b">
+          <a:bodyPr lIns="91440" rIns="91440" tIns="45720" bIns="45720" anchor="ctr">
             <a:noAutofit/>
           </a:bodyPr>
           <a:p>
@@ -3561,7 +3884,7 @@
               </a:tabLst>
             </a:pPr>
             <a:r>
-              <a:rPr lang="pt-BR" sz="6000" b="0" u="none" strike="noStrike">
+              <a:rPr lang="pt-BR" sz="4400" b="0" u="none" strike="noStrike">
                 <a:solidFill>
                   <a:schemeClr val="dk1"/>
                 </a:solidFill>
@@ -3571,7 +3894,7 @@
               </a:rPr>
               <a:t>Clique para editar o título Mestre</a:t>
             </a:r>
-            <a:endParaRPr lang="pt-BR" sz="6000" b="0" u="none" strike="noStrike">
+            <a:endParaRPr lang="pt-BR" sz="4400" b="0" u="none" strike="noStrike">
               <a:solidFill>
                 <a:srgbClr val="000000"/>
               </a:solidFill>
@@ -3584,7 +3907,7 @@
       </p:sp>
       <p:sp>
         <p:nvSpPr>
-          <p:cNvPr id="28" name="PlaceHolder 2"/>
+          <p:cNvPr id="26" name="PlaceHolder 2"/>
           <p:cNvSpPr>
             <a:spLocks noGrp="1"/>
           </p:cNvSpPr>
@@ -3594,8 +3917,8 @@
         </p:nvSpPr>
         <p:spPr>
           <a:xfrm>
-            <a:off x="831960" y="4589640"/>
-            <a:ext cx="10513800" cy="1498320"/>
+            <a:off x="838080" y="1825560"/>
+            <a:ext cx="10513440" cy="4349160"/>
           </a:xfrm>
           <a:prstGeom prst="rect">
             <a:avLst/>
@@ -3606,36 +3929,171 @@
           </a:ln>
         </p:spPr>
         <p:txBody>
-          <a:bodyPr lIns="91440" rIns="91440" tIns="45720" bIns="45720" anchor="t">
+          <a:bodyPr lIns="91440" rIns="91440" tIns="45720" bIns="45720" anchor="t" vert="eaVert">
             <a:noAutofit/>
           </a:bodyPr>
           <a:p>
-            <a:pPr indent="0" defTabSz="914400">
+            <a:pPr marL="228600" indent="-228600" defTabSz="914400">
               <a:lnSpc>
                 <a:spcPct val="90000"/>
               </a:lnSpc>
               <a:spcBef>
                 <a:spcPts val="1001"/>
               </a:spcBef>
-              <a:buNone/>
-              <a:tabLst>
-                <a:tab algn="l" pos="0"/>
-              </a:tabLst>
+              <a:buClr>
+                <a:srgbClr val="000000"/>
+              </a:buClr>
+              <a:buFont typeface="Arial"/>
+              <a:buChar char="•"/>
+            </a:pPr>
+            <a:r>
+              <a:rPr lang="pt-BR" sz="2800" b="0" u="none" strike="noStrike">
+                <a:solidFill>
+                  <a:schemeClr val="dk1"/>
+                </a:solidFill>
+                <a:effectLst/>
+                <a:uFillTx/>
+                <a:latin typeface="Calibri"/>
+              </a:rPr>
+              <a:t>Clique para editar os estilos de texto Mestres</a:t>
+            </a:r>
+            <a:endParaRPr lang="pt-BR" sz="2800" b="0" u="none" strike="noStrike">
+              <a:solidFill>
+                <a:srgbClr val="000000"/>
+              </a:solidFill>
+              <a:effectLst/>
+              <a:uFillTx/>
+              <a:latin typeface="Arial"/>
+            </a:endParaRPr>
+          </a:p>
+          <a:p>
+            <a:pPr marL="685800" lvl="1" indent="-228600" defTabSz="914400">
+              <a:lnSpc>
+                <a:spcPct val="90000"/>
+              </a:lnSpc>
+              <a:spcBef>
+                <a:spcPts val="499"/>
+              </a:spcBef>
+              <a:buClr>
+                <a:srgbClr val="000000"/>
+              </a:buClr>
+              <a:buFont typeface="Arial"/>
+              <a:buChar char="•"/>
             </a:pPr>
             <a:r>
               <a:rPr lang="pt-BR" sz="2400" b="0" u="none" strike="noStrike">
                 <a:solidFill>
-                  <a:schemeClr val="dk1">
-                    <a:tint val="75000"/>
-                  </a:schemeClr>
+                  <a:schemeClr val="dk1"/>
                 </a:solidFill>
                 <a:effectLst/>
                 <a:uFillTx/>
                 <a:latin typeface="Calibri"/>
               </a:rPr>
-              <a:t>Clique para editar os estilos de texto Mestres</a:t>
+              <a:t>Segundo nível</a:t>
             </a:r>
             <a:endParaRPr lang="pt-BR" sz="2400" b="0" u="none" strike="noStrike">
+              <a:solidFill>
+                <a:srgbClr val="000000"/>
+              </a:solidFill>
+              <a:effectLst/>
+              <a:uFillTx/>
+              <a:latin typeface="Arial"/>
+            </a:endParaRPr>
+          </a:p>
+          <a:p>
+            <a:pPr marL="1143000" lvl="2" indent="-228600" defTabSz="914400">
+              <a:lnSpc>
+                <a:spcPct val="90000"/>
+              </a:lnSpc>
+              <a:spcBef>
+                <a:spcPts val="499"/>
+              </a:spcBef>
+              <a:buClr>
+                <a:srgbClr val="000000"/>
+              </a:buClr>
+              <a:buFont typeface="Arial"/>
+              <a:buChar char="•"/>
+            </a:pPr>
+            <a:r>
+              <a:rPr lang="pt-BR" sz="2000" b="0" u="none" strike="noStrike">
+                <a:solidFill>
+                  <a:schemeClr val="dk1"/>
+                </a:solidFill>
+                <a:effectLst/>
+                <a:uFillTx/>
+                <a:latin typeface="Calibri"/>
+              </a:rPr>
+              <a:t>Terceiro nível</a:t>
+            </a:r>
+            <a:endParaRPr lang="pt-BR" sz="2000" b="0" u="none" strike="noStrike">
+              <a:solidFill>
+                <a:srgbClr val="000000"/>
+              </a:solidFill>
+              <a:effectLst/>
+              <a:uFillTx/>
+              <a:latin typeface="Arial"/>
+            </a:endParaRPr>
+          </a:p>
+          <a:p>
+            <a:pPr marL="1600200" lvl="3" indent="-228600" defTabSz="914400">
+              <a:lnSpc>
+                <a:spcPct val="90000"/>
+              </a:lnSpc>
+              <a:spcBef>
+                <a:spcPts val="499"/>
+              </a:spcBef>
+              <a:buClr>
+                <a:srgbClr val="000000"/>
+              </a:buClr>
+              <a:buFont typeface="Arial"/>
+              <a:buChar char="•"/>
+            </a:pPr>
+            <a:r>
+              <a:rPr lang="pt-BR" sz="1800" b="0" u="none" strike="noStrike">
+                <a:solidFill>
+                  <a:schemeClr val="dk1"/>
+                </a:solidFill>
+                <a:effectLst/>
+                <a:uFillTx/>
+                <a:latin typeface="Calibri"/>
+              </a:rPr>
+              <a:t>Quarto nível</a:t>
+            </a:r>
+            <a:endParaRPr lang="pt-BR" sz="1800" b="0" u="none" strike="noStrike">
+              <a:solidFill>
+                <a:srgbClr val="000000"/>
+              </a:solidFill>
+              <a:effectLst/>
+              <a:uFillTx/>
+              <a:latin typeface="Arial"/>
+            </a:endParaRPr>
+          </a:p>
+          <a:p>
+            <a:pPr marL="2057400" lvl="4" indent="-228600" defTabSz="914400">
+              <a:lnSpc>
+                <a:spcPct val="90000"/>
+              </a:lnSpc>
+              <a:spcBef>
+                <a:spcPts val="499"/>
+              </a:spcBef>
+              <a:buClr>
+                <a:srgbClr val="000000"/>
+              </a:buClr>
+              <a:buFont typeface="Arial"/>
+              <a:buChar char="•"/>
+            </a:pPr>
+            <a:r>
+              <a:rPr lang="pt-BR" sz="1800" b="0" u="none" strike="noStrike">
+                <a:solidFill>
+                  <a:schemeClr val="dk1"/>
+                </a:solidFill>
+                <a:effectLst/>
+                <a:uFillTx/>
+                <a:latin typeface="Calibri"/>
+              </a:rPr>
+              <a:t>Quinto nível</a:t>
+            </a:r>
+            <a:endParaRPr lang="pt-BR" sz="1800" b="0" u="none" strike="noStrike">
               <a:solidFill>
                 <a:srgbClr val="000000"/>
               </a:solidFill>
@@ -3648,7 +4106,7 @@
       </p:sp>
       <p:sp>
         <p:nvSpPr>
-          <p:cNvPr id="29" name="PlaceHolder 3"/>
+          <p:cNvPr id="27" name="PlaceHolder 3"/>
           <p:cNvSpPr>
             <a:spLocks noGrp="1"/>
           </p:cNvSpPr>
@@ -3659,7 +4117,7 @@
         <p:spPr>
           <a:xfrm>
             <a:off x="838080" y="6356520"/>
-            <a:ext cx="2741400" cy="363240"/>
+            <a:ext cx="2741040" cy="362880"/>
           </a:xfrm>
           <a:prstGeom prst="rect">
             <a:avLst/>
@@ -3730,7 +4188,7 @@
       </p:sp>
       <p:sp>
         <p:nvSpPr>
-          <p:cNvPr id="30" name="PlaceHolder 4"/>
+          <p:cNvPr id="28" name="PlaceHolder 4"/>
           <p:cNvSpPr>
             <a:spLocks noGrp="1"/>
           </p:cNvSpPr>
@@ -3741,7 +4199,7 @@
         <p:spPr>
           <a:xfrm>
             <a:off x="4038480" y="6356520"/>
-            <a:ext cx="4113000" cy="363240"/>
+            <a:ext cx="4112640" cy="362880"/>
           </a:xfrm>
           <a:prstGeom prst="rect">
             <a:avLst/>
@@ -3808,7 +4266,7 @@
       </p:sp>
       <p:sp>
         <p:nvSpPr>
-          <p:cNvPr id="31" name="PlaceHolder 5"/>
+          <p:cNvPr id="29" name="PlaceHolder 5"/>
           <p:cNvSpPr>
             <a:spLocks noGrp="1"/>
           </p:cNvSpPr>
@@ -3819,7 +4277,7 @@
         <p:spPr>
           <a:xfrm>
             <a:off x="8610480" y="6356520"/>
-            <a:ext cx="2741400" cy="363240"/>
+            <a:ext cx="2741040" cy="362880"/>
           </a:xfrm>
           <a:prstGeom prst="rect">
             <a:avLst/>
@@ -3864,7 +4322,7 @@
                 <a:tab algn="l" pos="0"/>
               </a:tabLst>
             </a:pPr>
-            <a:fld id="{B2544E9B-F28E-4B0E-9EE0-CC1C7C6A7923}" type="slidenum">
+            <a:fld id="{F4345646-E3F5-4A48-8F37-5FDCF2440F9C}" type="slidenum">
               <a:rPr lang="pt-BR" sz="1200" b="0" u="none" strike="noStrike">
                 <a:solidFill>
                   <a:schemeClr val="dk1">
@@ -3894,14 +4352,14 @@
 </file>
 
 <file path=ppt/slideLayouts/slideLayout7.xml><?xml version="1.0" encoding="utf-8"?>
-<p:sldLayout xmlns:a="http://schemas.openxmlformats.org/drawingml/2006/main" xmlns:p="http://schemas.openxmlformats.org/presentationml/2006/main" xmlns:r="http://schemas.openxmlformats.org/officeDocument/2006/relationships" xmlns:p14="http://schemas.microsoft.com/office/powerpoint/2010/main" xmlns:p15="http://schemas.microsoft.com/office/powerpoint/2012/main" xmlns:mc="http://schemas.openxmlformats.org/markup-compatibility/2006" type="twoObj" preserve="1">
-  <p:cSld name="Duas Partes de Conteúdo">
+<p:sldLayout xmlns:a="http://schemas.openxmlformats.org/drawingml/2006/main" xmlns:p="http://schemas.openxmlformats.org/presentationml/2006/main" xmlns:r="http://schemas.openxmlformats.org/officeDocument/2006/relationships" xmlns:p14="http://schemas.microsoft.com/office/powerpoint/2010/main" xmlns:p15="http://schemas.microsoft.com/office/powerpoint/2012/main" xmlns:mc="http://schemas.openxmlformats.org/markup-compatibility/2006" type="vertTitleAndTx" preserve="1">
+  <p:cSld name="Texto e Título Vertical">
     <p:bg>
       <p:bgPr>
         <a:blipFill rotWithShape="0">
           <a:blip r:embed="rId2"/>
           <a:stretch>
-            <a:fillRect l="-993" r="-993"/>
+            <a:fillRect l="-992" r="-992"/>
           </a:stretch>
         </a:blipFill>
       </p:bgPr>
@@ -3922,7 +4380,7 @@
       </p:grpSpPr>
       <p:sp>
         <p:nvSpPr>
-          <p:cNvPr id="32" name="PlaceHolder 1"/>
+          <p:cNvPr id="30" name="PlaceHolder 1"/>
           <p:cNvSpPr>
             <a:spLocks noGrp="1"/>
           </p:cNvSpPr>
@@ -3932,8 +4390,8 @@
         </p:nvSpPr>
         <p:spPr>
           <a:xfrm>
-            <a:off x="838080" y="365040"/>
-            <a:ext cx="10513800" cy="1323720"/>
+            <a:off x="8724960" y="365040"/>
+            <a:ext cx="2626920" cy="5809680"/>
           </a:xfrm>
           <a:prstGeom prst="rect">
             <a:avLst/>
@@ -3944,7 +4402,7 @@
           </a:ln>
         </p:spPr>
         <p:txBody>
-          <a:bodyPr lIns="91440" rIns="91440" tIns="45720" bIns="45720" anchor="ctr">
+          <a:bodyPr lIns="91440" rIns="91440" tIns="45720" bIns="45720" anchor="ctr" vert="eaVert">
             <a:noAutofit/>
           </a:bodyPr>
           <a:p>
@@ -3981,7 +4439,7 @@
       </p:sp>
       <p:sp>
         <p:nvSpPr>
-          <p:cNvPr id="33" name="PlaceHolder 2"/>
+          <p:cNvPr id="31" name="PlaceHolder 2"/>
           <p:cNvSpPr>
             <a:spLocks noGrp="1"/>
           </p:cNvSpPr>
@@ -3991,8 +4449,8 @@
         </p:nvSpPr>
         <p:spPr>
           <a:xfrm>
-            <a:off x="838080" y="1825560"/>
-            <a:ext cx="5179680" cy="4349520"/>
+            <a:off x="838080" y="365040"/>
+            <a:ext cx="7732080" cy="5809680"/>
           </a:xfrm>
           <a:prstGeom prst="rect">
             <a:avLst/>
@@ -4003,7 +4461,7 @@
           </a:ln>
         </p:spPr>
         <p:txBody>
-          <a:bodyPr lIns="91440" rIns="91440" tIns="45720" bIns="45720" anchor="t">
+          <a:bodyPr lIns="91440" rIns="91440" tIns="45720" bIns="45720" anchor="t" vert="eaVert">
             <a:noAutofit/>
           </a:bodyPr>
           <a:p>
@@ -4180,206 +4638,7 @@
       </p:sp>
       <p:sp>
         <p:nvSpPr>
-          <p:cNvPr id="34" name="PlaceHolder 3"/>
-          <p:cNvSpPr>
-            <a:spLocks noGrp="1"/>
-          </p:cNvSpPr>
-          <p:nvPr>
-            <p:ph type="body"/>
-          </p:nvPr>
-        </p:nvSpPr>
-        <p:spPr>
-          <a:xfrm>
-            <a:off x="6172200" y="1825560"/>
-            <a:ext cx="5179680" cy="4349520"/>
-          </a:xfrm>
-          <a:prstGeom prst="rect">
-            <a:avLst/>
-          </a:prstGeom>
-          <a:noFill/>
-          <a:ln w="0">
-            <a:noFill/>
-          </a:ln>
-        </p:spPr>
-        <p:txBody>
-          <a:bodyPr lIns="91440" rIns="91440" tIns="45720" bIns="45720" anchor="t">
-            <a:noAutofit/>
-          </a:bodyPr>
-          <a:p>
-            <a:pPr marL="228600" indent="-228600" defTabSz="914400">
-              <a:lnSpc>
-                <a:spcPct val="90000"/>
-              </a:lnSpc>
-              <a:spcBef>
-                <a:spcPts val="1001"/>
-              </a:spcBef>
-              <a:buClr>
-                <a:srgbClr val="000000"/>
-              </a:buClr>
-              <a:buFont typeface="Arial"/>
-              <a:buChar char="•"/>
-            </a:pPr>
-            <a:r>
-              <a:rPr lang="pt-BR" sz="2800" b="0" u="none" strike="noStrike">
-                <a:solidFill>
-                  <a:schemeClr val="dk1"/>
-                </a:solidFill>
-                <a:effectLst/>
-                <a:uFillTx/>
-                <a:latin typeface="Calibri"/>
-              </a:rPr>
-              <a:t>Clique para editar os estilos de texto Mestres</a:t>
-            </a:r>
-            <a:endParaRPr lang="pt-BR" sz="2800" b="0" u="none" strike="noStrike">
-              <a:solidFill>
-                <a:srgbClr val="000000"/>
-              </a:solidFill>
-              <a:effectLst/>
-              <a:uFillTx/>
-              <a:latin typeface="Arial"/>
-            </a:endParaRPr>
-          </a:p>
-          <a:p>
-            <a:pPr marL="685800" lvl="1" indent="-228600" defTabSz="914400">
-              <a:lnSpc>
-                <a:spcPct val="90000"/>
-              </a:lnSpc>
-              <a:spcBef>
-                <a:spcPts val="499"/>
-              </a:spcBef>
-              <a:buClr>
-                <a:srgbClr val="000000"/>
-              </a:buClr>
-              <a:buFont typeface="Arial"/>
-              <a:buChar char="•"/>
-            </a:pPr>
-            <a:r>
-              <a:rPr lang="pt-BR" sz="2400" b="0" u="none" strike="noStrike">
-                <a:solidFill>
-                  <a:schemeClr val="dk1"/>
-                </a:solidFill>
-                <a:effectLst/>
-                <a:uFillTx/>
-                <a:latin typeface="Calibri"/>
-              </a:rPr>
-              <a:t>Segundo nível</a:t>
-            </a:r>
-            <a:endParaRPr lang="pt-BR" sz="2400" b="0" u="none" strike="noStrike">
-              <a:solidFill>
-                <a:srgbClr val="000000"/>
-              </a:solidFill>
-              <a:effectLst/>
-              <a:uFillTx/>
-              <a:latin typeface="Arial"/>
-            </a:endParaRPr>
-          </a:p>
-          <a:p>
-            <a:pPr marL="1143000" lvl="2" indent="-228600" defTabSz="914400">
-              <a:lnSpc>
-                <a:spcPct val="90000"/>
-              </a:lnSpc>
-              <a:spcBef>
-                <a:spcPts val="499"/>
-              </a:spcBef>
-              <a:buClr>
-                <a:srgbClr val="000000"/>
-              </a:buClr>
-              <a:buFont typeface="Arial"/>
-              <a:buChar char="•"/>
-            </a:pPr>
-            <a:r>
-              <a:rPr lang="pt-BR" sz="2000" b="0" u="none" strike="noStrike">
-                <a:solidFill>
-                  <a:schemeClr val="dk1"/>
-                </a:solidFill>
-                <a:effectLst/>
-                <a:uFillTx/>
-                <a:latin typeface="Calibri"/>
-              </a:rPr>
-              <a:t>Terceiro nível</a:t>
-            </a:r>
-            <a:endParaRPr lang="pt-BR" sz="2000" b="0" u="none" strike="noStrike">
-              <a:solidFill>
-                <a:srgbClr val="000000"/>
-              </a:solidFill>
-              <a:effectLst/>
-              <a:uFillTx/>
-              <a:latin typeface="Arial"/>
-            </a:endParaRPr>
-          </a:p>
-          <a:p>
-            <a:pPr marL="1600200" lvl="3" indent="-228600" defTabSz="914400">
-              <a:lnSpc>
-                <a:spcPct val="90000"/>
-              </a:lnSpc>
-              <a:spcBef>
-                <a:spcPts val="499"/>
-              </a:spcBef>
-              <a:buClr>
-                <a:srgbClr val="000000"/>
-              </a:buClr>
-              <a:buFont typeface="Arial"/>
-              <a:buChar char="•"/>
-            </a:pPr>
-            <a:r>
-              <a:rPr lang="pt-BR" sz="1800" b="0" u="none" strike="noStrike">
-                <a:solidFill>
-                  <a:schemeClr val="dk1"/>
-                </a:solidFill>
-                <a:effectLst/>
-                <a:uFillTx/>
-                <a:latin typeface="Calibri"/>
-              </a:rPr>
-              <a:t>Quarto nível</a:t>
-            </a:r>
-            <a:endParaRPr lang="pt-BR" sz="1800" b="0" u="none" strike="noStrike">
-              <a:solidFill>
-                <a:srgbClr val="000000"/>
-              </a:solidFill>
-              <a:effectLst/>
-              <a:uFillTx/>
-              <a:latin typeface="Arial"/>
-            </a:endParaRPr>
-          </a:p>
-          <a:p>
-            <a:pPr marL="2057400" lvl="4" indent="-228600" defTabSz="914400">
-              <a:lnSpc>
-                <a:spcPct val="90000"/>
-              </a:lnSpc>
-              <a:spcBef>
-                <a:spcPts val="499"/>
-              </a:spcBef>
-              <a:buClr>
-                <a:srgbClr val="000000"/>
-              </a:buClr>
-              <a:buFont typeface="Arial"/>
-              <a:buChar char="•"/>
-            </a:pPr>
-            <a:r>
-              <a:rPr lang="pt-BR" sz="1800" b="0" u="none" strike="noStrike">
-                <a:solidFill>
-                  <a:schemeClr val="dk1"/>
-                </a:solidFill>
-                <a:effectLst/>
-                <a:uFillTx/>
-                <a:latin typeface="Calibri"/>
-              </a:rPr>
-              <a:t>Quinto nível</a:t>
-            </a:r>
-            <a:endParaRPr lang="pt-BR" sz="1800" b="0" u="none" strike="noStrike">
-              <a:solidFill>
-                <a:srgbClr val="000000"/>
-              </a:solidFill>
-              <a:effectLst/>
-              <a:uFillTx/>
-              <a:latin typeface="Arial"/>
-            </a:endParaRPr>
-          </a:p>
-        </p:txBody>
-      </p:sp>
-      <p:sp>
-        <p:nvSpPr>
-          <p:cNvPr id="35" name="PlaceHolder 4"/>
+          <p:cNvPr id="32" name="PlaceHolder 3"/>
           <p:cNvSpPr>
             <a:spLocks noGrp="1"/>
           </p:cNvSpPr>
@@ -4390,7 +4649,7 @@
         <p:spPr>
           <a:xfrm>
             <a:off x="838080" y="6356520"/>
-            <a:ext cx="2741400" cy="363240"/>
+            <a:ext cx="2741040" cy="362880"/>
           </a:xfrm>
           <a:prstGeom prst="rect">
             <a:avLst/>
@@ -4461,7 +4720,7 @@
       </p:sp>
       <p:sp>
         <p:nvSpPr>
-          <p:cNvPr id="36" name="PlaceHolder 5"/>
+          <p:cNvPr id="33" name="PlaceHolder 4"/>
           <p:cNvSpPr>
             <a:spLocks noGrp="1"/>
           </p:cNvSpPr>
@@ -4472,7 +4731,7 @@
         <p:spPr>
           <a:xfrm>
             <a:off x="4038480" y="6356520"/>
-            <a:ext cx="4113000" cy="363240"/>
+            <a:ext cx="4112640" cy="362880"/>
           </a:xfrm>
           <a:prstGeom prst="rect">
             <a:avLst/>
@@ -4539,7 +4798,7 @@
       </p:sp>
       <p:sp>
         <p:nvSpPr>
-          <p:cNvPr id="37" name="PlaceHolder 6"/>
+          <p:cNvPr id="34" name="PlaceHolder 5"/>
           <p:cNvSpPr>
             <a:spLocks noGrp="1"/>
           </p:cNvSpPr>
@@ -4550,7 +4809,7 @@
         <p:spPr>
           <a:xfrm>
             <a:off x="8610480" y="6356520"/>
-            <a:ext cx="2741400" cy="363240"/>
+            <a:ext cx="2741040" cy="362880"/>
           </a:xfrm>
           <a:prstGeom prst="rect">
             <a:avLst/>
@@ -4595,7 +4854,7 @@
                 <a:tab algn="l" pos="0"/>
               </a:tabLst>
             </a:pPr>
-            <a:fld id="{EA4D7298-D381-4580-93ED-28692FE9CC1A}" type="slidenum">
+            <a:fld id="{608EB4CD-1EA1-4C96-95A6-D5B68E0CFBE1}" type="slidenum">
               <a:rPr lang="pt-BR" sz="1200" b="0" u="none" strike="noStrike">
                 <a:solidFill>
                   <a:schemeClr val="dk1">
@@ -4625,14 +4884,14 @@
 </file>
 
 <file path=ppt/slideLayouts/slideLayout8.xml><?xml version="1.0" encoding="utf-8"?>
-<p:sldLayout xmlns:a="http://schemas.openxmlformats.org/drawingml/2006/main" xmlns:p="http://schemas.openxmlformats.org/presentationml/2006/main" xmlns:r="http://schemas.openxmlformats.org/officeDocument/2006/relationships" xmlns:p14="http://schemas.microsoft.com/office/powerpoint/2010/main" xmlns:p15="http://schemas.microsoft.com/office/powerpoint/2012/main" xmlns:mc="http://schemas.openxmlformats.org/markup-compatibility/2006" type="blank" preserve="1">
-  <p:cSld name="Comparação">
+<p:sldLayout xmlns:a="http://schemas.openxmlformats.org/drawingml/2006/main" xmlns:p="http://schemas.openxmlformats.org/presentationml/2006/main" xmlns:r="http://schemas.openxmlformats.org/officeDocument/2006/relationships" xmlns:p14="http://schemas.microsoft.com/office/powerpoint/2010/main" xmlns:p15="http://schemas.microsoft.com/office/powerpoint/2012/main" xmlns:mc="http://schemas.openxmlformats.org/markup-compatibility/2006" type="obj" preserve="1">
+  <p:cSld name="Título e Conteúdo">
     <p:bg>
       <p:bgPr>
         <a:blipFill rotWithShape="0">
           <a:blip r:embed="rId2"/>
           <a:stretch>
-            <a:fillRect l="-993" r="-993"/>
+            <a:fillRect l="-992" r="-992"/>
           </a:stretch>
         </a:blipFill>
       </p:bgPr>
@@ -4653,7 +4912,7 @@
       </p:grpSpPr>
       <p:sp>
         <p:nvSpPr>
-          <p:cNvPr id="38" name="PlaceHolder 1"/>
+          <p:cNvPr id="35" name="PlaceHolder 1"/>
           <p:cNvSpPr>
             <a:spLocks noGrp="1"/>
           </p:cNvSpPr>
@@ -4663,8 +4922,8 @@
         </p:nvSpPr>
         <p:spPr>
           <a:xfrm>
-            <a:off x="839880" y="365040"/>
-            <a:ext cx="10513800" cy="1323720"/>
+            <a:off x="838080" y="365040"/>
+            <a:ext cx="10513440" cy="1323360"/>
           </a:xfrm>
           <a:prstGeom prst="rect">
             <a:avLst/>
@@ -4712,7 +4971,7 @@
       </p:sp>
       <p:sp>
         <p:nvSpPr>
-          <p:cNvPr id="39" name="PlaceHolder 2"/>
+          <p:cNvPr id="36" name="PlaceHolder 2"/>
           <p:cNvSpPr>
             <a:spLocks noGrp="1"/>
           </p:cNvSpPr>
@@ -4722,70 +4981,8 @@
         </p:nvSpPr>
         <p:spPr>
           <a:xfrm>
-            <a:off x="839880" y="1681200"/>
-            <a:ext cx="5155920" cy="822240"/>
-          </a:xfrm>
-          <a:prstGeom prst="rect">
-            <a:avLst/>
-          </a:prstGeom>
-          <a:noFill/>
-          <a:ln w="0">
-            <a:noFill/>
-          </a:ln>
-        </p:spPr>
-        <p:txBody>
-          <a:bodyPr lIns="91440" rIns="91440" tIns="45720" bIns="45720" anchor="b">
-            <a:noAutofit/>
-          </a:bodyPr>
-          <a:p>
-            <a:pPr indent="0" defTabSz="914400">
-              <a:lnSpc>
-                <a:spcPct val="90000"/>
-              </a:lnSpc>
-              <a:spcBef>
-                <a:spcPts val="1001"/>
-              </a:spcBef>
-              <a:buNone/>
-              <a:tabLst>
-                <a:tab algn="l" pos="0"/>
-              </a:tabLst>
-            </a:pPr>
-            <a:r>
-              <a:rPr lang="pt-BR" sz="2400" b="1" u="none" strike="noStrike">
-                <a:solidFill>
-                  <a:schemeClr val="dk1"/>
-                </a:solidFill>
-                <a:effectLst/>
-                <a:uFillTx/>
-                <a:latin typeface="Calibri"/>
-              </a:rPr>
-              <a:t>Clique para editar os estilos de texto Mestres</a:t>
-            </a:r>
-            <a:endParaRPr lang="pt-BR" sz="2400" b="0" u="none" strike="noStrike">
-              <a:solidFill>
-                <a:srgbClr val="000000"/>
-              </a:solidFill>
-              <a:effectLst/>
-              <a:uFillTx/>
-              <a:latin typeface="Arial"/>
-            </a:endParaRPr>
-          </a:p>
-        </p:txBody>
-      </p:sp>
-      <p:sp>
-        <p:nvSpPr>
-          <p:cNvPr id="40" name="PlaceHolder 3"/>
-          <p:cNvSpPr>
-            <a:spLocks noGrp="1"/>
-          </p:cNvSpPr>
-          <p:nvPr>
-            <p:ph type="body"/>
-          </p:nvPr>
-        </p:nvSpPr>
-        <p:spPr>
-          <a:xfrm>
-            <a:off x="839880" y="2505240"/>
-            <a:ext cx="5155920" cy="3682800"/>
+            <a:off x="838080" y="1825560"/>
+            <a:ext cx="10513440" cy="4349160"/>
           </a:xfrm>
           <a:prstGeom prst="rect">
             <a:avLst/>
@@ -4973,268 +5170,7 @@
       </p:sp>
       <p:sp>
         <p:nvSpPr>
-          <p:cNvPr id="41" name="PlaceHolder 4"/>
-          <p:cNvSpPr>
-            <a:spLocks noGrp="1"/>
-          </p:cNvSpPr>
-          <p:nvPr>
-            <p:ph type="body"/>
-          </p:nvPr>
-        </p:nvSpPr>
-        <p:spPr>
-          <a:xfrm>
-            <a:off x="6172200" y="1681200"/>
-            <a:ext cx="5181480" cy="822240"/>
-          </a:xfrm>
-          <a:prstGeom prst="rect">
-            <a:avLst/>
-          </a:prstGeom>
-          <a:noFill/>
-          <a:ln w="0">
-            <a:noFill/>
-          </a:ln>
-        </p:spPr>
-        <p:txBody>
-          <a:bodyPr lIns="91440" rIns="91440" tIns="45720" bIns="45720" anchor="b">
-            <a:noAutofit/>
-          </a:bodyPr>
-          <a:p>
-            <a:pPr indent="0" defTabSz="914400">
-              <a:lnSpc>
-                <a:spcPct val="90000"/>
-              </a:lnSpc>
-              <a:spcBef>
-                <a:spcPts val="1001"/>
-              </a:spcBef>
-              <a:buNone/>
-              <a:tabLst>
-                <a:tab algn="l" pos="0"/>
-              </a:tabLst>
-            </a:pPr>
-            <a:r>
-              <a:rPr lang="pt-BR" sz="2400" b="1" u="none" strike="noStrike">
-                <a:solidFill>
-                  <a:schemeClr val="dk1"/>
-                </a:solidFill>
-                <a:effectLst/>
-                <a:uFillTx/>
-                <a:latin typeface="Calibri"/>
-              </a:rPr>
-              <a:t>Clique para editar os estilos de texto Mestres</a:t>
-            </a:r>
-            <a:endParaRPr lang="pt-BR" sz="2400" b="0" u="none" strike="noStrike">
-              <a:solidFill>
-                <a:srgbClr val="000000"/>
-              </a:solidFill>
-              <a:effectLst/>
-              <a:uFillTx/>
-              <a:latin typeface="Arial"/>
-            </a:endParaRPr>
-          </a:p>
-        </p:txBody>
-      </p:sp>
-      <p:sp>
-        <p:nvSpPr>
-          <p:cNvPr id="42" name="PlaceHolder 5"/>
-          <p:cNvSpPr>
-            <a:spLocks noGrp="1"/>
-          </p:cNvSpPr>
-          <p:nvPr>
-            <p:ph type="body"/>
-          </p:nvPr>
-        </p:nvSpPr>
-        <p:spPr>
-          <a:xfrm>
-            <a:off x="6172200" y="2505240"/>
-            <a:ext cx="5181480" cy="3682800"/>
-          </a:xfrm>
-          <a:prstGeom prst="rect">
-            <a:avLst/>
-          </a:prstGeom>
-          <a:noFill/>
-          <a:ln w="0">
-            <a:noFill/>
-          </a:ln>
-        </p:spPr>
-        <p:txBody>
-          <a:bodyPr lIns="91440" rIns="91440" tIns="45720" bIns="45720" anchor="t">
-            <a:noAutofit/>
-          </a:bodyPr>
-          <a:p>
-            <a:pPr marL="228600" indent="-228600" defTabSz="914400">
-              <a:lnSpc>
-                <a:spcPct val="90000"/>
-              </a:lnSpc>
-              <a:spcBef>
-                <a:spcPts val="1001"/>
-              </a:spcBef>
-              <a:buClr>
-                <a:srgbClr val="000000"/>
-              </a:buClr>
-              <a:buFont typeface="Arial"/>
-              <a:buChar char="•"/>
-            </a:pPr>
-            <a:r>
-              <a:rPr lang="pt-BR" sz="2800" b="0" u="none" strike="noStrike">
-                <a:solidFill>
-                  <a:schemeClr val="dk1"/>
-                </a:solidFill>
-                <a:effectLst/>
-                <a:uFillTx/>
-                <a:latin typeface="Calibri"/>
-              </a:rPr>
-              <a:t>Clique para editar os estilos de texto Mestres</a:t>
-            </a:r>
-            <a:endParaRPr lang="pt-BR" sz="2800" b="0" u="none" strike="noStrike">
-              <a:solidFill>
-                <a:srgbClr val="000000"/>
-              </a:solidFill>
-              <a:effectLst/>
-              <a:uFillTx/>
-              <a:latin typeface="Arial"/>
-            </a:endParaRPr>
-          </a:p>
-          <a:p>
-            <a:pPr marL="685800" lvl="1" indent="-228600" defTabSz="914400">
-              <a:lnSpc>
-                <a:spcPct val="90000"/>
-              </a:lnSpc>
-              <a:spcBef>
-                <a:spcPts val="499"/>
-              </a:spcBef>
-              <a:buClr>
-                <a:srgbClr val="000000"/>
-              </a:buClr>
-              <a:buFont typeface="Arial"/>
-              <a:buChar char="•"/>
-            </a:pPr>
-            <a:r>
-              <a:rPr lang="pt-BR" sz="2400" b="0" u="none" strike="noStrike">
-                <a:solidFill>
-                  <a:schemeClr val="dk1"/>
-                </a:solidFill>
-                <a:effectLst/>
-                <a:uFillTx/>
-                <a:latin typeface="Calibri"/>
-              </a:rPr>
-              <a:t>Segundo nível</a:t>
-            </a:r>
-            <a:endParaRPr lang="pt-BR" sz="2400" b="0" u="none" strike="noStrike">
-              <a:solidFill>
-                <a:srgbClr val="000000"/>
-              </a:solidFill>
-              <a:effectLst/>
-              <a:uFillTx/>
-              <a:latin typeface="Arial"/>
-            </a:endParaRPr>
-          </a:p>
-          <a:p>
-            <a:pPr marL="1143000" lvl="2" indent="-228600" defTabSz="914400">
-              <a:lnSpc>
-                <a:spcPct val="90000"/>
-              </a:lnSpc>
-              <a:spcBef>
-                <a:spcPts val="499"/>
-              </a:spcBef>
-              <a:buClr>
-                <a:srgbClr val="000000"/>
-              </a:buClr>
-              <a:buFont typeface="Arial"/>
-              <a:buChar char="•"/>
-            </a:pPr>
-            <a:r>
-              <a:rPr lang="pt-BR" sz="2000" b="0" u="none" strike="noStrike">
-                <a:solidFill>
-                  <a:schemeClr val="dk1"/>
-                </a:solidFill>
-                <a:effectLst/>
-                <a:uFillTx/>
-                <a:latin typeface="Calibri"/>
-              </a:rPr>
-              <a:t>Terceiro nível</a:t>
-            </a:r>
-            <a:endParaRPr lang="pt-BR" sz="2000" b="0" u="none" strike="noStrike">
-              <a:solidFill>
-                <a:srgbClr val="000000"/>
-              </a:solidFill>
-              <a:effectLst/>
-              <a:uFillTx/>
-              <a:latin typeface="Arial"/>
-            </a:endParaRPr>
-          </a:p>
-          <a:p>
-            <a:pPr marL="1600200" lvl="3" indent="-228600" defTabSz="914400">
-              <a:lnSpc>
-                <a:spcPct val="90000"/>
-              </a:lnSpc>
-              <a:spcBef>
-                <a:spcPts val="499"/>
-              </a:spcBef>
-              <a:buClr>
-                <a:srgbClr val="000000"/>
-              </a:buClr>
-              <a:buFont typeface="Arial"/>
-              <a:buChar char="•"/>
-            </a:pPr>
-            <a:r>
-              <a:rPr lang="pt-BR" sz="1800" b="0" u="none" strike="noStrike">
-                <a:solidFill>
-                  <a:schemeClr val="dk1"/>
-                </a:solidFill>
-                <a:effectLst/>
-                <a:uFillTx/>
-                <a:latin typeface="Calibri"/>
-              </a:rPr>
-              <a:t>Quarto nível</a:t>
-            </a:r>
-            <a:endParaRPr lang="pt-BR" sz="1800" b="0" u="none" strike="noStrike">
-              <a:solidFill>
-                <a:srgbClr val="000000"/>
-              </a:solidFill>
-              <a:effectLst/>
-              <a:uFillTx/>
-              <a:latin typeface="Arial"/>
-            </a:endParaRPr>
-          </a:p>
-          <a:p>
-            <a:pPr marL="2057400" lvl="4" indent="-228600" defTabSz="914400">
-              <a:lnSpc>
-                <a:spcPct val="90000"/>
-              </a:lnSpc>
-              <a:spcBef>
-                <a:spcPts val="499"/>
-              </a:spcBef>
-              <a:buClr>
-                <a:srgbClr val="000000"/>
-              </a:buClr>
-              <a:buFont typeface="Arial"/>
-              <a:buChar char="•"/>
-            </a:pPr>
-            <a:r>
-              <a:rPr lang="pt-BR" sz="1800" b="0" u="none" strike="noStrike">
-                <a:solidFill>
-                  <a:schemeClr val="dk1"/>
-                </a:solidFill>
-                <a:effectLst/>
-                <a:uFillTx/>
-                <a:latin typeface="Calibri"/>
-              </a:rPr>
-              <a:t>Quinto nível</a:t>
-            </a:r>
-            <a:endParaRPr lang="pt-BR" sz="1800" b="0" u="none" strike="noStrike">
-              <a:solidFill>
-                <a:srgbClr val="000000"/>
-              </a:solidFill>
-              <a:effectLst/>
-              <a:uFillTx/>
-              <a:latin typeface="Arial"/>
-            </a:endParaRPr>
-          </a:p>
-        </p:txBody>
-      </p:sp>
-      <p:sp>
-        <p:nvSpPr>
-          <p:cNvPr id="43" name="PlaceHolder 6"/>
+          <p:cNvPr id="37" name="PlaceHolder 3"/>
           <p:cNvSpPr>
             <a:spLocks noGrp="1"/>
           </p:cNvSpPr>
@@ -5245,7 +5181,7 @@
         <p:spPr>
           <a:xfrm>
             <a:off x="838080" y="6356520"/>
-            <a:ext cx="2741400" cy="363240"/>
+            <a:ext cx="2741040" cy="362880"/>
           </a:xfrm>
           <a:prstGeom prst="rect">
             <a:avLst/>
@@ -5316,7 +5252,7 @@
       </p:sp>
       <p:sp>
         <p:nvSpPr>
-          <p:cNvPr id="44" name="PlaceHolder 7"/>
+          <p:cNvPr id="38" name="PlaceHolder 4"/>
           <p:cNvSpPr>
             <a:spLocks noGrp="1"/>
           </p:cNvSpPr>
@@ -5327,7 +5263,7 @@
         <p:spPr>
           <a:xfrm>
             <a:off x="4038480" y="6356520"/>
-            <a:ext cx="4113000" cy="363240"/>
+            <a:ext cx="4112640" cy="362880"/>
           </a:xfrm>
           <a:prstGeom prst="rect">
             <a:avLst/>
@@ -5394,7 +5330,7 @@
       </p:sp>
       <p:sp>
         <p:nvSpPr>
-          <p:cNvPr id="45" name="PlaceHolder 8"/>
+          <p:cNvPr id="39" name="PlaceHolder 5"/>
           <p:cNvSpPr>
             <a:spLocks noGrp="1"/>
           </p:cNvSpPr>
@@ -5405,7 +5341,7 @@
         <p:spPr>
           <a:xfrm>
             <a:off x="8610480" y="6356520"/>
-            <a:ext cx="2741400" cy="363240"/>
+            <a:ext cx="2741040" cy="362880"/>
           </a:xfrm>
           <a:prstGeom prst="rect">
             <a:avLst/>
@@ -5450,7 +5386,7 @@
                 <a:tab algn="l" pos="0"/>
               </a:tabLst>
             </a:pPr>
-            <a:fld id="{64B83230-6F7E-407D-B47E-22BDA0A5B2B0}" type="slidenum">
+            <a:fld id="{2A351DBC-793F-4425-AA62-BBE4CE0E242F}" type="slidenum">
               <a:rPr lang="pt-BR" sz="1200" b="0" u="none" strike="noStrike">
                 <a:solidFill>
                   <a:schemeClr val="dk1">
@@ -5480,14 +5416,14 @@
 </file>
 
 <file path=ppt/slideLayouts/slideLayout9.xml><?xml version="1.0" encoding="utf-8"?>
-<p:sldLayout xmlns:a="http://schemas.openxmlformats.org/drawingml/2006/main" xmlns:p="http://schemas.openxmlformats.org/presentationml/2006/main" xmlns:r="http://schemas.openxmlformats.org/officeDocument/2006/relationships" xmlns:p14="http://schemas.microsoft.com/office/powerpoint/2010/main" xmlns:p15="http://schemas.microsoft.com/office/powerpoint/2012/main" xmlns:mc="http://schemas.openxmlformats.org/markup-compatibility/2006" type="titleOnly" preserve="1">
-  <p:cSld name="Somente Título">
+<p:sldLayout xmlns:a="http://schemas.openxmlformats.org/drawingml/2006/main" xmlns:p="http://schemas.openxmlformats.org/presentationml/2006/main" xmlns:r="http://schemas.openxmlformats.org/officeDocument/2006/relationships" xmlns:p14="http://schemas.microsoft.com/office/powerpoint/2010/main" xmlns:p15="http://schemas.microsoft.com/office/powerpoint/2012/main" xmlns:mc="http://schemas.openxmlformats.org/markup-compatibility/2006" type="blank" preserve="1">
+  <p:cSld name="Cabeçalho da Seção">
     <p:bg>
       <p:bgPr>
         <a:blipFill rotWithShape="0">
           <a:blip r:embed="rId2"/>
           <a:stretch>
-            <a:fillRect l="-993" r="-993"/>
+            <a:fillRect l="-992" r="-992"/>
           </a:stretch>
         </a:blipFill>
       </p:bgPr>
@@ -5508,7 +5444,7 @@
       </p:grpSpPr>
       <p:sp>
         <p:nvSpPr>
-          <p:cNvPr id="46" name="PlaceHolder 1"/>
+          <p:cNvPr id="40" name="PlaceHolder 1"/>
           <p:cNvSpPr>
             <a:spLocks noGrp="1"/>
           </p:cNvSpPr>
@@ -5518,8 +5454,8 @@
         </p:nvSpPr>
         <p:spPr>
           <a:xfrm>
-            <a:off x="838080" y="365040"/>
-            <a:ext cx="10513800" cy="1323720"/>
+            <a:off x="831960" y="1709640"/>
+            <a:ext cx="10513440" cy="2850480"/>
           </a:xfrm>
           <a:prstGeom prst="rect">
             <a:avLst/>
@@ -5530,7 +5466,7 @@
           </a:ln>
         </p:spPr>
         <p:txBody>
-          <a:bodyPr lIns="91440" rIns="91440" tIns="45720" bIns="45720" anchor="ctr">
+          <a:bodyPr lIns="91440" rIns="91440" tIns="45720" bIns="45720" anchor="b">
             <a:noAutofit/>
           </a:bodyPr>
           <a:p>
@@ -5544,7 +5480,7 @@
               </a:tabLst>
             </a:pPr>
             <a:r>
-              <a:rPr lang="pt-BR" sz="4400" b="0" u="none" strike="noStrike">
+              <a:rPr lang="pt-BR" sz="6000" b="0" u="none" strike="noStrike">
                 <a:solidFill>
                   <a:schemeClr val="dk1"/>
                 </a:solidFill>
@@ -5554,7 +5490,7 @@
               </a:rPr>
               <a:t>Clique para editar o título Mestre</a:t>
             </a:r>
-            <a:endParaRPr lang="pt-BR" sz="4400" b="0" u="none" strike="noStrike">
+            <a:endParaRPr lang="pt-BR" sz="6000" b="0" u="none" strike="noStrike">
               <a:solidFill>
                 <a:srgbClr val="000000"/>
               </a:solidFill>
@@ -5567,7 +5503,71 @@
       </p:sp>
       <p:sp>
         <p:nvSpPr>
-          <p:cNvPr id="47" name="PlaceHolder 2"/>
+          <p:cNvPr id="41" name="PlaceHolder 2"/>
+          <p:cNvSpPr>
+            <a:spLocks noGrp="1"/>
+          </p:cNvSpPr>
+          <p:nvPr>
+            <p:ph type="body"/>
+          </p:nvPr>
+        </p:nvSpPr>
+        <p:spPr>
+          <a:xfrm>
+            <a:off x="831960" y="4589640"/>
+            <a:ext cx="10513440" cy="1497960"/>
+          </a:xfrm>
+          <a:prstGeom prst="rect">
+            <a:avLst/>
+          </a:prstGeom>
+          <a:noFill/>
+          <a:ln w="0">
+            <a:noFill/>
+          </a:ln>
+        </p:spPr>
+        <p:txBody>
+          <a:bodyPr lIns="91440" rIns="91440" tIns="45720" bIns="45720" anchor="t">
+            <a:noAutofit/>
+          </a:bodyPr>
+          <a:p>
+            <a:pPr indent="0" defTabSz="914400">
+              <a:lnSpc>
+                <a:spcPct val="90000"/>
+              </a:lnSpc>
+              <a:spcBef>
+                <a:spcPts val="1001"/>
+              </a:spcBef>
+              <a:buNone/>
+              <a:tabLst>
+                <a:tab algn="l" pos="0"/>
+              </a:tabLst>
+            </a:pPr>
+            <a:r>
+              <a:rPr lang="pt-BR" sz="2400" b="0" u="none" strike="noStrike">
+                <a:solidFill>
+                  <a:schemeClr val="dk1">
+                    <a:tint val="75000"/>
+                  </a:schemeClr>
+                </a:solidFill>
+                <a:effectLst/>
+                <a:uFillTx/>
+                <a:latin typeface="Calibri"/>
+              </a:rPr>
+              <a:t>Clique para editar os estilos de texto Mestres</a:t>
+            </a:r>
+            <a:endParaRPr lang="pt-BR" sz="2400" b="0" u="none" strike="noStrike">
+              <a:solidFill>
+                <a:srgbClr val="000000"/>
+              </a:solidFill>
+              <a:effectLst/>
+              <a:uFillTx/>
+              <a:latin typeface="Arial"/>
+            </a:endParaRPr>
+          </a:p>
+        </p:txBody>
+      </p:sp>
+      <p:sp>
+        <p:nvSpPr>
+          <p:cNvPr id="42" name="PlaceHolder 3"/>
           <p:cNvSpPr>
             <a:spLocks noGrp="1"/>
           </p:cNvSpPr>
@@ -5578,7 +5578,7 @@
         <p:spPr>
           <a:xfrm>
             <a:off x="838080" y="6356520"/>
-            <a:ext cx="2741400" cy="363240"/>
+            <a:ext cx="2741040" cy="362880"/>
           </a:xfrm>
           <a:prstGeom prst="rect">
             <a:avLst/>
@@ -5649,7 +5649,7 @@
       </p:sp>
       <p:sp>
         <p:nvSpPr>
-          <p:cNvPr id="48" name="PlaceHolder 3"/>
+          <p:cNvPr id="43" name="PlaceHolder 4"/>
           <p:cNvSpPr>
             <a:spLocks noGrp="1"/>
           </p:cNvSpPr>
@@ -5660,7 +5660,7 @@
         <p:spPr>
           <a:xfrm>
             <a:off x="4038480" y="6356520"/>
-            <a:ext cx="4113000" cy="363240"/>
+            <a:ext cx="4112640" cy="362880"/>
           </a:xfrm>
           <a:prstGeom prst="rect">
             <a:avLst/>
@@ -5727,7 +5727,7 @@
       </p:sp>
       <p:sp>
         <p:nvSpPr>
-          <p:cNvPr id="49" name="PlaceHolder 4"/>
+          <p:cNvPr id="44" name="PlaceHolder 5"/>
           <p:cNvSpPr>
             <a:spLocks noGrp="1"/>
           </p:cNvSpPr>
@@ -5738,7 +5738,7 @@
         <p:spPr>
           <a:xfrm>
             <a:off x="8610480" y="6356520"/>
-            <a:ext cx="2741400" cy="363240"/>
+            <a:ext cx="2741040" cy="362880"/>
           </a:xfrm>
           <a:prstGeom prst="rect">
             <a:avLst/>
@@ -5783,7 +5783,7 @@
                 <a:tab algn="l" pos="0"/>
               </a:tabLst>
             </a:pPr>
-            <a:fld id="{DBA024C3-4021-480E-A708-CBBA60B979F7}" type="slidenum">
+            <a:fld id="{096D3B82-D9CE-45C3-9D69-C6C8A34E22B8}" type="slidenum">
               <a:rPr lang="pt-BR" sz="1200" b="0" u="none" strike="noStrike">
                 <a:solidFill>
                   <a:schemeClr val="dk1">
@@ -5878,7 +5878,7 @@
         <p:spPr>
           <a:xfrm>
             <a:off x="-40320" y="0"/>
-            <a:ext cx="12269880" cy="6903720"/>
+            <a:ext cx="12269520" cy="6903360"/>
           </a:xfrm>
           <a:prstGeom prst="rect">
             <a:avLst/>
@@ -5898,7 +5898,7 @@
         <p:spPr>
           <a:xfrm>
             <a:off x="8097480" y="997560"/>
-            <a:ext cx="3550320" cy="1065240"/>
+            <a:ext cx="3549960" cy="1065240"/>
           </a:xfrm>
           <a:prstGeom prst="rect">
             <a:avLst/>
@@ -5956,7 +5956,7 @@
         <p:spPr>
           <a:xfrm>
             <a:off x="7867080" y="2820240"/>
-            <a:ext cx="4011480" cy="577080"/>
+            <a:ext cx="4011120" cy="577080"/>
           </a:xfrm>
           <a:prstGeom prst="rect">
             <a:avLst/>
@@ -6017,7 +6017,7 @@
         <p:spPr>
           <a:xfrm>
             <a:off x="695160" y="2619000"/>
-            <a:ext cx="6548040" cy="846000"/>
+            <a:ext cx="6547680" cy="845640"/>
           </a:xfrm>
           <a:prstGeom prst="rect">
             <a:avLst/>
@@ -6037,7 +6037,7 @@
         <p:spPr>
           <a:xfrm>
             <a:off x="7867080" y="4155480"/>
-            <a:ext cx="4011480" cy="1064520"/>
+            <a:ext cx="4011120" cy="1064520"/>
           </a:xfrm>
           <a:prstGeom prst="rect">
             <a:avLst/>
@@ -6149,7 +6149,7 @@
         <p:spPr>
           <a:xfrm>
             <a:off x="7983720" y="5362200"/>
-            <a:ext cx="4011480" cy="332640"/>
+            <a:ext cx="4011120" cy="332280"/>
           </a:xfrm>
           <a:prstGeom prst="rect">
             <a:avLst/>
@@ -6218,14 +6218,14 @@
       </p:grpSpPr>
       <p:sp>
         <p:nvSpPr>
-          <p:cNvPr id="87" name=""/>
+          <p:cNvPr id="88" name=""/>
           <p:cNvSpPr/>
           <p:nvPr/>
         </p:nvSpPr>
         <p:spPr>
           <a:xfrm>
             <a:off x="1620000" y="608760"/>
-            <a:ext cx="1017720" cy="470160"/>
+            <a:ext cx="1018800" cy="395280"/>
           </a:xfrm>
           <a:prstGeom prst="rect">
             <a:avLst/>
@@ -6275,14 +6275,14 @@
       </p:sp>
       <p:sp>
         <p:nvSpPr>
-          <p:cNvPr id="88" name=""/>
+          <p:cNvPr id="89" name=""/>
           <p:cNvSpPr/>
           <p:nvPr/>
         </p:nvSpPr>
         <p:spPr>
           <a:xfrm>
             <a:off x="1620000" y="1008000"/>
-            <a:ext cx="8475840" cy="470160"/>
+            <a:ext cx="8475480" cy="469800"/>
           </a:xfrm>
           <a:prstGeom prst="rect">
             <a:avLst/>
@@ -6332,7 +6332,7 @@
       </p:sp>
       <p:pic>
         <p:nvPicPr>
-          <p:cNvPr id="89" name=""/>
+          <p:cNvPr id="90" name=""/>
           <p:cNvPicPr/>
           <p:nvPr/>
         </p:nvPicPr>
@@ -6343,7 +6343,7 @@
         <p:spPr>
           <a:xfrm>
             <a:off x="2438280" y="1359000"/>
-            <a:ext cx="7314120" cy="4570920"/>
+            <a:ext cx="7313760" cy="4570560"/>
           </a:xfrm>
           <a:prstGeom prst="rect">
             <a:avLst/>
@@ -6386,14 +6386,14 @@
       </p:grpSpPr>
       <p:sp>
         <p:nvSpPr>
-          <p:cNvPr id="90" name=""/>
+          <p:cNvPr id="91" name=""/>
           <p:cNvSpPr/>
           <p:nvPr/>
         </p:nvSpPr>
         <p:spPr>
           <a:xfrm>
             <a:off x="1620000" y="608760"/>
-            <a:ext cx="1017720" cy="470160"/>
+            <a:ext cx="1018800" cy="395280"/>
           </a:xfrm>
           <a:prstGeom prst="rect">
             <a:avLst/>
@@ -6443,14 +6443,14 @@
       </p:sp>
       <p:sp>
         <p:nvSpPr>
-          <p:cNvPr id="91" name=""/>
+          <p:cNvPr id="92" name=""/>
           <p:cNvSpPr/>
           <p:nvPr/>
         </p:nvSpPr>
         <p:spPr>
           <a:xfrm>
             <a:off x="1620000" y="1008000"/>
-            <a:ext cx="8540640" cy="470160"/>
+            <a:ext cx="8540280" cy="469800"/>
           </a:xfrm>
           <a:prstGeom prst="rect">
             <a:avLst/>
@@ -6501,7 +6501,7 @@
       </p:sp>
       <p:pic>
         <p:nvPicPr>
-          <p:cNvPr id="92" name=""/>
+          <p:cNvPr id="93" name=""/>
           <p:cNvPicPr/>
           <p:nvPr/>
         </p:nvPicPr>
@@ -6512,7 +6512,7 @@
         <p:spPr>
           <a:xfrm>
             <a:off x="2438280" y="1359000"/>
-            <a:ext cx="7314120" cy="4570920"/>
+            <a:ext cx="7313760" cy="4570560"/>
           </a:xfrm>
           <a:prstGeom prst="rect">
             <a:avLst/>
@@ -6555,14 +6555,14 @@
       </p:grpSpPr>
       <p:sp>
         <p:nvSpPr>
-          <p:cNvPr id="93" name=""/>
+          <p:cNvPr id="94" name=""/>
           <p:cNvSpPr/>
           <p:nvPr/>
         </p:nvSpPr>
         <p:spPr>
           <a:xfrm>
             <a:off x="1409760" y="608760"/>
-            <a:ext cx="2909160" cy="470160"/>
+            <a:ext cx="2908800" cy="469800"/>
           </a:xfrm>
           <a:prstGeom prst="rect">
             <a:avLst/>
@@ -6612,7 +6612,7 @@
       </p:sp>
       <p:graphicFrame>
         <p:nvGraphicFramePr>
-          <p:cNvPr id="94" name=""/>
+          <p:cNvPr id="95" name=""/>
           <p:cNvGraphicFramePr/>
           <p:nvPr/>
         </p:nvGraphicFramePr>
@@ -7762,14 +7762,14 @@
       </p:grpSpPr>
       <p:sp>
         <p:nvSpPr>
-          <p:cNvPr id="95" name="CaixaDeTexto 5"/>
+          <p:cNvPr id="96" name="CaixaDeTexto 5"/>
           <p:cNvSpPr/>
           <p:nvPr/>
         </p:nvSpPr>
         <p:spPr>
           <a:xfrm>
             <a:off x="903600" y="3140280"/>
-            <a:ext cx="10383840" cy="577440"/>
+            <a:ext cx="10383480" cy="577440"/>
           </a:xfrm>
           <a:prstGeom prst="rect">
             <a:avLst/>
@@ -7865,13 +7865,13 @@
       </p:grpSpPr>
       <p:graphicFrame>
         <p:nvGraphicFramePr>
-          <p:cNvPr id="96" name=""/>
+          <p:cNvPr id="97" name=""/>
           <p:cNvGraphicFramePr/>
           <p:nvPr/>
         </p:nvGraphicFramePr>
         <p:xfrm>
           <a:off x="1060920" y="2473200"/>
-          <a:ext cx="11246760" cy="2910240"/>
+          <a:ext cx="10069920" cy="1911960"/>
         </p:xfrm>
         <a:graphic>
           <a:graphicData uri="http://schemas.openxmlformats.org/drawingml/2006/table">
@@ -7894,6 +7894,11 @@
                       <a:noAutofit/>
                     </a:bodyPr>
                     <a:p>
+                      <a:pPr>
+                        <a:lnSpc>
+                          <a:spcPct val="100000"/>
+                        </a:lnSpc>
+                      </a:pPr>
                       <a:endParaRPr lang="pt-BR" sz="1800" b="0" u="none" strike="noStrike">
                         <a:solidFill>
                           <a:srgbClr val="000000"/>
@@ -8193,18 +8198,7 @@
                           <a:latin typeface="Maitree"/>
                           <a:ea typeface="Microsoft YaHei"/>
                         </a:rPr>
-                        <a:t>Proporção</a:t>
-                      </a:r>
-                      <a:r>
-                        <a:rPr lang="pt-BR" sz="1600" b="0" u="none" strike="noStrike">
-                          <a:solidFill>
-                            <a:srgbClr val="000000"/>
-                          </a:solidFill>
-                          <a:effectLst/>
-                          <a:uFillTx/>
-                          <a:latin typeface="Maitree"/>
-                        </a:rPr>
-                        <a:t> de famílias em IA grave com Cartão</a:t>
+                        <a:t>Proporção de famílias em IA grave com Cartão</a:t>
                       </a:r>
                       <a:endParaRPr lang="pt-BR" sz="1600" b="0" u="none" strike="noStrike">
                         <a:solidFill>
@@ -8853,14 +8847,14 @@
       </p:graphicFrame>
       <p:sp>
         <p:nvSpPr>
-          <p:cNvPr id="97" name=""/>
+          <p:cNvPr id="98" name=""/>
           <p:cNvSpPr/>
           <p:nvPr/>
         </p:nvSpPr>
         <p:spPr>
           <a:xfrm>
             <a:off x="468000" y="5040000"/>
-            <a:ext cx="11159280" cy="760680"/>
+            <a:ext cx="11158920" cy="760320"/>
           </a:xfrm>
           <a:prstGeom prst="rect">
             <a:avLst/>
@@ -8940,14 +8934,14 @@
       </p:grpSpPr>
       <p:sp>
         <p:nvSpPr>
-          <p:cNvPr id="98" name="CaixaDeTexto 5"/>
+          <p:cNvPr id="99" name="CaixaDeTexto 5"/>
           <p:cNvSpPr/>
           <p:nvPr/>
         </p:nvSpPr>
         <p:spPr>
           <a:xfrm>
             <a:off x="1080000" y="1976040"/>
-            <a:ext cx="10383840" cy="455400"/>
+            <a:ext cx="10383480" cy="455400"/>
           </a:xfrm>
           <a:prstGeom prst="rect">
             <a:avLst/>
@@ -9013,14 +9007,14 @@
       </p:sp>
       <p:sp>
         <p:nvSpPr>
-          <p:cNvPr id="99" name=""/>
+          <p:cNvPr id="100" name=""/>
           <p:cNvSpPr/>
           <p:nvPr/>
         </p:nvSpPr>
         <p:spPr>
           <a:xfrm>
             <a:off x="900000" y="2752560"/>
-            <a:ext cx="10438920" cy="2196360"/>
+            <a:ext cx="10438560" cy="2196360"/>
           </a:xfrm>
           <a:prstGeom prst="rect">
             <a:avLst/>
@@ -9061,7 +9055,29 @@
                 <a:uFillTx/>
                 <a:latin typeface="Maitree"/>
               </a:rPr>
-              <a:t>O programa consegue identificar corretamente os cidadãos que mais precisam, ou seja, tem uma boa focalização. Isso decorre do fato de capturar que 70% dos beneficiários ainda precisam sair da situação de fome mesmo recebendo Bolsa Família</a:t>
+              <a:t>O programa consegue identificar corretamente os cidadãos que mais precisam, ou seja, tem uma boa focalização. Isso decorre do fato de capturar que </a:t>
+            </a:r>
+            <a:r>
+              <a:rPr lang="pt-BR" sz="2000" b="1" u="none" strike="noStrike">
+                <a:solidFill>
+                  <a:srgbClr val="000000"/>
+                </a:solidFill>
+                <a:effectLst/>
+                <a:uFillTx/>
+                <a:latin typeface="Maitree"/>
+              </a:rPr>
+              <a:t>70%</a:t>
+            </a:r>
+            <a:r>
+              <a:rPr lang="pt-BR" sz="2000" b="0" u="none" strike="noStrike">
+                <a:solidFill>
+                  <a:srgbClr val="000000"/>
+                </a:solidFill>
+                <a:effectLst/>
+                <a:uFillTx/>
+                <a:latin typeface="Maitree"/>
+              </a:rPr>
+              <a:t> dos beneficiários ainda precisam sair da situação de fome mesmo recebendo Bolsa Família</a:t>
             </a:r>
             <a:endParaRPr lang="pt-BR" sz="2000" b="0" u="none" strike="noStrike">
               <a:solidFill>
@@ -9092,8 +9108,31 @@
                 <a:effectLst/>
                 <a:uFillTx/>
                 <a:latin typeface="Maitree"/>
-              </a:rPr>
-              <a:t>O modelo encontrado a partir das variáveis selecionadas identifica que 27% dos domicílios beneficiados tem risco de insegurança alimentar grave diminuído com o recebimento da renda complementar.</a:t>
+                <a:ea typeface="Microsoft YaHei"/>
+              </a:rPr>
+              <a:t>O modelo encontrado a partir das variáveis selecionadas identifica que há redução de </a:t>
+            </a:r>
+            <a:r>
+              <a:rPr lang="pt-BR" sz="2000" b="1" u="none" strike="noStrike">
+                <a:solidFill>
+                  <a:srgbClr val="000000"/>
+                </a:solidFill>
+                <a:effectLst/>
+                <a:uFillTx/>
+                <a:latin typeface="Maitree"/>
+              </a:rPr>
+              <a:t>36%</a:t>
+            </a:r>
+            <a:r>
+              <a:rPr lang="pt-BR" sz="2000" b="0" u="none" strike="noStrike">
+                <a:solidFill>
+                  <a:srgbClr val="000000"/>
+                </a:solidFill>
+                <a:effectLst/>
+                <a:uFillTx/>
+                <a:latin typeface="Maitree"/>
+              </a:rPr>
+              <a:t> de domicílios em risco de insegurança alimentar grave com o recebimento da renda complementar do cartão CSF.</a:t>
             </a:r>
             <a:endParaRPr lang="pt-BR" sz="2000" b="0" u="none" strike="noStrike">
               <a:solidFill>
@@ -9138,14 +9177,14 @@
       </p:grpSpPr>
       <p:sp>
         <p:nvSpPr>
-          <p:cNvPr id="100" name="CaixaDeTexto 8"/>
+          <p:cNvPr id="101" name="CaixaDeTexto 8"/>
           <p:cNvSpPr/>
           <p:nvPr/>
         </p:nvSpPr>
         <p:spPr>
           <a:xfrm>
             <a:off x="1080000" y="1976040"/>
-            <a:ext cx="10383840" cy="455400"/>
+            <a:ext cx="10383480" cy="455400"/>
           </a:xfrm>
           <a:prstGeom prst="rect">
             <a:avLst/>
@@ -9211,14 +9250,14 @@
       </p:sp>
       <p:sp>
         <p:nvSpPr>
-          <p:cNvPr id="101" name=""/>
+          <p:cNvPr id="102" name=""/>
           <p:cNvSpPr/>
           <p:nvPr/>
         </p:nvSpPr>
         <p:spPr>
           <a:xfrm>
             <a:off x="900000" y="2752560"/>
-            <a:ext cx="10438920" cy="3083400"/>
+            <a:ext cx="10438560" cy="3083400"/>
           </a:xfrm>
           <a:prstGeom prst="rect">
             <a:avLst/>
@@ -9390,14 +9429,14 @@
       </p:grpSpPr>
       <p:sp>
         <p:nvSpPr>
-          <p:cNvPr id="102" name="CaixaDeTexto 9"/>
+          <p:cNvPr id="103" name="CaixaDeTexto 9"/>
           <p:cNvSpPr/>
           <p:nvPr/>
         </p:nvSpPr>
         <p:spPr>
           <a:xfrm>
             <a:off x="1080000" y="1976040"/>
-            <a:ext cx="10383840" cy="455400"/>
+            <a:ext cx="10383480" cy="455400"/>
           </a:xfrm>
           <a:prstGeom prst="rect">
             <a:avLst/>
@@ -9463,14 +9502,14 @@
       </p:sp>
       <p:sp>
         <p:nvSpPr>
-          <p:cNvPr id="103" name=""/>
+          <p:cNvPr id="104" name=""/>
           <p:cNvSpPr/>
           <p:nvPr/>
         </p:nvSpPr>
         <p:spPr>
           <a:xfrm>
             <a:off x="900000" y="2752560"/>
-            <a:ext cx="10438920" cy="1282320"/>
+            <a:ext cx="10438560" cy="1281600"/>
           </a:xfrm>
           <a:prstGeom prst="rect">
             <a:avLst/>
@@ -9588,14 +9627,14 @@
       </p:grpSpPr>
       <p:sp>
         <p:nvSpPr>
-          <p:cNvPr id="104" name=""/>
+          <p:cNvPr id="105" name=""/>
           <p:cNvSpPr/>
           <p:nvPr/>
         </p:nvSpPr>
         <p:spPr>
           <a:xfrm>
             <a:off x="1620000" y="2340000"/>
-            <a:ext cx="9178920" cy="1308240"/>
+            <a:ext cx="9178560" cy="1308240"/>
           </a:xfrm>
           <a:prstGeom prst="rect">
             <a:avLst/>
@@ -9656,14 +9695,14 @@
       </p:sp>
       <p:sp>
         <p:nvSpPr>
-          <p:cNvPr id="105" name=""/>
+          <p:cNvPr id="106" name=""/>
           <p:cNvSpPr/>
           <p:nvPr/>
         </p:nvSpPr>
         <p:spPr>
           <a:xfrm>
             <a:off x="1620000" y="1586520"/>
-            <a:ext cx="1779840" cy="470160"/>
+            <a:ext cx="1779480" cy="469800"/>
           </a:xfrm>
           <a:prstGeom prst="rect">
             <a:avLst/>
@@ -9743,14 +9782,14 @@
       </p:grpSpPr>
       <p:sp>
         <p:nvSpPr>
-          <p:cNvPr id="106" name="CaixaDeTexto 2"/>
+          <p:cNvPr id="107" name="CaixaDeTexto 2"/>
           <p:cNvSpPr/>
           <p:nvPr/>
         </p:nvSpPr>
         <p:spPr>
           <a:xfrm>
             <a:off x="1952640" y="2180520"/>
-            <a:ext cx="8666280" cy="2319480"/>
+            <a:ext cx="8665920" cy="2319480"/>
           </a:xfrm>
           <a:prstGeom prst="rect">
             <a:avLst/>
@@ -9915,7 +9954,7 @@
         <a:blipFill rotWithShape="0">
           <a:blip r:embed="rId1"/>
           <a:stretch>
-            <a:fillRect l="-993" r="-993"/>
+            <a:fillRect l="-992" r="-992"/>
           </a:stretch>
         </a:blipFill>
       </p:bgPr>
@@ -9943,7 +9982,7 @@
         <p:spPr>
           <a:xfrm>
             <a:off x="903240" y="1455840"/>
-            <a:ext cx="10383840" cy="363960"/>
+            <a:ext cx="10383480" cy="363960"/>
           </a:xfrm>
           <a:prstGeom prst="rect">
             <a:avLst/>
@@ -10016,7 +10055,7 @@
         <p:spPr>
           <a:xfrm>
             <a:off x="903240" y="2573280"/>
-            <a:ext cx="10383840" cy="912600"/>
+            <a:ext cx="10383480" cy="912600"/>
           </a:xfrm>
           <a:prstGeom prst="rect">
             <a:avLst/>
@@ -10125,7 +10164,7 @@
         <p:spPr>
           <a:xfrm>
             <a:off x="903240" y="936360"/>
-            <a:ext cx="10383840" cy="363960"/>
+            <a:ext cx="10383480" cy="363960"/>
           </a:xfrm>
           <a:prstGeom prst="rect">
             <a:avLst/>
@@ -10202,7 +10241,7 @@
         <p:spPr>
           <a:xfrm>
             <a:off x="1691280" y="1440000"/>
-            <a:ext cx="8927640" cy="4869000"/>
+            <a:ext cx="8927280" cy="4868640"/>
           </a:xfrm>
           <a:prstGeom prst="rect">
             <a:avLst/>
@@ -10222,7 +10261,7 @@
         <p:spPr>
           <a:xfrm flipV="1">
             <a:off x="2376000" y="5506560"/>
-            <a:ext cx="1078920" cy="178920"/>
+            <a:ext cx="1078560" cy="178560"/>
           </a:xfrm>
           <a:prstGeom prst="rect">
             <a:avLst/>
@@ -10270,7 +10309,7 @@
         <p:spPr>
           <a:xfrm flipV="1">
             <a:off x="6264000" y="3814560"/>
-            <a:ext cx="538920" cy="178920"/>
+            <a:ext cx="538560" cy="178560"/>
           </a:xfrm>
           <a:prstGeom prst="rect">
             <a:avLst/>
@@ -10348,7 +10387,7 @@
         <p:spPr>
           <a:xfrm>
             <a:off x="903240" y="936360"/>
-            <a:ext cx="10383840" cy="363960"/>
+            <a:ext cx="10383480" cy="363960"/>
           </a:xfrm>
           <a:prstGeom prst="rect">
             <a:avLst/>
@@ -10421,7 +10460,7 @@
         <p:spPr>
           <a:xfrm>
             <a:off x="1771200" y="1370520"/>
-            <a:ext cx="8666280" cy="394560"/>
+            <a:ext cx="8665920" cy="394560"/>
           </a:xfrm>
           <a:prstGeom prst="rect">
             <a:avLst/>
@@ -10478,7 +10517,7 @@
         <p:spPr>
           <a:xfrm>
             <a:off x="432000" y="1832760"/>
-            <a:ext cx="11357280" cy="4024080"/>
+            <a:ext cx="11356920" cy="4023720"/>
           </a:xfrm>
           <a:prstGeom prst="rect">
             <a:avLst/>
@@ -10682,7 +10721,7 @@
         <p:spPr>
           <a:xfrm>
             <a:off x="903240" y="936360"/>
-            <a:ext cx="10383840" cy="363960"/>
+            <a:ext cx="10383480" cy="363960"/>
           </a:xfrm>
           <a:prstGeom prst="rect">
             <a:avLst/>
@@ -10755,7 +10794,7 @@
         <p:spPr>
           <a:xfrm>
             <a:off x="1771200" y="1370520"/>
-            <a:ext cx="8666280" cy="394560"/>
+            <a:ext cx="8665920" cy="394560"/>
           </a:xfrm>
           <a:prstGeom prst="rect">
             <a:avLst/>
@@ -10811,7 +10850,7 @@
         </p:nvGraphicFramePr>
         <p:xfrm>
           <a:off x="786240" y="2104920"/>
-          <a:ext cx="10619640" cy="3728880"/>
+          <a:ext cx="10619640" cy="3745800"/>
         </p:xfrm>
         <a:graphic>
           <a:graphicData uri="http://schemas.openxmlformats.org/drawingml/2006/table">
@@ -10834,6 +10873,11 @@
                       <a:noAutofit/>
                     </a:bodyPr>
                     <a:p>
+                      <a:pPr>
+                        <a:lnSpc>
+                          <a:spcPct val="100000"/>
+                        </a:lnSpc>
+                      </a:pPr>
                       <a:endParaRPr lang="pt-BR" sz="1800" b="0" u="none" strike="noStrike">
                         <a:solidFill>
                           <a:srgbClr val="000000"/>
@@ -11133,18 +11177,7 @@
                           <a:latin typeface="Maitree"/>
                           <a:ea typeface="Microsoft YaHei"/>
                         </a:rPr>
-                        <a:t>Proporção</a:t>
-                      </a:r>
-                      <a:r>
-                        <a:rPr lang="pt-BR" sz="1600" b="0" u="none" strike="noStrike">
-                          <a:solidFill>
-                            <a:srgbClr val="000000"/>
-                          </a:solidFill>
-                          <a:effectLst/>
-                          <a:uFillTx/>
-                          <a:latin typeface="Maitree"/>
-                        </a:rPr>
-                        <a:t> de famílias em IA grave com benefícios sociais</a:t>
+                        <a:t>Proporção de famílias em IA grave com benefícios sociais</a:t>
                       </a:r>
                       <a:endParaRPr lang="pt-BR" sz="1600" b="0" u="none" strike="noStrike">
                         <a:solidFill>
@@ -14240,7 +14273,7 @@
         <p:spPr>
           <a:xfrm>
             <a:off x="903240" y="946080"/>
-            <a:ext cx="10383840" cy="455400"/>
+            <a:ext cx="10383480" cy="455400"/>
           </a:xfrm>
           <a:prstGeom prst="rect">
             <a:avLst/>
@@ -14313,7 +14346,7 @@
         <p:spPr>
           <a:xfrm>
             <a:off x="3041640" y="2774880"/>
-            <a:ext cx="6107400" cy="1919160"/>
+            <a:ext cx="6107040" cy="1919160"/>
           </a:xfrm>
           <a:prstGeom prst="rect">
             <a:avLst/>
@@ -14400,7 +14433,7 @@
         <p:spPr>
           <a:xfrm>
             <a:off x="3071520" y="2340000"/>
-            <a:ext cx="6107400" cy="3083400"/>
+            <a:ext cx="6107040" cy="3083400"/>
           </a:xfrm>
           <a:prstGeom prst="rect">
             <a:avLst/>
@@ -14542,7 +14575,7 @@
         <p:spPr>
           <a:xfrm>
             <a:off x="1620000" y="1586520"/>
-            <a:ext cx="1017720" cy="470160"/>
+            <a:ext cx="1018800" cy="395280"/>
           </a:xfrm>
           <a:prstGeom prst="rect">
             <a:avLst/>
@@ -14629,7 +14662,7 @@
         <p:spPr>
           <a:xfrm>
             <a:off x="605880" y="1457640"/>
-            <a:ext cx="10980000" cy="3942720"/>
+            <a:ext cx="10979640" cy="3942720"/>
           </a:xfrm>
           <a:prstGeom prst="rect">
             <a:avLst/>
@@ -14845,7 +14878,7 @@
         <p:spPr>
           <a:xfrm>
             <a:off x="1620000" y="900000"/>
-            <a:ext cx="5827680" cy="395280"/>
+            <a:ext cx="5827680" cy="394560"/>
           </a:xfrm>
           <a:prstGeom prst="rect">
             <a:avLst/>
@@ -14923,64 +14956,16 @@
           <a:chExt cx="0" cy="0"/>
         </a:xfrm>
       </p:grpSpPr>
-      <p:pic>
-        <p:nvPicPr>
-          <p:cNvPr id="83" name=""/>
-          <p:cNvPicPr/>
-          <p:nvPr/>
-        </p:nvPicPr>
-        <p:blipFill>
-          <a:blip r:embed="rId1"/>
-          <a:stretch/>
-        </p:blipFill>
-        <p:spPr>
-          <a:xfrm>
-            <a:off x="3352680" y="1600200"/>
-            <a:ext cx="5486760" cy="3657600"/>
-          </a:xfrm>
-          <a:prstGeom prst="rect">
-            <a:avLst/>
-          </a:prstGeom>
-          <a:noFill/>
-          <a:ln w="0">
-            <a:noFill/>
-          </a:ln>
-        </p:spPr>
-      </p:pic>
-      <p:pic>
-        <p:nvPicPr>
-          <p:cNvPr id="84" name=""/>
-          <p:cNvPicPr/>
-          <p:nvPr/>
-        </p:nvPicPr>
-        <p:blipFill>
-          <a:blip r:embed="rId2"/>
-          <a:stretch/>
-        </p:blipFill>
-        <p:spPr>
-          <a:xfrm>
-            <a:off x="2741760" y="1673280"/>
-            <a:ext cx="6780240" cy="4519800"/>
-          </a:xfrm>
-          <a:prstGeom prst="rect">
-            <a:avLst/>
-          </a:prstGeom>
-          <a:noFill/>
-          <a:ln w="0">
-            <a:noFill/>
-          </a:ln>
-        </p:spPr>
-      </p:pic>
       <p:sp>
         <p:nvSpPr>
-          <p:cNvPr id="85" name=""/>
+          <p:cNvPr id="83" name=""/>
           <p:cNvSpPr/>
           <p:nvPr/>
         </p:nvSpPr>
         <p:spPr>
           <a:xfrm>
-            <a:off x="1423800" y="756000"/>
-            <a:ext cx="1018080" cy="395280"/>
+            <a:off x="601920" y="720000"/>
+            <a:ext cx="1018080" cy="394560"/>
           </a:xfrm>
           <a:prstGeom prst="rect">
             <a:avLst/>
@@ -15028,16 +15013,20 @@
           </a:p>
         </p:txBody>
       </p:sp>
-      <p:sp>
-        <p:nvSpPr>
-          <p:cNvPr id="86" name=""/>
-          <p:cNvSpPr/>
+      <p:pic>
+        <p:nvPicPr>
+          <p:cNvPr id="84" name=""/>
+          <p:cNvPicPr/>
           <p:nvPr/>
-        </p:nvSpPr>
+        </p:nvPicPr>
+        <p:blipFill>
+          <a:blip r:embed="rId1"/>
+          <a:stretch/>
+        </p:blipFill>
         <p:spPr>
           <a:xfrm>
-            <a:off x="1423800" y="1155240"/>
-            <a:ext cx="10080720" cy="395280"/>
+            <a:off x="1955880" y="759600"/>
+            <a:ext cx="8280000" cy="5555160"/>
           </a:xfrm>
           <a:prstGeom prst="rect">
             <a:avLst/>
@@ -15047,6 +15036,28 @@
             <a:noFill/>
           </a:ln>
         </p:spPr>
+      </p:pic>
+      <p:sp>
+        <p:nvSpPr>
+          <p:cNvPr id="85" name=""/>
+          <p:cNvSpPr/>
+          <p:nvPr/>
+        </p:nvSpPr>
+        <p:spPr>
+          <a:xfrm flipH="1">
+            <a:off x="10080000" y="4320000"/>
+            <a:ext cx="540000" cy="0"/>
+          </a:xfrm>
+          <a:prstGeom prst="line">
+            <a:avLst/>
+          </a:prstGeom>
+          <a:ln w="0">
+            <a:solidFill>
+              <a:srgbClr val="3465a4"/>
+            </a:solidFill>
+            <a:tailEnd len="med" type="triangle" w="med"/>
+          </a:ln>
+        </p:spPr>
         <p:style>
           <a:lnRef idx="0"/>
           <a:fillRef idx="0"/>
@@ -15054,39 +15065,118 @@
           <a:fontRef idx="minor"/>
         </p:style>
         <p:txBody>
-          <a:bodyPr wrap="none" lIns="90000" rIns="90000" tIns="45000" bIns="45000" anchor="t">
-            <a:spAutoFit/>
+          <a:bodyPr lIns="90000" rIns="90000" tIns="-45000" bIns="-45000" anchor="ctr">
+            <a:noAutofit/>
           </a:bodyPr>
           <a:p>
-            <a:pPr>
-              <a:lnSpc>
-                <a:spcPct val="100000"/>
-              </a:lnSpc>
-              <a:spcBef>
-                <a:spcPts val="1191"/>
-              </a:spcBef>
-              <a:spcAft>
-                <a:spcPts val="992"/>
-              </a:spcAft>
-            </a:pPr>
-            <a:r>
-              <a:rPr lang="pt-BR" sz="2000" b="0" u="none" strike="noStrike">
-                <a:solidFill>
-                  <a:srgbClr val="000000"/>
-                </a:solidFill>
-                <a:effectLst/>
-                <a:uFillTx/>
-                <a:latin typeface="Kanit"/>
-              </a:rPr>
-              <a:t>Domicílios  por situação de segurança alimentar, segundo a renda domiciliar per capita </a:t>
-            </a:r>
-            <a:endParaRPr lang="pt-BR" sz="2000" b="0" u="none" strike="noStrike">
+            <a:endParaRPr lang="pt-BR" sz="1800" b="0" u="none" strike="noStrike">
               <a:solidFill>
                 <a:srgbClr val="000000"/>
               </a:solidFill>
               <a:effectLst/>
               <a:uFillTx/>
               <a:latin typeface="Arial"/>
+            </a:endParaRPr>
+          </a:p>
+        </p:txBody>
+      </p:sp>
+      <p:sp>
+        <p:nvSpPr>
+          <p:cNvPr id="86" name=""/>
+          <p:cNvSpPr/>
+          <p:nvPr/>
+        </p:nvSpPr>
+        <p:spPr>
+          <a:xfrm flipH="1">
+            <a:off x="10080000" y="4572000"/>
+            <a:ext cx="540000" cy="0"/>
+          </a:xfrm>
+          <a:prstGeom prst="line">
+            <a:avLst/>
+          </a:prstGeom>
+          <a:ln w="0">
+            <a:solidFill>
+              <a:srgbClr val="3465a4"/>
+            </a:solidFill>
+            <a:tailEnd len="med" type="triangle" w="med"/>
+          </a:ln>
+        </p:spPr>
+        <p:style>
+          <a:lnRef idx="0"/>
+          <a:fillRef idx="0"/>
+          <a:effectRef idx="0"/>
+          <a:fontRef idx="minor"/>
+        </p:style>
+        <p:txBody>
+          <a:bodyPr lIns="90000" rIns="90000" tIns="-45000" bIns="-45000" anchor="ctr">
+            <a:noAutofit/>
+          </a:bodyPr>
+          <a:p>
+            <a:endParaRPr lang="pt-BR" sz="1800" b="0" u="none" strike="noStrike">
+              <a:solidFill>
+                <a:srgbClr val="000000"/>
+              </a:solidFill>
+              <a:effectLst/>
+              <a:uFillTx/>
+              <a:latin typeface="Arial"/>
+            </a:endParaRPr>
+          </a:p>
+        </p:txBody>
+      </p:sp>
+      <p:sp>
+        <p:nvSpPr>
+          <p:cNvPr id="87" name=""/>
+          <p:cNvSpPr txBox="1"/>
+          <p:nvPr/>
+        </p:nvSpPr>
+        <p:spPr>
+          <a:xfrm>
+            <a:off x="10378800" y="3401640"/>
+            <a:ext cx="1705320" cy="2358360"/>
+          </a:xfrm>
+          <a:prstGeom prst="rect">
+            <a:avLst/>
+          </a:prstGeom>
+          <a:noFill/>
+          <a:ln w="0">
+            <a:noFill/>
+          </a:ln>
+        </p:spPr>
+        <p:txBody>
+          <a:bodyPr lIns="90000" rIns="90000" tIns="45000" bIns="45000" anchor="ctr" anchorCtr="1">
+            <a:spAutoFit/>
+          </a:bodyPr>
+          <a:p>
+            <a:pPr algn="ctr">
+              <a:lnSpc>
+                <a:spcPct val="100000"/>
+              </a:lnSpc>
+              <a:spcBef>
+                <a:spcPts val="283"/>
+              </a:spcBef>
+              <a:spcAft>
+                <a:spcPts val="283"/>
+              </a:spcAft>
+            </a:pPr>
+            <a:r>
+              <a:rPr lang="pt-BR" sz="1800" b="0" u="none" strike="noStrike">
+                <a:solidFill>
+                  <a:srgbClr val="000000"/>
+                </a:solidFill>
+                <a:effectLst/>
+                <a:uFillTx/>
+                <a:latin typeface="Maitree"/>
+              </a:rPr>
+              <a:t>64,4% dos domicílios em IA Grave possuem renda até ½ s.m.</a:t>
+            </a:r>
+            <a:endParaRPr lang="pt-BR" sz="1800" b="0" u="none" strike="noStrike">
+              <a:solidFill>
+                <a:srgbClr val="000000"/>
+              </a:solidFill>
+              <a:effectLst/>
+              <a:uFillTx/>
+              <a:latin typeface="Maitree"/>
+              <a:ea typeface="Microsoft YaHei"/>
             </a:endParaRPr>
           </a:p>
         </p:txBody>
